--- a/artifacts/speaking-portfolio-expanded/decks/dynamic-scaling-40min-handout.pptx
+++ b/artifacts/speaking-portfolio-expanded/decks/dynamic-scaling-40min-handout.pptx
@@ -27,6 +27,7 @@
     <p:sldId id="272" r:id="rIdSlide17"/>
     <p:sldId id="273" r:id="rIdSlide18"/>
     <p:sldId id="274" r:id="rIdSlide19"/>
+    <p:sldId id="275" r:id="rIdSlide20"/>
   </p:sldIdLst>
   <p:sldSz cx="10058400" cy="7772400" type="custom"/>
   <p:notesSz cx="6858000" cy="9144000"/>
@@ -2583,7 +2584,7 @@
                 <a:ea typeface="Arial"/>
                 <a:cs typeface="Arial"/>
               </a:rPr>
-              <a:t xml:space="preserve">Attempts are a scaling axis too</a:t>
+              <a:t xml:space="preserve">Attempts are a scaling axis. So is judging.</a:t>
             </a:r>
             <a:endParaRPr lang="en-US" sz="1200"/>
           </a:p>
@@ -2744,6 +2745,29 @@
                 <a:ea typeface="Arial"/>
                 <a:cs typeface="Arial"/>
               </a:rPr>
+              <a:t xml:space="preserve">&gt; A judge reads a thousand tokens and writes fifty. Run a council. Measure the disagreement.</a:t>
+            </a:r>
+            <a:endParaRPr lang="en-US" sz="1200"/>
+          </a:p>
+          <a:p>
+            <a:pPr marL="0" indent="0">
+              <a:lnSpc>
+                <a:spcPts val="1560"/>
+              </a:lnSpc>
+              <a:spcAft>
+                <a:spcPts val="0"/>
+              </a:spcAft>
+              <a:buNone/>
+            </a:pPr>
+            <a:r>
+              <a:rPr lang="en-US" sz="1200" b="0">
+                <a:solidFill>
+                  <a:srgbClr val="202b33"/>
+                </a:solidFill>
+                <a:latin typeface="Arial"/>
+                <a:ea typeface="Arial"/>
+                <a:cs typeface="Arial"/>
+              </a:rPr>
               <a:t xml:space="preserve">&gt; Gates before preferences; the judge may reject everyone</a:t>
             </a:r>
             <a:endParaRPr lang="en-US" sz="1200"/>
@@ -2767,29 +2791,6 @@
                 <a:ea typeface="Arial"/>
                 <a:cs typeface="Arial"/>
               </a:rPr>
-              <a:t xml:space="preserve">&gt; A synthesis is a new candidate</a:t>
-            </a:r>
-            <a:endParaRPr lang="en-US" sz="1200"/>
-          </a:p>
-          <a:p>
-            <a:pPr marL="0" indent="0">
-              <a:lnSpc>
-                <a:spcPts val="1560"/>
-              </a:lnSpc>
-              <a:spcAft>
-                <a:spcPts val="0"/>
-              </a:spcAft>
-              <a:buNone/>
-            </a:pPr>
-            <a:r>
-              <a:rPr lang="en-US" sz="1200" b="0">
-                <a:solidFill>
-                  <a:srgbClr val="202b33"/>
-                </a:solidFill>
-                <a:latin typeface="Arial"/>
-                <a:ea typeface="Arial"/>
-                <a:cs typeface="Arial"/>
-              </a:rPr>
               <a:t xml:space="preserve"/>
             </a:r>
             <a:endParaRPr lang="en-US" sz="1200"/>
@@ -2813,7 +2814,7 @@
                 <a:ea typeface="Arial"/>
                 <a:cs typeface="Arial"/>
               </a:rPr>
-              <a:t xml:space="preserve">Change the unit of work from images to whole designs. Give the batch-job problem to three generated agents with the same requirements and different priorities: a minimalist, a maintainer, a security and performance reviewer. Keep first drafts separate so they do not converge on the first plausible answer. They can still share a blind spot; the contrast is the product.</a:t>
+              <a:t xml:space="preserve">Change the unit of work from images to whole designs. Give the batch-job problem to three generated agents with the same requirements and different priorities: a minimalist, a maintainer, a security and performance reviewer. Keep first drafts separate so they do not converge on the first plausible answer. The contrast is the product.</a:t>
             </a:r>
             <a:endParaRPr lang="en-US" sz="1200"/>
           </a:p>
@@ -2859,7 +2860,7 @@
                 <a:ea typeface="Arial"/>
                 <a:cs typeface="Arial"/>
               </a:rPr>
-              <a:t xml:space="preserve">That last part is not a hunch, and software engineering settled it forty years ago. Knight and Leveson ran the experiment in 1986: twenty-seven teams wrote the same program from the same specification, independently, and after a million tests the versions failed together far more often than independence predicts. Independently written does not mean independently wrong. Parallel attempts buy you contrast. They do not buy you coverage, and anyone selling you three-model consensus as a correctness argument is selling the assumption that experiment rejected.</a:t>
+              <a:t xml:space="preserve">Somebody is going to cite Knight and Leveson at me, so let me do it first. 1986, twenty-seven teams, one specification, a million tests, and the independently written versions failed together far more than independence predicts. True, important, and about N-version programming as a correctness strategy. That is not what this is. I am not voting three models toward the truth, and I am not going to tell you the ensemble is right because it agreed with itself. If that is the pitch you heard, it is not mine.</a:t>
             </a:r>
             <a:endParaRPr lang="en-US" sz="1200"/>
           </a:p>
@@ -2905,7 +2906,7 @@
                 <a:ea typeface="Arial"/>
                 <a:cs typeface="Arial"/>
               </a:rPr>
-              <a:t xml:space="preserve">Write the gates before reading the candidates: no duplicate dispatch after restart, no cross-tenant spend, no regeneration on notification retry, no dispatch after deadline. Run executable checks first. In the exercise every candidate fails a gate, including the careful one, which is the point: the judge is allowed to reject the room.</a:t>
+              <a:t xml:space="preserve">Here is what parallel attempts actually buy. Understanding of the models you depend on: run one brief through two of them and you learn what each reaches for and what each forgets. A migration harness: same brief, new model, diff the behavior before you switch, instead of after the incident. Better output: a synthesis of compatible ideas is often better than any single draft. And the cheap one, which is the one I care about: judging. A judge reads a thousand tokens and writes fifty. Output is what costs, so you can afford three or five judges from different models on every candidate, and the number you want back is not the average score. It is the disagreement. When the judges split or their reasons barely overlap, that candidate is sitting in territory nobody understands, and that is the one you do not ship on autopilot. I call this the Council of Guards. It picks between one and three alternatives to generate, and it costs a fraction of the generation it is guarding.</a:t>
             </a:r>
             <a:endParaRPr lang="en-US" sz="1200"/>
           </a:p>
@@ -2951,7 +2952,7 @@
                 <a:ea typeface="Arial"/>
                 <a:cs typeface="Arial"/>
               </a:rPr>
-              <a:t xml:space="preserve">Then combine compatible ideas into a new candidate with one coherent set of assumptions and run the gates again. Passing parts do not make a passing whole. Stop at the review budget; an endless debate is an expensive way to not ship.</a:t>
+              <a:t xml:space="preserve">Write the gates before reading the candidates: no duplicate dispatch after restart, no cross-tenant spend, no regeneration on notification retry, no dispatch after deadline. Run executable checks first. In the exercise every candidate fails a gate, including the careful one, which is the point: the council is allowed to reject the room. Then combine compatible ideas into a new candidate with one coherent set of assumptions and run the gates again. Passing parts do not make a passing whole. Stop at the review budget; an endless debate is an expensive way to not ship.</a:t>
             </a:r>
             <a:endParaRPr lang="en-US" sz="1200"/>
           </a:p>
@@ -2997,7 +2998,7 @@
                 <a:ea typeface="Arial"/>
                 <a:cs typeface="Arial"/>
               </a:rPr>
-              <a:t xml:space="preserve">Source: Knight and Leveson (1986), [An Experimental Evaluation of the Assumption of Independence in Multiversion Programming](https://doi.org/10.1109/TSE.1986.6312924), IEEE Transactions on Software Engineering SE-12(1), 96 to 109.</a:t>
+              <a:t xml:space="preserve">None of this looks like the engineering we were raised on. Do not do the work twice. Do not spend compute speculatively. One right answer per ticket. Those were axioms when the expensive thing was the engineer. When the expensive thing is being wrong, and a second draft costs cents, doing it three times and reading what disagrees is the frugal move. I am not a shill for Big Token. I am telling you that cheaper, safer and faster now sometimes come from spending exactly where yesterday's wisdom told you not to.</a:t>
             </a:r>
             <a:endParaRPr lang="en-US" sz="1200"/>
           </a:p>
@@ -3043,7 +3044,53 @@
                 <a:ea typeface="Arial"/>
                 <a:cs typeface="Arial"/>
               </a:rPr>
-              <a:t xml:space="preserve">Stage direction: Score the three candidates in demo.md. Have the room find each candidate's failed gate before revealing it.</a:t>
+              <a:t xml:space="preserve">Source: Knight and Leveson (1986), [An Experimental Evaluation of the Assumption of Independence in Multiversion Programming](https://doi.org/10.1109/TSE.1986.6312924), IEEE Transactions on Software Engineering SE-12(1), 96 to 109. Cited to set aside: it is a result about redundancy as a correctness strategy, which this slide does not claim.</a:t>
+            </a:r>
+            <a:endParaRPr lang="en-US" sz="1200"/>
+          </a:p>
+          <a:p>
+            <a:pPr marL="0" indent="0">
+              <a:lnSpc>
+                <a:spcPts val="1560"/>
+              </a:lnSpc>
+              <a:spcAft>
+                <a:spcPts val="0"/>
+              </a:spcAft>
+              <a:buNone/>
+            </a:pPr>
+            <a:r>
+              <a:rPr lang="en-US" sz="1200" b="0">
+                <a:solidFill>
+                  <a:srgbClr val="202b33"/>
+                </a:solidFill>
+                <a:latin typeface="Arial"/>
+                <a:ea typeface="Arial"/>
+                <a:cs typeface="Arial"/>
+              </a:rPr>
+              <a:t xml:space="preserve"/>
+            </a:r>
+            <a:endParaRPr lang="en-US" sz="1200"/>
+          </a:p>
+          <a:p>
+            <a:pPr marL="0" indent="0">
+              <a:lnSpc>
+                <a:spcPts val="1560"/>
+              </a:lnSpc>
+              <a:spcAft>
+                <a:spcPts val="0"/>
+              </a:spcAft>
+              <a:buNone/>
+            </a:pPr>
+            <a:r>
+              <a:rPr lang="en-US" sz="1200" b="0">
+                <a:solidFill>
+                  <a:srgbClr val="202b33"/>
+                </a:solidFill>
+                <a:latin typeface="Arial"/>
+                <a:ea typeface="Arial"/>
+                <a:cs typeface="Arial"/>
+              </a:rPr>
+              <a:t xml:space="preserve">Stage direction: Score the three candidates in demo.md. Have the room find each candidate's failed gate before revealing it. Then show the council split per candidate: high agreement on the minimalist's failure, low overlap on the maintainer's, and ask which one deserves the human's afternoon.</a:t>
             </a:r>
             <a:endParaRPr lang="en-US" sz="1200"/>
           </a:p>
@@ -3156,7 +3203,7 @@
                 <a:ea typeface="Arial"/>
                 <a:cs typeface="Arial"/>
               </a:rPr>
-              <a:t xml:space="preserve">Attempts are a scaling axis too</a:t>
+              <a:t xml:space="preserve">Attempts are a scaling axis. So is judging.</a:t>
             </a:r>
             <a:endParaRPr lang="en-US" sz="1200"/>
           </a:p>
@@ -3317,6 +3364,29 @@
                 <a:ea typeface="Arial"/>
                 <a:cs typeface="Arial"/>
               </a:rPr>
+              <a:t xml:space="preserve">&gt; A judge reads a thousand tokens and writes fifty. Run a council. Measure the disagreement.</a:t>
+            </a:r>
+            <a:endParaRPr lang="en-US" sz="1200"/>
+          </a:p>
+          <a:p>
+            <a:pPr marL="0" indent="0">
+              <a:lnSpc>
+                <a:spcPts val="1560"/>
+              </a:lnSpc>
+              <a:spcAft>
+                <a:spcPts val="0"/>
+              </a:spcAft>
+              <a:buNone/>
+            </a:pPr>
+            <a:r>
+              <a:rPr lang="en-US" sz="1200" b="0">
+                <a:solidFill>
+                  <a:srgbClr val="202b33"/>
+                </a:solidFill>
+                <a:latin typeface="Arial"/>
+                <a:ea typeface="Arial"/>
+                <a:cs typeface="Arial"/>
+              </a:rPr>
               <a:t xml:space="preserve">&gt; Gates before preferences; the judge may reject everyone</a:t>
             </a:r>
             <a:endParaRPr lang="en-US" sz="1200"/>
@@ -3340,29 +3410,6 @@
                 <a:ea typeface="Arial"/>
                 <a:cs typeface="Arial"/>
               </a:rPr>
-              <a:t xml:space="preserve">&gt; A synthesis is a new candidate</a:t>
-            </a:r>
-            <a:endParaRPr lang="en-US" sz="1200"/>
-          </a:p>
-          <a:p>
-            <a:pPr marL="0" indent="0">
-              <a:lnSpc>
-                <a:spcPts val="1560"/>
-              </a:lnSpc>
-              <a:spcAft>
-                <a:spcPts val="0"/>
-              </a:spcAft>
-              <a:buNone/>
-            </a:pPr>
-            <a:r>
-              <a:rPr lang="en-US" sz="1200" b="0">
-                <a:solidFill>
-                  <a:srgbClr val="202b33"/>
-                </a:solidFill>
-                <a:latin typeface="Arial"/>
-                <a:ea typeface="Arial"/>
-                <a:cs typeface="Arial"/>
-              </a:rPr>
               <a:t xml:space="preserve"/>
             </a:r>
             <a:endParaRPr lang="en-US" sz="1200"/>
@@ -3386,7 +3433,7 @@
                 <a:ea typeface="Arial"/>
                 <a:cs typeface="Arial"/>
               </a:rPr>
-              <a:t xml:space="preserve">Change the unit of work from images to whole designs. Give the batch-job problem to three generated agents with the same requirements and different priorities: a minimalist, a maintainer, a security and performance reviewer. Keep first drafts separate so they do not converge on the first plausible answer. They can still share a blind spot; the contrast is the product.</a:t>
+              <a:t xml:space="preserve">Change the unit of work from images to whole designs. Give the batch-job problem to three generated agents with the same requirements and different priorities: a minimalist, a maintainer, a security and performance reviewer. Keep first drafts separate so they do not converge on the first plausible answer. The contrast is the product.</a:t>
             </a:r>
             <a:endParaRPr lang="en-US" sz="1200"/>
           </a:p>
@@ -3432,7 +3479,7 @@
                 <a:ea typeface="Arial"/>
                 <a:cs typeface="Arial"/>
               </a:rPr>
-              <a:t xml:space="preserve">That last part is not a hunch, and software engineering settled it forty years ago. Knight and Leveson ran the experiment in 1986: twenty-seven teams wrote the same program from the same specification, independently, and after a million tests the versions failed together far more often than independence predicts. Independently written does not mean independently wrong. Parallel attempts buy you contrast. They do not buy you coverage, and anyone selling you three-model consensus as a correctness argument is selling the assumption that experiment rejected.</a:t>
+              <a:t xml:space="preserve">Somebody is going to cite Knight and Leveson at me, so let me do it first. 1986, twenty-seven teams, one specification, a million tests, and the independently written versions failed together far more than independence predicts. True, important, and about N-version programming as a correctness strategy. That is not what this is. I am not voting three models toward the truth, and I am not going to tell you the ensemble is right because it agreed with itself. If that is the pitch you heard, it is not mine.</a:t>
             </a:r>
             <a:endParaRPr lang="en-US" sz="1200"/>
           </a:p>
@@ -3478,7 +3525,7 @@
                 <a:ea typeface="Arial"/>
                 <a:cs typeface="Arial"/>
               </a:rPr>
-              <a:t xml:space="preserve">Write the gates before reading the candidates: no duplicate dispatch after restart, no cross-tenant spend, no regeneration on notification retry, no dispatch after deadline. Run executable checks first. In the exercise every candidate fails a gate, including the careful one, which is the point: the judge is allowed to reject the room.</a:t>
+              <a:t xml:space="preserve">Here is what parallel attempts actually buy. Understanding of the models you depend on: run one brief through two of them and you learn what each reaches for and what each forgets. A migration harness: same brief, new model, diff the behavior before you switch, instead of after the incident. Better output: a synthesis of compatible ideas is often better than any single draft. And the cheap one, which is the one I care about: judging. A judge reads a thousand tokens and writes fifty. Output is what costs, so you can afford three or five judges from different models on every candidate, and the number you want back is not the average score. It is the disagreement. When the judges split or their reasons barely overlap, that candidate is sitting in territory nobody understands, and that is the one you do not ship on autopilot. I call this the Council of Guards. It picks between one and three alternatives to generate, and it costs a fraction of the generation it is guarding.</a:t>
             </a:r>
             <a:endParaRPr lang="en-US" sz="1200"/>
           </a:p>
@@ -3524,7 +3571,7 @@
                 <a:ea typeface="Arial"/>
                 <a:cs typeface="Arial"/>
               </a:rPr>
-              <a:t xml:space="preserve">Then combine compatible ideas into a new candidate with one coherent set of assumptions and run the gates again. Passing parts do not make a passing whole. Stop at the review budget; an endless debate is an expensive way to not ship.</a:t>
+              <a:t xml:space="preserve">Write the gates before reading the candidates: no duplicate dispatch after restart, no cross-tenant spend, no regeneration on notification retry, no dispatch after deadline. Run executable checks first. In the exercise every candidate fails a gate, including the careful one, which is the point: the council is allowed to reject the room. Then combine compatible ideas into a new candidate with one coherent set of assumptions and run the gates again. Passing parts do not make a passing whole. Stop at the review budget; an endless debate is an expensive way to not ship.</a:t>
             </a:r>
             <a:endParaRPr lang="en-US" sz="1200"/>
           </a:p>
@@ -3570,7 +3617,7 @@
                 <a:ea typeface="Arial"/>
                 <a:cs typeface="Arial"/>
               </a:rPr>
-              <a:t xml:space="preserve">Source: Knight and Leveson (1986), [An Experimental Evaluation of the Assumption of Independence in Multiversion Programming](https://doi.org/10.1109/TSE.1986.6312924), IEEE Transactions on Software Engineering SE-12(1), 96 to 109.</a:t>
+              <a:t xml:space="preserve">None of this looks like the engineering we were raised on. Do not do the work twice. Do not spend compute speculatively. One right answer per ticket. Those were axioms when the expensive thing was the engineer. When the expensive thing is being wrong, and a second draft costs cents, doing it three times and reading what disagrees is the frugal move. I am not a shill for Big Token. I am telling you that cheaper, safer and faster now sometimes come from spending exactly where yesterday's wisdom told you not to.</a:t>
             </a:r>
             <a:endParaRPr lang="en-US" sz="1200"/>
           </a:p>
@@ -3616,7 +3663,53 @@
                 <a:ea typeface="Arial"/>
                 <a:cs typeface="Arial"/>
               </a:rPr>
-              <a:t xml:space="preserve">Stage direction: Score the three candidates in demo.md. Have the room find each candidate's failed gate before revealing it.</a:t>
+              <a:t xml:space="preserve">Source: Knight and Leveson (1986), [An Experimental Evaluation of the Assumption of Independence in Multiversion Programming](https://doi.org/10.1109/TSE.1986.6312924), IEEE Transactions on Software Engineering SE-12(1), 96 to 109. Cited to set aside: it is a result about redundancy as a correctness strategy, which this slide does not claim.</a:t>
+            </a:r>
+            <a:endParaRPr lang="en-US" sz="1200"/>
+          </a:p>
+          <a:p>
+            <a:pPr marL="0" indent="0">
+              <a:lnSpc>
+                <a:spcPts val="1560"/>
+              </a:lnSpc>
+              <a:spcAft>
+                <a:spcPts val="0"/>
+              </a:spcAft>
+              <a:buNone/>
+            </a:pPr>
+            <a:r>
+              <a:rPr lang="en-US" sz="1200" b="0">
+                <a:solidFill>
+                  <a:srgbClr val="202b33"/>
+                </a:solidFill>
+                <a:latin typeface="Arial"/>
+                <a:ea typeface="Arial"/>
+                <a:cs typeface="Arial"/>
+              </a:rPr>
+              <a:t xml:space="preserve"/>
+            </a:r>
+            <a:endParaRPr lang="en-US" sz="1200"/>
+          </a:p>
+          <a:p>
+            <a:pPr marL="0" indent="0">
+              <a:lnSpc>
+                <a:spcPts val="1560"/>
+              </a:lnSpc>
+              <a:spcAft>
+                <a:spcPts val="0"/>
+              </a:spcAft>
+              <a:buNone/>
+            </a:pPr>
+            <a:r>
+              <a:rPr lang="en-US" sz="1200" b="0">
+                <a:solidFill>
+                  <a:srgbClr val="202b33"/>
+                </a:solidFill>
+                <a:latin typeface="Arial"/>
+                <a:ea typeface="Arial"/>
+                <a:cs typeface="Arial"/>
+              </a:rPr>
+              <a:t xml:space="preserve">Stage direction: Score the three candidates in demo.md. Have the room find each candidate's failed gate before revealing it. Then show the council split per candidate: high agreement on the minimalist's failure, low overlap on the maintainer's, and ask which one deserves the human's afternoon.</a:t>
             </a:r>
             <a:endParaRPr lang="en-US" sz="1200"/>
           </a:p>
@@ -3729,7 +3822,7 @@
                 <a:ea typeface="Arial"/>
                 <a:cs typeface="Arial"/>
               </a:rPr>
-              <a:t xml:space="preserve">Measure the accepted outcome</a:t>
+              <a:t xml:space="preserve">Attempts are a scaling axis. So is judging.</a:t>
             </a:r>
             <a:endParaRPr lang="en-US" sz="1200"/>
           </a:p>
@@ -3775,7 +3868,7 @@
                 <a:ea typeface="Arial"/>
                 <a:cs typeface="Arial"/>
               </a:rPr>
-              <a:t xml:space="preserve">34:00 to 37:00 · land</a:t>
+              <a:t xml:space="preserve">30:00 to 34:00 · build</a:t>
             </a:r>
             <a:endParaRPr lang="en-US" sz="1200"/>
           </a:p>
@@ -3821,53 +3914,7 @@
                 <a:ea typeface="Arial"/>
                 <a:cs typeface="Arial"/>
               </a:rPr>
-              <a:t xml:space="preserve">&gt; Latency: dispatch + queue + slowest branch + merge + verify</a:t>
-            </a:r>
-            <a:endParaRPr lang="en-US" sz="1200"/>
-          </a:p>
-          <a:p>
-            <a:pPr marL="0" indent="0">
-              <a:lnSpc>
-                <a:spcPts val="1560"/>
-              </a:lnSpc>
-              <a:spcAft>
-                <a:spcPts val="0"/>
-              </a:spcAft>
-              <a:buNone/>
-            </a:pPr>
-            <a:r>
-              <a:rPr lang="en-US" sz="1200" b="0">
-                <a:solidFill>
-                  <a:srgbClr val="202b33"/>
-                </a:solidFill>
-                <a:latin typeface="Arial"/>
-                <a:ea typeface="Arial"/>
-                <a:cs typeface="Arial"/>
-              </a:rPr>
-              <a:t xml:space="preserve">&gt; Cost: every candidate, every retry, every held reservation, review time</a:t>
-            </a:r>
-            <a:endParaRPr lang="en-US" sz="1200"/>
-          </a:p>
-          <a:p>
-            <a:pPr marL="0" indent="0">
-              <a:lnSpc>
-                <a:spcPts val="1560"/>
-              </a:lnSpc>
-              <a:spcAft>
-                <a:spcPts val="0"/>
-              </a:spcAft>
-              <a:buNone/>
-            </a:pPr>
-            <a:r>
-              <a:rPr lang="en-US" sz="1200" b="0">
-                <a:solidFill>
-                  <a:srgbClr val="202b33"/>
-                </a:solidFill>
-                <a:latin typeface="Arial"/>
-                <a:ea typeface="Arial"/>
-                <a:cs typeface="Arial"/>
-              </a:rPr>
-              <a:t xml:space="preserve">&gt; Compare against one competent attempt</a:t>
+              <a:t xml:space="preserve">![Different priorities expose tradeoffs. Common requirements and checks apply to every candidate.](../../reveal-talks/assets/dynamic-scaling/11-independent-attempts-share-requirements.svg)</a:t>
             </a:r>
             <a:endParaRPr lang="en-US" sz="1200"/>
           </a:p>
@@ -3913,7 +3960,53 @@
                 <a:ea typeface="Arial"/>
                 <a:cs typeface="Arial"/>
               </a:rPr>
-              <a:t xml:space="preserve">Starting three workers does not delete the serial parts. That is Amdahl, 1967, and it is unkind: if a tenth of the job is serial, ten workers get you five and a quarter times, and a hundred workers get you nine. Waiting on every branch can make a finished task slower. Count the whole thing: all candidates, failed work, reserved uncertainty, judging and human review, and compare against one competent attempt on the same task set.</a:t>
+              <a:t xml:space="preserve">&gt; Same brief, contrasting priorities, separate first drafts</a:t>
+            </a:r>
+            <a:endParaRPr lang="en-US" sz="1200"/>
+          </a:p>
+          <a:p>
+            <a:pPr marL="0" indent="0">
+              <a:lnSpc>
+                <a:spcPts val="1560"/>
+              </a:lnSpc>
+              <a:spcAft>
+                <a:spcPts val="0"/>
+              </a:spcAft>
+              <a:buNone/>
+            </a:pPr>
+            <a:r>
+              <a:rPr lang="en-US" sz="1200" b="0">
+                <a:solidFill>
+                  <a:srgbClr val="202b33"/>
+                </a:solidFill>
+                <a:latin typeface="Arial"/>
+                <a:ea typeface="Arial"/>
+                <a:cs typeface="Arial"/>
+              </a:rPr>
+              <a:t xml:space="preserve">&gt; A judge reads a thousand tokens and writes fifty. Run a council. Measure the disagreement.</a:t>
+            </a:r>
+            <a:endParaRPr lang="en-US" sz="1200"/>
+          </a:p>
+          <a:p>
+            <a:pPr marL="0" indent="0">
+              <a:lnSpc>
+                <a:spcPts val="1560"/>
+              </a:lnSpc>
+              <a:spcAft>
+                <a:spcPts val="0"/>
+              </a:spcAft>
+              <a:buNone/>
+            </a:pPr>
+            <a:r>
+              <a:rPr lang="en-US" sz="1200" b="0">
+                <a:solidFill>
+                  <a:srgbClr val="202b33"/>
+                </a:solidFill>
+                <a:latin typeface="Arial"/>
+                <a:ea typeface="Arial"/>
+                <a:cs typeface="Arial"/>
+              </a:rPr>
+              <a:t xml:space="preserve">&gt; Gates before preferences; the judge may reject everyone</a:t>
             </a:r>
             <a:endParaRPr lang="en-US" sz="1200"/>
           </a:p>
@@ -3959,7 +4052,7 @@
                 <a:ea typeface="Arial"/>
                 <a:cs typeface="Arial"/>
               </a:rPr>
-              <a:t xml:space="preserve">Measure accepted outcomes, not launched workers. Start with one extra attempt or one batch boundary; if it does not buy quality, time or cost, keep the simpler path. We are trying to buy useful work, not maximize the number of things blinking.</a:t>
+              <a:t xml:space="preserve">Change the unit of work from images to whole designs. Give the batch-job problem to three generated agents with the same requirements and different priorities: a minimalist, a maintainer, a security and performance reviewer. Keep first drafts separate so they do not converge on the first plausible answer. The contrast is the product.</a:t>
             </a:r>
             <a:endParaRPr lang="en-US" sz="1200"/>
           </a:p>
@@ -4005,7 +4098,7 @@
                 <a:ea typeface="Arial"/>
                 <a:cs typeface="Arial"/>
               </a:rPr>
-              <a:t xml:space="preserve">Source: Amdahl (1967), Validity of the single processor approach to achieving large scale computing capabilities, AFIPS Conference Proceedings 30, 483 to 485.</a:t>
+              <a:t xml:space="preserve">Somebody is going to cite Knight and Leveson at me, so let me do it first. 1986, twenty-seven teams, one specification, a million tests, and the independently written versions failed together far more than independence predicts. True, important, and about N-version programming as a correctness strategy. That is not what this is. I am not voting three models toward the truth, and I am not going to tell you the ensemble is right because it agreed with itself. If that is the pitch you heard, it is not mine.</a:t>
             </a:r>
             <a:endParaRPr lang="en-US" sz="1200"/>
           </a:p>
@@ -4051,7 +4144,191 @@
                 <a:ea typeface="Arial"/>
                 <a:cs typeface="Arial"/>
               </a:rPr>
-              <a:t xml:space="preserve">Stage direction: Ninety seconds: choose a baseline, a cap and an acceptance gate. Keep latency and total cost as separate numbers.</a:t>
+              <a:t xml:space="preserve">Here is what parallel attempts actually buy. Understanding of the models you depend on: run one brief through two of them and you learn what each reaches for and what each forgets. A migration harness: same brief, new model, diff the behavior before you switch, instead of after the incident. Better output: a synthesis of compatible ideas is often better than any single draft. And the cheap one, which is the one I care about: judging. A judge reads a thousand tokens and writes fifty. Output is what costs, so you can afford three or five judges from different models on every candidate, and the number you want back is not the average score. It is the disagreement. When the judges split or their reasons barely overlap, that candidate is sitting in territory nobody understands, and that is the one you do not ship on autopilot. I call this the Council of Guards. It picks between one and three alternatives to generate, and it costs a fraction of the generation it is guarding.</a:t>
+            </a:r>
+            <a:endParaRPr lang="en-US" sz="1200"/>
+          </a:p>
+          <a:p>
+            <a:pPr marL="0" indent="0">
+              <a:lnSpc>
+                <a:spcPts val="1560"/>
+              </a:lnSpc>
+              <a:spcAft>
+                <a:spcPts val="0"/>
+              </a:spcAft>
+              <a:buNone/>
+            </a:pPr>
+            <a:r>
+              <a:rPr lang="en-US" sz="1200" b="0">
+                <a:solidFill>
+                  <a:srgbClr val="202b33"/>
+                </a:solidFill>
+                <a:latin typeface="Arial"/>
+                <a:ea typeface="Arial"/>
+                <a:cs typeface="Arial"/>
+              </a:rPr>
+              <a:t xml:space="preserve"/>
+            </a:r>
+            <a:endParaRPr lang="en-US" sz="1200"/>
+          </a:p>
+          <a:p>
+            <a:pPr marL="0" indent="0">
+              <a:lnSpc>
+                <a:spcPts val="1560"/>
+              </a:lnSpc>
+              <a:spcAft>
+                <a:spcPts val="0"/>
+              </a:spcAft>
+              <a:buNone/>
+            </a:pPr>
+            <a:r>
+              <a:rPr lang="en-US" sz="1200" b="0">
+                <a:solidFill>
+                  <a:srgbClr val="202b33"/>
+                </a:solidFill>
+                <a:latin typeface="Arial"/>
+                <a:ea typeface="Arial"/>
+                <a:cs typeface="Arial"/>
+              </a:rPr>
+              <a:t xml:space="preserve">Write the gates before reading the candidates: no duplicate dispatch after restart, no cross-tenant spend, no regeneration on notification retry, no dispatch after deadline. Run executable checks first. In the exercise every candidate fails a gate, including the careful one, which is the point: the council is allowed to reject the room. Then combine compatible ideas into a new candidate with one coherent set of assumptions and run the gates again. Passing parts do not make a passing whole. Stop at the review budget; an endless debate is an expensive way to not ship.</a:t>
+            </a:r>
+            <a:endParaRPr lang="en-US" sz="1200"/>
+          </a:p>
+          <a:p>
+            <a:pPr marL="0" indent="0">
+              <a:lnSpc>
+                <a:spcPts val="1560"/>
+              </a:lnSpc>
+              <a:spcAft>
+                <a:spcPts val="0"/>
+              </a:spcAft>
+              <a:buNone/>
+            </a:pPr>
+            <a:r>
+              <a:rPr lang="en-US" sz="1200" b="0">
+                <a:solidFill>
+                  <a:srgbClr val="202b33"/>
+                </a:solidFill>
+                <a:latin typeface="Arial"/>
+                <a:ea typeface="Arial"/>
+                <a:cs typeface="Arial"/>
+              </a:rPr>
+              <a:t xml:space="preserve"/>
+            </a:r>
+            <a:endParaRPr lang="en-US" sz="1200"/>
+          </a:p>
+          <a:p>
+            <a:pPr marL="0" indent="0">
+              <a:lnSpc>
+                <a:spcPts val="1560"/>
+              </a:lnSpc>
+              <a:spcAft>
+                <a:spcPts val="0"/>
+              </a:spcAft>
+              <a:buNone/>
+            </a:pPr>
+            <a:r>
+              <a:rPr lang="en-US" sz="1200" b="0">
+                <a:solidFill>
+                  <a:srgbClr val="202b33"/>
+                </a:solidFill>
+                <a:latin typeface="Arial"/>
+                <a:ea typeface="Arial"/>
+                <a:cs typeface="Arial"/>
+              </a:rPr>
+              <a:t xml:space="preserve">None of this looks like the engineering we were raised on. Do not do the work twice. Do not spend compute speculatively. One right answer per ticket. Those were axioms when the expensive thing was the engineer. When the expensive thing is being wrong, and a second draft costs cents, doing it three times and reading what disagrees is the frugal move. I am not a shill for Big Token. I am telling you that cheaper, safer and faster now sometimes come from spending exactly where yesterday's wisdom told you not to.</a:t>
+            </a:r>
+            <a:endParaRPr lang="en-US" sz="1200"/>
+          </a:p>
+          <a:p>
+            <a:pPr marL="0" indent="0">
+              <a:lnSpc>
+                <a:spcPts val="1560"/>
+              </a:lnSpc>
+              <a:spcAft>
+                <a:spcPts val="0"/>
+              </a:spcAft>
+              <a:buNone/>
+            </a:pPr>
+            <a:r>
+              <a:rPr lang="en-US" sz="1200" b="0">
+                <a:solidFill>
+                  <a:srgbClr val="202b33"/>
+                </a:solidFill>
+                <a:latin typeface="Arial"/>
+                <a:ea typeface="Arial"/>
+                <a:cs typeface="Arial"/>
+              </a:rPr>
+              <a:t xml:space="preserve"/>
+            </a:r>
+            <a:endParaRPr lang="en-US" sz="1200"/>
+          </a:p>
+          <a:p>
+            <a:pPr marL="0" indent="0">
+              <a:lnSpc>
+                <a:spcPts val="1560"/>
+              </a:lnSpc>
+              <a:spcAft>
+                <a:spcPts val="0"/>
+              </a:spcAft>
+              <a:buNone/>
+            </a:pPr>
+            <a:r>
+              <a:rPr lang="en-US" sz="1200" b="0">
+                <a:solidFill>
+                  <a:srgbClr val="202b33"/>
+                </a:solidFill>
+                <a:latin typeface="Arial"/>
+                <a:ea typeface="Arial"/>
+                <a:cs typeface="Arial"/>
+              </a:rPr>
+              <a:t xml:space="preserve">Source: Knight and Leveson (1986), [An Experimental Evaluation of the Assumption of Independence in Multiversion Programming](https://doi.org/10.1109/TSE.1986.6312924), IEEE Transactions on Software Engineering SE-12(1), 96 to 109. Cited to set aside: it is a result about redundancy as a correctness strategy, which this slide does not claim.</a:t>
+            </a:r>
+            <a:endParaRPr lang="en-US" sz="1200"/>
+          </a:p>
+          <a:p>
+            <a:pPr marL="0" indent="0">
+              <a:lnSpc>
+                <a:spcPts val="1560"/>
+              </a:lnSpc>
+              <a:spcAft>
+                <a:spcPts val="0"/>
+              </a:spcAft>
+              <a:buNone/>
+            </a:pPr>
+            <a:r>
+              <a:rPr lang="en-US" sz="1200" b="0">
+                <a:solidFill>
+                  <a:srgbClr val="202b33"/>
+                </a:solidFill>
+                <a:latin typeface="Arial"/>
+                <a:ea typeface="Arial"/>
+                <a:cs typeface="Arial"/>
+              </a:rPr>
+              <a:t xml:space="preserve"/>
+            </a:r>
+            <a:endParaRPr lang="en-US" sz="1200"/>
+          </a:p>
+          <a:p>
+            <a:pPr marL="0" indent="0">
+              <a:lnSpc>
+                <a:spcPts val="1560"/>
+              </a:lnSpc>
+              <a:spcAft>
+                <a:spcPts val="0"/>
+              </a:spcAft>
+              <a:buNone/>
+            </a:pPr>
+            <a:r>
+              <a:rPr lang="en-US" sz="1200" b="0">
+                <a:solidFill>
+                  <a:srgbClr val="202b33"/>
+                </a:solidFill>
+                <a:latin typeface="Arial"/>
+                <a:ea typeface="Arial"/>
+                <a:cs typeface="Arial"/>
+              </a:rPr>
+              <a:t xml:space="preserve">Stage direction: Score the three candidates in demo.md. Have the room find each candidate's failed gate before revealing it. Then show the council split per candidate: high agreement on the minimalist's failure, low overlap on the maintainer's, and ask which one deserves the human's afternoon.</a:t>
             </a:r>
             <a:endParaRPr lang="en-US" sz="1200"/>
           </a:p>
@@ -4164,7 +4441,7 @@
                 <a:ea typeface="Arial"/>
                 <a:cs typeface="Arial"/>
               </a:rPr>
-              <a:t xml:space="preserve">Put the limit where the work begins</a:t>
+              <a:t xml:space="preserve">Measure the accepted outcome</a:t>
             </a:r>
             <a:endParaRPr lang="en-US" sz="1200"/>
           </a:p>
@@ -4210,7 +4487,7 @@
                 <a:ea typeface="Arial"/>
                 <a:cs typeface="Arial"/>
               </a:rPr>
-              <a:t xml:space="preserve">37:00 to 40:00 · land</a:t>
+              <a:t xml:space="preserve">34:00 to 37:00 · land</a:t>
             </a:r>
             <a:endParaRPr lang="en-US" sz="1200"/>
           </a:p>
@@ -4256,53 +4533,53 @@
                 <a:ea typeface="Arial"/>
                 <a:cs typeface="Arial"/>
               </a:rPr>
-              <a:t xml:space="preserve">&gt; One ledger across every caller</a:t>
-            </a:r>
-            <a:endParaRPr lang="en-US" sz="1200"/>
-          </a:p>
-          <a:p>
-            <a:pPr marL="0" indent="0">
-              <a:lnSpc>
-                <a:spcPts val="1560"/>
-              </a:lnSpc>
-              <a:spcAft>
-                <a:spcPts val="0"/>
-              </a:spcAft>
-              <a:buNone/>
-            </a:pPr>
-            <a:r>
-              <a:rPr lang="en-US" sz="1200" b="0">
-                <a:solidFill>
-                  <a:srgbClr val="202b33"/>
-                </a:solidFill>
-                <a:latin typeface="Arial"/>
-                <a:ea typeface="Arial"/>
-                <a:cs typeface="Arial"/>
-              </a:rPr>
-              <a:t xml:space="preserve">&gt; Durable state across every restart</a:t>
-            </a:r>
-            <a:endParaRPr lang="en-US" sz="1200"/>
-          </a:p>
-          <a:p>
-            <a:pPr marL="0" indent="0">
-              <a:lnSpc>
-                <a:spcPts val="1560"/>
-              </a:lnSpc>
-              <a:spcAft>
-                <a:spcPts val="0"/>
-              </a:spcAft>
-              <a:buNone/>
-            </a:pPr>
-            <a:r>
-              <a:rPr lang="en-US" sz="1200" b="0">
-                <a:solidFill>
-                  <a:srgbClr val="202b33"/>
-                </a:solidFill>
-                <a:latin typeface="Arial"/>
-                <a:ea typeface="Arial"/>
-                <a:cs typeface="Arial"/>
-              </a:rPr>
-              <a:t xml:space="preserve">&gt; A lease on every box, a gate on every candidate</a:t>
+              <a:t xml:space="preserve">&gt; Latency: dispatch + queue + slowest branch + merge + verify</a:t>
+            </a:r>
+            <a:endParaRPr lang="en-US" sz="1200"/>
+          </a:p>
+          <a:p>
+            <a:pPr marL="0" indent="0">
+              <a:lnSpc>
+                <a:spcPts val="1560"/>
+              </a:lnSpc>
+              <a:spcAft>
+                <a:spcPts val="0"/>
+              </a:spcAft>
+              <a:buNone/>
+            </a:pPr>
+            <a:r>
+              <a:rPr lang="en-US" sz="1200" b="0">
+                <a:solidFill>
+                  <a:srgbClr val="202b33"/>
+                </a:solidFill>
+                <a:latin typeface="Arial"/>
+                <a:ea typeface="Arial"/>
+                <a:cs typeface="Arial"/>
+              </a:rPr>
+              <a:t xml:space="preserve">&gt; Cost: every candidate, every retry, every held reservation, review time</a:t>
+            </a:r>
+            <a:endParaRPr lang="en-US" sz="1200"/>
+          </a:p>
+          <a:p>
+            <a:pPr marL="0" indent="0">
+              <a:lnSpc>
+                <a:spcPts val="1560"/>
+              </a:lnSpc>
+              <a:spcAft>
+                <a:spcPts val="0"/>
+              </a:spcAft>
+              <a:buNone/>
+            </a:pPr>
+            <a:r>
+              <a:rPr lang="en-US" sz="1200" b="0">
+                <a:solidFill>
+                  <a:srgbClr val="202b33"/>
+                </a:solidFill>
+                <a:latin typeface="Arial"/>
+                <a:ea typeface="Arial"/>
+                <a:cs typeface="Arial"/>
+              </a:rPr>
+              <a:t xml:space="preserve">&gt; Compare against one competent attempt</a:t>
             </a:r>
             <a:endParaRPr lang="en-US" sz="1200"/>
           </a:p>
@@ -4348,7 +4625,7 @@
                 <a:ea typeface="Arial"/>
                 <a:cs typeface="Arial"/>
               </a:rPr>
-              <a:t xml:space="preserve">Back to the four callers. Forty jobs were legal by four local counters. The missing piece was one shared account of what the application had promised and what it had already started.</a:t>
+              <a:t xml:space="preserve">Starting three workers does not delete the serial parts. That is Amdahl, 1967, and it is unkind: if a tenth of the job is serial, ten workers get you five and a quarter times, and a hundred workers get you nine. Waiting on every branch can make a finished task slower. Count the whole thing: all candidates, failed work, reserved uncertainty, judging and human review, and compare against one competent attempt on the same task set.</a:t>
             </a:r>
             <a:endParaRPr lang="en-US" sz="1200"/>
           </a:p>
@@ -4394,7 +4671,7 @@
                 <a:ea typeface="Arial"/>
                 <a:cs typeface="Arial"/>
               </a:rPr>
-              <a:t xml:space="preserve">The inversion is real: the workload can now describe its own shape and ask for its own compute, and the substrate to grant it in seconds already exists. That is a better world than a warm fleet and a guess. It is only safe because the agent chooses from a catalog, spends from a ledger, and runs on boxes that expire.</a:t>
+              <a:t xml:space="preserve">Measure accepted outcomes, not launched workers. Start with one extra attempt or one batch boundary; if it does not buy quality, time or cost, keep the simpler path. We are trying to buy useful work, not maximize the number of things blinking.</a:t>
             </a:r>
             <a:endParaRPr lang="en-US" sz="1200"/>
           </a:p>
@@ -4440,7 +4717,7 @@
                 <a:ea typeface="Arial"/>
                 <a:cs typeface="Arial"/>
               </a:rPr>
-              <a:t xml:space="preserve">Inspect one expensive tool in your system. Count the work it can launch underneath itself. Put the limit where that work actually begins.</a:t>
+              <a:t xml:space="preserve">Source: Amdahl (1967), Validity of the single processor approach to achieving large scale computing capabilities, AFIPS Conference Proceedings 30, 483 to 485.</a:t>
             </a:r>
             <a:endParaRPr lang="en-US" sz="1200"/>
           </a:p>
@@ -4486,7 +4763,30 @@
                 <a:ea typeface="Arial"/>
                 <a:cs typeface="Arial"/>
               </a:rPr>
-              <a:t xml:space="preserve">Stage direction: Close on the multiplication and the shared admission line. Do not add a vendor.</a:t>
+              <a:t xml:space="preserve">Stage direction: Ninety seconds: choose a baseline, a cap and an acceptance gate. Keep latency and total cost as separate numbers.</a:t>
+            </a:r>
+            <a:endParaRPr lang="en-US" sz="1200"/>
+          </a:p>
+          <a:p>
+            <a:pPr marL="0" indent="0">
+              <a:lnSpc>
+                <a:spcPts val="1560"/>
+              </a:lnSpc>
+              <a:spcAft>
+                <a:spcPts val="0"/>
+              </a:spcAft>
+              <a:buNone/>
+            </a:pPr>
+            <a:r>
+              <a:rPr lang="en-US" sz="1200" b="0">
+                <a:solidFill>
+                  <a:srgbClr val="202b33"/>
+                </a:solidFill>
+                <a:latin typeface="Arial"/>
+                <a:ea typeface="Arial"/>
+                <a:cs typeface="Arial"/>
+              </a:rPr>
+              <a:t xml:space="preserve"/>
             </a:r>
             <a:endParaRPr lang="en-US" sz="1200"/>
           </a:p>
@@ -4576,7 +4876,7 @@
                 <a:ea typeface="Arial"/>
                 <a:cs typeface="Arial"/>
               </a:rPr>
-              <a:t xml:space="preserve">Knight and Leveson (1986), [An Experimental Evaluation of the Assumption of Independence in Multiversion Programming](https://doi.org/10.1109/TSE.1986.6312924), IEEE Transactions on Software Engineering SE-12(1), 96 to 109.</a:t>
+              <a:t xml:space="preserve">Put the limit where the work begins</a:t>
             </a:r>
             <a:endParaRPr lang="en-US" sz="1200"/>
           </a:p>
@@ -4622,7 +4922,306 @@
                 <a:ea typeface="Arial"/>
                 <a:cs typeface="Arial"/>
               </a:rPr>
-              <a:t xml:space="preserve">Amdahl (1967), Validity of the single processor approach to achieving large scale computing capabilities, AFIPS Conference Proceedings 30, 483 to 485.</a:t>
+              <a:t xml:space="preserve">37:00 to 40:00 · land</a:t>
+            </a:r>
+            <a:endParaRPr lang="en-US" sz="1200"/>
+          </a:p>
+          <a:p>
+            <a:pPr marL="0" indent="0">
+              <a:lnSpc>
+                <a:spcPts val="1560"/>
+              </a:lnSpc>
+              <a:spcAft>
+                <a:spcPts val="0"/>
+              </a:spcAft>
+              <a:buNone/>
+            </a:pPr>
+            <a:r>
+              <a:rPr lang="en-US" sz="1200" b="0">
+                <a:solidFill>
+                  <a:srgbClr val="202b33"/>
+                </a:solidFill>
+                <a:latin typeface="Arial"/>
+                <a:ea typeface="Arial"/>
+                <a:cs typeface="Arial"/>
+              </a:rPr>
+              <a:t xml:space="preserve"/>
+            </a:r>
+            <a:endParaRPr lang="en-US" sz="1200"/>
+          </a:p>
+          <a:p>
+            <a:pPr marL="0" indent="0">
+              <a:lnSpc>
+                <a:spcPts val="1560"/>
+              </a:lnSpc>
+              <a:spcAft>
+                <a:spcPts val="0"/>
+              </a:spcAft>
+              <a:buNone/>
+            </a:pPr>
+            <a:r>
+              <a:rPr lang="en-US" sz="1200" b="0">
+                <a:solidFill>
+                  <a:srgbClr val="202b33"/>
+                </a:solidFill>
+                <a:latin typeface="Arial"/>
+                <a:ea typeface="Arial"/>
+                <a:cs typeface="Arial"/>
+              </a:rPr>
+              <a:t xml:space="preserve">&gt; One ledger across every caller</a:t>
+            </a:r>
+            <a:endParaRPr lang="en-US" sz="1200"/>
+          </a:p>
+          <a:p>
+            <a:pPr marL="0" indent="0">
+              <a:lnSpc>
+                <a:spcPts val="1560"/>
+              </a:lnSpc>
+              <a:spcAft>
+                <a:spcPts val="0"/>
+              </a:spcAft>
+              <a:buNone/>
+            </a:pPr>
+            <a:r>
+              <a:rPr lang="en-US" sz="1200" b="0">
+                <a:solidFill>
+                  <a:srgbClr val="202b33"/>
+                </a:solidFill>
+                <a:latin typeface="Arial"/>
+                <a:ea typeface="Arial"/>
+                <a:cs typeface="Arial"/>
+              </a:rPr>
+              <a:t xml:space="preserve">&gt; Durable state across every restart</a:t>
+            </a:r>
+            <a:endParaRPr lang="en-US" sz="1200"/>
+          </a:p>
+          <a:p>
+            <a:pPr marL="0" indent="0">
+              <a:lnSpc>
+                <a:spcPts val="1560"/>
+              </a:lnSpc>
+              <a:spcAft>
+                <a:spcPts val="0"/>
+              </a:spcAft>
+              <a:buNone/>
+            </a:pPr>
+            <a:r>
+              <a:rPr lang="en-US" sz="1200" b="0">
+                <a:solidFill>
+                  <a:srgbClr val="202b33"/>
+                </a:solidFill>
+                <a:latin typeface="Arial"/>
+                <a:ea typeface="Arial"/>
+                <a:cs typeface="Arial"/>
+              </a:rPr>
+              <a:t xml:space="preserve">&gt; A lease on every box, a gate on every candidate</a:t>
+            </a:r>
+            <a:endParaRPr lang="en-US" sz="1200"/>
+          </a:p>
+          <a:p>
+            <a:pPr marL="0" indent="0">
+              <a:lnSpc>
+                <a:spcPts val="1560"/>
+              </a:lnSpc>
+              <a:spcAft>
+                <a:spcPts val="0"/>
+              </a:spcAft>
+              <a:buNone/>
+            </a:pPr>
+            <a:r>
+              <a:rPr lang="en-US" sz="1200" b="0">
+                <a:solidFill>
+                  <a:srgbClr val="202b33"/>
+                </a:solidFill>
+                <a:latin typeface="Arial"/>
+                <a:ea typeface="Arial"/>
+                <a:cs typeface="Arial"/>
+              </a:rPr>
+              <a:t xml:space="preserve"/>
+            </a:r>
+            <a:endParaRPr lang="en-US" sz="1200"/>
+          </a:p>
+          <a:p>
+            <a:pPr marL="0" indent="0">
+              <a:lnSpc>
+                <a:spcPts val="1560"/>
+              </a:lnSpc>
+              <a:spcAft>
+                <a:spcPts val="0"/>
+              </a:spcAft>
+              <a:buNone/>
+            </a:pPr>
+            <a:r>
+              <a:rPr lang="en-US" sz="1200" b="0">
+                <a:solidFill>
+                  <a:srgbClr val="202b33"/>
+                </a:solidFill>
+                <a:latin typeface="Arial"/>
+                <a:ea typeface="Arial"/>
+                <a:cs typeface="Arial"/>
+              </a:rPr>
+              <a:t xml:space="preserve">Back to the four callers. Forty jobs were legal by four local counters. The missing piece was one shared account of what the application had promised and what it had already started.</a:t>
+            </a:r>
+            <a:endParaRPr lang="en-US" sz="1200"/>
+          </a:p>
+          <a:p>
+            <a:pPr marL="0" indent="0">
+              <a:lnSpc>
+                <a:spcPts val="1560"/>
+              </a:lnSpc>
+              <a:spcAft>
+                <a:spcPts val="0"/>
+              </a:spcAft>
+              <a:buNone/>
+            </a:pPr>
+            <a:r>
+              <a:rPr lang="en-US" sz="1200" b="0">
+                <a:solidFill>
+                  <a:srgbClr val="202b33"/>
+                </a:solidFill>
+                <a:latin typeface="Arial"/>
+                <a:ea typeface="Arial"/>
+                <a:cs typeface="Arial"/>
+              </a:rPr>
+              <a:t xml:space="preserve"/>
+            </a:r>
+            <a:endParaRPr lang="en-US" sz="1200"/>
+          </a:p>
+          <a:p>
+            <a:pPr marL="0" indent="0">
+              <a:lnSpc>
+                <a:spcPts val="1560"/>
+              </a:lnSpc>
+              <a:spcAft>
+                <a:spcPts val="0"/>
+              </a:spcAft>
+              <a:buNone/>
+            </a:pPr>
+            <a:r>
+              <a:rPr lang="en-US" sz="1200" b="0">
+                <a:solidFill>
+                  <a:srgbClr val="202b33"/>
+                </a:solidFill>
+                <a:latin typeface="Arial"/>
+                <a:ea typeface="Arial"/>
+                <a:cs typeface="Arial"/>
+              </a:rPr>
+              <a:t xml:space="preserve">The inversion is real: the workload can now describe its own shape and ask for its own compute, and the substrate to grant it in seconds already exists. That is a better world than a warm fleet and a guess. It is only safe because the agent chooses from a catalog, spends from a ledger, and runs on boxes that expire.</a:t>
+            </a:r>
+            <a:endParaRPr lang="en-US" sz="1200"/>
+          </a:p>
+          <a:p>
+            <a:pPr marL="0" indent="0">
+              <a:lnSpc>
+                <a:spcPts val="1560"/>
+              </a:lnSpc>
+              <a:spcAft>
+                <a:spcPts val="0"/>
+              </a:spcAft>
+              <a:buNone/>
+            </a:pPr>
+            <a:r>
+              <a:rPr lang="en-US" sz="1200" b="0">
+                <a:solidFill>
+                  <a:srgbClr val="202b33"/>
+                </a:solidFill>
+                <a:latin typeface="Arial"/>
+                <a:ea typeface="Arial"/>
+                <a:cs typeface="Arial"/>
+              </a:rPr>
+              <a:t xml:space="preserve"/>
+            </a:r>
+            <a:endParaRPr lang="en-US" sz="1200"/>
+          </a:p>
+          <a:p>
+            <a:pPr marL="0" indent="0">
+              <a:lnSpc>
+                <a:spcPts val="1560"/>
+              </a:lnSpc>
+              <a:spcAft>
+                <a:spcPts val="0"/>
+              </a:spcAft>
+              <a:buNone/>
+            </a:pPr>
+            <a:r>
+              <a:rPr lang="en-US" sz="1200" b="0">
+                <a:solidFill>
+                  <a:srgbClr val="202b33"/>
+                </a:solidFill>
+                <a:latin typeface="Arial"/>
+                <a:ea typeface="Arial"/>
+                <a:cs typeface="Arial"/>
+              </a:rPr>
+              <a:t xml:space="preserve">Inspect one expensive tool in your system. Count the work it can launch underneath itself. Put the limit where that work actually begins.</a:t>
+            </a:r>
+            <a:endParaRPr lang="en-US" sz="1200"/>
+          </a:p>
+          <a:p>
+            <a:pPr marL="0" indent="0">
+              <a:lnSpc>
+                <a:spcPts val="1560"/>
+              </a:lnSpc>
+              <a:spcAft>
+                <a:spcPts val="0"/>
+              </a:spcAft>
+              <a:buNone/>
+            </a:pPr>
+            <a:r>
+              <a:rPr lang="en-US" sz="1200" b="0">
+                <a:solidFill>
+                  <a:srgbClr val="202b33"/>
+                </a:solidFill>
+                <a:latin typeface="Arial"/>
+                <a:ea typeface="Arial"/>
+                <a:cs typeface="Arial"/>
+              </a:rPr>
+              <a:t xml:space="preserve"/>
+            </a:r>
+            <a:endParaRPr lang="en-US" sz="1200"/>
+          </a:p>
+          <a:p>
+            <a:pPr marL="0" indent="0">
+              <a:lnSpc>
+                <a:spcPts val="1560"/>
+              </a:lnSpc>
+              <a:spcAft>
+                <a:spcPts val="0"/>
+              </a:spcAft>
+              <a:buNone/>
+            </a:pPr>
+            <a:r>
+              <a:rPr lang="en-US" sz="1200" b="0">
+                <a:solidFill>
+                  <a:srgbClr val="202b33"/>
+                </a:solidFill>
+                <a:latin typeface="Arial"/>
+                <a:ea typeface="Arial"/>
+                <a:cs typeface="Arial"/>
+              </a:rPr>
+              <a:t xml:space="preserve">Stage direction: Close on the multiplication and the shared admission line. Do not add a vendor.</a:t>
+            </a:r>
+            <a:endParaRPr lang="en-US" sz="1200"/>
+          </a:p>
+          <a:p>
+            <a:pPr marL="0" indent="0">
+              <a:lnSpc>
+                <a:spcPts val="1560"/>
+              </a:lnSpc>
+              <a:spcAft>
+                <a:spcPts val="0"/>
+              </a:spcAft>
+              <a:buNone/>
+            </a:pPr>
+            <a:r>
+              <a:rPr lang="en-US" sz="1200" b="0">
+                <a:solidFill>
+                  <a:srgbClr val="202b33"/>
+                </a:solidFill>
+                <a:latin typeface="Arial"/>
+                <a:ea typeface="Arial"/>
+                <a:cs typeface="Arial"/>
+              </a:rPr>
+              <a:t xml:space="preserve"/>
             </a:r>
             <a:endParaRPr lang="en-US" sz="1200"/>
           </a:p>
@@ -5150,6 +5749,119 @@
                 <a:cs typeface="Arial"/>
               </a:rPr>
               <a:t xml:space="preserve"/>
+            </a:r>
+            <a:endParaRPr lang="en-US" sz="1200"/>
+          </a:p>
+        </p:txBody>
+      </p:sp>
+    </p:spTree>
+  </p:cSld>
+  <p:clrMapOvr>
+    <a:masterClrMapping/>
+  </p:clrMapOvr>
+</p:notes>
+</file>
+
+<file path=ppt/notesSlides/notesSlide20.xml><?xml version="1.0" encoding="utf-8"?>
+<p:notes xmlns:a="http://schemas.openxmlformats.org/drawingml/2006/main" xmlns:r="http://schemas.openxmlformats.org/officeDocument/2006/relationships" xmlns:p="http://schemas.openxmlformats.org/presentationml/2006/main">
+  <p:cSld>
+    <p:spTree>
+      <p:nvGrpSpPr>
+        <p:cNvPr id="1" name=""/>
+        <p:cNvGrpSpPr/>
+        <p:nvPr/>
+      </p:nvGrpSpPr>
+      <p:grpSpPr>
+        <a:xfrm>
+          <a:off x="0" y="0"/>
+          <a:ext cx="0" cy="0"/>
+          <a:chOff x="0" y="0"/>
+          <a:chExt cx="0" cy="0"/>
+        </a:xfrm>
+      </p:grpSpPr>
+      <p:sp>
+        <p:nvSpPr>
+          <p:cNvPr id="2" name="Presenter notes"/>
+          <p:cNvSpPr txBox="1"/>
+          <p:nvPr>
+            <p:ph type="body" idx="1"/>
+          </p:nvPr>
+        </p:nvSpPr>
+        <p:spPr>
+          <a:xfrm>
+            <a:off x="457200" y="1428750"/>
+            <a:ext cx="5715000" cy="6667500"/>
+          </a:xfrm>
+        </p:spPr>
+        <p:txBody>
+          <a:bodyPr/>
+          <a:lstStyle/>
+          <a:p>
+            <a:pPr marL="0" indent="0">
+              <a:lnSpc>
+                <a:spcPts val="1560"/>
+              </a:lnSpc>
+              <a:spcAft>
+                <a:spcPts val="0"/>
+              </a:spcAft>
+              <a:buNone/>
+            </a:pPr>
+            <a:r>
+              <a:rPr lang="en-US" sz="1200" b="0">
+                <a:solidFill>
+                  <a:srgbClr val="202b33"/>
+                </a:solidFill>
+                <a:latin typeface="Arial"/>
+                <a:ea typeface="Arial"/>
+                <a:cs typeface="Arial"/>
+              </a:rPr>
+              <a:t xml:space="preserve">Knight and Leveson (1986), [An Experimental Evaluation of the Assumption of Independence in Multiversion Programming](https://doi.org/10.1109/TSE.1986.6312924), IEEE Transactions on Software Engineering SE-12(1), 96 to 109. Cited to set aside: it is a result about redundancy as a correctness strategy, which this slide does not claim.</a:t>
+            </a:r>
+            <a:endParaRPr lang="en-US" sz="1200"/>
+          </a:p>
+          <a:p>
+            <a:pPr marL="0" indent="0">
+              <a:lnSpc>
+                <a:spcPts val="1560"/>
+              </a:lnSpc>
+              <a:spcAft>
+                <a:spcPts val="0"/>
+              </a:spcAft>
+              <a:buNone/>
+            </a:pPr>
+            <a:r>
+              <a:rPr lang="en-US" sz="1200" b="0">
+                <a:solidFill>
+                  <a:srgbClr val="202b33"/>
+                </a:solidFill>
+                <a:latin typeface="Arial"/>
+                <a:ea typeface="Arial"/>
+                <a:cs typeface="Arial"/>
+              </a:rPr>
+              <a:t xml:space="preserve"/>
+            </a:r>
+            <a:endParaRPr lang="en-US" sz="1200"/>
+          </a:p>
+          <a:p>
+            <a:pPr marL="0" indent="0">
+              <a:lnSpc>
+                <a:spcPts val="1560"/>
+              </a:lnSpc>
+              <a:spcAft>
+                <a:spcPts val="0"/>
+              </a:spcAft>
+              <a:buNone/>
+            </a:pPr>
+            <a:r>
+              <a:rPr lang="en-US" sz="1200" b="0">
+                <a:solidFill>
+                  <a:srgbClr val="202b33"/>
+                </a:solidFill>
+                <a:latin typeface="Arial"/>
+                <a:ea typeface="Arial"/>
+                <a:cs typeface="Arial"/>
+              </a:rPr>
+              <a:t xml:space="preserve">Amdahl (1967), Validity of the single processor approach to achieving large scale computing capabilities, AFIPS Conference Proceedings 30, 483 to 485.</a:t>
             </a:r>
             <a:endParaRPr lang="en-US" sz="1200"/>
           </a:p>
@@ -12891,7 +13603,7 @@
                 <a:ea typeface="Arial"/>
                 <a:cs typeface="Arial"/>
               </a:rPr>
-              <a:t xml:space="preserve">Attempts are a scaling axis too</a:t>
+              <a:t xml:space="preserve">Attempts are a scaling axis. So is judging.</a:t>
             </a:r>
             <a:endParaRPr lang="en-US" sz="2550"/>
           </a:p>
@@ -13064,6 +13776,75 @@
                 <a:ea typeface="Arial"/>
                 <a:cs typeface="Arial"/>
               </a:rPr>
+              <a:t xml:space="preserve">A judge reads a thousand tokens and writes fifty. Run</a:t>
+            </a:r>
+            <a:endParaRPr lang="en-US" sz="1200"/>
+          </a:p>
+          <a:p>
+            <a:pPr marL="0" indent="0">
+              <a:lnSpc>
+                <a:spcPts val="1575"/>
+              </a:lnSpc>
+              <a:spcAft>
+                <a:spcPts val="0"/>
+              </a:spcAft>
+              <a:buNone/>
+            </a:pPr>
+            <a:r>
+              <a:rPr lang="en-US" sz="1200" b="0">
+                <a:solidFill>
+                  <a:srgbClr val="202B33"/>
+                </a:solidFill>
+                <a:latin typeface="Arial"/>
+                <a:ea typeface="Arial"/>
+                <a:cs typeface="Arial"/>
+              </a:rPr>
+              <a:t xml:space="preserve">a council. Measure the disagreement.</a:t>
+            </a:r>
+            <a:endParaRPr lang="en-US" sz="1200"/>
+          </a:p>
+          <a:p>
+            <a:pPr marL="0" indent="0">
+              <a:lnSpc>
+                <a:spcPts val="1575"/>
+              </a:lnSpc>
+              <a:spcAft>
+                <a:spcPts val="0"/>
+              </a:spcAft>
+              <a:buNone/>
+            </a:pPr>
+            <a:r>
+              <a:rPr lang="en-US" sz="1200" b="0">
+                <a:solidFill>
+                  <a:srgbClr val="202B33"/>
+                </a:solidFill>
+                <a:latin typeface="Arial"/>
+                <a:ea typeface="Arial"/>
+                <a:cs typeface="Arial"/>
+              </a:rPr>
+              <a:t xml:space="preserve"/>
+            </a:r>
+            <a:endParaRPr lang="en-US" sz="1200"/>
+          </a:p>
+          <a:p>
+            <a:pPr marL="0" indent="0">
+              <a:lnSpc>
+                <a:spcPts val="1575"/>
+              </a:lnSpc>
+              <a:spcAft>
+                <a:spcPts val="0"/>
+              </a:spcAft>
+              <a:buNone/>
+            </a:pPr>
+            <a:r>
+              <a:rPr lang="en-US" sz="1200" b="0">
+                <a:solidFill>
+                  <a:srgbClr val="202B33"/>
+                </a:solidFill>
+                <a:latin typeface="Arial"/>
+                <a:ea typeface="Arial"/>
+                <a:cs typeface="Arial"/>
+              </a:rPr>
               <a:t xml:space="preserve">Gates before preferences; the judge may reject</a:t>
             </a:r>
             <a:endParaRPr lang="en-US" sz="1200"/>
@@ -13088,75 +13869,6 @@
                 <a:cs typeface="Arial"/>
               </a:rPr>
               <a:t xml:space="preserve">everyone</a:t>
-            </a:r>
-            <a:endParaRPr lang="en-US" sz="1200"/>
-          </a:p>
-          <a:p>
-            <a:pPr marL="0" indent="0">
-              <a:lnSpc>
-                <a:spcPts val="1575"/>
-              </a:lnSpc>
-              <a:spcAft>
-                <a:spcPts val="0"/>
-              </a:spcAft>
-              <a:buNone/>
-            </a:pPr>
-            <a:r>
-              <a:rPr lang="en-US" sz="1200" b="0">
-                <a:solidFill>
-                  <a:srgbClr val="202B33"/>
-                </a:solidFill>
-                <a:latin typeface="Arial"/>
-                <a:ea typeface="Arial"/>
-                <a:cs typeface="Arial"/>
-              </a:rPr>
-              <a:t xml:space="preserve"/>
-            </a:r>
-            <a:endParaRPr lang="en-US" sz="1200"/>
-          </a:p>
-          <a:p>
-            <a:pPr marL="0" indent="0">
-              <a:lnSpc>
-                <a:spcPts val="1575"/>
-              </a:lnSpc>
-              <a:spcAft>
-                <a:spcPts val="0"/>
-              </a:spcAft>
-              <a:buNone/>
-            </a:pPr>
-            <a:r>
-              <a:rPr lang="en-US" sz="1200" b="0">
-                <a:solidFill>
-                  <a:srgbClr val="202B33"/>
-                </a:solidFill>
-                <a:latin typeface="Arial"/>
-                <a:ea typeface="Arial"/>
-                <a:cs typeface="Arial"/>
-              </a:rPr>
-              <a:t xml:space="preserve">A synthesis is a new candidate</a:t>
-            </a:r>
-            <a:endParaRPr lang="en-US" sz="1200"/>
-          </a:p>
-          <a:p>
-            <a:pPr marL="0" indent="0">
-              <a:lnSpc>
-                <a:spcPts val="1575"/>
-              </a:lnSpc>
-              <a:spcAft>
-                <a:spcPts val="0"/>
-              </a:spcAft>
-              <a:buNone/>
-            </a:pPr>
-            <a:r>
-              <a:rPr lang="en-US" sz="1200" b="0">
-                <a:solidFill>
-                  <a:srgbClr val="202B33"/>
-                </a:solidFill>
-                <a:latin typeface="Arial"/>
-                <a:ea typeface="Arial"/>
-                <a:cs typeface="Arial"/>
-              </a:rPr>
-              <a:t xml:space="preserve"/>
             </a:r>
             <a:endParaRPr lang="en-US" sz="1200"/>
           </a:p>
@@ -13205,6 +13917,29 @@
                 <a:ea typeface="Arial"/>
                 <a:cs typeface="Arial"/>
               </a:rPr>
+              <a:t xml:space="preserve"/>
+            </a:r>
+            <a:endParaRPr lang="en-US" sz="1200"/>
+          </a:p>
+          <a:p>
+            <a:pPr marL="0" indent="0">
+              <a:lnSpc>
+                <a:spcPts val="1575"/>
+              </a:lnSpc>
+              <a:spcAft>
+                <a:spcPts val="0"/>
+              </a:spcAft>
+              <a:buNone/>
+            </a:pPr>
+            <a:r>
+              <a:rPr lang="en-US" sz="1200" b="0">
+                <a:solidFill>
+                  <a:srgbClr val="202B33"/>
+                </a:solidFill>
+                <a:latin typeface="Arial"/>
+                <a:ea typeface="Arial"/>
+                <a:cs typeface="Arial"/>
+              </a:rPr>
               <a:t xml:space="preserve">Change the unit of work from images to whole designs.</a:t>
             </a:r>
             <a:endParaRPr lang="en-US" sz="1200"/>
@@ -13343,30 +14078,7 @@
                 <a:ea typeface="Arial"/>
                 <a:cs typeface="Arial"/>
               </a:rPr>
-              <a:t xml:space="preserve">They can still share a blind spot; the contrast is</a:t>
-            </a:r>
-            <a:endParaRPr lang="en-US" sz="1200"/>
-          </a:p>
-          <a:p>
-            <a:pPr marL="0" indent="0">
-              <a:lnSpc>
-                <a:spcPts val="1575"/>
-              </a:lnSpc>
-              <a:spcAft>
-                <a:spcPts val="0"/>
-              </a:spcAft>
-              <a:buNone/>
-            </a:pPr>
-            <a:r>
-              <a:rPr lang="en-US" sz="1200" b="0">
-                <a:solidFill>
-                  <a:srgbClr val="202B33"/>
-                </a:solidFill>
-                <a:latin typeface="Arial"/>
-                <a:ea typeface="Arial"/>
-                <a:cs typeface="Arial"/>
-              </a:rPr>
-              <a:t xml:space="preserve">the product.</a:t>
+              <a:t xml:space="preserve">The contrast is the product.</a:t>
             </a:r>
             <a:endParaRPr lang="en-US" sz="1200"/>
           </a:p>
@@ -13595,7 +14307,30 @@
                 <a:ea typeface="Arial"/>
                 <a:cs typeface="Arial"/>
               </a:rPr>
-              <a:t xml:space="preserve">Attempts are a scaling axis too (continued)</a:t>
+              <a:t xml:space="preserve">Attempts are a scaling axis. So is judging.</a:t>
+            </a:r>
+            <a:endParaRPr lang="en-US" sz="2550"/>
+          </a:p>
+          <a:p>
+            <a:pPr marL="0" indent="0">
+              <a:lnSpc>
+                <a:spcPts val="3060"/>
+              </a:lnSpc>
+              <a:spcAft>
+                <a:spcPts val="0"/>
+              </a:spcAft>
+              <a:buNone/>
+            </a:pPr>
+            <a:r>
+              <a:rPr lang="en-US" sz="2550" b="1">
+                <a:solidFill>
+                  <a:srgbClr val="202B33"/>
+                </a:solidFill>
+                <a:latin typeface="Arial"/>
+                <a:ea typeface="Arial"/>
+                <a:cs typeface="Arial"/>
+              </a:rPr>
+              <a:t xml:space="preserve">(continued)</a:t>
             </a:r>
             <a:endParaRPr lang="en-US" sz="2550"/>
           </a:p>
@@ -13644,7 +14379,7 @@
                 <a:ea typeface="Arial"/>
                 <a:cs typeface="Arial"/>
               </a:rPr>
-              <a:t xml:space="preserve">That last part is not a hunch, and software</a:t>
+              <a:t xml:space="preserve">Somebody is going to cite Knight and</a:t>
             </a:r>
             <a:endParaRPr lang="en-US" sz="1500"/>
           </a:p>
@@ -13667,7 +14402,7 @@
                 <a:ea typeface="Arial"/>
                 <a:cs typeface="Arial"/>
               </a:rPr>
-              <a:t xml:space="preserve">engineering settled it forty years ago.</a:t>
+              <a:t xml:space="preserve">Leveson at me, so let me do it first. 1986,</a:t>
             </a:r>
             <a:endParaRPr lang="en-US" sz="1500"/>
           </a:p>
@@ -13690,7 +14425,7 @@
                 <a:ea typeface="Arial"/>
                 <a:cs typeface="Arial"/>
               </a:rPr>
-              <a:t xml:space="preserve">Knight and Leveson ran the experiment in</a:t>
+              <a:t xml:space="preserve">twenty-seven teams, one specification, a</a:t>
             </a:r>
             <a:endParaRPr lang="en-US" sz="1500"/>
           </a:p>
@@ -13713,7 +14448,7 @@
                 <a:ea typeface="Arial"/>
                 <a:cs typeface="Arial"/>
               </a:rPr>
-              <a:t xml:space="preserve">1986: twenty-seven teams wrote the same</a:t>
+              <a:t xml:space="preserve">million tests, and the independently</a:t>
             </a:r>
             <a:endParaRPr lang="en-US" sz="1500"/>
           </a:p>
@@ -13736,7 +14471,7 @@
                 <a:ea typeface="Arial"/>
                 <a:cs typeface="Arial"/>
               </a:rPr>
-              <a:t xml:space="preserve">program from the same specification,</a:t>
+              <a:t xml:space="preserve">written versions failed together far more</a:t>
             </a:r>
             <a:endParaRPr lang="en-US" sz="1500"/>
           </a:p>
@@ -13759,7 +14494,7 @@
                 <a:ea typeface="Arial"/>
                 <a:cs typeface="Arial"/>
               </a:rPr>
-              <a:t xml:space="preserve">independently, and after a million tests</a:t>
+              <a:t xml:space="preserve">than independence predicts. True,</a:t>
             </a:r>
             <a:endParaRPr lang="en-US" sz="1500"/>
           </a:p>
@@ -13782,7 +14517,7 @@
                 <a:ea typeface="Arial"/>
                 <a:cs typeface="Arial"/>
               </a:rPr>
-              <a:t xml:space="preserve">the versions failed together far more often</a:t>
+              <a:t xml:space="preserve">important, and about N-version programming</a:t>
             </a:r>
             <a:endParaRPr lang="en-US" sz="1500"/>
           </a:p>
@@ -13805,7 +14540,7 @@
                 <a:ea typeface="Arial"/>
                 <a:cs typeface="Arial"/>
               </a:rPr>
-              <a:t xml:space="preserve">than independence predicts. Independently</a:t>
+              <a:t xml:space="preserve">as a correctness strategy. That is not what</a:t>
             </a:r>
             <a:endParaRPr lang="en-US" sz="1500"/>
           </a:p>
@@ -13828,7 +14563,7 @@
                 <a:ea typeface="Arial"/>
                 <a:cs typeface="Arial"/>
               </a:rPr>
-              <a:t xml:space="preserve">written does not mean independently wrong.</a:t>
+              <a:t xml:space="preserve">this is. I am not voting three models</a:t>
             </a:r>
             <a:endParaRPr lang="en-US" sz="1500"/>
           </a:p>
@@ -13851,7 +14586,7 @@
                 <a:ea typeface="Arial"/>
                 <a:cs typeface="Arial"/>
               </a:rPr>
-              <a:t xml:space="preserve">Parallel attempts buy you contrast. They do</a:t>
+              <a:t xml:space="preserve">toward the truth, and I am not going to</a:t>
             </a:r>
             <a:endParaRPr lang="en-US" sz="1500"/>
           </a:p>
@@ -13874,7 +14609,7 @@
                 <a:ea typeface="Arial"/>
                 <a:cs typeface="Arial"/>
               </a:rPr>
-              <a:t xml:space="preserve">not buy you coverage, and anyone selling</a:t>
+              <a:t xml:space="preserve">tell you the ensemble is right because it</a:t>
             </a:r>
             <a:endParaRPr lang="en-US" sz="1500"/>
           </a:p>
@@ -13897,7 +14632,7 @@
                 <a:ea typeface="Arial"/>
                 <a:cs typeface="Arial"/>
               </a:rPr>
-              <a:t xml:space="preserve">you three-model consensus as a correctness</a:t>
+              <a:t xml:space="preserve">agreed with itself. If that is the pitch</a:t>
             </a:r>
             <a:endParaRPr lang="en-US" sz="1500"/>
           </a:p>
@@ -13920,7 +14655,7 @@
                 <a:ea typeface="Arial"/>
                 <a:cs typeface="Arial"/>
               </a:rPr>
-              <a:t xml:space="preserve">argument is selling the assumption that</a:t>
+              <a:t xml:space="preserve">you heard, it is not mine.</a:t>
             </a:r>
             <a:endParaRPr lang="en-US" sz="1500"/>
           </a:p>
@@ -13943,7 +14678,7 @@
                 <a:ea typeface="Arial"/>
                 <a:cs typeface="Arial"/>
               </a:rPr>
-              <a:t xml:space="preserve">experiment rejected.</a:t>
+              <a:t xml:space="preserve"/>
             </a:r>
             <a:endParaRPr lang="en-US" sz="1500"/>
           </a:p>
@@ -13966,7 +14701,7 @@
                 <a:ea typeface="Arial"/>
                 <a:cs typeface="Arial"/>
               </a:rPr>
-              <a:t xml:space="preserve"/>
+              <a:t xml:space="preserve">Here is what parallel attempts actually</a:t>
             </a:r>
             <a:endParaRPr lang="en-US" sz="1500"/>
           </a:p>
@@ -13989,7 +14724,76 @@
                 <a:ea typeface="Arial"/>
                 <a:cs typeface="Arial"/>
               </a:rPr>
-              <a:t xml:space="preserve">Write the gates before reading the</a:t>
+              <a:t xml:space="preserve">buy. Understanding of the models you depend</a:t>
+            </a:r>
+            <a:endParaRPr lang="en-US" sz="1500"/>
+          </a:p>
+          <a:p>
+            <a:pPr marL="0" indent="0">
+              <a:lnSpc>
+                <a:spcPts val="1950"/>
+              </a:lnSpc>
+              <a:spcAft>
+                <a:spcPts val="0"/>
+              </a:spcAft>
+              <a:buNone/>
+            </a:pPr>
+            <a:r>
+              <a:rPr lang="en-US" sz="1500" b="0">
+                <a:solidFill>
+                  <a:srgbClr val="202B33"/>
+                </a:solidFill>
+                <a:latin typeface="Arial"/>
+                <a:ea typeface="Arial"/>
+                <a:cs typeface="Arial"/>
+              </a:rPr>
+              <a:t xml:space="preserve">on: run one brief through two of them and</a:t>
+            </a:r>
+            <a:endParaRPr lang="en-US" sz="1500"/>
+          </a:p>
+          <a:p>
+            <a:pPr marL="0" indent="0">
+              <a:lnSpc>
+                <a:spcPts val="1950"/>
+              </a:lnSpc>
+              <a:spcAft>
+                <a:spcPts val="0"/>
+              </a:spcAft>
+              <a:buNone/>
+            </a:pPr>
+            <a:r>
+              <a:rPr lang="en-US" sz="1500" b="0">
+                <a:solidFill>
+                  <a:srgbClr val="202B33"/>
+                </a:solidFill>
+                <a:latin typeface="Arial"/>
+                <a:ea typeface="Arial"/>
+                <a:cs typeface="Arial"/>
+              </a:rPr>
+              <a:t xml:space="preserve">you learn what each reaches for and what</a:t>
+            </a:r>
+            <a:endParaRPr lang="en-US" sz="1500"/>
+          </a:p>
+          <a:p>
+            <a:pPr marL="0" indent="0">
+              <a:lnSpc>
+                <a:spcPts val="1950"/>
+              </a:lnSpc>
+              <a:spcAft>
+                <a:spcPts val="0"/>
+              </a:spcAft>
+              <a:buNone/>
+            </a:pPr>
+            <a:r>
+              <a:rPr lang="en-US" sz="1500" b="0">
+                <a:solidFill>
+                  <a:srgbClr val="202B33"/>
+                </a:solidFill>
+                <a:latin typeface="Arial"/>
+                <a:ea typeface="Arial"/>
+                <a:cs typeface="Arial"/>
+              </a:rPr>
+              <a:t xml:space="preserve">each forgets. A migration harness: same</a:t>
             </a:r>
             <a:endParaRPr lang="en-US" sz="1500"/>
           </a:p>
@@ -14038,7 +14842,7 @@
                 <a:ea typeface="Arial"/>
                 <a:cs typeface="Arial"/>
               </a:rPr>
-              <a:t xml:space="preserve">candidates: no duplicate dispatch after</a:t>
+              <a:t xml:space="preserve">brief, new model, diff the behavior before</a:t>
             </a:r>
             <a:endParaRPr lang="en-US" sz="1500"/>
           </a:p>
@@ -14061,7 +14865,7 @@
                 <a:ea typeface="Arial"/>
                 <a:cs typeface="Arial"/>
               </a:rPr>
-              <a:t xml:space="preserve">restart, no cross-tenant spend, no</a:t>
+              <a:t xml:space="preserve">you switch, instead of after the incident.</a:t>
             </a:r>
             <a:endParaRPr lang="en-US" sz="1500"/>
           </a:p>
@@ -14084,7 +14888,7 @@
                 <a:ea typeface="Arial"/>
                 <a:cs typeface="Arial"/>
               </a:rPr>
-              <a:t xml:space="preserve">regeneration on notification retry, no</a:t>
+              <a:t xml:space="preserve">Better output: a synthesis of compatible</a:t>
             </a:r>
             <a:endParaRPr lang="en-US" sz="1500"/>
           </a:p>
@@ -14107,7 +14911,7 @@
                 <a:ea typeface="Arial"/>
                 <a:cs typeface="Arial"/>
               </a:rPr>
-              <a:t xml:space="preserve">dispatch after deadline. Run executable</a:t>
+              <a:t xml:space="preserve">ideas is often better than any single</a:t>
             </a:r>
             <a:endParaRPr lang="en-US" sz="1500"/>
           </a:p>
@@ -14130,7 +14934,7 @@
                 <a:ea typeface="Arial"/>
                 <a:cs typeface="Arial"/>
               </a:rPr>
-              <a:t xml:space="preserve">checks first. In the exercise every</a:t>
+              <a:t xml:space="preserve">draft. And the cheap one, which is the one</a:t>
             </a:r>
             <a:endParaRPr lang="en-US" sz="1500"/>
           </a:p>
@@ -14153,7 +14957,7 @@
                 <a:ea typeface="Arial"/>
                 <a:cs typeface="Arial"/>
               </a:rPr>
-              <a:t xml:space="preserve">candidate fails a gate, including the</a:t>
+              <a:t xml:space="preserve">I care about: judging. A judge reads a</a:t>
             </a:r>
             <a:endParaRPr lang="en-US" sz="1500"/>
           </a:p>
@@ -14176,7 +14980,7 @@
                 <a:ea typeface="Arial"/>
                 <a:cs typeface="Arial"/>
               </a:rPr>
-              <a:t xml:space="preserve">careful one, which is the point: the judge</a:t>
+              <a:t xml:space="preserve">thousand tokens and writes fifty. Output is</a:t>
             </a:r>
             <a:endParaRPr lang="en-US" sz="1500"/>
           </a:p>
@@ -14199,7 +15003,7 @@
                 <a:ea typeface="Arial"/>
                 <a:cs typeface="Arial"/>
               </a:rPr>
-              <a:t xml:space="preserve">is allowed to reject the room.</a:t>
+              <a:t xml:space="preserve">what costs, so you can afford three or five</a:t>
             </a:r>
             <a:endParaRPr lang="en-US" sz="1500"/>
           </a:p>
@@ -14222,7 +15026,7 @@
                 <a:ea typeface="Arial"/>
                 <a:cs typeface="Arial"/>
               </a:rPr>
-              <a:t xml:space="preserve"/>
+              <a:t xml:space="preserve">judges from different models on every</a:t>
             </a:r>
             <a:endParaRPr lang="en-US" sz="1500"/>
           </a:p>
@@ -14245,7 +15049,7 @@
                 <a:ea typeface="Arial"/>
                 <a:cs typeface="Arial"/>
               </a:rPr>
-              <a:t xml:space="preserve">Then combine compatible ideas into a new</a:t>
+              <a:t xml:space="preserve">candidate, and the number you want back is</a:t>
             </a:r>
             <a:endParaRPr lang="en-US" sz="1500"/>
           </a:p>
@@ -14268,7 +15072,7 @@
                 <a:ea typeface="Arial"/>
                 <a:cs typeface="Arial"/>
               </a:rPr>
-              <a:t xml:space="preserve">candidate with one coherent set of</a:t>
+              <a:t xml:space="preserve">not the average score. It is the</a:t>
             </a:r>
             <a:endParaRPr lang="en-US" sz="1500"/>
           </a:p>
@@ -14291,7 +15095,7 @@
                 <a:ea typeface="Arial"/>
                 <a:cs typeface="Arial"/>
               </a:rPr>
-              <a:t xml:space="preserve">assumptions and run the gates again.</a:t>
+              <a:t xml:space="preserve">disagreement. When the judges split or</a:t>
             </a:r>
             <a:endParaRPr lang="en-US" sz="1500"/>
           </a:p>
@@ -14314,7 +15118,7 @@
                 <a:ea typeface="Arial"/>
                 <a:cs typeface="Arial"/>
               </a:rPr>
-              <a:t xml:space="preserve">Passing parts do not make a passing whole.</a:t>
+              <a:t xml:space="preserve">their reasons barely overlap, that</a:t>
             </a:r>
             <a:endParaRPr lang="en-US" sz="1500"/>
           </a:p>
@@ -14337,7 +15141,7 @@
                 <a:ea typeface="Arial"/>
                 <a:cs typeface="Arial"/>
               </a:rPr>
-              <a:t xml:space="preserve">Stop at the review budget; an endless</a:t>
+              <a:t xml:space="preserve">candidate is sitting in territory nobody</a:t>
             </a:r>
             <a:endParaRPr lang="en-US" sz="1500"/>
           </a:p>
@@ -14360,7 +15164,99 @@
                 <a:ea typeface="Arial"/>
                 <a:cs typeface="Arial"/>
               </a:rPr>
-              <a:t xml:space="preserve">debate is an expensive way to not ship.</a:t>
+              <a:t xml:space="preserve">understands, and that is the one you do not</a:t>
+            </a:r>
+            <a:endParaRPr lang="en-US" sz="1500"/>
+          </a:p>
+          <a:p>
+            <a:pPr marL="0" indent="0">
+              <a:lnSpc>
+                <a:spcPts val="1950"/>
+              </a:lnSpc>
+              <a:spcAft>
+                <a:spcPts val="0"/>
+              </a:spcAft>
+              <a:buNone/>
+            </a:pPr>
+            <a:r>
+              <a:rPr lang="en-US" sz="1500" b="0">
+                <a:solidFill>
+                  <a:srgbClr val="202B33"/>
+                </a:solidFill>
+                <a:latin typeface="Arial"/>
+                <a:ea typeface="Arial"/>
+                <a:cs typeface="Arial"/>
+              </a:rPr>
+              <a:t xml:space="preserve">ship on autopilot. I call this the Council</a:t>
+            </a:r>
+            <a:endParaRPr lang="en-US" sz="1500"/>
+          </a:p>
+          <a:p>
+            <a:pPr marL="0" indent="0">
+              <a:lnSpc>
+                <a:spcPts val="1950"/>
+              </a:lnSpc>
+              <a:spcAft>
+                <a:spcPts val="0"/>
+              </a:spcAft>
+              <a:buNone/>
+            </a:pPr>
+            <a:r>
+              <a:rPr lang="en-US" sz="1500" b="0">
+                <a:solidFill>
+                  <a:srgbClr val="202B33"/>
+                </a:solidFill>
+                <a:latin typeface="Arial"/>
+                <a:ea typeface="Arial"/>
+                <a:cs typeface="Arial"/>
+              </a:rPr>
+              <a:t xml:space="preserve">of Guards. It picks between one and three</a:t>
+            </a:r>
+            <a:endParaRPr lang="en-US" sz="1500"/>
+          </a:p>
+          <a:p>
+            <a:pPr marL="0" indent="0">
+              <a:lnSpc>
+                <a:spcPts val="1950"/>
+              </a:lnSpc>
+              <a:spcAft>
+                <a:spcPts val="0"/>
+              </a:spcAft>
+              <a:buNone/>
+            </a:pPr>
+            <a:r>
+              <a:rPr lang="en-US" sz="1500" b="0">
+                <a:solidFill>
+                  <a:srgbClr val="202B33"/>
+                </a:solidFill>
+                <a:latin typeface="Arial"/>
+                <a:ea typeface="Arial"/>
+                <a:cs typeface="Arial"/>
+              </a:rPr>
+              <a:t xml:space="preserve">alternatives to generate, and it costs a</a:t>
+            </a:r>
+            <a:endParaRPr lang="en-US" sz="1500"/>
+          </a:p>
+          <a:p>
+            <a:pPr marL="0" indent="0">
+              <a:lnSpc>
+                <a:spcPts val="1950"/>
+              </a:lnSpc>
+              <a:spcAft>
+                <a:spcPts val="0"/>
+              </a:spcAft>
+              <a:buNone/>
+            </a:pPr>
+            <a:r>
+              <a:rPr lang="en-US" sz="1500" b="0">
+                <a:solidFill>
+                  <a:srgbClr val="202B33"/>
+                </a:solidFill>
+                <a:latin typeface="Arial"/>
+                <a:ea typeface="Arial"/>
+                <a:cs typeface="Arial"/>
+              </a:rPr>
+              <a:t xml:space="preserve">fraction of the generation it is guarding.</a:t>
             </a:r>
             <a:endParaRPr lang="en-US" sz="1500"/>
           </a:p>
@@ -14540,7 +15436,7 @@
                 <a:ea typeface="Arial"/>
                 <a:cs typeface="Arial"/>
               </a:rPr>
-              <a:t xml:space="preserve">13 / 14    SOURCE SLIDE 13</a:t>
+              <a:t xml:space="preserve">12 / 14    SOURCE SLIDE 12</a:t>
             </a:r>
             <a:endParaRPr lang="en-US" sz="1050"/>
           </a:p>
@@ -14589,7 +15485,30 @@
                 <a:ea typeface="Arial"/>
                 <a:cs typeface="Arial"/>
               </a:rPr>
-              <a:t xml:space="preserve">Measure the accepted outcome</a:t>
+              <a:t xml:space="preserve">Attempts are a scaling axis. So is judging.</a:t>
+            </a:r>
+            <a:endParaRPr lang="en-US" sz="2550"/>
+          </a:p>
+          <a:p>
+            <a:pPr marL="0" indent="0">
+              <a:lnSpc>
+                <a:spcPts val="3060"/>
+              </a:lnSpc>
+              <a:spcAft>
+                <a:spcPts val="0"/>
+              </a:spcAft>
+              <a:buNone/>
+            </a:pPr>
+            <a:r>
+              <a:rPr lang="en-US" sz="2550" b="1">
+                <a:solidFill>
+                  <a:srgbClr val="202B33"/>
+                </a:solidFill>
+                <a:latin typeface="Arial"/>
+                <a:ea typeface="Arial"/>
+                <a:cs typeface="Arial"/>
+              </a:rPr>
+              <a:t xml:space="preserve">(continued)</a:t>
             </a:r>
             <a:endParaRPr lang="en-US" sz="2550"/>
           </a:p>
@@ -14638,7 +15557,7 @@
                 <a:ea typeface="Arial"/>
                 <a:cs typeface="Arial"/>
               </a:rPr>
-              <a:t xml:space="preserve">Latency: dispatch + queue + slowest branch</a:t>
+              <a:t xml:space="preserve">Write the gates before reading the</a:t>
             </a:r>
             <a:endParaRPr lang="en-US" sz="1500"/>
           </a:p>
@@ -14661,7 +15580,7 @@
                 <a:ea typeface="Arial"/>
                 <a:cs typeface="Arial"/>
               </a:rPr>
-              <a:t xml:space="preserve">+ merge + verify</a:t>
+              <a:t xml:space="preserve">candidates: no duplicate dispatch after</a:t>
             </a:r>
             <a:endParaRPr lang="en-US" sz="1500"/>
           </a:p>
@@ -14684,7 +15603,7 @@
                 <a:ea typeface="Arial"/>
                 <a:cs typeface="Arial"/>
               </a:rPr>
-              <a:t xml:space="preserve"/>
+              <a:t xml:space="preserve">restart, no cross-tenant spend, no</a:t>
             </a:r>
             <a:endParaRPr lang="en-US" sz="1500"/>
           </a:p>
@@ -14707,7 +15626,7 @@
                 <a:ea typeface="Arial"/>
                 <a:cs typeface="Arial"/>
               </a:rPr>
-              <a:t xml:space="preserve">Cost: every candidate, every retry, every</a:t>
+              <a:t xml:space="preserve">regeneration on notification retry, no</a:t>
             </a:r>
             <a:endParaRPr lang="en-US" sz="1500"/>
           </a:p>
@@ -14730,7 +15649,7 @@
                 <a:ea typeface="Arial"/>
                 <a:cs typeface="Arial"/>
               </a:rPr>
-              <a:t xml:space="preserve">held reservation, review time</a:t>
+              <a:t xml:space="preserve">dispatch after deadline. Run executable</a:t>
             </a:r>
             <a:endParaRPr lang="en-US" sz="1500"/>
           </a:p>
@@ -14753,7 +15672,7 @@
                 <a:ea typeface="Arial"/>
                 <a:cs typeface="Arial"/>
               </a:rPr>
-              <a:t xml:space="preserve"/>
+              <a:t xml:space="preserve">checks first. In the exercise every</a:t>
             </a:r>
             <a:endParaRPr lang="en-US" sz="1500"/>
           </a:p>
@@ -14776,7 +15695,7 @@
                 <a:ea typeface="Arial"/>
                 <a:cs typeface="Arial"/>
               </a:rPr>
-              <a:t xml:space="preserve">Compare against one competent attempt</a:t>
+              <a:t xml:space="preserve">candidate fails a gate, including the</a:t>
             </a:r>
             <a:endParaRPr lang="en-US" sz="1500"/>
           </a:p>
@@ -14799,7 +15718,7 @@
                 <a:ea typeface="Arial"/>
                 <a:cs typeface="Arial"/>
               </a:rPr>
-              <a:t xml:space="preserve"/>
+              <a:t xml:space="preserve">careful one, which is the point: the</a:t>
             </a:r>
             <a:endParaRPr lang="en-US" sz="1500"/>
           </a:p>
@@ -14822,7 +15741,7 @@
                 <a:ea typeface="Arial"/>
                 <a:cs typeface="Arial"/>
               </a:rPr>
-              <a:t xml:space="preserve">Starting three workers does not delete the</a:t>
+              <a:t xml:space="preserve">council is allowed to reject the room. Then</a:t>
             </a:r>
             <a:endParaRPr lang="en-US" sz="1500"/>
           </a:p>
@@ -14845,7 +15764,7 @@
                 <a:ea typeface="Arial"/>
                 <a:cs typeface="Arial"/>
               </a:rPr>
-              <a:t xml:space="preserve">serial parts. That is Amdahl, 1967, and it</a:t>
+              <a:t xml:space="preserve">combine compatible ideas into a new</a:t>
             </a:r>
             <a:endParaRPr lang="en-US" sz="1500"/>
           </a:p>
@@ -14868,7 +15787,7 @@
                 <a:ea typeface="Arial"/>
                 <a:cs typeface="Arial"/>
               </a:rPr>
-              <a:t xml:space="preserve">is unkind: if a tenth of the job is serial,</a:t>
+              <a:t xml:space="preserve">candidate with one coherent set of</a:t>
             </a:r>
             <a:endParaRPr lang="en-US" sz="1500"/>
           </a:p>
@@ -14891,7 +15810,7 @@
                 <a:ea typeface="Arial"/>
                 <a:cs typeface="Arial"/>
               </a:rPr>
-              <a:t xml:space="preserve">ten workers get you five and a quarter</a:t>
+              <a:t xml:space="preserve">assumptions and run the gates again.</a:t>
             </a:r>
             <a:endParaRPr lang="en-US" sz="1500"/>
           </a:p>
@@ -14914,7 +15833,53 @@
                 <a:ea typeface="Arial"/>
                 <a:cs typeface="Arial"/>
               </a:rPr>
-              <a:t xml:space="preserve">times, and a hundred workers get you nine.</a:t>
+              <a:t xml:space="preserve">Passing parts do not make a passing whole.</a:t>
+            </a:r>
+            <a:endParaRPr lang="en-US" sz="1500"/>
+          </a:p>
+          <a:p>
+            <a:pPr marL="0" indent="0">
+              <a:lnSpc>
+                <a:spcPts val="1950"/>
+              </a:lnSpc>
+              <a:spcAft>
+                <a:spcPts val="0"/>
+              </a:spcAft>
+              <a:buNone/>
+            </a:pPr>
+            <a:r>
+              <a:rPr lang="en-US" sz="1500" b="0">
+                <a:solidFill>
+                  <a:srgbClr val="202B33"/>
+                </a:solidFill>
+                <a:latin typeface="Arial"/>
+                <a:ea typeface="Arial"/>
+                <a:cs typeface="Arial"/>
+              </a:rPr>
+              <a:t xml:space="preserve">Stop at the review budget; an endless</a:t>
+            </a:r>
+            <a:endParaRPr lang="en-US" sz="1500"/>
+          </a:p>
+          <a:p>
+            <a:pPr marL="0" indent="0">
+              <a:lnSpc>
+                <a:spcPts val="1950"/>
+              </a:lnSpc>
+              <a:spcAft>
+                <a:spcPts val="0"/>
+              </a:spcAft>
+              <a:buNone/>
+            </a:pPr>
+            <a:r>
+              <a:rPr lang="en-US" sz="1500" b="0">
+                <a:solidFill>
+                  <a:srgbClr val="202B33"/>
+                </a:solidFill>
+                <a:latin typeface="Arial"/>
+                <a:ea typeface="Arial"/>
+                <a:cs typeface="Arial"/>
+              </a:rPr>
+              <a:t xml:space="preserve">debate is an expensive way to not ship.</a:t>
             </a:r>
             <a:endParaRPr lang="en-US" sz="1500"/>
           </a:p>
@@ -14963,7 +15928,7 @@
                 <a:ea typeface="Arial"/>
                 <a:cs typeface="Arial"/>
               </a:rPr>
-              <a:t xml:space="preserve">Waiting on every branch can make a finished</a:t>
+              <a:t xml:space="preserve"/>
             </a:r>
             <a:endParaRPr lang="en-US" sz="1500"/>
           </a:p>
@@ -14986,7 +15951,7 @@
                 <a:ea typeface="Arial"/>
                 <a:cs typeface="Arial"/>
               </a:rPr>
-              <a:t xml:space="preserve">task slower. Count the whole thing: all</a:t>
+              <a:t xml:space="preserve">None of this looks like the engineering we</a:t>
             </a:r>
             <a:endParaRPr lang="en-US" sz="1500"/>
           </a:p>
@@ -15009,7 +15974,7 @@
                 <a:ea typeface="Arial"/>
                 <a:cs typeface="Arial"/>
               </a:rPr>
-              <a:t xml:space="preserve">candidates, failed work, reserved</a:t>
+              <a:t xml:space="preserve">were raised on. Do not do the work twice.</a:t>
             </a:r>
             <a:endParaRPr lang="en-US" sz="1500"/>
           </a:p>
@@ -15032,7 +15997,7 @@
                 <a:ea typeface="Arial"/>
                 <a:cs typeface="Arial"/>
               </a:rPr>
-              <a:t xml:space="preserve">uncertainty, judging and human review, and</a:t>
+              <a:t xml:space="preserve">Do not spend compute speculatively. One</a:t>
             </a:r>
             <a:endParaRPr lang="en-US" sz="1500"/>
           </a:p>
@@ -15055,7 +16020,7 @@
                 <a:ea typeface="Arial"/>
                 <a:cs typeface="Arial"/>
               </a:rPr>
-              <a:t xml:space="preserve">compare against one competent attempt on</a:t>
+              <a:t xml:space="preserve">right answer per ticket. Those were axioms</a:t>
             </a:r>
             <a:endParaRPr lang="en-US" sz="1500"/>
           </a:p>
@@ -15078,7 +16043,7 @@
                 <a:ea typeface="Arial"/>
                 <a:cs typeface="Arial"/>
               </a:rPr>
-              <a:t xml:space="preserve">the same task set.</a:t>
+              <a:t xml:space="preserve">when the expensive thing was the engineer.</a:t>
             </a:r>
             <a:endParaRPr lang="en-US" sz="1500"/>
           </a:p>
@@ -15101,7 +16066,7 @@
                 <a:ea typeface="Arial"/>
                 <a:cs typeface="Arial"/>
               </a:rPr>
-              <a:t xml:space="preserve"/>
+              <a:t xml:space="preserve">When the expensive thing is being wrong,</a:t>
             </a:r>
             <a:endParaRPr lang="en-US" sz="1500"/>
           </a:p>
@@ -15124,7 +16089,7 @@
                 <a:ea typeface="Arial"/>
                 <a:cs typeface="Arial"/>
               </a:rPr>
-              <a:t xml:space="preserve">Measure accepted outcomes, not launched</a:t>
+              <a:t xml:space="preserve">and a second draft costs cents, doing it</a:t>
             </a:r>
             <a:endParaRPr lang="en-US" sz="1500"/>
           </a:p>
@@ -15147,7 +16112,7 @@
                 <a:ea typeface="Arial"/>
                 <a:cs typeface="Arial"/>
               </a:rPr>
-              <a:t xml:space="preserve">workers. Start with one extra attempt or</a:t>
+              <a:t xml:space="preserve">three times and reading what disagrees is</a:t>
             </a:r>
             <a:endParaRPr lang="en-US" sz="1500"/>
           </a:p>
@@ -15170,7 +16135,7 @@
                 <a:ea typeface="Arial"/>
                 <a:cs typeface="Arial"/>
               </a:rPr>
-              <a:t xml:space="preserve">one batch boundary; if it does not buy</a:t>
+              <a:t xml:space="preserve">the frugal move. I am not a shill for Big</a:t>
             </a:r>
             <a:endParaRPr lang="en-US" sz="1500"/>
           </a:p>
@@ -15193,7 +16158,7 @@
                 <a:ea typeface="Arial"/>
                 <a:cs typeface="Arial"/>
               </a:rPr>
-              <a:t xml:space="preserve">quality, time or cost, keep the simpler</a:t>
+              <a:t xml:space="preserve">Token. I am telling you that cheaper, safer</a:t>
             </a:r>
             <a:endParaRPr lang="en-US" sz="1500"/>
           </a:p>
@@ -15216,7 +16181,7 @@
                 <a:ea typeface="Arial"/>
                 <a:cs typeface="Arial"/>
               </a:rPr>
-              <a:t xml:space="preserve">path. We are trying to buy useful work, not</a:t>
+              <a:t xml:space="preserve">and faster now sometimes come from spending</a:t>
             </a:r>
             <a:endParaRPr lang="en-US" sz="1500"/>
           </a:p>
@@ -15239,7 +16204,30 @@
                 <a:ea typeface="Arial"/>
                 <a:cs typeface="Arial"/>
               </a:rPr>
-              <a:t xml:space="preserve">maximize the number of things blinking.</a:t>
+              <a:t xml:space="preserve">exactly where yesterday's wisdom told you</a:t>
+            </a:r>
+            <a:endParaRPr lang="en-US" sz="1500"/>
+          </a:p>
+          <a:p>
+            <a:pPr marL="0" indent="0">
+              <a:lnSpc>
+                <a:spcPts val="1950"/>
+              </a:lnSpc>
+              <a:spcAft>
+                <a:spcPts val="0"/>
+              </a:spcAft>
+              <a:buNone/>
+            </a:pPr>
+            <a:r>
+              <a:rPr lang="en-US" sz="1500" b="0">
+                <a:solidFill>
+                  <a:srgbClr val="202B33"/>
+                </a:solidFill>
+                <a:latin typeface="Arial"/>
+                <a:ea typeface="Arial"/>
+                <a:cs typeface="Arial"/>
+              </a:rPr>
+              <a:t xml:space="preserve">not to.</a:t>
             </a:r>
             <a:endParaRPr lang="en-US" sz="1500"/>
           </a:p>
@@ -15419,7 +16407,7 @@
                 <a:ea typeface="Arial"/>
                 <a:cs typeface="Arial"/>
               </a:rPr>
-              <a:t xml:space="preserve">14 / 14    SOURCE SLIDE 14</a:t>
+              <a:t xml:space="preserve">13 / 14    SOURCE SLIDE 13</a:t>
             </a:r>
             <a:endParaRPr lang="en-US" sz="1050"/>
           </a:p>
@@ -15468,7 +16456,7 @@
                 <a:ea typeface="Arial"/>
                 <a:cs typeface="Arial"/>
               </a:rPr>
-              <a:t xml:space="preserve">Put the limit where the work begins</a:t>
+              <a:t xml:space="preserve">Measure the accepted outcome</a:t>
             </a:r>
             <a:endParaRPr lang="en-US" sz="2550"/>
           </a:p>
@@ -15517,7 +16505,7 @@
                 <a:ea typeface="Arial"/>
                 <a:cs typeface="Arial"/>
               </a:rPr>
-              <a:t xml:space="preserve">One ledger across every caller</a:t>
+              <a:t xml:space="preserve">Latency: dispatch + queue + slowest branch</a:t>
             </a:r>
             <a:endParaRPr lang="en-US" sz="1500"/>
           </a:p>
@@ -15540,6 +16528,29 @@
                 <a:ea typeface="Arial"/>
                 <a:cs typeface="Arial"/>
               </a:rPr>
+              <a:t xml:space="preserve">+ merge + verify</a:t>
+            </a:r>
+            <a:endParaRPr lang="en-US" sz="1500"/>
+          </a:p>
+          <a:p>
+            <a:pPr marL="0" indent="0">
+              <a:lnSpc>
+                <a:spcPts val="1950"/>
+              </a:lnSpc>
+              <a:spcAft>
+                <a:spcPts val="0"/>
+              </a:spcAft>
+              <a:buNone/>
+            </a:pPr>
+            <a:r>
+              <a:rPr lang="en-US" sz="1500" b="0">
+                <a:solidFill>
+                  <a:srgbClr val="202B33"/>
+                </a:solidFill>
+                <a:latin typeface="Arial"/>
+                <a:ea typeface="Arial"/>
+                <a:cs typeface="Arial"/>
+              </a:rPr>
               <a:t xml:space="preserve"/>
             </a:r>
             <a:endParaRPr lang="en-US" sz="1500"/>
@@ -15563,7 +16574,7 @@
                 <a:ea typeface="Arial"/>
                 <a:cs typeface="Arial"/>
               </a:rPr>
-              <a:t xml:space="preserve">Durable state across every restart</a:t>
+              <a:t xml:space="preserve">Cost: every candidate, every retry, every</a:t>
             </a:r>
             <a:endParaRPr lang="en-US" sz="1500"/>
           </a:p>
@@ -15586,6 +16597,29 @@
                 <a:ea typeface="Arial"/>
                 <a:cs typeface="Arial"/>
               </a:rPr>
+              <a:t xml:space="preserve">held reservation, review time</a:t>
+            </a:r>
+            <a:endParaRPr lang="en-US" sz="1500"/>
+          </a:p>
+          <a:p>
+            <a:pPr marL="0" indent="0">
+              <a:lnSpc>
+                <a:spcPts val="1950"/>
+              </a:lnSpc>
+              <a:spcAft>
+                <a:spcPts val="0"/>
+              </a:spcAft>
+              <a:buNone/>
+            </a:pPr>
+            <a:r>
+              <a:rPr lang="en-US" sz="1500" b="0">
+                <a:solidFill>
+                  <a:srgbClr val="202B33"/>
+                </a:solidFill>
+                <a:latin typeface="Arial"/>
+                <a:ea typeface="Arial"/>
+                <a:cs typeface="Arial"/>
+              </a:rPr>
               <a:t xml:space="preserve"/>
             </a:r>
             <a:endParaRPr lang="en-US" sz="1500"/>
@@ -15609,7 +16643,7 @@
                 <a:ea typeface="Arial"/>
                 <a:cs typeface="Arial"/>
               </a:rPr>
-              <a:t xml:space="preserve">A lease on every box, a gate on every</a:t>
+              <a:t xml:space="preserve">Compare against one competent attempt</a:t>
             </a:r>
             <a:endParaRPr lang="en-US" sz="1500"/>
           </a:p>
@@ -15632,7 +16666,7 @@
                 <a:ea typeface="Arial"/>
                 <a:cs typeface="Arial"/>
               </a:rPr>
-              <a:t xml:space="preserve">candidate</a:t>
+              <a:t xml:space="preserve"/>
             </a:r>
             <a:endParaRPr lang="en-US" sz="1500"/>
           </a:p>
@@ -15655,7 +16689,7 @@
                 <a:ea typeface="Arial"/>
                 <a:cs typeface="Arial"/>
               </a:rPr>
-              <a:t xml:space="preserve"/>
+              <a:t xml:space="preserve">Starting three workers does not delete the</a:t>
             </a:r>
             <a:endParaRPr lang="en-US" sz="1500"/>
           </a:p>
@@ -15678,7 +16712,7 @@
                 <a:ea typeface="Arial"/>
                 <a:cs typeface="Arial"/>
               </a:rPr>
-              <a:t xml:space="preserve">Back to the four callers. Forty jobs were</a:t>
+              <a:t xml:space="preserve">serial parts. That is Amdahl, 1967, and it</a:t>
             </a:r>
             <a:endParaRPr lang="en-US" sz="1500"/>
           </a:p>
@@ -15701,7 +16735,7 @@
                 <a:ea typeface="Arial"/>
                 <a:cs typeface="Arial"/>
               </a:rPr>
-              <a:t xml:space="preserve">legal by four local counters. The missing</a:t>
+              <a:t xml:space="preserve">is unkind: if a tenth of the job is serial,</a:t>
             </a:r>
             <a:endParaRPr lang="en-US" sz="1500"/>
           </a:p>
@@ -15724,7 +16758,7 @@
                 <a:ea typeface="Arial"/>
                 <a:cs typeface="Arial"/>
               </a:rPr>
-              <a:t xml:space="preserve">piece was one shared account of what the</a:t>
+              <a:t xml:space="preserve">ten workers get you five and a quarter</a:t>
             </a:r>
             <a:endParaRPr lang="en-US" sz="1500"/>
           </a:p>
@@ -15747,53 +16781,7 @@
                 <a:ea typeface="Arial"/>
                 <a:cs typeface="Arial"/>
               </a:rPr>
-              <a:t xml:space="preserve">application had promised and what it had</a:t>
-            </a:r>
-            <a:endParaRPr lang="en-US" sz="1500"/>
-          </a:p>
-          <a:p>
-            <a:pPr marL="0" indent="0">
-              <a:lnSpc>
-                <a:spcPts val="1950"/>
-              </a:lnSpc>
-              <a:spcAft>
-                <a:spcPts val="0"/>
-              </a:spcAft>
-              <a:buNone/>
-            </a:pPr>
-            <a:r>
-              <a:rPr lang="en-US" sz="1500" b="0">
-                <a:solidFill>
-                  <a:srgbClr val="202B33"/>
-                </a:solidFill>
-                <a:latin typeface="Arial"/>
-                <a:ea typeface="Arial"/>
-                <a:cs typeface="Arial"/>
-              </a:rPr>
-              <a:t xml:space="preserve">already started.</a:t>
-            </a:r>
-            <a:endParaRPr lang="en-US" sz="1500"/>
-          </a:p>
-          <a:p>
-            <a:pPr marL="0" indent="0">
-              <a:lnSpc>
-                <a:spcPts val="1950"/>
-              </a:lnSpc>
-              <a:spcAft>
-                <a:spcPts val="0"/>
-              </a:spcAft>
-              <a:buNone/>
-            </a:pPr>
-            <a:r>
-              <a:rPr lang="en-US" sz="1500" b="0">
-                <a:solidFill>
-                  <a:srgbClr val="202B33"/>
-                </a:solidFill>
-                <a:latin typeface="Arial"/>
-                <a:ea typeface="Arial"/>
-                <a:cs typeface="Arial"/>
-              </a:rPr>
-              <a:t xml:space="preserve"/>
+              <a:t xml:space="preserve">times, and a hundred workers get you nine.</a:t>
             </a:r>
             <a:endParaRPr lang="en-US" sz="1500"/>
           </a:p>
@@ -15842,7 +16830,7 @@
                 <a:ea typeface="Arial"/>
                 <a:cs typeface="Arial"/>
               </a:rPr>
-              <a:t xml:space="preserve">The inversion is real: the workload can now</a:t>
+              <a:t xml:space="preserve">Waiting on every branch can make a finished</a:t>
             </a:r>
             <a:endParaRPr lang="en-US" sz="1500"/>
           </a:p>
@@ -15865,7 +16853,7 @@
                 <a:ea typeface="Arial"/>
                 <a:cs typeface="Arial"/>
               </a:rPr>
-              <a:t xml:space="preserve">describe its own shape and ask for its own</a:t>
+              <a:t xml:space="preserve">task slower. Count the whole thing: all</a:t>
             </a:r>
             <a:endParaRPr lang="en-US" sz="1500"/>
           </a:p>
@@ -15888,7 +16876,7 @@
                 <a:ea typeface="Arial"/>
                 <a:cs typeface="Arial"/>
               </a:rPr>
-              <a:t xml:space="preserve">compute, and the substrate to grant it in</a:t>
+              <a:t xml:space="preserve">candidates, failed work, reserved</a:t>
             </a:r>
             <a:endParaRPr lang="en-US" sz="1500"/>
           </a:p>
@@ -15911,7 +16899,7 @@
                 <a:ea typeface="Arial"/>
                 <a:cs typeface="Arial"/>
               </a:rPr>
-              <a:t xml:space="preserve">seconds already exists. That is a better</a:t>
+              <a:t xml:space="preserve">uncertainty, judging and human review, and</a:t>
             </a:r>
             <a:endParaRPr lang="en-US" sz="1500"/>
           </a:p>
@@ -15934,7 +16922,7 @@
                 <a:ea typeface="Arial"/>
                 <a:cs typeface="Arial"/>
               </a:rPr>
-              <a:t xml:space="preserve">world than a warm fleet and a guess. It is</a:t>
+              <a:t xml:space="preserve">compare against one competent attempt on</a:t>
             </a:r>
             <a:endParaRPr lang="en-US" sz="1500"/>
           </a:p>
@@ -15957,7 +16945,7 @@
                 <a:ea typeface="Arial"/>
                 <a:cs typeface="Arial"/>
               </a:rPr>
-              <a:t xml:space="preserve">only safe because the agent chooses from a</a:t>
+              <a:t xml:space="preserve">the same task set.</a:t>
             </a:r>
             <a:endParaRPr lang="en-US" sz="1500"/>
           </a:p>
@@ -15980,7 +16968,7 @@
                 <a:ea typeface="Arial"/>
                 <a:cs typeface="Arial"/>
               </a:rPr>
-              <a:t xml:space="preserve">catalog, spends from a ledger, and runs on</a:t>
+              <a:t xml:space="preserve"/>
             </a:r>
             <a:endParaRPr lang="en-US" sz="1500"/>
           </a:p>
@@ -16003,7 +16991,7 @@
                 <a:ea typeface="Arial"/>
                 <a:cs typeface="Arial"/>
               </a:rPr>
-              <a:t xml:space="preserve">boxes that expire.</a:t>
+              <a:t xml:space="preserve">Measure accepted outcomes, not launched</a:t>
             </a:r>
             <a:endParaRPr lang="en-US" sz="1500"/>
           </a:p>
@@ -16026,7 +17014,7 @@
                 <a:ea typeface="Arial"/>
                 <a:cs typeface="Arial"/>
               </a:rPr>
-              <a:t xml:space="preserve"/>
+              <a:t xml:space="preserve">workers. Start with one extra attempt or</a:t>
             </a:r>
             <a:endParaRPr lang="en-US" sz="1500"/>
           </a:p>
@@ -16049,7 +17037,7 @@
                 <a:ea typeface="Arial"/>
                 <a:cs typeface="Arial"/>
               </a:rPr>
-              <a:t xml:space="preserve">Inspect one expensive tool in your system.</a:t>
+              <a:t xml:space="preserve">one batch boundary; if it does not buy</a:t>
             </a:r>
             <a:endParaRPr lang="en-US" sz="1500"/>
           </a:p>
@@ -16072,7 +17060,7 @@
                 <a:ea typeface="Arial"/>
                 <a:cs typeface="Arial"/>
               </a:rPr>
-              <a:t xml:space="preserve">Count the work it can launch underneath</a:t>
+              <a:t xml:space="preserve">quality, time or cost, keep the simpler</a:t>
             </a:r>
             <a:endParaRPr lang="en-US" sz="1500"/>
           </a:p>
@@ -16095,7 +17083,7 @@
                 <a:ea typeface="Arial"/>
                 <a:cs typeface="Arial"/>
               </a:rPr>
-              <a:t xml:space="preserve">itself. Put the limit where that work</a:t>
+              <a:t xml:space="preserve">path. We are trying to buy useful work, not</a:t>
             </a:r>
             <a:endParaRPr lang="en-US" sz="1500"/>
           </a:p>
@@ -16118,7 +17106,7 @@
                 <a:ea typeface="Arial"/>
                 <a:cs typeface="Arial"/>
               </a:rPr>
-              <a:t xml:space="preserve">actually begins.</a:t>
+              <a:t xml:space="preserve">maximize the number of things blinking.</a:t>
             </a:r>
             <a:endParaRPr lang="en-US" sz="1500"/>
           </a:p>
@@ -16298,7 +17286,7 @@
                 <a:ea typeface="Arial"/>
                 <a:cs typeface="Arial"/>
               </a:rPr>
-              <a:t xml:space="preserve">SOURCE REFERENCES</a:t>
+              <a:t xml:space="preserve">14 / 14    SOURCE SLIDE 14</a:t>
             </a:r>
             <a:endParaRPr lang="en-US" sz="1050"/>
           </a:p>
@@ -16347,7 +17335,7 @@
                 <a:ea typeface="Arial"/>
                 <a:cs typeface="Arial"/>
               </a:rPr>
-              <a:t xml:space="preserve">References</a:t>
+              <a:t xml:space="preserve">Put the limit where the work begins</a:t>
             </a:r>
             <a:endParaRPr lang="en-US" sz="2550"/>
           </a:p>
@@ -16396,7 +17384,7 @@
                 <a:ea typeface="Arial"/>
                 <a:cs typeface="Arial"/>
               </a:rPr>
-              <a:t xml:space="preserve">Knight and Leveson (1986), An Experimental</a:t>
+              <a:t xml:space="preserve">One ledger across every caller</a:t>
             </a:r>
             <a:endParaRPr lang="en-US" sz="1500"/>
           </a:p>
@@ -16419,7 +17407,7 @@
                 <a:ea typeface="Arial"/>
                 <a:cs typeface="Arial"/>
               </a:rPr>
-              <a:t xml:space="preserve">Evaluation of the Assumption of</a:t>
+              <a:t xml:space="preserve"/>
             </a:r>
             <a:endParaRPr lang="en-US" sz="1500"/>
           </a:p>
@@ -16442,7 +17430,7 @@
                 <a:ea typeface="Arial"/>
                 <a:cs typeface="Arial"/>
               </a:rPr>
-              <a:t xml:space="preserve">Independence in Multiversion Programming —</a:t>
+              <a:t xml:space="preserve">Durable state across every restart</a:t>
             </a:r>
             <a:endParaRPr lang="en-US" sz="1500"/>
           </a:p>
@@ -16465,7 +17453,7 @@
                 <a:ea typeface="Arial"/>
                 <a:cs typeface="Arial"/>
               </a:rPr>
-              <a:t xml:space="preserve">https://doi.org/10.1109/TSE.1986.6312924),</a:t>
+              <a:t xml:space="preserve"/>
             </a:r>
             <a:endParaRPr lang="en-US" sz="1500"/>
           </a:p>
@@ -16488,7 +17476,7 @@
                 <a:ea typeface="Arial"/>
                 <a:cs typeface="Arial"/>
               </a:rPr>
-              <a:t xml:space="preserve">IEEE Transactions on Software Engineering</a:t>
+              <a:t xml:space="preserve">A lease on every box, a gate on every</a:t>
             </a:r>
             <a:endParaRPr lang="en-US" sz="1500"/>
           </a:p>
@@ -16511,7 +17499,168 @@
                 <a:ea typeface="Arial"/>
                 <a:cs typeface="Arial"/>
               </a:rPr>
-              <a:t xml:space="preserve">SE-12(1, 96 to 109.</a:t>
+              <a:t xml:space="preserve">candidate</a:t>
+            </a:r>
+            <a:endParaRPr lang="en-US" sz="1500"/>
+          </a:p>
+          <a:p>
+            <a:pPr marL="0" indent="0">
+              <a:lnSpc>
+                <a:spcPts val="1950"/>
+              </a:lnSpc>
+              <a:spcAft>
+                <a:spcPts val="0"/>
+              </a:spcAft>
+              <a:buNone/>
+            </a:pPr>
+            <a:r>
+              <a:rPr lang="en-US" sz="1500" b="0">
+                <a:solidFill>
+                  <a:srgbClr val="202B33"/>
+                </a:solidFill>
+                <a:latin typeface="Arial"/>
+                <a:ea typeface="Arial"/>
+                <a:cs typeface="Arial"/>
+              </a:rPr>
+              <a:t xml:space="preserve"/>
+            </a:r>
+            <a:endParaRPr lang="en-US" sz="1500"/>
+          </a:p>
+          <a:p>
+            <a:pPr marL="0" indent="0">
+              <a:lnSpc>
+                <a:spcPts val="1950"/>
+              </a:lnSpc>
+              <a:spcAft>
+                <a:spcPts val="0"/>
+              </a:spcAft>
+              <a:buNone/>
+            </a:pPr>
+            <a:r>
+              <a:rPr lang="en-US" sz="1500" b="0">
+                <a:solidFill>
+                  <a:srgbClr val="202B33"/>
+                </a:solidFill>
+                <a:latin typeface="Arial"/>
+                <a:ea typeface="Arial"/>
+                <a:cs typeface="Arial"/>
+              </a:rPr>
+              <a:t xml:space="preserve">Back to the four callers. Forty jobs were</a:t>
+            </a:r>
+            <a:endParaRPr lang="en-US" sz="1500"/>
+          </a:p>
+          <a:p>
+            <a:pPr marL="0" indent="0">
+              <a:lnSpc>
+                <a:spcPts val="1950"/>
+              </a:lnSpc>
+              <a:spcAft>
+                <a:spcPts val="0"/>
+              </a:spcAft>
+              <a:buNone/>
+            </a:pPr>
+            <a:r>
+              <a:rPr lang="en-US" sz="1500" b="0">
+                <a:solidFill>
+                  <a:srgbClr val="202B33"/>
+                </a:solidFill>
+                <a:latin typeface="Arial"/>
+                <a:ea typeface="Arial"/>
+                <a:cs typeface="Arial"/>
+              </a:rPr>
+              <a:t xml:space="preserve">legal by four local counters. The missing</a:t>
+            </a:r>
+            <a:endParaRPr lang="en-US" sz="1500"/>
+          </a:p>
+          <a:p>
+            <a:pPr marL="0" indent="0">
+              <a:lnSpc>
+                <a:spcPts val="1950"/>
+              </a:lnSpc>
+              <a:spcAft>
+                <a:spcPts val="0"/>
+              </a:spcAft>
+              <a:buNone/>
+            </a:pPr>
+            <a:r>
+              <a:rPr lang="en-US" sz="1500" b="0">
+                <a:solidFill>
+                  <a:srgbClr val="202B33"/>
+                </a:solidFill>
+                <a:latin typeface="Arial"/>
+                <a:ea typeface="Arial"/>
+                <a:cs typeface="Arial"/>
+              </a:rPr>
+              <a:t xml:space="preserve">piece was one shared account of what the</a:t>
+            </a:r>
+            <a:endParaRPr lang="en-US" sz="1500"/>
+          </a:p>
+          <a:p>
+            <a:pPr marL="0" indent="0">
+              <a:lnSpc>
+                <a:spcPts val="1950"/>
+              </a:lnSpc>
+              <a:spcAft>
+                <a:spcPts val="0"/>
+              </a:spcAft>
+              <a:buNone/>
+            </a:pPr>
+            <a:r>
+              <a:rPr lang="en-US" sz="1500" b="0">
+                <a:solidFill>
+                  <a:srgbClr val="202B33"/>
+                </a:solidFill>
+                <a:latin typeface="Arial"/>
+                <a:ea typeface="Arial"/>
+                <a:cs typeface="Arial"/>
+              </a:rPr>
+              <a:t xml:space="preserve">application had promised and what it had</a:t>
+            </a:r>
+            <a:endParaRPr lang="en-US" sz="1500"/>
+          </a:p>
+          <a:p>
+            <a:pPr marL="0" indent="0">
+              <a:lnSpc>
+                <a:spcPts val="1950"/>
+              </a:lnSpc>
+              <a:spcAft>
+                <a:spcPts val="0"/>
+              </a:spcAft>
+              <a:buNone/>
+            </a:pPr>
+            <a:r>
+              <a:rPr lang="en-US" sz="1500" b="0">
+                <a:solidFill>
+                  <a:srgbClr val="202B33"/>
+                </a:solidFill>
+                <a:latin typeface="Arial"/>
+                <a:ea typeface="Arial"/>
+                <a:cs typeface="Arial"/>
+              </a:rPr>
+              <a:t xml:space="preserve">already started.</a:t>
+            </a:r>
+            <a:endParaRPr lang="en-US" sz="1500"/>
+          </a:p>
+          <a:p>
+            <a:pPr marL="0" indent="0">
+              <a:lnSpc>
+                <a:spcPts val="1950"/>
+              </a:lnSpc>
+              <a:spcAft>
+                <a:spcPts val="0"/>
+              </a:spcAft>
+              <a:buNone/>
+            </a:pPr>
+            <a:r>
+              <a:rPr lang="en-US" sz="1500" b="0">
+                <a:solidFill>
+                  <a:srgbClr val="202B33"/>
+                </a:solidFill>
+                <a:latin typeface="Arial"/>
+                <a:ea typeface="Arial"/>
+                <a:cs typeface="Arial"/>
+              </a:rPr>
+              <a:t xml:space="preserve"/>
             </a:r>
             <a:endParaRPr lang="en-US" sz="1500"/>
           </a:p>
@@ -16560,6 +17709,190 @@
                 <a:ea typeface="Arial"/>
                 <a:cs typeface="Arial"/>
               </a:rPr>
+              <a:t xml:space="preserve">The inversion is real: the workload can now</a:t>
+            </a:r>
+            <a:endParaRPr lang="en-US" sz="1500"/>
+          </a:p>
+          <a:p>
+            <a:pPr marL="0" indent="0">
+              <a:lnSpc>
+                <a:spcPts val="1950"/>
+              </a:lnSpc>
+              <a:spcAft>
+                <a:spcPts val="0"/>
+              </a:spcAft>
+              <a:buNone/>
+            </a:pPr>
+            <a:r>
+              <a:rPr lang="en-US" sz="1500" b="0">
+                <a:solidFill>
+                  <a:srgbClr val="202B33"/>
+                </a:solidFill>
+                <a:latin typeface="Arial"/>
+                <a:ea typeface="Arial"/>
+                <a:cs typeface="Arial"/>
+              </a:rPr>
+              <a:t xml:space="preserve">describe its own shape and ask for its own</a:t>
+            </a:r>
+            <a:endParaRPr lang="en-US" sz="1500"/>
+          </a:p>
+          <a:p>
+            <a:pPr marL="0" indent="0">
+              <a:lnSpc>
+                <a:spcPts val="1950"/>
+              </a:lnSpc>
+              <a:spcAft>
+                <a:spcPts val="0"/>
+              </a:spcAft>
+              <a:buNone/>
+            </a:pPr>
+            <a:r>
+              <a:rPr lang="en-US" sz="1500" b="0">
+                <a:solidFill>
+                  <a:srgbClr val="202B33"/>
+                </a:solidFill>
+                <a:latin typeface="Arial"/>
+                <a:ea typeface="Arial"/>
+                <a:cs typeface="Arial"/>
+              </a:rPr>
+              <a:t xml:space="preserve">compute, and the substrate to grant it in</a:t>
+            </a:r>
+            <a:endParaRPr lang="en-US" sz="1500"/>
+          </a:p>
+          <a:p>
+            <a:pPr marL="0" indent="0">
+              <a:lnSpc>
+                <a:spcPts val="1950"/>
+              </a:lnSpc>
+              <a:spcAft>
+                <a:spcPts val="0"/>
+              </a:spcAft>
+              <a:buNone/>
+            </a:pPr>
+            <a:r>
+              <a:rPr lang="en-US" sz="1500" b="0">
+                <a:solidFill>
+                  <a:srgbClr val="202B33"/>
+                </a:solidFill>
+                <a:latin typeface="Arial"/>
+                <a:ea typeface="Arial"/>
+                <a:cs typeface="Arial"/>
+              </a:rPr>
+              <a:t xml:space="preserve">seconds already exists. That is a better</a:t>
+            </a:r>
+            <a:endParaRPr lang="en-US" sz="1500"/>
+          </a:p>
+          <a:p>
+            <a:pPr marL="0" indent="0">
+              <a:lnSpc>
+                <a:spcPts val="1950"/>
+              </a:lnSpc>
+              <a:spcAft>
+                <a:spcPts val="0"/>
+              </a:spcAft>
+              <a:buNone/>
+            </a:pPr>
+            <a:r>
+              <a:rPr lang="en-US" sz="1500" b="0">
+                <a:solidFill>
+                  <a:srgbClr val="202B33"/>
+                </a:solidFill>
+                <a:latin typeface="Arial"/>
+                <a:ea typeface="Arial"/>
+                <a:cs typeface="Arial"/>
+              </a:rPr>
+              <a:t xml:space="preserve">world than a warm fleet and a guess. It is</a:t>
+            </a:r>
+            <a:endParaRPr lang="en-US" sz="1500"/>
+          </a:p>
+          <a:p>
+            <a:pPr marL="0" indent="0">
+              <a:lnSpc>
+                <a:spcPts val="1950"/>
+              </a:lnSpc>
+              <a:spcAft>
+                <a:spcPts val="0"/>
+              </a:spcAft>
+              <a:buNone/>
+            </a:pPr>
+            <a:r>
+              <a:rPr lang="en-US" sz="1500" b="0">
+                <a:solidFill>
+                  <a:srgbClr val="202B33"/>
+                </a:solidFill>
+                <a:latin typeface="Arial"/>
+                <a:ea typeface="Arial"/>
+                <a:cs typeface="Arial"/>
+              </a:rPr>
+              <a:t xml:space="preserve">only safe because the agent chooses from a</a:t>
+            </a:r>
+            <a:endParaRPr lang="en-US" sz="1500"/>
+          </a:p>
+          <a:p>
+            <a:pPr marL="0" indent="0">
+              <a:lnSpc>
+                <a:spcPts val="1950"/>
+              </a:lnSpc>
+              <a:spcAft>
+                <a:spcPts val="0"/>
+              </a:spcAft>
+              <a:buNone/>
+            </a:pPr>
+            <a:r>
+              <a:rPr lang="en-US" sz="1500" b="0">
+                <a:solidFill>
+                  <a:srgbClr val="202B33"/>
+                </a:solidFill>
+                <a:latin typeface="Arial"/>
+                <a:ea typeface="Arial"/>
+                <a:cs typeface="Arial"/>
+              </a:rPr>
+              <a:t xml:space="preserve">catalog, spends from a ledger, and runs on</a:t>
+            </a:r>
+            <a:endParaRPr lang="en-US" sz="1500"/>
+          </a:p>
+          <a:p>
+            <a:pPr marL="0" indent="0">
+              <a:lnSpc>
+                <a:spcPts val="1950"/>
+              </a:lnSpc>
+              <a:spcAft>
+                <a:spcPts val="0"/>
+              </a:spcAft>
+              <a:buNone/>
+            </a:pPr>
+            <a:r>
+              <a:rPr lang="en-US" sz="1500" b="0">
+                <a:solidFill>
+                  <a:srgbClr val="202B33"/>
+                </a:solidFill>
+                <a:latin typeface="Arial"/>
+                <a:ea typeface="Arial"/>
+                <a:cs typeface="Arial"/>
+              </a:rPr>
+              <a:t xml:space="preserve">boxes that expire.</a:t>
+            </a:r>
+            <a:endParaRPr lang="en-US" sz="1500"/>
+          </a:p>
+          <a:p>
+            <a:pPr marL="0" indent="0">
+              <a:lnSpc>
+                <a:spcPts val="1950"/>
+              </a:lnSpc>
+              <a:spcAft>
+                <a:spcPts val="0"/>
+              </a:spcAft>
+              <a:buNone/>
+            </a:pPr>
+            <a:r>
+              <a:rPr lang="en-US" sz="1500" b="0">
+                <a:solidFill>
+                  <a:srgbClr val="202B33"/>
+                </a:solidFill>
+                <a:latin typeface="Arial"/>
+                <a:ea typeface="Arial"/>
+                <a:cs typeface="Arial"/>
+              </a:rPr>
               <a:t xml:space="preserve"/>
             </a:r>
             <a:endParaRPr lang="en-US" sz="1500"/>
@@ -16583,7 +17916,7 @@
                 <a:ea typeface="Arial"/>
                 <a:cs typeface="Arial"/>
               </a:rPr>
-              <a:t xml:space="preserve">Amdahl (1967), Validity of the single</a:t>
+              <a:t xml:space="preserve">Inspect one expensive tool in your system.</a:t>
             </a:r>
             <a:endParaRPr lang="en-US" sz="1500"/>
           </a:p>
@@ -16606,7 +17939,7 @@
                 <a:ea typeface="Arial"/>
                 <a:cs typeface="Arial"/>
               </a:rPr>
-              <a:t xml:space="preserve">processor approach to achieving large scale</a:t>
+              <a:t xml:space="preserve">Count the work it can launch underneath</a:t>
             </a:r>
             <a:endParaRPr lang="en-US" sz="1500"/>
           </a:p>
@@ -16629,7 +17962,7 @@
                 <a:ea typeface="Arial"/>
                 <a:cs typeface="Arial"/>
               </a:rPr>
-              <a:t xml:space="preserve">computing capabilities, AFIPS Conference</a:t>
+              <a:t xml:space="preserve">itself. Put the limit where that work</a:t>
             </a:r>
             <a:endParaRPr lang="en-US" sz="1500"/>
           </a:p>
@@ -16652,7 +17985,7 @@
                 <a:ea typeface="Arial"/>
                 <a:cs typeface="Arial"/>
               </a:rPr>
-              <a:t xml:space="preserve">Proceedings 30, 483 to 485.</a:t>
+              <a:t xml:space="preserve">actually begins.</a:t>
             </a:r>
             <a:endParaRPr lang="en-US" sz="1500"/>
           </a:p>
@@ -17639,6 +18972,609 @@
                 <a:cs typeface="Arial"/>
               </a:rPr>
               <a:t xml:space="preserve">2</a:t>
+            </a:r>
+            <a:endParaRPr lang="en-US" sz="975"/>
+          </a:p>
+        </p:txBody>
+      </p:sp>
+    </p:spTree>
+  </p:cSld>
+  <p:clrMapOvr>
+    <a:masterClrMapping/>
+  </p:clrMapOvr>
+</p:sld>
+</file>
+
+<file path=ppt/slides/slide20.xml><?xml version="1.0" encoding="utf-8"?>
+<p:sld xmlns:a="http://schemas.openxmlformats.org/drawingml/2006/main" xmlns:r="http://schemas.openxmlformats.org/officeDocument/2006/relationships" xmlns:p="http://schemas.openxmlformats.org/presentationml/2006/main">
+  <p:cSld name="Slide 20">
+    <p:bg>
+      <p:bgPr>
+        <a:solidFill>
+          <a:srgbClr val="FAFAF7"/>
+        </a:solidFill>
+        <a:effectLst/>
+      </p:bgPr>
+    </p:bg>
+    <p:spTree>
+      <p:nvGrpSpPr>
+        <p:cNvPr id="1" name=""/>
+        <p:cNvGrpSpPr/>
+        <p:nvPr/>
+      </p:nvGrpSpPr>
+      <p:grpSpPr>
+        <a:xfrm>
+          <a:off x="0" y="0"/>
+          <a:ext cx="0" cy="0"/>
+          <a:chOff x="0" y="0"/>
+          <a:chExt cx="0" cy="0"/>
+        </a:xfrm>
+      </p:grpSpPr>
+      <p:sp>
+        <p:nvSpPr>
+          <p:cNvPr id="2" name="Text 2"/>
+          <p:cNvSpPr txBox="1"/>
+          <p:nvPr/>
+        </p:nvSpPr>
+        <p:spPr>
+          <a:xfrm>
+            <a:off x="457200" y="266700"/>
+            <a:ext cx="9144000" cy="228600"/>
+          </a:xfrm>
+          <a:prstGeom prst="rect">
+            <a:avLst/>
+          </a:prstGeom>
+          <a:noFill/>
+          <a:ln>
+            <a:noFill/>
+          </a:ln>
+        </p:spPr>
+        <p:txBody>
+          <a:bodyPr wrap="none" lIns="0" tIns="0" rIns="0" bIns="0" anchor="t">
+            <a:noAutofit/>
+          </a:bodyPr>
+          <a:lstStyle/>
+          <a:p>
+            <a:pPr marL="0" indent="0">
+              <a:lnSpc>
+                <a:spcPts val="1365"/>
+              </a:lnSpc>
+              <a:spcAft>
+                <a:spcPts val="0"/>
+              </a:spcAft>
+              <a:buNone/>
+            </a:pPr>
+            <a:r>
+              <a:rPr lang="en-US" sz="1050" b="1">
+                <a:solidFill>
+                  <a:srgbClr val="246957"/>
+                </a:solidFill>
+                <a:latin typeface="Arial"/>
+                <a:ea typeface="Arial"/>
+                <a:cs typeface="Arial"/>
+              </a:rPr>
+              <a:t xml:space="preserve">SOURCE REFERENCES</a:t>
+            </a:r>
+            <a:endParaRPr lang="en-US" sz="1050"/>
+          </a:p>
+        </p:txBody>
+      </p:sp>
+      <p:sp>
+        <p:nvSpPr>
+          <p:cNvPr id="3" name="Text 3"/>
+          <p:cNvSpPr txBox="1"/>
+          <p:nvPr/>
+        </p:nvSpPr>
+        <p:spPr>
+          <a:xfrm>
+            <a:off x="457200" y="657225"/>
+            <a:ext cx="9144000" cy="1104900"/>
+          </a:xfrm>
+          <a:prstGeom prst="rect">
+            <a:avLst/>
+          </a:prstGeom>
+          <a:noFill/>
+          <a:ln>
+            <a:noFill/>
+          </a:ln>
+        </p:spPr>
+        <p:txBody>
+          <a:bodyPr wrap="none" lIns="0" tIns="0" rIns="0" bIns="0" anchor="t">
+            <a:noAutofit/>
+          </a:bodyPr>
+          <a:lstStyle/>
+          <a:p>
+            <a:pPr marL="0" indent="0">
+              <a:lnSpc>
+                <a:spcPts val="3060"/>
+              </a:lnSpc>
+              <a:spcAft>
+                <a:spcPts val="0"/>
+              </a:spcAft>
+              <a:buNone/>
+            </a:pPr>
+            <a:r>
+              <a:rPr lang="en-US" sz="2550" b="1">
+                <a:solidFill>
+                  <a:srgbClr val="202B33"/>
+                </a:solidFill>
+                <a:latin typeface="Arial"/>
+                <a:ea typeface="Arial"/>
+                <a:cs typeface="Arial"/>
+              </a:rPr>
+              <a:t xml:space="preserve">References</a:t>
+            </a:r>
+            <a:endParaRPr lang="en-US" sz="2550"/>
+          </a:p>
+        </p:txBody>
+      </p:sp>
+      <p:sp>
+        <p:nvSpPr>
+          <p:cNvPr id="4" name="Text 4"/>
+          <p:cNvSpPr txBox="1"/>
+          <p:nvPr/>
+        </p:nvSpPr>
+        <p:spPr>
+          <a:xfrm>
+            <a:off x="457200" y="1971675"/>
+            <a:ext cx="4352925" cy="5314950"/>
+          </a:xfrm>
+          <a:prstGeom prst="rect">
+            <a:avLst/>
+          </a:prstGeom>
+          <a:noFill/>
+          <a:ln>
+            <a:noFill/>
+          </a:ln>
+        </p:spPr>
+        <p:txBody>
+          <a:bodyPr wrap="none" lIns="0" tIns="0" rIns="0" bIns="0" anchor="t">
+            <a:noAutofit/>
+          </a:bodyPr>
+          <a:lstStyle/>
+          <a:p>
+            <a:pPr marL="0" indent="0">
+              <a:lnSpc>
+                <a:spcPts val="1950"/>
+              </a:lnSpc>
+              <a:spcAft>
+                <a:spcPts val="0"/>
+              </a:spcAft>
+              <a:buNone/>
+            </a:pPr>
+            <a:r>
+              <a:rPr lang="en-US" sz="1500" b="0">
+                <a:solidFill>
+                  <a:srgbClr val="202B33"/>
+                </a:solidFill>
+                <a:latin typeface="Arial"/>
+                <a:ea typeface="Arial"/>
+                <a:cs typeface="Arial"/>
+              </a:rPr>
+              <a:t xml:space="preserve">Knight and Leveson (1986), An Experimental</a:t>
+            </a:r>
+            <a:endParaRPr lang="en-US" sz="1500"/>
+          </a:p>
+          <a:p>
+            <a:pPr marL="0" indent="0">
+              <a:lnSpc>
+                <a:spcPts val="1950"/>
+              </a:lnSpc>
+              <a:spcAft>
+                <a:spcPts val="0"/>
+              </a:spcAft>
+              <a:buNone/>
+            </a:pPr>
+            <a:r>
+              <a:rPr lang="en-US" sz="1500" b="0">
+                <a:solidFill>
+                  <a:srgbClr val="202B33"/>
+                </a:solidFill>
+                <a:latin typeface="Arial"/>
+                <a:ea typeface="Arial"/>
+                <a:cs typeface="Arial"/>
+              </a:rPr>
+              <a:t xml:space="preserve">Evaluation of the Assumption of</a:t>
+            </a:r>
+            <a:endParaRPr lang="en-US" sz="1500"/>
+          </a:p>
+          <a:p>
+            <a:pPr marL="0" indent="0">
+              <a:lnSpc>
+                <a:spcPts val="1950"/>
+              </a:lnSpc>
+              <a:spcAft>
+                <a:spcPts val="0"/>
+              </a:spcAft>
+              <a:buNone/>
+            </a:pPr>
+            <a:r>
+              <a:rPr lang="en-US" sz="1500" b="0">
+                <a:solidFill>
+                  <a:srgbClr val="202B33"/>
+                </a:solidFill>
+                <a:latin typeface="Arial"/>
+                <a:ea typeface="Arial"/>
+                <a:cs typeface="Arial"/>
+              </a:rPr>
+              <a:t xml:space="preserve">Independence in Multiversion Programming —</a:t>
+            </a:r>
+            <a:endParaRPr lang="en-US" sz="1500"/>
+          </a:p>
+          <a:p>
+            <a:pPr marL="0" indent="0">
+              <a:lnSpc>
+                <a:spcPts val="1950"/>
+              </a:lnSpc>
+              <a:spcAft>
+                <a:spcPts val="0"/>
+              </a:spcAft>
+              <a:buNone/>
+            </a:pPr>
+            <a:r>
+              <a:rPr lang="en-US" sz="1500" b="0">
+                <a:solidFill>
+                  <a:srgbClr val="202B33"/>
+                </a:solidFill>
+                <a:latin typeface="Arial"/>
+                <a:ea typeface="Arial"/>
+                <a:cs typeface="Arial"/>
+              </a:rPr>
+              <a:t xml:space="preserve">https://doi.org/10.1109/TSE.1986.6312924),</a:t>
+            </a:r>
+            <a:endParaRPr lang="en-US" sz="1500"/>
+          </a:p>
+          <a:p>
+            <a:pPr marL="0" indent="0">
+              <a:lnSpc>
+                <a:spcPts val="1950"/>
+              </a:lnSpc>
+              <a:spcAft>
+                <a:spcPts val="0"/>
+              </a:spcAft>
+              <a:buNone/>
+            </a:pPr>
+            <a:r>
+              <a:rPr lang="en-US" sz="1500" b="0">
+                <a:solidFill>
+                  <a:srgbClr val="202B33"/>
+                </a:solidFill>
+                <a:latin typeface="Arial"/>
+                <a:ea typeface="Arial"/>
+                <a:cs typeface="Arial"/>
+              </a:rPr>
+              <a:t xml:space="preserve">IEEE Transactions on Software Engineering</a:t>
+            </a:r>
+            <a:endParaRPr lang="en-US" sz="1500"/>
+          </a:p>
+          <a:p>
+            <a:pPr marL="0" indent="0">
+              <a:lnSpc>
+                <a:spcPts val="1950"/>
+              </a:lnSpc>
+              <a:spcAft>
+                <a:spcPts val="0"/>
+              </a:spcAft>
+              <a:buNone/>
+            </a:pPr>
+            <a:r>
+              <a:rPr lang="en-US" sz="1500" b="0">
+                <a:solidFill>
+                  <a:srgbClr val="202B33"/>
+                </a:solidFill>
+                <a:latin typeface="Arial"/>
+                <a:ea typeface="Arial"/>
+                <a:cs typeface="Arial"/>
+              </a:rPr>
+              <a:t xml:space="preserve">SE-12(1, 96 to 109. Cited to set aside: it</a:t>
+            </a:r>
+            <a:endParaRPr lang="en-US" sz="1500"/>
+          </a:p>
+          <a:p>
+            <a:pPr marL="0" indent="0">
+              <a:lnSpc>
+                <a:spcPts val="1950"/>
+              </a:lnSpc>
+              <a:spcAft>
+                <a:spcPts val="0"/>
+              </a:spcAft>
+              <a:buNone/>
+            </a:pPr>
+            <a:r>
+              <a:rPr lang="en-US" sz="1500" b="0">
+                <a:solidFill>
+                  <a:srgbClr val="202B33"/>
+                </a:solidFill>
+                <a:latin typeface="Arial"/>
+                <a:ea typeface="Arial"/>
+                <a:cs typeface="Arial"/>
+              </a:rPr>
+              <a:t xml:space="preserve">is a result about redundancy as a</a:t>
+            </a:r>
+            <a:endParaRPr lang="en-US" sz="1500"/>
+          </a:p>
+        </p:txBody>
+      </p:sp>
+      <p:sp>
+        <p:nvSpPr>
+          <p:cNvPr id="5" name="Text 5"/>
+          <p:cNvSpPr txBox="1"/>
+          <p:nvPr/>
+        </p:nvSpPr>
+        <p:spPr>
+          <a:xfrm>
+            <a:off x="5238750" y="1971675"/>
+            <a:ext cx="4362450" cy="5314950"/>
+          </a:xfrm>
+          <a:prstGeom prst="rect">
+            <a:avLst/>
+          </a:prstGeom>
+          <a:noFill/>
+          <a:ln>
+            <a:noFill/>
+          </a:ln>
+        </p:spPr>
+        <p:txBody>
+          <a:bodyPr wrap="none" lIns="0" tIns="0" rIns="0" bIns="0" anchor="t">
+            <a:noAutofit/>
+          </a:bodyPr>
+          <a:lstStyle/>
+          <a:p>
+            <a:pPr marL="0" indent="0">
+              <a:lnSpc>
+                <a:spcPts val="1950"/>
+              </a:lnSpc>
+              <a:spcAft>
+                <a:spcPts val="0"/>
+              </a:spcAft>
+              <a:buNone/>
+            </a:pPr>
+            <a:r>
+              <a:rPr lang="en-US" sz="1500" b="0">
+                <a:solidFill>
+                  <a:srgbClr val="202B33"/>
+                </a:solidFill>
+                <a:latin typeface="Arial"/>
+                <a:ea typeface="Arial"/>
+                <a:cs typeface="Arial"/>
+              </a:rPr>
+              <a:t xml:space="preserve">correctness strategy, which this slide does</a:t>
+            </a:r>
+            <a:endParaRPr lang="en-US" sz="1500"/>
+          </a:p>
+          <a:p>
+            <a:pPr marL="0" indent="0">
+              <a:lnSpc>
+                <a:spcPts val="1950"/>
+              </a:lnSpc>
+              <a:spcAft>
+                <a:spcPts val="0"/>
+              </a:spcAft>
+              <a:buNone/>
+            </a:pPr>
+            <a:r>
+              <a:rPr lang="en-US" sz="1500" b="0">
+                <a:solidFill>
+                  <a:srgbClr val="202B33"/>
+                </a:solidFill>
+                <a:latin typeface="Arial"/>
+                <a:ea typeface="Arial"/>
+                <a:cs typeface="Arial"/>
+              </a:rPr>
+              <a:t xml:space="preserve">not claim.</a:t>
+            </a:r>
+            <a:endParaRPr lang="en-US" sz="1500"/>
+          </a:p>
+          <a:p>
+            <a:pPr marL="0" indent="0">
+              <a:lnSpc>
+                <a:spcPts val="1950"/>
+              </a:lnSpc>
+              <a:spcAft>
+                <a:spcPts val="0"/>
+              </a:spcAft>
+              <a:buNone/>
+            </a:pPr>
+            <a:r>
+              <a:rPr lang="en-US" sz="1500" b="0">
+                <a:solidFill>
+                  <a:srgbClr val="202B33"/>
+                </a:solidFill>
+                <a:latin typeface="Arial"/>
+                <a:ea typeface="Arial"/>
+                <a:cs typeface="Arial"/>
+              </a:rPr>
+              <a:t xml:space="preserve"/>
+            </a:r>
+            <a:endParaRPr lang="en-US" sz="1500"/>
+          </a:p>
+          <a:p>
+            <a:pPr marL="0" indent="0">
+              <a:lnSpc>
+                <a:spcPts val="1950"/>
+              </a:lnSpc>
+              <a:spcAft>
+                <a:spcPts val="0"/>
+              </a:spcAft>
+              <a:buNone/>
+            </a:pPr>
+            <a:r>
+              <a:rPr lang="en-US" sz="1500" b="0">
+                <a:solidFill>
+                  <a:srgbClr val="202B33"/>
+                </a:solidFill>
+                <a:latin typeface="Arial"/>
+                <a:ea typeface="Arial"/>
+                <a:cs typeface="Arial"/>
+              </a:rPr>
+              <a:t xml:space="preserve">Amdahl (1967), Validity of the single</a:t>
+            </a:r>
+            <a:endParaRPr lang="en-US" sz="1500"/>
+          </a:p>
+          <a:p>
+            <a:pPr marL="0" indent="0">
+              <a:lnSpc>
+                <a:spcPts val="1950"/>
+              </a:lnSpc>
+              <a:spcAft>
+                <a:spcPts val="0"/>
+              </a:spcAft>
+              <a:buNone/>
+            </a:pPr>
+            <a:r>
+              <a:rPr lang="en-US" sz="1500" b="0">
+                <a:solidFill>
+                  <a:srgbClr val="202B33"/>
+                </a:solidFill>
+                <a:latin typeface="Arial"/>
+                <a:ea typeface="Arial"/>
+                <a:cs typeface="Arial"/>
+              </a:rPr>
+              <a:t xml:space="preserve">processor approach to achieving large scale</a:t>
+            </a:r>
+            <a:endParaRPr lang="en-US" sz="1500"/>
+          </a:p>
+          <a:p>
+            <a:pPr marL="0" indent="0">
+              <a:lnSpc>
+                <a:spcPts val="1950"/>
+              </a:lnSpc>
+              <a:spcAft>
+                <a:spcPts val="0"/>
+              </a:spcAft>
+              <a:buNone/>
+            </a:pPr>
+            <a:r>
+              <a:rPr lang="en-US" sz="1500" b="0">
+                <a:solidFill>
+                  <a:srgbClr val="202B33"/>
+                </a:solidFill>
+                <a:latin typeface="Arial"/>
+                <a:ea typeface="Arial"/>
+                <a:cs typeface="Arial"/>
+              </a:rPr>
+              <a:t xml:space="preserve">computing capabilities, AFIPS Conference</a:t>
+            </a:r>
+            <a:endParaRPr lang="en-US" sz="1500"/>
+          </a:p>
+          <a:p>
+            <a:pPr marL="0" indent="0">
+              <a:lnSpc>
+                <a:spcPts val="1950"/>
+              </a:lnSpc>
+              <a:spcAft>
+                <a:spcPts val="0"/>
+              </a:spcAft>
+              <a:buNone/>
+            </a:pPr>
+            <a:r>
+              <a:rPr lang="en-US" sz="1500" b="0">
+                <a:solidFill>
+                  <a:srgbClr val="202B33"/>
+                </a:solidFill>
+                <a:latin typeface="Arial"/>
+                <a:ea typeface="Arial"/>
+                <a:cs typeface="Arial"/>
+              </a:rPr>
+              <a:t xml:space="preserve">Proceedings 30, 483 to 485.</a:t>
+            </a:r>
+            <a:endParaRPr lang="en-US" sz="1500"/>
+          </a:p>
+        </p:txBody>
+      </p:sp>
+      <p:sp>
+        <p:nvSpPr>
+          <p:cNvPr id="6" name="Text 6"/>
+          <p:cNvSpPr txBox="1"/>
+          <p:nvPr/>
+        </p:nvSpPr>
+        <p:spPr>
+          <a:xfrm>
+            <a:off x="457200" y="7486650"/>
+            <a:ext cx="8820150" cy="190500"/>
+          </a:xfrm>
+          <a:prstGeom prst="rect">
+            <a:avLst/>
+          </a:prstGeom>
+          <a:noFill/>
+          <a:ln>
+            <a:noFill/>
+          </a:ln>
+        </p:spPr>
+        <p:txBody>
+          <a:bodyPr wrap="none" lIns="0" tIns="0" rIns="0" bIns="0" anchor="t">
+            <a:noAutofit/>
+          </a:bodyPr>
+          <a:lstStyle/>
+          <a:p>
+            <a:pPr marL="0" indent="0">
+              <a:lnSpc>
+                <a:spcPts val="1268"/>
+              </a:lnSpc>
+              <a:spcAft>
+                <a:spcPts val="0"/>
+              </a:spcAft>
+              <a:buNone/>
+            </a:pPr>
+            <a:r>
+              <a:rPr lang="en-US" sz="975" b="0">
+                <a:solidFill>
+                  <a:srgbClr val="48555B"/>
+                </a:solidFill>
+                <a:latin typeface="Arial"/>
+                <a:ea typeface="Arial"/>
+                <a:cs typeface="Arial"/>
+              </a:rPr>
+              <a:t xml:space="preserve">Dynamic Scaling of Agentic Workloads</a:t>
+            </a:r>
+            <a:endParaRPr lang="en-US" sz="975"/>
+          </a:p>
+        </p:txBody>
+      </p:sp>
+      <p:sp>
+        <p:nvSpPr>
+          <p:cNvPr id="7" name="Text 7"/>
+          <p:cNvSpPr txBox="1"/>
+          <p:nvPr/>
+        </p:nvSpPr>
+        <p:spPr>
+          <a:xfrm>
+            <a:off x="9391650" y="7486650"/>
+            <a:ext cx="238125" cy="190500"/>
+          </a:xfrm>
+          <a:prstGeom prst="rect">
+            <a:avLst/>
+          </a:prstGeom>
+          <a:noFill/>
+          <a:ln>
+            <a:noFill/>
+          </a:ln>
+        </p:spPr>
+        <p:txBody>
+          <a:bodyPr wrap="none" lIns="0" tIns="0" rIns="0" bIns="0" anchor="t">
+            <a:noAutofit/>
+          </a:bodyPr>
+          <a:lstStyle/>
+          <a:p>
+            <a:pPr marL="0" indent="0">
+              <a:lnSpc>
+                <a:spcPts val="1268"/>
+              </a:lnSpc>
+              <a:spcAft>
+                <a:spcPts val="0"/>
+              </a:spcAft>
+              <a:buNone/>
+            </a:pPr>
+            <a:r>
+              <a:rPr lang="en-US" sz="975" b="0">
+                <a:solidFill>
+                  <a:srgbClr val="48555B"/>
+                </a:solidFill>
+                <a:latin typeface="Arial"/>
+                <a:ea typeface="Arial"/>
+                <a:cs typeface="Arial"/>
+              </a:rPr>
+              <a:t xml:space="preserve">20</a:t>
             </a:r>
             <a:endParaRPr lang="en-US" sz="975"/>
           </a:p>

--- a/artifacts/speaking-portfolio-expanded/decks/dynamic-scaling-40min-handout.pptx
+++ b/artifacts/speaking-portfolio-expanded/decks/dynamic-scaling-40min-handout.pptx
@@ -28,6 +28,7 @@
     <p:sldId id="273" r:id="rIdSlide18"/>
     <p:sldId id="274" r:id="rIdSlide19"/>
     <p:sldId id="275" r:id="rIdSlide20"/>
+    <p:sldId id="276" r:id="rIdSlide21"/>
   </p:sldIdLst>
   <p:sldSz cx="10058400" cy="7772400" type="custom"/>
   <p:notesSz cx="6858000" cy="9144000"/>
@@ -2630,7 +2631,7 @@
                 <a:ea typeface="Arial"/>
                 <a:cs typeface="Arial"/>
               </a:rPr>
-              <a:t xml:space="preserve">30:00 to 34:00 · build</a:t>
+              <a:t xml:space="preserve">30:00 to 35:00 · build</a:t>
             </a:r>
             <a:endParaRPr lang="en-US" sz="1200"/>
           </a:p>
@@ -2722,30 +2723,30 @@
                 <a:ea typeface="Arial"/>
                 <a:cs typeface="Arial"/>
               </a:rPr>
-              <a:t xml:space="preserve">&gt; Same brief, contrasting priorities, separate first drafts</a:t>
-            </a:r>
-            <a:endParaRPr lang="en-US" sz="1200"/>
-          </a:p>
-          <a:p>
-            <a:pPr marL="0" indent="0">
-              <a:lnSpc>
-                <a:spcPts val="1560"/>
-              </a:lnSpc>
-              <a:spcAft>
-                <a:spcPts val="0"/>
-              </a:spcAft>
-              <a:buNone/>
-            </a:pPr>
-            <a:r>
-              <a:rPr lang="en-US" sz="1200" b="0">
-                <a:solidFill>
-                  <a:srgbClr val="202b33"/>
-                </a:solidFill>
-                <a:latin typeface="Arial"/>
-                <a:ea typeface="Arial"/>
-                <a:cs typeface="Arial"/>
-              </a:rPr>
-              <a:t xml:space="preserve">&gt; A judge reads a thousand tokens and writes fifty. Run a council. Measure the disagreement.</a:t>
+              <a:t xml:space="preserve">&gt; Barrel of monkeys: lead with cheap parallel generation, on purpose</a:t>
+            </a:r>
+            <a:endParaRPr lang="en-US" sz="1200"/>
+          </a:p>
+          <a:p>
+            <a:pPr marL="0" indent="0">
+              <a:lnSpc>
+                <a:spcPts val="1560"/>
+              </a:lnSpc>
+              <a:spcAft>
+                <a:spcPts val="0"/>
+              </a:spcAft>
+              <a:buNone/>
+            </a:pPr>
+            <a:r>
+              <a:rPr lang="en-US" sz="1200" b="0">
+                <a:solidFill>
+                  <a:srgbClr val="202b33"/>
+                </a:solidFill>
+                <a:latin typeface="Arial"/>
+                <a:ea typeface="Arial"/>
+                <a:cs typeface="Arial"/>
+              </a:rPr>
+              <a:t xml:space="preserve">&gt; Council of guards: judges read a thousand tokens and write fifty; measure the disagreement</a:t>
             </a:r>
             <a:endParaRPr lang="en-US" sz="1200"/>
           </a:p>
@@ -2907,6 +2908,98 @@
                 <a:cs typeface="Arial"/>
               </a:rPr>
               <a:t xml:space="preserve">Here is what parallel attempts actually buy. Understanding of the models you depend on: run one brief through two of them and you learn what each reaches for and what each forgets. A migration harness: same brief, new model, diff the behavior before you switch, instead of after the incident. Better output: a synthesis of compatible ideas is often better than any single draft. And the cheap one, which is the one I care about: judging. A judge reads a thousand tokens and writes fifty. Output is what costs, so you can afford three or five judges from different models on every candidate, and the number you want back is not the average score. It is the disagreement. When the judges split or their reasons barely overlap, that candidate is sitting in territory nobody understands, and that is the one you do not ship on autopilot. I call this the Council of Guards. It picks between one and three alternatives to generate, and it costs a fraction of the generation it is guarding.</a:t>
+            </a:r>
+            <a:endParaRPr lang="en-US" sz="1200"/>
+          </a:p>
+          <a:p>
+            <a:pPr marL="0" indent="0">
+              <a:lnSpc>
+                <a:spcPts val="1560"/>
+              </a:lnSpc>
+              <a:spcAft>
+                <a:spcPts val="0"/>
+              </a:spcAft>
+              <a:buNone/>
+            </a:pPr>
+            <a:r>
+              <a:rPr lang="en-US" sz="1200" b="0">
+                <a:solidFill>
+                  <a:srgbClr val="202b33"/>
+                </a:solidFill>
+                <a:latin typeface="Arial"/>
+                <a:ea typeface="Arial"/>
+                <a:cs typeface="Arial"/>
+              </a:rPr>
+              <a:t xml:space="preserve"/>
+            </a:r>
+            <a:endParaRPr lang="en-US" sz="1200"/>
+          </a:p>
+          <a:p>
+            <a:pPr marL="0" indent="0">
+              <a:lnSpc>
+                <a:spcPts val="1560"/>
+              </a:lnSpc>
+              <a:spcAft>
+                <a:spcPts val="0"/>
+              </a:spcAft>
+              <a:buNone/>
+            </a:pPr>
+            <a:r>
+              <a:rPr lang="en-US" sz="1200" b="0">
+                <a:solidFill>
+                  <a:srgbClr val="202b33"/>
+                </a:solidFill>
+                <a:latin typeface="Arial"/>
+                <a:ea typeface="Arial"/>
+                <a:cs typeface="Arial"/>
+              </a:rPr>
+              <a:t xml:space="preserve">The generation side has a name too, and I am not sorry about it: the barrel-of-monkeys maneuver. Lead with parallel generation on purpose. You are adding a controlled section of chaos that the next stage has to handle: a revision loop, a router, the council, or your users in an A/B test. Why you would want the chaos varies. Sometimes you want the fastest answer, so you race. Sometimes you want the best parts of several, so a frontier model, whose input tokens are the cheap ones, reads all of them and writes one coherent output. Sometimes you just want more candidates for the judges to rank so the best whole answer goes downstream. In law or medicine, where the rules are extensive and specific, that is how you catch the one errant mistake that shows up in one output out of ten. And the monkeys can be cheap: models at a hundredth or a thousandth the price of the frontier, generating alternatives in a loop. Some of them need a tool-calling agent with files, search and git, which means a sandbox and somebody's cloud; others single-shot it fine. That is an architecture question about how much effort you want in a system that keeps improving versus one you can retune at runtime. Fan-out is a tool you encapsulate at points in the graph: default model most of the time, n alternatives for a sample of requests. Your needs and your opportunities decide why, where and how often.</a:t>
+            </a:r>
+            <a:endParaRPr lang="en-US" sz="1200"/>
+          </a:p>
+          <a:p>
+            <a:pPr marL="0" indent="0">
+              <a:lnSpc>
+                <a:spcPts val="1560"/>
+              </a:lnSpc>
+              <a:spcAft>
+                <a:spcPts val="0"/>
+              </a:spcAft>
+              <a:buNone/>
+            </a:pPr>
+            <a:r>
+              <a:rPr lang="en-US" sz="1200" b="0">
+                <a:solidFill>
+                  <a:srgbClr val="202b33"/>
+                </a:solidFill>
+                <a:latin typeface="Arial"/>
+                <a:ea typeface="Arial"/>
+                <a:cs typeface="Arial"/>
+              </a:rPr>
+              <a:t xml:space="preserve"/>
+            </a:r>
+            <a:endParaRPr lang="en-US" sz="1200"/>
+          </a:p>
+          <a:p>
+            <a:pPr marL="0" indent="0">
+              <a:lnSpc>
+                <a:spcPts val="1560"/>
+              </a:lnSpc>
+              <a:spcAft>
+                <a:spcPts val="0"/>
+              </a:spcAft>
+              <a:buNone/>
+            </a:pPr>
+            <a:r>
+              <a:rPr lang="en-US" sz="1200" b="0">
+                <a:solidFill>
+                  <a:srgbClr val="202b33"/>
+                </a:solidFill>
+                <a:latin typeface="Arial"/>
+                <a:ea typeface="Arial"/>
+                <a:cs typeface="Arial"/>
+              </a:rPr>
+              <a:t xml:space="preserve">Does this border on speculative optimization dressed up as learning? Yes, possibly. Probably sometimes. We will find out. So do not build any of it without env vars to turn it down, and ideally build the system that adjusts its own fan-out and token burn from what it measures. Right? Right. That system is the companion talk.</a:t>
             </a:r>
             <a:endParaRPr lang="en-US" sz="1200"/>
           </a:p>
@@ -3249,7 +3342,7 @@
                 <a:ea typeface="Arial"/>
                 <a:cs typeface="Arial"/>
               </a:rPr>
-              <a:t xml:space="preserve">30:00 to 34:00 · build</a:t>
+              <a:t xml:space="preserve">30:00 to 35:00 · build</a:t>
             </a:r>
             <a:endParaRPr lang="en-US" sz="1200"/>
           </a:p>
@@ -3341,30 +3434,30 @@
                 <a:ea typeface="Arial"/>
                 <a:cs typeface="Arial"/>
               </a:rPr>
-              <a:t xml:space="preserve">&gt; Same brief, contrasting priorities, separate first drafts</a:t>
-            </a:r>
-            <a:endParaRPr lang="en-US" sz="1200"/>
-          </a:p>
-          <a:p>
-            <a:pPr marL="0" indent="0">
-              <a:lnSpc>
-                <a:spcPts val="1560"/>
-              </a:lnSpc>
-              <a:spcAft>
-                <a:spcPts val="0"/>
-              </a:spcAft>
-              <a:buNone/>
-            </a:pPr>
-            <a:r>
-              <a:rPr lang="en-US" sz="1200" b="0">
-                <a:solidFill>
-                  <a:srgbClr val="202b33"/>
-                </a:solidFill>
-                <a:latin typeface="Arial"/>
-                <a:ea typeface="Arial"/>
-                <a:cs typeface="Arial"/>
-              </a:rPr>
-              <a:t xml:space="preserve">&gt; A judge reads a thousand tokens and writes fifty. Run a council. Measure the disagreement.</a:t>
+              <a:t xml:space="preserve">&gt; Barrel of monkeys: lead with cheap parallel generation, on purpose</a:t>
+            </a:r>
+            <a:endParaRPr lang="en-US" sz="1200"/>
+          </a:p>
+          <a:p>
+            <a:pPr marL="0" indent="0">
+              <a:lnSpc>
+                <a:spcPts val="1560"/>
+              </a:lnSpc>
+              <a:spcAft>
+                <a:spcPts val="0"/>
+              </a:spcAft>
+              <a:buNone/>
+            </a:pPr>
+            <a:r>
+              <a:rPr lang="en-US" sz="1200" b="0">
+                <a:solidFill>
+                  <a:srgbClr val="202b33"/>
+                </a:solidFill>
+                <a:latin typeface="Arial"/>
+                <a:ea typeface="Arial"/>
+                <a:cs typeface="Arial"/>
+              </a:rPr>
+              <a:t xml:space="preserve">&gt; Council of guards: judges read a thousand tokens and write fifty; measure the disagreement</a:t>
             </a:r>
             <a:endParaRPr lang="en-US" sz="1200"/>
           </a:p>
@@ -3526,6 +3619,98 @@
                 <a:cs typeface="Arial"/>
               </a:rPr>
               <a:t xml:space="preserve">Here is what parallel attempts actually buy. Understanding of the models you depend on: run one brief through two of them and you learn what each reaches for and what each forgets. A migration harness: same brief, new model, diff the behavior before you switch, instead of after the incident. Better output: a synthesis of compatible ideas is often better than any single draft. And the cheap one, which is the one I care about: judging. A judge reads a thousand tokens and writes fifty. Output is what costs, so you can afford three or five judges from different models on every candidate, and the number you want back is not the average score. It is the disagreement. When the judges split or their reasons barely overlap, that candidate is sitting in territory nobody understands, and that is the one you do not ship on autopilot. I call this the Council of Guards. It picks between one and three alternatives to generate, and it costs a fraction of the generation it is guarding.</a:t>
+            </a:r>
+            <a:endParaRPr lang="en-US" sz="1200"/>
+          </a:p>
+          <a:p>
+            <a:pPr marL="0" indent="0">
+              <a:lnSpc>
+                <a:spcPts val="1560"/>
+              </a:lnSpc>
+              <a:spcAft>
+                <a:spcPts val="0"/>
+              </a:spcAft>
+              <a:buNone/>
+            </a:pPr>
+            <a:r>
+              <a:rPr lang="en-US" sz="1200" b="0">
+                <a:solidFill>
+                  <a:srgbClr val="202b33"/>
+                </a:solidFill>
+                <a:latin typeface="Arial"/>
+                <a:ea typeface="Arial"/>
+                <a:cs typeface="Arial"/>
+              </a:rPr>
+              <a:t xml:space="preserve"/>
+            </a:r>
+            <a:endParaRPr lang="en-US" sz="1200"/>
+          </a:p>
+          <a:p>
+            <a:pPr marL="0" indent="0">
+              <a:lnSpc>
+                <a:spcPts val="1560"/>
+              </a:lnSpc>
+              <a:spcAft>
+                <a:spcPts val="0"/>
+              </a:spcAft>
+              <a:buNone/>
+            </a:pPr>
+            <a:r>
+              <a:rPr lang="en-US" sz="1200" b="0">
+                <a:solidFill>
+                  <a:srgbClr val="202b33"/>
+                </a:solidFill>
+                <a:latin typeface="Arial"/>
+                <a:ea typeface="Arial"/>
+                <a:cs typeface="Arial"/>
+              </a:rPr>
+              <a:t xml:space="preserve">The generation side has a name too, and I am not sorry about it: the barrel-of-monkeys maneuver. Lead with parallel generation on purpose. You are adding a controlled section of chaos that the next stage has to handle: a revision loop, a router, the council, or your users in an A/B test. Why you would want the chaos varies. Sometimes you want the fastest answer, so you race. Sometimes you want the best parts of several, so a frontier model, whose input tokens are the cheap ones, reads all of them and writes one coherent output. Sometimes you just want more candidates for the judges to rank so the best whole answer goes downstream. In law or medicine, where the rules are extensive and specific, that is how you catch the one errant mistake that shows up in one output out of ten. And the monkeys can be cheap: models at a hundredth or a thousandth the price of the frontier, generating alternatives in a loop. Some of them need a tool-calling agent with files, search and git, which means a sandbox and somebody's cloud; others single-shot it fine. That is an architecture question about how much effort you want in a system that keeps improving versus one you can retune at runtime. Fan-out is a tool you encapsulate at points in the graph: default model most of the time, n alternatives for a sample of requests. Your needs and your opportunities decide why, where and how often.</a:t>
+            </a:r>
+            <a:endParaRPr lang="en-US" sz="1200"/>
+          </a:p>
+          <a:p>
+            <a:pPr marL="0" indent="0">
+              <a:lnSpc>
+                <a:spcPts val="1560"/>
+              </a:lnSpc>
+              <a:spcAft>
+                <a:spcPts val="0"/>
+              </a:spcAft>
+              <a:buNone/>
+            </a:pPr>
+            <a:r>
+              <a:rPr lang="en-US" sz="1200" b="0">
+                <a:solidFill>
+                  <a:srgbClr val="202b33"/>
+                </a:solidFill>
+                <a:latin typeface="Arial"/>
+                <a:ea typeface="Arial"/>
+                <a:cs typeface="Arial"/>
+              </a:rPr>
+              <a:t xml:space="preserve"/>
+            </a:r>
+            <a:endParaRPr lang="en-US" sz="1200"/>
+          </a:p>
+          <a:p>
+            <a:pPr marL="0" indent="0">
+              <a:lnSpc>
+                <a:spcPts val="1560"/>
+              </a:lnSpc>
+              <a:spcAft>
+                <a:spcPts val="0"/>
+              </a:spcAft>
+              <a:buNone/>
+            </a:pPr>
+            <a:r>
+              <a:rPr lang="en-US" sz="1200" b="0">
+                <a:solidFill>
+                  <a:srgbClr val="202b33"/>
+                </a:solidFill>
+                <a:latin typeface="Arial"/>
+                <a:ea typeface="Arial"/>
+                <a:cs typeface="Arial"/>
+              </a:rPr>
+              <a:t xml:space="preserve">Does this border on speculative optimization dressed up as learning? Yes, possibly. Probably sometimes. We will find out. So do not build any of it without env vars to turn it down, and ideally build the system that adjusts its own fan-out and token burn from what it measures. Right? Right. That system is the companion talk.</a:t>
             </a:r>
             <a:endParaRPr lang="en-US" sz="1200"/>
           </a:p>
@@ -3868,7 +4053,7 @@
                 <a:ea typeface="Arial"/>
                 <a:cs typeface="Arial"/>
               </a:rPr>
-              <a:t xml:space="preserve">30:00 to 34:00 · build</a:t>
+              <a:t xml:space="preserve">30:00 to 35:00 · build</a:t>
             </a:r>
             <a:endParaRPr lang="en-US" sz="1200"/>
           </a:p>
@@ -3960,30 +4145,30 @@
                 <a:ea typeface="Arial"/>
                 <a:cs typeface="Arial"/>
               </a:rPr>
-              <a:t xml:space="preserve">&gt; Same brief, contrasting priorities, separate first drafts</a:t>
-            </a:r>
-            <a:endParaRPr lang="en-US" sz="1200"/>
-          </a:p>
-          <a:p>
-            <a:pPr marL="0" indent="0">
-              <a:lnSpc>
-                <a:spcPts val="1560"/>
-              </a:lnSpc>
-              <a:spcAft>
-                <a:spcPts val="0"/>
-              </a:spcAft>
-              <a:buNone/>
-            </a:pPr>
-            <a:r>
-              <a:rPr lang="en-US" sz="1200" b="0">
-                <a:solidFill>
-                  <a:srgbClr val="202b33"/>
-                </a:solidFill>
-                <a:latin typeface="Arial"/>
-                <a:ea typeface="Arial"/>
-                <a:cs typeface="Arial"/>
-              </a:rPr>
-              <a:t xml:space="preserve">&gt; A judge reads a thousand tokens and writes fifty. Run a council. Measure the disagreement.</a:t>
+              <a:t xml:space="preserve">&gt; Barrel of monkeys: lead with cheap parallel generation, on purpose</a:t>
+            </a:r>
+            <a:endParaRPr lang="en-US" sz="1200"/>
+          </a:p>
+          <a:p>
+            <a:pPr marL="0" indent="0">
+              <a:lnSpc>
+                <a:spcPts val="1560"/>
+              </a:lnSpc>
+              <a:spcAft>
+                <a:spcPts val="0"/>
+              </a:spcAft>
+              <a:buNone/>
+            </a:pPr>
+            <a:r>
+              <a:rPr lang="en-US" sz="1200" b="0">
+                <a:solidFill>
+                  <a:srgbClr val="202b33"/>
+                </a:solidFill>
+                <a:latin typeface="Arial"/>
+                <a:ea typeface="Arial"/>
+                <a:cs typeface="Arial"/>
+              </a:rPr>
+              <a:t xml:space="preserve">&gt; Council of guards: judges read a thousand tokens and write fifty; measure the disagreement</a:t>
             </a:r>
             <a:endParaRPr lang="en-US" sz="1200"/>
           </a:p>
@@ -4145,6 +4330,98 @@
                 <a:cs typeface="Arial"/>
               </a:rPr>
               <a:t xml:space="preserve">Here is what parallel attempts actually buy. Understanding of the models you depend on: run one brief through two of them and you learn what each reaches for and what each forgets. A migration harness: same brief, new model, diff the behavior before you switch, instead of after the incident. Better output: a synthesis of compatible ideas is often better than any single draft. And the cheap one, which is the one I care about: judging. A judge reads a thousand tokens and writes fifty. Output is what costs, so you can afford three or five judges from different models on every candidate, and the number you want back is not the average score. It is the disagreement. When the judges split or their reasons barely overlap, that candidate is sitting in territory nobody understands, and that is the one you do not ship on autopilot. I call this the Council of Guards. It picks between one and three alternatives to generate, and it costs a fraction of the generation it is guarding.</a:t>
+            </a:r>
+            <a:endParaRPr lang="en-US" sz="1200"/>
+          </a:p>
+          <a:p>
+            <a:pPr marL="0" indent="0">
+              <a:lnSpc>
+                <a:spcPts val="1560"/>
+              </a:lnSpc>
+              <a:spcAft>
+                <a:spcPts val="0"/>
+              </a:spcAft>
+              <a:buNone/>
+            </a:pPr>
+            <a:r>
+              <a:rPr lang="en-US" sz="1200" b="0">
+                <a:solidFill>
+                  <a:srgbClr val="202b33"/>
+                </a:solidFill>
+                <a:latin typeface="Arial"/>
+                <a:ea typeface="Arial"/>
+                <a:cs typeface="Arial"/>
+              </a:rPr>
+              <a:t xml:space="preserve"/>
+            </a:r>
+            <a:endParaRPr lang="en-US" sz="1200"/>
+          </a:p>
+          <a:p>
+            <a:pPr marL="0" indent="0">
+              <a:lnSpc>
+                <a:spcPts val="1560"/>
+              </a:lnSpc>
+              <a:spcAft>
+                <a:spcPts val="0"/>
+              </a:spcAft>
+              <a:buNone/>
+            </a:pPr>
+            <a:r>
+              <a:rPr lang="en-US" sz="1200" b="0">
+                <a:solidFill>
+                  <a:srgbClr val="202b33"/>
+                </a:solidFill>
+                <a:latin typeface="Arial"/>
+                <a:ea typeface="Arial"/>
+                <a:cs typeface="Arial"/>
+              </a:rPr>
+              <a:t xml:space="preserve">The generation side has a name too, and I am not sorry about it: the barrel-of-monkeys maneuver. Lead with parallel generation on purpose. You are adding a controlled section of chaos that the next stage has to handle: a revision loop, a router, the council, or your users in an A/B test. Why you would want the chaos varies. Sometimes you want the fastest answer, so you race. Sometimes you want the best parts of several, so a frontier model, whose input tokens are the cheap ones, reads all of them and writes one coherent output. Sometimes you just want more candidates for the judges to rank so the best whole answer goes downstream. In law or medicine, where the rules are extensive and specific, that is how you catch the one errant mistake that shows up in one output out of ten. And the monkeys can be cheap: models at a hundredth or a thousandth the price of the frontier, generating alternatives in a loop. Some of them need a tool-calling agent with files, search and git, which means a sandbox and somebody's cloud; others single-shot it fine. That is an architecture question about how much effort you want in a system that keeps improving versus one you can retune at runtime. Fan-out is a tool you encapsulate at points in the graph: default model most of the time, n alternatives for a sample of requests. Your needs and your opportunities decide why, where and how often.</a:t>
+            </a:r>
+            <a:endParaRPr lang="en-US" sz="1200"/>
+          </a:p>
+          <a:p>
+            <a:pPr marL="0" indent="0">
+              <a:lnSpc>
+                <a:spcPts val="1560"/>
+              </a:lnSpc>
+              <a:spcAft>
+                <a:spcPts val="0"/>
+              </a:spcAft>
+              <a:buNone/>
+            </a:pPr>
+            <a:r>
+              <a:rPr lang="en-US" sz="1200" b="0">
+                <a:solidFill>
+                  <a:srgbClr val="202b33"/>
+                </a:solidFill>
+                <a:latin typeface="Arial"/>
+                <a:ea typeface="Arial"/>
+                <a:cs typeface="Arial"/>
+              </a:rPr>
+              <a:t xml:space="preserve"/>
+            </a:r>
+            <a:endParaRPr lang="en-US" sz="1200"/>
+          </a:p>
+          <a:p>
+            <a:pPr marL="0" indent="0">
+              <a:lnSpc>
+                <a:spcPts val="1560"/>
+              </a:lnSpc>
+              <a:spcAft>
+                <a:spcPts val="0"/>
+              </a:spcAft>
+              <a:buNone/>
+            </a:pPr>
+            <a:r>
+              <a:rPr lang="en-US" sz="1200" b="0">
+                <a:solidFill>
+                  <a:srgbClr val="202b33"/>
+                </a:solidFill>
+                <a:latin typeface="Arial"/>
+                <a:ea typeface="Arial"/>
+                <a:cs typeface="Arial"/>
+              </a:rPr>
+              <a:t xml:space="preserve">Does this border on speculative optimization dressed up as learning? Yes, possibly. Probably sometimes. We will find out. So do not build any of it without env vars to turn it down, and ideally build the system that adjusts its own fan-out and token burn from what it measures. Right? Right. That system is the companion talk.</a:t>
             </a:r>
             <a:endParaRPr lang="en-US" sz="1200"/>
           </a:p>
@@ -4441,7 +4718,7 @@
                 <a:ea typeface="Arial"/>
                 <a:cs typeface="Arial"/>
               </a:rPr>
-              <a:t xml:space="preserve">Measure the accepted outcome</a:t>
+              <a:t xml:space="preserve">Attempts are a scaling axis. So is judging.</a:t>
             </a:r>
             <a:endParaRPr lang="en-US" sz="1200"/>
           </a:p>
@@ -4487,7 +4764,7 @@
                 <a:ea typeface="Arial"/>
                 <a:cs typeface="Arial"/>
               </a:rPr>
-              <a:t xml:space="preserve">34:00 to 37:00 · land</a:t>
+              <a:t xml:space="preserve">30:00 to 35:00 · build</a:t>
             </a:r>
             <a:endParaRPr lang="en-US" sz="1200"/>
           </a:p>
@@ -4533,53 +4810,7 @@
                 <a:ea typeface="Arial"/>
                 <a:cs typeface="Arial"/>
               </a:rPr>
-              <a:t xml:space="preserve">&gt; Latency: dispatch + queue + slowest branch + merge + verify</a:t>
-            </a:r>
-            <a:endParaRPr lang="en-US" sz="1200"/>
-          </a:p>
-          <a:p>
-            <a:pPr marL="0" indent="0">
-              <a:lnSpc>
-                <a:spcPts val="1560"/>
-              </a:lnSpc>
-              <a:spcAft>
-                <a:spcPts val="0"/>
-              </a:spcAft>
-              <a:buNone/>
-            </a:pPr>
-            <a:r>
-              <a:rPr lang="en-US" sz="1200" b="0">
-                <a:solidFill>
-                  <a:srgbClr val="202b33"/>
-                </a:solidFill>
-                <a:latin typeface="Arial"/>
-                <a:ea typeface="Arial"/>
-                <a:cs typeface="Arial"/>
-              </a:rPr>
-              <a:t xml:space="preserve">&gt; Cost: every candidate, every retry, every held reservation, review time</a:t>
-            </a:r>
-            <a:endParaRPr lang="en-US" sz="1200"/>
-          </a:p>
-          <a:p>
-            <a:pPr marL="0" indent="0">
-              <a:lnSpc>
-                <a:spcPts val="1560"/>
-              </a:lnSpc>
-              <a:spcAft>
-                <a:spcPts val="0"/>
-              </a:spcAft>
-              <a:buNone/>
-            </a:pPr>
-            <a:r>
-              <a:rPr lang="en-US" sz="1200" b="0">
-                <a:solidFill>
-                  <a:srgbClr val="202b33"/>
-                </a:solidFill>
-                <a:latin typeface="Arial"/>
-                <a:ea typeface="Arial"/>
-                <a:cs typeface="Arial"/>
-              </a:rPr>
-              <a:t xml:space="preserve">&gt; Compare against one competent attempt</a:t>
+              <a:t xml:space="preserve">![Different priorities expose tradeoffs. Common requirements and checks apply to every candidate.](../../reveal-talks/assets/dynamic-scaling/11-independent-attempts-share-requirements.svg)</a:t>
             </a:r>
             <a:endParaRPr lang="en-US" sz="1200"/>
           </a:p>
@@ -4625,7 +4856,53 @@
                 <a:ea typeface="Arial"/>
                 <a:cs typeface="Arial"/>
               </a:rPr>
-              <a:t xml:space="preserve">Starting three workers does not delete the serial parts. That is Amdahl, 1967, and it is unkind: if a tenth of the job is serial, ten workers get you five and a quarter times, and a hundred workers get you nine. Waiting on every branch can make a finished task slower. Count the whole thing: all candidates, failed work, reserved uncertainty, judging and human review, and compare against one competent attempt on the same task set.</a:t>
+              <a:t xml:space="preserve">&gt; Barrel of monkeys: lead with cheap parallel generation, on purpose</a:t>
+            </a:r>
+            <a:endParaRPr lang="en-US" sz="1200"/>
+          </a:p>
+          <a:p>
+            <a:pPr marL="0" indent="0">
+              <a:lnSpc>
+                <a:spcPts val="1560"/>
+              </a:lnSpc>
+              <a:spcAft>
+                <a:spcPts val="0"/>
+              </a:spcAft>
+              <a:buNone/>
+            </a:pPr>
+            <a:r>
+              <a:rPr lang="en-US" sz="1200" b="0">
+                <a:solidFill>
+                  <a:srgbClr val="202b33"/>
+                </a:solidFill>
+                <a:latin typeface="Arial"/>
+                <a:ea typeface="Arial"/>
+                <a:cs typeface="Arial"/>
+              </a:rPr>
+              <a:t xml:space="preserve">&gt; Council of guards: judges read a thousand tokens and write fifty; measure the disagreement</a:t>
+            </a:r>
+            <a:endParaRPr lang="en-US" sz="1200"/>
+          </a:p>
+          <a:p>
+            <a:pPr marL="0" indent="0">
+              <a:lnSpc>
+                <a:spcPts val="1560"/>
+              </a:lnSpc>
+              <a:spcAft>
+                <a:spcPts val="0"/>
+              </a:spcAft>
+              <a:buNone/>
+            </a:pPr>
+            <a:r>
+              <a:rPr lang="en-US" sz="1200" b="0">
+                <a:solidFill>
+                  <a:srgbClr val="202b33"/>
+                </a:solidFill>
+                <a:latin typeface="Arial"/>
+                <a:ea typeface="Arial"/>
+                <a:cs typeface="Arial"/>
+              </a:rPr>
+              <a:t xml:space="preserve">&gt; Gates before preferences; the judge may reject everyone</a:t>
             </a:r>
             <a:endParaRPr lang="en-US" sz="1200"/>
           </a:p>
@@ -4671,7 +4948,7 @@
                 <a:ea typeface="Arial"/>
                 <a:cs typeface="Arial"/>
               </a:rPr>
-              <a:t xml:space="preserve">Measure accepted outcomes, not launched workers. Start with one extra attempt or one batch boundary; if it does not buy quality, time or cost, keep the simpler path. We are trying to buy useful work, not maximize the number of things blinking.</a:t>
+              <a:t xml:space="preserve">Change the unit of work from images to whole designs. Give the batch-job problem to three generated agents with the same requirements and different priorities: a minimalist, a maintainer, a security and performance reviewer. Keep first drafts separate so they do not converge on the first plausible answer. The contrast is the product.</a:t>
             </a:r>
             <a:endParaRPr lang="en-US" sz="1200"/>
           </a:p>
@@ -4717,7 +4994,7 @@
                 <a:ea typeface="Arial"/>
                 <a:cs typeface="Arial"/>
               </a:rPr>
-              <a:t xml:space="preserve">Source: Amdahl (1967), Validity of the single processor approach to achieving large scale computing capabilities, AFIPS Conference Proceedings 30, 483 to 485.</a:t>
+              <a:t xml:space="preserve">Somebody is going to cite Knight and Leveson at me, so let me do it first. 1986, twenty-seven teams, one specification, a million tests, and the independently written versions failed together far more than independence predicts. True, important, and about N-version programming as a correctness strategy. That is not what this is. I am not voting three models toward the truth, and I am not going to tell you the ensemble is right because it agreed with itself. If that is the pitch you heard, it is not mine.</a:t>
             </a:r>
             <a:endParaRPr lang="en-US" sz="1200"/>
           </a:p>
@@ -4763,7 +5040,283 @@
                 <a:ea typeface="Arial"/>
                 <a:cs typeface="Arial"/>
               </a:rPr>
-              <a:t xml:space="preserve">Stage direction: Ninety seconds: choose a baseline, a cap and an acceptance gate. Keep latency and total cost as separate numbers.</a:t>
+              <a:t xml:space="preserve">Here is what parallel attempts actually buy. Understanding of the models you depend on: run one brief through two of them and you learn what each reaches for and what each forgets. A migration harness: same brief, new model, diff the behavior before you switch, instead of after the incident. Better output: a synthesis of compatible ideas is often better than any single draft. And the cheap one, which is the one I care about: judging. A judge reads a thousand tokens and writes fifty. Output is what costs, so you can afford three or five judges from different models on every candidate, and the number you want back is not the average score. It is the disagreement. When the judges split or their reasons barely overlap, that candidate is sitting in territory nobody understands, and that is the one you do not ship on autopilot. I call this the Council of Guards. It picks between one and three alternatives to generate, and it costs a fraction of the generation it is guarding.</a:t>
+            </a:r>
+            <a:endParaRPr lang="en-US" sz="1200"/>
+          </a:p>
+          <a:p>
+            <a:pPr marL="0" indent="0">
+              <a:lnSpc>
+                <a:spcPts val="1560"/>
+              </a:lnSpc>
+              <a:spcAft>
+                <a:spcPts val="0"/>
+              </a:spcAft>
+              <a:buNone/>
+            </a:pPr>
+            <a:r>
+              <a:rPr lang="en-US" sz="1200" b="0">
+                <a:solidFill>
+                  <a:srgbClr val="202b33"/>
+                </a:solidFill>
+                <a:latin typeface="Arial"/>
+                <a:ea typeface="Arial"/>
+                <a:cs typeface="Arial"/>
+              </a:rPr>
+              <a:t xml:space="preserve"/>
+            </a:r>
+            <a:endParaRPr lang="en-US" sz="1200"/>
+          </a:p>
+          <a:p>
+            <a:pPr marL="0" indent="0">
+              <a:lnSpc>
+                <a:spcPts val="1560"/>
+              </a:lnSpc>
+              <a:spcAft>
+                <a:spcPts val="0"/>
+              </a:spcAft>
+              <a:buNone/>
+            </a:pPr>
+            <a:r>
+              <a:rPr lang="en-US" sz="1200" b="0">
+                <a:solidFill>
+                  <a:srgbClr val="202b33"/>
+                </a:solidFill>
+                <a:latin typeface="Arial"/>
+                <a:ea typeface="Arial"/>
+                <a:cs typeface="Arial"/>
+              </a:rPr>
+              <a:t xml:space="preserve">The generation side has a name too, and I am not sorry about it: the barrel-of-monkeys maneuver. Lead with parallel generation on purpose. You are adding a controlled section of chaos that the next stage has to handle: a revision loop, a router, the council, or your users in an A/B test. Why you would want the chaos varies. Sometimes you want the fastest answer, so you race. Sometimes you want the best parts of several, so a frontier model, whose input tokens are the cheap ones, reads all of them and writes one coherent output. Sometimes you just want more candidates for the judges to rank so the best whole answer goes downstream. In law or medicine, where the rules are extensive and specific, that is how you catch the one errant mistake that shows up in one output out of ten. And the monkeys can be cheap: models at a hundredth or a thousandth the price of the frontier, generating alternatives in a loop. Some of them need a tool-calling agent with files, search and git, which means a sandbox and somebody's cloud; others single-shot it fine. That is an architecture question about how much effort you want in a system that keeps improving versus one you can retune at runtime. Fan-out is a tool you encapsulate at points in the graph: default model most of the time, n alternatives for a sample of requests. Your needs and your opportunities decide why, where and how often.</a:t>
+            </a:r>
+            <a:endParaRPr lang="en-US" sz="1200"/>
+          </a:p>
+          <a:p>
+            <a:pPr marL="0" indent="0">
+              <a:lnSpc>
+                <a:spcPts val="1560"/>
+              </a:lnSpc>
+              <a:spcAft>
+                <a:spcPts val="0"/>
+              </a:spcAft>
+              <a:buNone/>
+            </a:pPr>
+            <a:r>
+              <a:rPr lang="en-US" sz="1200" b="0">
+                <a:solidFill>
+                  <a:srgbClr val="202b33"/>
+                </a:solidFill>
+                <a:latin typeface="Arial"/>
+                <a:ea typeface="Arial"/>
+                <a:cs typeface="Arial"/>
+              </a:rPr>
+              <a:t xml:space="preserve"/>
+            </a:r>
+            <a:endParaRPr lang="en-US" sz="1200"/>
+          </a:p>
+          <a:p>
+            <a:pPr marL="0" indent="0">
+              <a:lnSpc>
+                <a:spcPts val="1560"/>
+              </a:lnSpc>
+              <a:spcAft>
+                <a:spcPts val="0"/>
+              </a:spcAft>
+              <a:buNone/>
+            </a:pPr>
+            <a:r>
+              <a:rPr lang="en-US" sz="1200" b="0">
+                <a:solidFill>
+                  <a:srgbClr val="202b33"/>
+                </a:solidFill>
+                <a:latin typeface="Arial"/>
+                <a:ea typeface="Arial"/>
+                <a:cs typeface="Arial"/>
+              </a:rPr>
+              <a:t xml:space="preserve">Does this border on speculative optimization dressed up as learning? Yes, possibly. Probably sometimes. We will find out. So do not build any of it without env vars to turn it down, and ideally build the system that adjusts its own fan-out and token burn from what it measures. Right? Right. That system is the companion talk.</a:t>
+            </a:r>
+            <a:endParaRPr lang="en-US" sz="1200"/>
+          </a:p>
+          <a:p>
+            <a:pPr marL="0" indent="0">
+              <a:lnSpc>
+                <a:spcPts val="1560"/>
+              </a:lnSpc>
+              <a:spcAft>
+                <a:spcPts val="0"/>
+              </a:spcAft>
+              <a:buNone/>
+            </a:pPr>
+            <a:r>
+              <a:rPr lang="en-US" sz="1200" b="0">
+                <a:solidFill>
+                  <a:srgbClr val="202b33"/>
+                </a:solidFill>
+                <a:latin typeface="Arial"/>
+                <a:ea typeface="Arial"/>
+                <a:cs typeface="Arial"/>
+              </a:rPr>
+              <a:t xml:space="preserve"/>
+            </a:r>
+            <a:endParaRPr lang="en-US" sz="1200"/>
+          </a:p>
+          <a:p>
+            <a:pPr marL="0" indent="0">
+              <a:lnSpc>
+                <a:spcPts val="1560"/>
+              </a:lnSpc>
+              <a:spcAft>
+                <a:spcPts val="0"/>
+              </a:spcAft>
+              <a:buNone/>
+            </a:pPr>
+            <a:r>
+              <a:rPr lang="en-US" sz="1200" b="0">
+                <a:solidFill>
+                  <a:srgbClr val="202b33"/>
+                </a:solidFill>
+                <a:latin typeface="Arial"/>
+                <a:ea typeface="Arial"/>
+                <a:cs typeface="Arial"/>
+              </a:rPr>
+              <a:t xml:space="preserve">Write the gates before reading the candidates: no duplicate dispatch after restart, no cross-tenant spend, no regeneration on notification retry, no dispatch after deadline. Run executable checks first. In the exercise every candidate fails a gate, including the careful one, which is the point: the council is allowed to reject the room. Then combine compatible ideas into a new candidate with one coherent set of assumptions and run the gates again. Passing parts do not make a passing whole. Stop at the review budget; an endless debate is an expensive way to not ship.</a:t>
+            </a:r>
+            <a:endParaRPr lang="en-US" sz="1200"/>
+          </a:p>
+          <a:p>
+            <a:pPr marL="0" indent="0">
+              <a:lnSpc>
+                <a:spcPts val="1560"/>
+              </a:lnSpc>
+              <a:spcAft>
+                <a:spcPts val="0"/>
+              </a:spcAft>
+              <a:buNone/>
+            </a:pPr>
+            <a:r>
+              <a:rPr lang="en-US" sz="1200" b="0">
+                <a:solidFill>
+                  <a:srgbClr val="202b33"/>
+                </a:solidFill>
+                <a:latin typeface="Arial"/>
+                <a:ea typeface="Arial"/>
+                <a:cs typeface="Arial"/>
+              </a:rPr>
+              <a:t xml:space="preserve"/>
+            </a:r>
+            <a:endParaRPr lang="en-US" sz="1200"/>
+          </a:p>
+          <a:p>
+            <a:pPr marL="0" indent="0">
+              <a:lnSpc>
+                <a:spcPts val="1560"/>
+              </a:lnSpc>
+              <a:spcAft>
+                <a:spcPts val="0"/>
+              </a:spcAft>
+              <a:buNone/>
+            </a:pPr>
+            <a:r>
+              <a:rPr lang="en-US" sz="1200" b="0">
+                <a:solidFill>
+                  <a:srgbClr val="202b33"/>
+                </a:solidFill>
+                <a:latin typeface="Arial"/>
+                <a:ea typeface="Arial"/>
+                <a:cs typeface="Arial"/>
+              </a:rPr>
+              <a:t xml:space="preserve">None of this looks like the engineering we were raised on. Do not do the work twice. Do not spend compute speculatively. One right answer per ticket. Those were axioms when the expensive thing was the engineer. When the expensive thing is being wrong, and a second draft costs cents, doing it three times and reading what disagrees is the frugal move. I am not a shill for Big Token. I am telling you that cheaper, safer and faster now sometimes come from spending exactly where yesterday's wisdom told you not to.</a:t>
+            </a:r>
+            <a:endParaRPr lang="en-US" sz="1200"/>
+          </a:p>
+          <a:p>
+            <a:pPr marL="0" indent="0">
+              <a:lnSpc>
+                <a:spcPts val="1560"/>
+              </a:lnSpc>
+              <a:spcAft>
+                <a:spcPts val="0"/>
+              </a:spcAft>
+              <a:buNone/>
+            </a:pPr>
+            <a:r>
+              <a:rPr lang="en-US" sz="1200" b="0">
+                <a:solidFill>
+                  <a:srgbClr val="202b33"/>
+                </a:solidFill>
+                <a:latin typeface="Arial"/>
+                <a:ea typeface="Arial"/>
+                <a:cs typeface="Arial"/>
+              </a:rPr>
+              <a:t xml:space="preserve"/>
+            </a:r>
+            <a:endParaRPr lang="en-US" sz="1200"/>
+          </a:p>
+          <a:p>
+            <a:pPr marL="0" indent="0">
+              <a:lnSpc>
+                <a:spcPts val="1560"/>
+              </a:lnSpc>
+              <a:spcAft>
+                <a:spcPts val="0"/>
+              </a:spcAft>
+              <a:buNone/>
+            </a:pPr>
+            <a:r>
+              <a:rPr lang="en-US" sz="1200" b="0">
+                <a:solidFill>
+                  <a:srgbClr val="202b33"/>
+                </a:solidFill>
+                <a:latin typeface="Arial"/>
+                <a:ea typeface="Arial"/>
+                <a:cs typeface="Arial"/>
+              </a:rPr>
+              <a:t xml:space="preserve">Source: Knight and Leveson (1986), [An Experimental Evaluation of the Assumption of Independence in Multiversion Programming](https://doi.org/10.1109/TSE.1986.6312924), IEEE Transactions on Software Engineering SE-12(1), 96 to 109. Cited to set aside: it is a result about redundancy as a correctness strategy, which this slide does not claim.</a:t>
+            </a:r>
+            <a:endParaRPr lang="en-US" sz="1200"/>
+          </a:p>
+          <a:p>
+            <a:pPr marL="0" indent="0">
+              <a:lnSpc>
+                <a:spcPts val="1560"/>
+              </a:lnSpc>
+              <a:spcAft>
+                <a:spcPts val="0"/>
+              </a:spcAft>
+              <a:buNone/>
+            </a:pPr>
+            <a:r>
+              <a:rPr lang="en-US" sz="1200" b="0">
+                <a:solidFill>
+                  <a:srgbClr val="202b33"/>
+                </a:solidFill>
+                <a:latin typeface="Arial"/>
+                <a:ea typeface="Arial"/>
+                <a:cs typeface="Arial"/>
+              </a:rPr>
+              <a:t xml:space="preserve"/>
+            </a:r>
+            <a:endParaRPr lang="en-US" sz="1200"/>
+          </a:p>
+          <a:p>
+            <a:pPr marL="0" indent="0">
+              <a:lnSpc>
+                <a:spcPts val="1560"/>
+              </a:lnSpc>
+              <a:spcAft>
+                <a:spcPts val="0"/>
+              </a:spcAft>
+              <a:buNone/>
+            </a:pPr>
+            <a:r>
+              <a:rPr lang="en-US" sz="1200" b="0">
+                <a:solidFill>
+                  <a:srgbClr val="202b33"/>
+                </a:solidFill>
+                <a:latin typeface="Arial"/>
+                <a:ea typeface="Arial"/>
+                <a:cs typeface="Arial"/>
+              </a:rPr>
+              <a:t xml:space="preserve">Stage direction: Score the three candidates in demo.md. Have the room find each candidate's failed gate before revealing it. Then show the council split per candidate: high agreement on the minimalist's failure, low overlap on the maintainer's, and ask which one deserves the human's afternoon.</a:t>
             </a:r>
             <a:endParaRPr lang="en-US" sz="1200"/>
           </a:p>
@@ -4876,7 +5429,7 @@
                 <a:ea typeface="Arial"/>
                 <a:cs typeface="Arial"/>
               </a:rPr>
-              <a:t xml:space="preserve">Put the limit where the work begins</a:t>
+              <a:t xml:space="preserve">Measure the accepted outcome</a:t>
             </a:r>
             <a:endParaRPr lang="en-US" sz="1200"/>
           </a:p>
@@ -4922,7 +5475,7 @@
                 <a:ea typeface="Arial"/>
                 <a:cs typeface="Arial"/>
               </a:rPr>
-              <a:t xml:space="preserve">37:00 to 40:00 · land</a:t>
+              <a:t xml:space="preserve">35:00 to 37:30 · land</a:t>
             </a:r>
             <a:endParaRPr lang="en-US" sz="1200"/>
           </a:p>
@@ -4968,53 +5521,53 @@
                 <a:ea typeface="Arial"/>
                 <a:cs typeface="Arial"/>
               </a:rPr>
-              <a:t xml:space="preserve">&gt; One ledger across every caller</a:t>
-            </a:r>
-            <a:endParaRPr lang="en-US" sz="1200"/>
-          </a:p>
-          <a:p>
-            <a:pPr marL="0" indent="0">
-              <a:lnSpc>
-                <a:spcPts val="1560"/>
-              </a:lnSpc>
-              <a:spcAft>
-                <a:spcPts val="0"/>
-              </a:spcAft>
-              <a:buNone/>
-            </a:pPr>
-            <a:r>
-              <a:rPr lang="en-US" sz="1200" b="0">
-                <a:solidFill>
-                  <a:srgbClr val="202b33"/>
-                </a:solidFill>
-                <a:latin typeface="Arial"/>
-                <a:ea typeface="Arial"/>
-                <a:cs typeface="Arial"/>
-              </a:rPr>
-              <a:t xml:space="preserve">&gt; Durable state across every restart</a:t>
-            </a:r>
-            <a:endParaRPr lang="en-US" sz="1200"/>
-          </a:p>
-          <a:p>
-            <a:pPr marL="0" indent="0">
-              <a:lnSpc>
-                <a:spcPts val="1560"/>
-              </a:lnSpc>
-              <a:spcAft>
-                <a:spcPts val="0"/>
-              </a:spcAft>
-              <a:buNone/>
-            </a:pPr>
-            <a:r>
-              <a:rPr lang="en-US" sz="1200" b="0">
-                <a:solidFill>
-                  <a:srgbClr val="202b33"/>
-                </a:solidFill>
-                <a:latin typeface="Arial"/>
-                <a:ea typeface="Arial"/>
-                <a:cs typeface="Arial"/>
-              </a:rPr>
-              <a:t xml:space="preserve">&gt; A lease on every box, a gate on every candidate</a:t>
+              <a:t xml:space="preserve">&gt; Latency: dispatch + queue + slowest branch + merge + verify</a:t>
+            </a:r>
+            <a:endParaRPr lang="en-US" sz="1200"/>
+          </a:p>
+          <a:p>
+            <a:pPr marL="0" indent="0">
+              <a:lnSpc>
+                <a:spcPts val="1560"/>
+              </a:lnSpc>
+              <a:spcAft>
+                <a:spcPts val="0"/>
+              </a:spcAft>
+              <a:buNone/>
+            </a:pPr>
+            <a:r>
+              <a:rPr lang="en-US" sz="1200" b="0">
+                <a:solidFill>
+                  <a:srgbClr val="202b33"/>
+                </a:solidFill>
+                <a:latin typeface="Arial"/>
+                <a:ea typeface="Arial"/>
+                <a:cs typeface="Arial"/>
+              </a:rPr>
+              <a:t xml:space="preserve">&gt; Cost: every candidate, every retry, every held reservation, review time</a:t>
+            </a:r>
+            <a:endParaRPr lang="en-US" sz="1200"/>
+          </a:p>
+          <a:p>
+            <a:pPr marL="0" indent="0">
+              <a:lnSpc>
+                <a:spcPts val="1560"/>
+              </a:lnSpc>
+              <a:spcAft>
+                <a:spcPts val="0"/>
+              </a:spcAft>
+              <a:buNone/>
+            </a:pPr>
+            <a:r>
+              <a:rPr lang="en-US" sz="1200" b="0">
+                <a:solidFill>
+                  <a:srgbClr val="202b33"/>
+                </a:solidFill>
+                <a:latin typeface="Arial"/>
+                <a:ea typeface="Arial"/>
+                <a:cs typeface="Arial"/>
+              </a:rPr>
+              <a:t xml:space="preserve">&gt; Compare against one competent attempt</a:t>
             </a:r>
             <a:endParaRPr lang="en-US" sz="1200"/>
           </a:p>
@@ -5060,7 +5613,7 @@
                 <a:ea typeface="Arial"/>
                 <a:cs typeface="Arial"/>
               </a:rPr>
-              <a:t xml:space="preserve">Back to the four callers. Forty jobs were legal by four local counters. The missing piece was one shared account of what the application had promised and what it had already started.</a:t>
+              <a:t xml:space="preserve">Starting three workers does not delete the serial parts. That is Amdahl, 1967, and it is unkind: if a tenth of the job is serial, ten workers get you five and a quarter times, and a hundred workers get you nine. Waiting on every branch can make a finished task slower. Count the whole thing: all candidates, failed work, reserved uncertainty, judging and human review, and compare against one competent attempt on the same task set.</a:t>
             </a:r>
             <a:endParaRPr lang="en-US" sz="1200"/>
           </a:p>
@@ -5106,7 +5659,7 @@
                 <a:ea typeface="Arial"/>
                 <a:cs typeface="Arial"/>
               </a:rPr>
-              <a:t xml:space="preserve">The inversion is real: the workload can now describe its own shape and ask for its own compute, and the substrate to grant it in seconds already exists. That is a better world than a warm fleet and a guess. It is only safe because the agent chooses from a catalog, spends from a ledger, and runs on boxes that expire.</a:t>
+              <a:t xml:space="preserve">Measure accepted outcomes, not launched workers. Start with one extra attempt or one batch boundary; if it does not buy quality, time or cost, keep the simpler path. We are trying to buy useful work, not maximize the number of things blinking.</a:t>
             </a:r>
             <a:endParaRPr lang="en-US" sz="1200"/>
           </a:p>
@@ -5152,7 +5705,7 @@
                 <a:ea typeface="Arial"/>
                 <a:cs typeface="Arial"/>
               </a:rPr>
-              <a:t xml:space="preserve">Inspect one expensive tool in your system. Count the work it can launch underneath itself. Put the limit where that work actually begins.</a:t>
+              <a:t xml:space="preserve">Source: Amdahl (1967), Validity of the single processor approach to achieving large scale computing capabilities, AFIPS Conference Proceedings 30, 483 to 485.</a:t>
             </a:r>
             <a:endParaRPr lang="en-US" sz="1200"/>
           </a:p>
@@ -5198,7 +5751,30 @@
                 <a:ea typeface="Arial"/>
                 <a:cs typeface="Arial"/>
               </a:rPr>
-              <a:t xml:space="preserve">Stage direction: Close on the multiplication and the shared admission line. Do not add a vendor.</a:t>
+              <a:t xml:space="preserve">Stage direction: Ninety seconds: choose a baseline, a cap and an acceptance gate. Keep latency and total cost as separate numbers.</a:t>
+            </a:r>
+            <a:endParaRPr lang="en-US" sz="1200"/>
+          </a:p>
+          <a:p>
+            <a:pPr marL="0" indent="0">
+              <a:lnSpc>
+                <a:spcPts val="1560"/>
+              </a:lnSpc>
+              <a:spcAft>
+                <a:spcPts val="0"/>
+              </a:spcAft>
+              <a:buNone/>
+            </a:pPr>
+            <a:r>
+              <a:rPr lang="en-US" sz="1200" b="0">
+                <a:solidFill>
+                  <a:srgbClr val="202b33"/>
+                </a:solidFill>
+                <a:latin typeface="Arial"/>
+                <a:ea typeface="Arial"/>
+                <a:cs typeface="Arial"/>
+              </a:rPr>
+              <a:t xml:space="preserve"/>
             </a:r>
             <a:endParaRPr lang="en-US" sz="1200"/>
           </a:p>
@@ -5763,6 +6339,418 @@
 </file>
 
 <file path=ppt/notesSlides/notesSlide20.xml><?xml version="1.0" encoding="utf-8"?>
+<p:notes xmlns:a="http://schemas.openxmlformats.org/drawingml/2006/main" xmlns:r="http://schemas.openxmlformats.org/officeDocument/2006/relationships" xmlns:p="http://schemas.openxmlformats.org/presentationml/2006/main">
+  <p:cSld>
+    <p:spTree>
+      <p:nvGrpSpPr>
+        <p:cNvPr id="1" name=""/>
+        <p:cNvGrpSpPr/>
+        <p:nvPr/>
+      </p:nvGrpSpPr>
+      <p:grpSpPr>
+        <a:xfrm>
+          <a:off x="0" y="0"/>
+          <a:ext cx="0" cy="0"/>
+          <a:chOff x="0" y="0"/>
+          <a:chExt cx="0" cy="0"/>
+        </a:xfrm>
+      </p:grpSpPr>
+      <p:sp>
+        <p:nvSpPr>
+          <p:cNvPr id="2" name="Presenter notes"/>
+          <p:cNvSpPr txBox="1"/>
+          <p:nvPr>
+            <p:ph type="body" idx="1"/>
+          </p:nvPr>
+        </p:nvSpPr>
+        <p:spPr>
+          <a:xfrm>
+            <a:off x="457200" y="1428750"/>
+            <a:ext cx="5715000" cy="6667500"/>
+          </a:xfrm>
+        </p:spPr>
+        <p:txBody>
+          <a:bodyPr/>
+          <a:lstStyle/>
+          <a:p>
+            <a:pPr marL="0" indent="0">
+              <a:lnSpc>
+                <a:spcPts val="1560"/>
+              </a:lnSpc>
+              <a:spcAft>
+                <a:spcPts val="0"/>
+              </a:spcAft>
+              <a:buNone/>
+            </a:pPr>
+            <a:r>
+              <a:rPr lang="en-US" sz="1200" b="0">
+                <a:solidFill>
+                  <a:srgbClr val="202b33"/>
+                </a:solidFill>
+                <a:latin typeface="Arial"/>
+                <a:ea typeface="Arial"/>
+                <a:cs typeface="Arial"/>
+              </a:rPr>
+              <a:t xml:space="preserve">Put the limit where the work begins</a:t>
+            </a:r>
+            <a:endParaRPr lang="en-US" sz="1200"/>
+          </a:p>
+          <a:p>
+            <a:pPr marL="0" indent="0">
+              <a:lnSpc>
+                <a:spcPts val="1560"/>
+              </a:lnSpc>
+              <a:spcAft>
+                <a:spcPts val="0"/>
+              </a:spcAft>
+              <a:buNone/>
+            </a:pPr>
+            <a:r>
+              <a:rPr lang="en-US" sz="1200" b="0">
+                <a:solidFill>
+                  <a:srgbClr val="202b33"/>
+                </a:solidFill>
+                <a:latin typeface="Arial"/>
+                <a:ea typeface="Arial"/>
+                <a:cs typeface="Arial"/>
+              </a:rPr>
+              <a:t xml:space="preserve"/>
+            </a:r>
+            <a:endParaRPr lang="en-US" sz="1200"/>
+          </a:p>
+          <a:p>
+            <a:pPr marL="0" indent="0">
+              <a:lnSpc>
+                <a:spcPts val="1560"/>
+              </a:lnSpc>
+              <a:spcAft>
+                <a:spcPts val="0"/>
+              </a:spcAft>
+              <a:buNone/>
+            </a:pPr>
+            <a:r>
+              <a:rPr lang="en-US" sz="1200" b="0">
+                <a:solidFill>
+                  <a:srgbClr val="202b33"/>
+                </a:solidFill>
+                <a:latin typeface="Arial"/>
+                <a:ea typeface="Arial"/>
+                <a:cs typeface="Arial"/>
+              </a:rPr>
+              <a:t xml:space="preserve">37:30 to 40:00 · land</a:t>
+            </a:r>
+            <a:endParaRPr lang="en-US" sz="1200"/>
+          </a:p>
+          <a:p>
+            <a:pPr marL="0" indent="0">
+              <a:lnSpc>
+                <a:spcPts val="1560"/>
+              </a:lnSpc>
+              <a:spcAft>
+                <a:spcPts val="0"/>
+              </a:spcAft>
+              <a:buNone/>
+            </a:pPr>
+            <a:r>
+              <a:rPr lang="en-US" sz="1200" b="0">
+                <a:solidFill>
+                  <a:srgbClr val="202b33"/>
+                </a:solidFill>
+                <a:latin typeface="Arial"/>
+                <a:ea typeface="Arial"/>
+                <a:cs typeface="Arial"/>
+              </a:rPr>
+              <a:t xml:space="preserve"/>
+            </a:r>
+            <a:endParaRPr lang="en-US" sz="1200"/>
+          </a:p>
+          <a:p>
+            <a:pPr marL="0" indent="0">
+              <a:lnSpc>
+                <a:spcPts val="1560"/>
+              </a:lnSpc>
+              <a:spcAft>
+                <a:spcPts val="0"/>
+              </a:spcAft>
+              <a:buNone/>
+            </a:pPr>
+            <a:r>
+              <a:rPr lang="en-US" sz="1200" b="0">
+                <a:solidFill>
+                  <a:srgbClr val="202b33"/>
+                </a:solidFill>
+                <a:latin typeface="Arial"/>
+                <a:ea typeface="Arial"/>
+                <a:cs typeface="Arial"/>
+              </a:rPr>
+              <a:t xml:space="preserve">&gt; One ledger across every caller</a:t>
+            </a:r>
+            <a:endParaRPr lang="en-US" sz="1200"/>
+          </a:p>
+          <a:p>
+            <a:pPr marL="0" indent="0">
+              <a:lnSpc>
+                <a:spcPts val="1560"/>
+              </a:lnSpc>
+              <a:spcAft>
+                <a:spcPts val="0"/>
+              </a:spcAft>
+              <a:buNone/>
+            </a:pPr>
+            <a:r>
+              <a:rPr lang="en-US" sz="1200" b="0">
+                <a:solidFill>
+                  <a:srgbClr val="202b33"/>
+                </a:solidFill>
+                <a:latin typeface="Arial"/>
+                <a:ea typeface="Arial"/>
+                <a:cs typeface="Arial"/>
+              </a:rPr>
+              <a:t xml:space="preserve">&gt; Durable state across every restart</a:t>
+            </a:r>
+            <a:endParaRPr lang="en-US" sz="1200"/>
+          </a:p>
+          <a:p>
+            <a:pPr marL="0" indent="0">
+              <a:lnSpc>
+                <a:spcPts val="1560"/>
+              </a:lnSpc>
+              <a:spcAft>
+                <a:spcPts val="0"/>
+              </a:spcAft>
+              <a:buNone/>
+            </a:pPr>
+            <a:r>
+              <a:rPr lang="en-US" sz="1200" b="0">
+                <a:solidFill>
+                  <a:srgbClr val="202b33"/>
+                </a:solidFill>
+                <a:latin typeface="Arial"/>
+                <a:ea typeface="Arial"/>
+                <a:cs typeface="Arial"/>
+              </a:rPr>
+              <a:t xml:space="preserve">&gt; A lease on every box, a gate on every candidate</a:t>
+            </a:r>
+            <a:endParaRPr lang="en-US" sz="1200"/>
+          </a:p>
+          <a:p>
+            <a:pPr marL="0" indent="0">
+              <a:lnSpc>
+                <a:spcPts val="1560"/>
+              </a:lnSpc>
+              <a:spcAft>
+                <a:spcPts val="0"/>
+              </a:spcAft>
+              <a:buNone/>
+            </a:pPr>
+            <a:r>
+              <a:rPr lang="en-US" sz="1200" b="0">
+                <a:solidFill>
+                  <a:srgbClr val="202b33"/>
+                </a:solidFill>
+                <a:latin typeface="Arial"/>
+                <a:ea typeface="Arial"/>
+                <a:cs typeface="Arial"/>
+              </a:rPr>
+              <a:t xml:space="preserve"/>
+            </a:r>
+            <a:endParaRPr lang="en-US" sz="1200"/>
+          </a:p>
+          <a:p>
+            <a:pPr marL="0" indent="0">
+              <a:lnSpc>
+                <a:spcPts val="1560"/>
+              </a:lnSpc>
+              <a:spcAft>
+                <a:spcPts val="0"/>
+              </a:spcAft>
+              <a:buNone/>
+            </a:pPr>
+            <a:r>
+              <a:rPr lang="en-US" sz="1200" b="0">
+                <a:solidFill>
+                  <a:srgbClr val="202b33"/>
+                </a:solidFill>
+                <a:latin typeface="Arial"/>
+                <a:ea typeface="Arial"/>
+                <a:cs typeface="Arial"/>
+              </a:rPr>
+              <a:t xml:space="preserve">Back to the four callers. Forty jobs were legal by four local counters. The missing piece was one shared account of what the application had promised and what it had already started.</a:t>
+            </a:r>
+            <a:endParaRPr lang="en-US" sz="1200"/>
+          </a:p>
+          <a:p>
+            <a:pPr marL="0" indent="0">
+              <a:lnSpc>
+                <a:spcPts val="1560"/>
+              </a:lnSpc>
+              <a:spcAft>
+                <a:spcPts val="0"/>
+              </a:spcAft>
+              <a:buNone/>
+            </a:pPr>
+            <a:r>
+              <a:rPr lang="en-US" sz="1200" b="0">
+                <a:solidFill>
+                  <a:srgbClr val="202b33"/>
+                </a:solidFill>
+                <a:latin typeface="Arial"/>
+                <a:ea typeface="Arial"/>
+                <a:cs typeface="Arial"/>
+              </a:rPr>
+              <a:t xml:space="preserve"/>
+            </a:r>
+            <a:endParaRPr lang="en-US" sz="1200"/>
+          </a:p>
+          <a:p>
+            <a:pPr marL="0" indent="0">
+              <a:lnSpc>
+                <a:spcPts val="1560"/>
+              </a:lnSpc>
+              <a:spcAft>
+                <a:spcPts val="0"/>
+              </a:spcAft>
+              <a:buNone/>
+            </a:pPr>
+            <a:r>
+              <a:rPr lang="en-US" sz="1200" b="0">
+                <a:solidFill>
+                  <a:srgbClr val="202b33"/>
+                </a:solidFill>
+                <a:latin typeface="Arial"/>
+                <a:ea typeface="Arial"/>
+                <a:cs typeface="Arial"/>
+              </a:rPr>
+              <a:t xml:space="preserve">The inversion is real: the workload can now describe its own shape and ask for its own compute, and the substrate to grant it in seconds already exists. That is a better world than a warm fleet and a guess. It is only safe because the agent chooses from a catalog, spends from a ledger, and runs on boxes that expire.</a:t>
+            </a:r>
+            <a:endParaRPr lang="en-US" sz="1200"/>
+          </a:p>
+          <a:p>
+            <a:pPr marL="0" indent="0">
+              <a:lnSpc>
+                <a:spcPts val="1560"/>
+              </a:lnSpc>
+              <a:spcAft>
+                <a:spcPts val="0"/>
+              </a:spcAft>
+              <a:buNone/>
+            </a:pPr>
+            <a:r>
+              <a:rPr lang="en-US" sz="1200" b="0">
+                <a:solidFill>
+                  <a:srgbClr val="202b33"/>
+                </a:solidFill>
+                <a:latin typeface="Arial"/>
+                <a:ea typeface="Arial"/>
+                <a:cs typeface="Arial"/>
+              </a:rPr>
+              <a:t xml:space="preserve"/>
+            </a:r>
+            <a:endParaRPr lang="en-US" sz="1200"/>
+          </a:p>
+          <a:p>
+            <a:pPr marL="0" indent="0">
+              <a:lnSpc>
+                <a:spcPts val="1560"/>
+              </a:lnSpc>
+              <a:spcAft>
+                <a:spcPts val="0"/>
+              </a:spcAft>
+              <a:buNone/>
+            </a:pPr>
+            <a:r>
+              <a:rPr lang="en-US" sz="1200" b="0">
+                <a:solidFill>
+                  <a:srgbClr val="202b33"/>
+                </a:solidFill>
+                <a:latin typeface="Arial"/>
+                <a:ea typeface="Arial"/>
+                <a:cs typeface="Arial"/>
+              </a:rPr>
+              <a:t xml:space="preserve">Inspect one expensive tool in your system. Count the work it can launch underneath itself. Put the limit where that work actually begins.</a:t>
+            </a:r>
+            <a:endParaRPr lang="en-US" sz="1200"/>
+          </a:p>
+          <a:p>
+            <a:pPr marL="0" indent="0">
+              <a:lnSpc>
+                <a:spcPts val="1560"/>
+              </a:lnSpc>
+              <a:spcAft>
+                <a:spcPts val="0"/>
+              </a:spcAft>
+              <a:buNone/>
+            </a:pPr>
+            <a:r>
+              <a:rPr lang="en-US" sz="1200" b="0">
+                <a:solidFill>
+                  <a:srgbClr val="202b33"/>
+                </a:solidFill>
+                <a:latin typeface="Arial"/>
+                <a:ea typeface="Arial"/>
+                <a:cs typeface="Arial"/>
+              </a:rPr>
+              <a:t xml:space="preserve"/>
+            </a:r>
+            <a:endParaRPr lang="en-US" sz="1200"/>
+          </a:p>
+          <a:p>
+            <a:pPr marL="0" indent="0">
+              <a:lnSpc>
+                <a:spcPts val="1560"/>
+              </a:lnSpc>
+              <a:spcAft>
+                <a:spcPts val="0"/>
+              </a:spcAft>
+              <a:buNone/>
+            </a:pPr>
+            <a:r>
+              <a:rPr lang="en-US" sz="1200" b="0">
+                <a:solidFill>
+                  <a:srgbClr val="202b33"/>
+                </a:solidFill>
+                <a:latin typeface="Arial"/>
+                <a:ea typeface="Arial"/>
+                <a:cs typeface="Arial"/>
+              </a:rPr>
+              <a:t xml:space="preserve">Stage direction: Close on the multiplication and the shared admission line. Do not add a vendor.</a:t>
+            </a:r>
+            <a:endParaRPr lang="en-US" sz="1200"/>
+          </a:p>
+          <a:p>
+            <a:pPr marL="0" indent="0">
+              <a:lnSpc>
+                <a:spcPts val="1560"/>
+              </a:lnSpc>
+              <a:spcAft>
+                <a:spcPts val="0"/>
+              </a:spcAft>
+              <a:buNone/>
+            </a:pPr>
+            <a:r>
+              <a:rPr lang="en-US" sz="1200" b="0">
+                <a:solidFill>
+                  <a:srgbClr val="202b33"/>
+                </a:solidFill>
+                <a:latin typeface="Arial"/>
+                <a:ea typeface="Arial"/>
+                <a:cs typeface="Arial"/>
+              </a:rPr>
+              <a:t xml:space="preserve"/>
+            </a:r>
+            <a:endParaRPr lang="en-US" sz="1200"/>
+          </a:p>
+        </p:txBody>
+      </p:sp>
+    </p:spTree>
+  </p:cSld>
+  <p:clrMapOvr>
+    <a:masterClrMapping/>
+  </p:clrMapOvr>
+</p:notes>
+</file>
+
+<file path=ppt/notesSlides/notesSlide21.xml><?xml version="1.0" encoding="utf-8"?>
 <p:notes xmlns:a="http://schemas.openxmlformats.org/drawingml/2006/main" xmlns:r="http://schemas.openxmlformats.org/officeDocument/2006/relationships" xmlns:p="http://schemas.openxmlformats.org/presentationml/2006/main">
   <p:cSld>
     <p:spTree>
@@ -13707,7 +14695,7 @@
                 <a:ea typeface="Arial"/>
                 <a:cs typeface="Arial"/>
               </a:rPr>
-              <a:t xml:space="preserve">Same brief, contrasting priorities, separate first</a:t>
+              <a:t xml:space="preserve">Barrel of monkeys: lead with cheap parallel</a:t>
             </a:r>
             <a:endParaRPr lang="en-US" sz="1200"/>
           </a:p>
@@ -13730,7 +14718,7 @@
                 <a:ea typeface="Arial"/>
                 <a:cs typeface="Arial"/>
               </a:rPr>
-              <a:t xml:space="preserve">drafts</a:t>
+              <a:t xml:space="preserve">generation, on purpose</a:t>
             </a:r>
             <a:endParaRPr lang="en-US" sz="1200"/>
           </a:p>
@@ -13776,7 +14764,7 @@
                 <a:ea typeface="Arial"/>
                 <a:cs typeface="Arial"/>
               </a:rPr>
-              <a:t xml:space="preserve">A judge reads a thousand tokens and writes fifty. Run</a:t>
+              <a:t xml:space="preserve">Council of guards: judges read a thousand tokens and</a:t>
             </a:r>
             <a:endParaRPr lang="en-US" sz="1200"/>
           </a:p>
@@ -13799,7 +14787,7 @@
                 <a:ea typeface="Arial"/>
                 <a:cs typeface="Arial"/>
               </a:rPr>
-              <a:t xml:space="preserve">a council. Measure the disagreement.</a:t>
+              <a:t xml:space="preserve">write fifty; measure the disagreement</a:t>
             </a:r>
             <a:endParaRPr lang="en-US" sz="1200"/>
           </a:p>
@@ -15557,7 +16545,7 @@
                 <a:ea typeface="Arial"/>
                 <a:cs typeface="Arial"/>
               </a:rPr>
-              <a:t xml:space="preserve">Write the gates before reading the</a:t>
+              <a:t xml:space="preserve">The generation side has a name too, and I</a:t>
             </a:r>
             <a:endParaRPr lang="en-US" sz="1500"/>
           </a:p>
@@ -15580,7 +16568,7 @@
                 <a:ea typeface="Arial"/>
                 <a:cs typeface="Arial"/>
               </a:rPr>
-              <a:t xml:space="preserve">candidates: no duplicate dispatch after</a:t>
+              <a:t xml:space="preserve">am not sorry about it: the</a:t>
             </a:r>
             <a:endParaRPr lang="en-US" sz="1500"/>
           </a:p>
@@ -15603,7 +16591,7 @@
                 <a:ea typeface="Arial"/>
                 <a:cs typeface="Arial"/>
               </a:rPr>
-              <a:t xml:space="preserve">restart, no cross-tenant spend, no</a:t>
+              <a:t xml:space="preserve">barrel-of-monkeys maneuver. Lead with</a:t>
             </a:r>
             <a:endParaRPr lang="en-US" sz="1500"/>
           </a:p>
@@ -15626,7 +16614,7 @@
                 <a:ea typeface="Arial"/>
                 <a:cs typeface="Arial"/>
               </a:rPr>
-              <a:t xml:space="preserve">regeneration on notification retry, no</a:t>
+              <a:t xml:space="preserve">parallel generation on purpose. You are</a:t>
             </a:r>
             <a:endParaRPr lang="en-US" sz="1500"/>
           </a:p>
@@ -15649,7 +16637,7 @@
                 <a:ea typeface="Arial"/>
                 <a:cs typeface="Arial"/>
               </a:rPr>
-              <a:t xml:space="preserve">dispatch after deadline. Run executable</a:t>
+              <a:t xml:space="preserve">adding a controlled section of chaos that</a:t>
             </a:r>
             <a:endParaRPr lang="en-US" sz="1500"/>
           </a:p>
@@ -15672,7 +16660,7 @@
                 <a:ea typeface="Arial"/>
                 <a:cs typeface="Arial"/>
               </a:rPr>
-              <a:t xml:space="preserve">checks first. In the exercise every</a:t>
+              <a:t xml:space="preserve">the next stage has to handle: a revision</a:t>
             </a:r>
             <a:endParaRPr lang="en-US" sz="1500"/>
           </a:p>
@@ -15695,7 +16683,7 @@
                 <a:ea typeface="Arial"/>
                 <a:cs typeface="Arial"/>
               </a:rPr>
-              <a:t xml:space="preserve">candidate fails a gate, including the</a:t>
+              <a:t xml:space="preserve">loop, a router, the council, or your users</a:t>
             </a:r>
             <a:endParaRPr lang="en-US" sz="1500"/>
           </a:p>
@@ -15718,7 +16706,7 @@
                 <a:ea typeface="Arial"/>
                 <a:cs typeface="Arial"/>
               </a:rPr>
-              <a:t xml:space="preserve">careful one, which is the point: the</a:t>
+              <a:t xml:space="preserve">in an A/B test. Why you would want the</a:t>
             </a:r>
             <a:endParaRPr lang="en-US" sz="1500"/>
           </a:p>
@@ -15741,7 +16729,7 @@
                 <a:ea typeface="Arial"/>
                 <a:cs typeface="Arial"/>
               </a:rPr>
-              <a:t xml:space="preserve">council is allowed to reject the room. Then</a:t>
+              <a:t xml:space="preserve">chaos varies. Sometimes you want the</a:t>
             </a:r>
             <a:endParaRPr lang="en-US" sz="1500"/>
           </a:p>
@@ -15764,7 +16752,7 @@
                 <a:ea typeface="Arial"/>
                 <a:cs typeface="Arial"/>
               </a:rPr>
-              <a:t xml:space="preserve">combine compatible ideas into a new</a:t>
+              <a:t xml:space="preserve">fastest answer, so you race. Sometimes you</a:t>
             </a:r>
             <a:endParaRPr lang="en-US" sz="1500"/>
           </a:p>
@@ -15787,7 +16775,7 @@
                 <a:ea typeface="Arial"/>
                 <a:cs typeface="Arial"/>
               </a:rPr>
-              <a:t xml:space="preserve">candidate with one coherent set of</a:t>
+              <a:t xml:space="preserve">want the best parts of several, so a</a:t>
             </a:r>
             <a:endParaRPr lang="en-US" sz="1500"/>
           </a:p>
@@ -15810,7 +16798,7 @@
                 <a:ea typeface="Arial"/>
                 <a:cs typeface="Arial"/>
               </a:rPr>
-              <a:t xml:space="preserve">assumptions and run the gates again.</a:t>
+              <a:t xml:space="preserve">frontier model, whose input tokens are the</a:t>
             </a:r>
             <a:endParaRPr lang="en-US" sz="1500"/>
           </a:p>
@@ -15833,7 +16821,7 @@
                 <a:ea typeface="Arial"/>
                 <a:cs typeface="Arial"/>
               </a:rPr>
-              <a:t xml:space="preserve">Passing parts do not make a passing whole.</a:t>
+              <a:t xml:space="preserve">cheap ones, reads all of them and writes</a:t>
             </a:r>
             <a:endParaRPr lang="en-US" sz="1500"/>
           </a:p>
@@ -15856,7 +16844,7 @@
                 <a:ea typeface="Arial"/>
                 <a:cs typeface="Arial"/>
               </a:rPr>
-              <a:t xml:space="preserve">Stop at the review budget; an endless</a:t>
+              <a:t xml:space="preserve">one coherent output. Sometimes you just</a:t>
             </a:r>
             <a:endParaRPr lang="en-US" sz="1500"/>
           </a:p>
@@ -15879,7 +16867,76 @@
                 <a:ea typeface="Arial"/>
                 <a:cs typeface="Arial"/>
               </a:rPr>
-              <a:t xml:space="preserve">debate is an expensive way to not ship.</a:t>
+              <a:t xml:space="preserve">want more candidates for the judges to rank</a:t>
+            </a:r>
+            <a:endParaRPr lang="en-US" sz="1500"/>
+          </a:p>
+          <a:p>
+            <a:pPr marL="0" indent="0">
+              <a:lnSpc>
+                <a:spcPts val="1950"/>
+              </a:lnSpc>
+              <a:spcAft>
+                <a:spcPts val="0"/>
+              </a:spcAft>
+              <a:buNone/>
+            </a:pPr>
+            <a:r>
+              <a:rPr lang="en-US" sz="1500" b="0">
+                <a:solidFill>
+                  <a:srgbClr val="202B33"/>
+                </a:solidFill>
+                <a:latin typeface="Arial"/>
+                <a:ea typeface="Arial"/>
+                <a:cs typeface="Arial"/>
+              </a:rPr>
+              <a:t xml:space="preserve">so the best whole answer goes downstream.</a:t>
+            </a:r>
+            <a:endParaRPr lang="en-US" sz="1500"/>
+          </a:p>
+          <a:p>
+            <a:pPr marL="0" indent="0">
+              <a:lnSpc>
+                <a:spcPts val="1950"/>
+              </a:lnSpc>
+              <a:spcAft>
+                <a:spcPts val="0"/>
+              </a:spcAft>
+              <a:buNone/>
+            </a:pPr>
+            <a:r>
+              <a:rPr lang="en-US" sz="1500" b="0">
+                <a:solidFill>
+                  <a:srgbClr val="202B33"/>
+                </a:solidFill>
+                <a:latin typeface="Arial"/>
+                <a:ea typeface="Arial"/>
+                <a:cs typeface="Arial"/>
+              </a:rPr>
+              <a:t xml:space="preserve">In law or medicine, where the rules are</a:t>
+            </a:r>
+            <a:endParaRPr lang="en-US" sz="1500"/>
+          </a:p>
+          <a:p>
+            <a:pPr marL="0" indent="0">
+              <a:lnSpc>
+                <a:spcPts val="1950"/>
+              </a:lnSpc>
+              <a:spcAft>
+                <a:spcPts val="0"/>
+              </a:spcAft>
+              <a:buNone/>
+            </a:pPr>
+            <a:r>
+              <a:rPr lang="en-US" sz="1500" b="0">
+                <a:solidFill>
+                  <a:srgbClr val="202B33"/>
+                </a:solidFill>
+                <a:latin typeface="Arial"/>
+                <a:ea typeface="Arial"/>
+                <a:cs typeface="Arial"/>
+              </a:rPr>
+              <a:t xml:space="preserve">extensive and specific, that is how you</a:t>
             </a:r>
             <a:endParaRPr lang="en-US" sz="1500"/>
           </a:p>
@@ -15928,7 +16985,7 @@
                 <a:ea typeface="Arial"/>
                 <a:cs typeface="Arial"/>
               </a:rPr>
-              <a:t xml:space="preserve"/>
+              <a:t xml:space="preserve">catch the one errant mistake that shows up</a:t>
             </a:r>
             <a:endParaRPr lang="en-US" sz="1500"/>
           </a:p>
@@ -15951,7 +17008,7 @@
                 <a:ea typeface="Arial"/>
                 <a:cs typeface="Arial"/>
               </a:rPr>
-              <a:t xml:space="preserve">None of this looks like the engineering we</a:t>
+              <a:t xml:space="preserve">in one output out of ten. And the monkeys</a:t>
             </a:r>
             <a:endParaRPr lang="en-US" sz="1500"/>
           </a:p>
@@ -15974,7 +17031,7 @@
                 <a:ea typeface="Arial"/>
                 <a:cs typeface="Arial"/>
               </a:rPr>
-              <a:t xml:space="preserve">were raised on. Do not do the work twice.</a:t>
+              <a:t xml:space="preserve">can be cheap: models at a hundredth or a</a:t>
             </a:r>
             <a:endParaRPr lang="en-US" sz="1500"/>
           </a:p>
@@ -15997,7 +17054,7 @@
                 <a:ea typeface="Arial"/>
                 <a:cs typeface="Arial"/>
               </a:rPr>
-              <a:t xml:space="preserve">Do not spend compute speculatively. One</a:t>
+              <a:t xml:space="preserve">thousandth the price of the frontier,</a:t>
             </a:r>
             <a:endParaRPr lang="en-US" sz="1500"/>
           </a:p>
@@ -16020,7 +17077,7 @@
                 <a:ea typeface="Arial"/>
                 <a:cs typeface="Arial"/>
               </a:rPr>
-              <a:t xml:space="preserve">right answer per ticket. Those were axioms</a:t>
+              <a:t xml:space="preserve">generating alternatives in a loop. Some of</a:t>
             </a:r>
             <a:endParaRPr lang="en-US" sz="1500"/>
           </a:p>
@@ -16043,7 +17100,7 @@
                 <a:ea typeface="Arial"/>
                 <a:cs typeface="Arial"/>
               </a:rPr>
-              <a:t xml:space="preserve">when the expensive thing was the engineer.</a:t>
+              <a:t xml:space="preserve">them need a tool-calling agent with files,</a:t>
             </a:r>
             <a:endParaRPr lang="en-US" sz="1500"/>
           </a:p>
@@ -16066,7 +17123,7 @@
                 <a:ea typeface="Arial"/>
                 <a:cs typeface="Arial"/>
               </a:rPr>
-              <a:t xml:space="preserve">When the expensive thing is being wrong,</a:t>
+              <a:t xml:space="preserve">search and git, which means a sandbox and</a:t>
             </a:r>
             <a:endParaRPr lang="en-US" sz="1500"/>
           </a:p>
@@ -16089,7 +17146,7 @@
                 <a:ea typeface="Arial"/>
                 <a:cs typeface="Arial"/>
               </a:rPr>
-              <a:t xml:space="preserve">and a second draft costs cents, doing it</a:t>
+              <a:t xml:space="preserve">somebody's cloud; others single-shot it</a:t>
             </a:r>
             <a:endParaRPr lang="en-US" sz="1500"/>
           </a:p>
@@ -16112,7 +17169,7 @@
                 <a:ea typeface="Arial"/>
                 <a:cs typeface="Arial"/>
               </a:rPr>
-              <a:t xml:space="preserve">three times and reading what disagrees is</a:t>
+              <a:t xml:space="preserve">fine. That is an architecture question</a:t>
             </a:r>
             <a:endParaRPr lang="en-US" sz="1500"/>
           </a:p>
@@ -16135,7 +17192,7 @@
                 <a:ea typeface="Arial"/>
                 <a:cs typeface="Arial"/>
               </a:rPr>
-              <a:t xml:space="preserve">the frugal move. I am not a shill for Big</a:t>
+              <a:t xml:space="preserve">about how much effort you want in a system</a:t>
             </a:r>
             <a:endParaRPr lang="en-US" sz="1500"/>
           </a:p>
@@ -16158,7 +17215,7 @@
                 <a:ea typeface="Arial"/>
                 <a:cs typeface="Arial"/>
               </a:rPr>
-              <a:t xml:space="preserve">Token. I am telling you that cheaper, safer</a:t>
+              <a:t xml:space="preserve">that keeps improving versus one you can</a:t>
             </a:r>
             <a:endParaRPr lang="en-US" sz="1500"/>
           </a:p>
@@ -16181,7 +17238,7 @@
                 <a:ea typeface="Arial"/>
                 <a:cs typeface="Arial"/>
               </a:rPr>
-              <a:t xml:space="preserve">and faster now sometimes come from spending</a:t>
+              <a:t xml:space="preserve">retune at runtime. Fan-out is a tool you</a:t>
             </a:r>
             <a:endParaRPr lang="en-US" sz="1500"/>
           </a:p>
@@ -16204,7 +17261,7 @@
                 <a:ea typeface="Arial"/>
                 <a:cs typeface="Arial"/>
               </a:rPr>
-              <a:t xml:space="preserve">exactly where yesterday's wisdom told you</a:t>
+              <a:t xml:space="preserve">encapsulate at points in the graph: default</a:t>
             </a:r>
             <a:endParaRPr lang="en-US" sz="1500"/>
           </a:p>
@@ -16227,7 +17284,76 @@
                 <a:ea typeface="Arial"/>
                 <a:cs typeface="Arial"/>
               </a:rPr>
-              <a:t xml:space="preserve">not to.</a:t>
+              <a:t xml:space="preserve">model most of the time, n alternatives for</a:t>
+            </a:r>
+            <a:endParaRPr lang="en-US" sz="1500"/>
+          </a:p>
+          <a:p>
+            <a:pPr marL="0" indent="0">
+              <a:lnSpc>
+                <a:spcPts val="1950"/>
+              </a:lnSpc>
+              <a:spcAft>
+                <a:spcPts val="0"/>
+              </a:spcAft>
+              <a:buNone/>
+            </a:pPr>
+            <a:r>
+              <a:rPr lang="en-US" sz="1500" b="0">
+                <a:solidFill>
+                  <a:srgbClr val="202B33"/>
+                </a:solidFill>
+                <a:latin typeface="Arial"/>
+                <a:ea typeface="Arial"/>
+                <a:cs typeface="Arial"/>
+              </a:rPr>
+              <a:t xml:space="preserve">a sample of requests. Your needs and your</a:t>
+            </a:r>
+            <a:endParaRPr lang="en-US" sz="1500"/>
+          </a:p>
+          <a:p>
+            <a:pPr marL="0" indent="0">
+              <a:lnSpc>
+                <a:spcPts val="1950"/>
+              </a:lnSpc>
+              <a:spcAft>
+                <a:spcPts val="0"/>
+              </a:spcAft>
+              <a:buNone/>
+            </a:pPr>
+            <a:r>
+              <a:rPr lang="en-US" sz="1500" b="0">
+                <a:solidFill>
+                  <a:srgbClr val="202B33"/>
+                </a:solidFill>
+                <a:latin typeface="Arial"/>
+                <a:ea typeface="Arial"/>
+                <a:cs typeface="Arial"/>
+              </a:rPr>
+              <a:t xml:space="preserve">opportunities decide why, where and how</a:t>
+            </a:r>
+            <a:endParaRPr lang="en-US" sz="1500"/>
+          </a:p>
+          <a:p>
+            <a:pPr marL="0" indent="0">
+              <a:lnSpc>
+                <a:spcPts val="1950"/>
+              </a:lnSpc>
+              <a:spcAft>
+                <a:spcPts val="0"/>
+              </a:spcAft>
+              <a:buNone/>
+            </a:pPr>
+            <a:r>
+              <a:rPr lang="en-US" sz="1500" b="0">
+                <a:solidFill>
+                  <a:srgbClr val="202B33"/>
+                </a:solidFill>
+                <a:latin typeface="Arial"/>
+                <a:ea typeface="Arial"/>
+                <a:cs typeface="Arial"/>
+              </a:rPr>
+              <a:t xml:space="preserve">often.</a:t>
             </a:r>
             <a:endParaRPr lang="en-US" sz="1500"/>
           </a:p>
@@ -16407,7 +17533,7 @@
                 <a:ea typeface="Arial"/>
                 <a:cs typeface="Arial"/>
               </a:rPr>
-              <a:t xml:space="preserve">13 / 14    SOURCE SLIDE 13</a:t>
+              <a:t xml:space="preserve">12 / 14    SOURCE SLIDE 12</a:t>
             </a:r>
             <a:endParaRPr lang="en-US" sz="1050"/>
           </a:p>
@@ -16456,7 +17582,30 @@
                 <a:ea typeface="Arial"/>
                 <a:cs typeface="Arial"/>
               </a:rPr>
-              <a:t xml:space="preserve">Measure the accepted outcome</a:t>
+              <a:t xml:space="preserve">Attempts are a scaling axis. So is judging.</a:t>
+            </a:r>
+            <a:endParaRPr lang="en-US" sz="2550"/>
+          </a:p>
+          <a:p>
+            <a:pPr marL="0" indent="0">
+              <a:lnSpc>
+                <a:spcPts val="3060"/>
+              </a:lnSpc>
+              <a:spcAft>
+                <a:spcPts val="0"/>
+              </a:spcAft>
+              <a:buNone/>
+            </a:pPr>
+            <a:r>
+              <a:rPr lang="en-US" sz="2550" b="1">
+                <a:solidFill>
+                  <a:srgbClr val="202B33"/>
+                </a:solidFill>
+                <a:latin typeface="Arial"/>
+                <a:ea typeface="Arial"/>
+                <a:cs typeface="Arial"/>
+              </a:rPr>
+              <a:t xml:space="preserve">(continued)</a:t>
             </a:r>
             <a:endParaRPr lang="en-US" sz="2550"/>
           </a:p>
@@ -16505,7 +17654,7 @@
                 <a:ea typeface="Arial"/>
                 <a:cs typeface="Arial"/>
               </a:rPr>
-              <a:t xml:space="preserve">Latency: dispatch + queue + slowest branch</a:t>
+              <a:t xml:space="preserve">Does this border on speculative</a:t>
             </a:r>
             <a:endParaRPr lang="en-US" sz="1500"/>
           </a:p>
@@ -16528,7 +17677,7 @@
                 <a:ea typeface="Arial"/>
                 <a:cs typeface="Arial"/>
               </a:rPr>
-              <a:t xml:space="preserve">+ merge + verify</a:t>
+              <a:t xml:space="preserve">optimization dressed up as learning? Yes,</a:t>
             </a:r>
             <a:endParaRPr lang="en-US" sz="1500"/>
           </a:p>
@@ -16551,6 +17700,144 @@
                 <a:ea typeface="Arial"/>
                 <a:cs typeface="Arial"/>
               </a:rPr>
+              <a:t xml:space="preserve">possibly. Probably sometimes. We will find</a:t>
+            </a:r>
+            <a:endParaRPr lang="en-US" sz="1500"/>
+          </a:p>
+          <a:p>
+            <a:pPr marL="0" indent="0">
+              <a:lnSpc>
+                <a:spcPts val="1950"/>
+              </a:lnSpc>
+              <a:spcAft>
+                <a:spcPts val="0"/>
+              </a:spcAft>
+              <a:buNone/>
+            </a:pPr>
+            <a:r>
+              <a:rPr lang="en-US" sz="1500" b="0">
+                <a:solidFill>
+                  <a:srgbClr val="202B33"/>
+                </a:solidFill>
+                <a:latin typeface="Arial"/>
+                <a:ea typeface="Arial"/>
+                <a:cs typeface="Arial"/>
+              </a:rPr>
+              <a:t xml:space="preserve">out. So do not build any of it without env</a:t>
+            </a:r>
+            <a:endParaRPr lang="en-US" sz="1500"/>
+          </a:p>
+          <a:p>
+            <a:pPr marL="0" indent="0">
+              <a:lnSpc>
+                <a:spcPts val="1950"/>
+              </a:lnSpc>
+              <a:spcAft>
+                <a:spcPts val="0"/>
+              </a:spcAft>
+              <a:buNone/>
+            </a:pPr>
+            <a:r>
+              <a:rPr lang="en-US" sz="1500" b="0">
+                <a:solidFill>
+                  <a:srgbClr val="202B33"/>
+                </a:solidFill>
+                <a:latin typeface="Arial"/>
+                <a:ea typeface="Arial"/>
+                <a:cs typeface="Arial"/>
+              </a:rPr>
+              <a:t xml:space="preserve">vars to turn it down, and ideally build the</a:t>
+            </a:r>
+            <a:endParaRPr lang="en-US" sz="1500"/>
+          </a:p>
+          <a:p>
+            <a:pPr marL="0" indent="0">
+              <a:lnSpc>
+                <a:spcPts val="1950"/>
+              </a:lnSpc>
+              <a:spcAft>
+                <a:spcPts val="0"/>
+              </a:spcAft>
+              <a:buNone/>
+            </a:pPr>
+            <a:r>
+              <a:rPr lang="en-US" sz="1500" b="0">
+                <a:solidFill>
+                  <a:srgbClr val="202B33"/>
+                </a:solidFill>
+                <a:latin typeface="Arial"/>
+                <a:ea typeface="Arial"/>
+                <a:cs typeface="Arial"/>
+              </a:rPr>
+              <a:t xml:space="preserve">system that adjusts its own fan-out and</a:t>
+            </a:r>
+            <a:endParaRPr lang="en-US" sz="1500"/>
+          </a:p>
+          <a:p>
+            <a:pPr marL="0" indent="0">
+              <a:lnSpc>
+                <a:spcPts val="1950"/>
+              </a:lnSpc>
+              <a:spcAft>
+                <a:spcPts val="0"/>
+              </a:spcAft>
+              <a:buNone/>
+            </a:pPr>
+            <a:r>
+              <a:rPr lang="en-US" sz="1500" b="0">
+                <a:solidFill>
+                  <a:srgbClr val="202B33"/>
+                </a:solidFill>
+                <a:latin typeface="Arial"/>
+                <a:ea typeface="Arial"/>
+                <a:cs typeface="Arial"/>
+              </a:rPr>
+              <a:t xml:space="preserve">token burn from what it measures. Right?</a:t>
+            </a:r>
+            <a:endParaRPr lang="en-US" sz="1500"/>
+          </a:p>
+          <a:p>
+            <a:pPr marL="0" indent="0">
+              <a:lnSpc>
+                <a:spcPts val="1950"/>
+              </a:lnSpc>
+              <a:spcAft>
+                <a:spcPts val="0"/>
+              </a:spcAft>
+              <a:buNone/>
+            </a:pPr>
+            <a:r>
+              <a:rPr lang="en-US" sz="1500" b="0">
+                <a:solidFill>
+                  <a:srgbClr val="202B33"/>
+                </a:solidFill>
+                <a:latin typeface="Arial"/>
+                <a:ea typeface="Arial"/>
+                <a:cs typeface="Arial"/>
+              </a:rPr>
+              <a:t xml:space="preserve">Right. That system is the companion talk.</a:t>
+            </a:r>
+            <a:endParaRPr lang="en-US" sz="1500"/>
+          </a:p>
+          <a:p>
+            <a:pPr marL="0" indent="0">
+              <a:lnSpc>
+                <a:spcPts val="1950"/>
+              </a:lnSpc>
+              <a:spcAft>
+                <a:spcPts val="0"/>
+              </a:spcAft>
+              <a:buNone/>
+            </a:pPr>
+            <a:r>
+              <a:rPr lang="en-US" sz="1500" b="0">
+                <a:solidFill>
+                  <a:srgbClr val="202B33"/>
+                </a:solidFill>
+                <a:latin typeface="Arial"/>
+                <a:ea typeface="Arial"/>
+                <a:cs typeface="Arial"/>
+              </a:rPr>
               <a:t xml:space="preserve"/>
             </a:r>
             <a:endParaRPr lang="en-US" sz="1500"/>
@@ -16574,7 +17861,7 @@
                 <a:ea typeface="Arial"/>
                 <a:cs typeface="Arial"/>
               </a:rPr>
-              <a:t xml:space="preserve">Cost: every candidate, every retry, every</a:t>
+              <a:t xml:space="preserve">Write the gates before reading the</a:t>
             </a:r>
             <a:endParaRPr lang="en-US" sz="1500"/>
           </a:p>
@@ -16597,7 +17884,7 @@
                 <a:ea typeface="Arial"/>
                 <a:cs typeface="Arial"/>
               </a:rPr>
-              <a:t xml:space="preserve">held reservation, review time</a:t>
+              <a:t xml:space="preserve">candidates: no duplicate dispatch after</a:t>
             </a:r>
             <a:endParaRPr lang="en-US" sz="1500"/>
           </a:p>
@@ -16620,7 +17907,7 @@
                 <a:ea typeface="Arial"/>
                 <a:cs typeface="Arial"/>
               </a:rPr>
-              <a:t xml:space="preserve"/>
+              <a:t xml:space="preserve">restart, no cross-tenant spend, no</a:t>
             </a:r>
             <a:endParaRPr lang="en-US" sz="1500"/>
           </a:p>
@@ -16643,7 +17930,7 @@
                 <a:ea typeface="Arial"/>
                 <a:cs typeface="Arial"/>
               </a:rPr>
-              <a:t xml:space="preserve">Compare against one competent attempt</a:t>
+              <a:t xml:space="preserve">regeneration on notification retry, no</a:t>
             </a:r>
             <a:endParaRPr lang="en-US" sz="1500"/>
           </a:p>
@@ -16666,7 +17953,7 @@
                 <a:ea typeface="Arial"/>
                 <a:cs typeface="Arial"/>
               </a:rPr>
-              <a:t xml:space="preserve"/>
+              <a:t xml:space="preserve">dispatch after deadline. Run executable</a:t>
             </a:r>
             <a:endParaRPr lang="en-US" sz="1500"/>
           </a:p>
@@ -16689,7 +17976,7 @@
                 <a:ea typeface="Arial"/>
                 <a:cs typeface="Arial"/>
               </a:rPr>
-              <a:t xml:space="preserve">Starting three workers does not delete the</a:t>
+              <a:t xml:space="preserve">checks first. In the exercise every</a:t>
             </a:r>
             <a:endParaRPr lang="en-US" sz="1500"/>
           </a:p>
@@ -16712,7 +17999,7 @@
                 <a:ea typeface="Arial"/>
                 <a:cs typeface="Arial"/>
               </a:rPr>
-              <a:t xml:space="preserve">serial parts. That is Amdahl, 1967, and it</a:t>
+              <a:t xml:space="preserve">candidate fails a gate, including the</a:t>
             </a:r>
             <a:endParaRPr lang="en-US" sz="1500"/>
           </a:p>
@@ -16735,7 +18022,7 @@
                 <a:ea typeface="Arial"/>
                 <a:cs typeface="Arial"/>
               </a:rPr>
-              <a:t xml:space="preserve">is unkind: if a tenth of the job is serial,</a:t>
+              <a:t xml:space="preserve">careful one, which is the point: the</a:t>
             </a:r>
             <a:endParaRPr lang="en-US" sz="1500"/>
           </a:p>
@@ -16758,7 +18045,7 @@
                 <a:ea typeface="Arial"/>
                 <a:cs typeface="Arial"/>
               </a:rPr>
-              <a:t xml:space="preserve">ten workers get you five and a quarter</a:t>
+              <a:t xml:space="preserve">council is allowed to reject the room. Then</a:t>
             </a:r>
             <a:endParaRPr lang="en-US" sz="1500"/>
           </a:p>
@@ -16781,7 +18068,7 @@
                 <a:ea typeface="Arial"/>
                 <a:cs typeface="Arial"/>
               </a:rPr>
-              <a:t xml:space="preserve">times, and a hundred workers get you nine.</a:t>
+              <a:t xml:space="preserve">combine compatible ideas into a new</a:t>
             </a:r>
             <a:endParaRPr lang="en-US" sz="1500"/>
           </a:p>
@@ -16830,7 +18117,7 @@
                 <a:ea typeface="Arial"/>
                 <a:cs typeface="Arial"/>
               </a:rPr>
-              <a:t xml:space="preserve">Waiting on every branch can make a finished</a:t>
+              <a:t xml:space="preserve">candidate with one coherent set of</a:t>
             </a:r>
             <a:endParaRPr lang="en-US" sz="1500"/>
           </a:p>
@@ -16853,7 +18140,7 @@
                 <a:ea typeface="Arial"/>
                 <a:cs typeface="Arial"/>
               </a:rPr>
-              <a:t xml:space="preserve">task slower. Count the whole thing: all</a:t>
+              <a:t xml:space="preserve">assumptions and run the gates again.</a:t>
             </a:r>
             <a:endParaRPr lang="en-US" sz="1500"/>
           </a:p>
@@ -16876,7 +18163,7 @@
                 <a:ea typeface="Arial"/>
                 <a:cs typeface="Arial"/>
               </a:rPr>
-              <a:t xml:space="preserve">candidates, failed work, reserved</a:t>
+              <a:t xml:space="preserve">Passing parts do not make a passing whole.</a:t>
             </a:r>
             <a:endParaRPr lang="en-US" sz="1500"/>
           </a:p>
@@ -16899,7 +18186,7 @@
                 <a:ea typeface="Arial"/>
                 <a:cs typeface="Arial"/>
               </a:rPr>
-              <a:t xml:space="preserve">uncertainty, judging and human review, and</a:t>
+              <a:t xml:space="preserve">Stop at the review budget; an endless</a:t>
             </a:r>
             <a:endParaRPr lang="en-US" sz="1500"/>
           </a:p>
@@ -16922,7 +18209,7 @@
                 <a:ea typeface="Arial"/>
                 <a:cs typeface="Arial"/>
               </a:rPr>
-              <a:t xml:space="preserve">compare against one competent attempt on</a:t>
+              <a:t xml:space="preserve">debate is an expensive way to not ship.</a:t>
             </a:r>
             <a:endParaRPr lang="en-US" sz="1500"/>
           </a:p>
@@ -16945,7 +18232,7 @@
                 <a:ea typeface="Arial"/>
                 <a:cs typeface="Arial"/>
               </a:rPr>
-              <a:t xml:space="preserve">the same task set.</a:t>
+              <a:t xml:space="preserve"/>
             </a:r>
             <a:endParaRPr lang="en-US" sz="1500"/>
           </a:p>
@@ -16968,7 +18255,7 @@
                 <a:ea typeface="Arial"/>
                 <a:cs typeface="Arial"/>
               </a:rPr>
-              <a:t xml:space="preserve"/>
+              <a:t xml:space="preserve">None of this looks like the engineering we</a:t>
             </a:r>
             <a:endParaRPr lang="en-US" sz="1500"/>
           </a:p>
@@ -16991,7 +18278,7 @@
                 <a:ea typeface="Arial"/>
                 <a:cs typeface="Arial"/>
               </a:rPr>
-              <a:t xml:space="preserve">Measure accepted outcomes, not launched</a:t>
+              <a:t xml:space="preserve">were raised on. Do not do the work twice.</a:t>
             </a:r>
             <a:endParaRPr lang="en-US" sz="1500"/>
           </a:p>
@@ -17014,7 +18301,7 @@
                 <a:ea typeface="Arial"/>
                 <a:cs typeface="Arial"/>
               </a:rPr>
-              <a:t xml:space="preserve">workers. Start with one extra attempt or</a:t>
+              <a:t xml:space="preserve">Do not spend compute speculatively. One</a:t>
             </a:r>
             <a:endParaRPr lang="en-US" sz="1500"/>
           </a:p>
@@ -17037,7 +18324,7 @@
                 <a:ea typeface="Arial"/>
                 <a:cs typeface="Arial"/>
               </a:rPr>
-              <a:t xml:space="preserve">one batch boundary; if it does not buy</a:t>
+              <a:t xml:space="preserve">right answer per ticket. Those were axioms</a:t>
             </a:r>
             <a:endParaRPr lang="en-US" sz="1500"/>
           </a:p>
@@ -17060,7 +18347,7 @@
                 <a:ea typeface="Arial"/>
                 <a:cs typeface="Arial"/>
               </a:rPr>
-              <a:t xml:space="preserve">quality, time or cost, keep the simpler</a:t>
+              <a:t xml:space="preserve">when the expensive thing was the engineer.</a:t>
             </a:r>
             <a:endParaRPr lang="en-US" sz="1500"/>
           </a:p>
@@ -17083,7 +18370,7 @@
                 <a:ea typeface="Arial"/>
                 <a:cs typeface="Arial"/>
               </a:rPr>
-              <a:t xml:space="preserve">path. We are trying to buy useful work, not</a:t>
+              <a:t xml:space="preserve">When the expensive thing is being wrong,</a:t>
             </a:r>
             <a:endParaRPr lang="en-US" sz="1500"/>
           </a:p>
@@ -17106,7 +18393,145 @@
                 <a:ea typeface="Arial"/>
                 <a:cs typeface="Arial"/>
               </a:rPr>
-              <a:t xml:space="preserve">maximize the number of things blinking.</a:t>
+              <a:t xml:space="preserve">and a second draft costs cents, doing it</a:t>
+            </a:r>
+            <a:endParaRPr lang="en-US" sz="1500"/>
+          </a:p>
+          <a:p>
+            <a:pPr marL="0" indent="0">
+              <a:lnSpc>
+                <a:spcPts val="1950"/>
+              </a:lnSpc>
+              <a:spcAft>
+                <a:spcPts val="0"/>
+              </a:spcAft>
+              <a:buNone/>
+            </a:pPr>
+            <a:r>
+              <a:rPr lang="en-US" sz="1500" b="0">
+                <a:solidFill>
+                  <a:srgbClr val="202B33"/>
+                </a:solidFill>
+                <a:latin typeface="Arial"/>
+                <a:ea typeface="Arial"/>
+                <a:cs typeface="Arial"/>
+              </a:rPr>
+              <a:t xml:space="preserve">three times and reading what disagrees is</a:t>
+            </a:r>
+            <a:endParaRPr lang="en-US" sz="1500"/>
+          </a:p>
+          <a:p>
+            <a:pPr marL="0" indent="0">
+              <a:lnSpc>
+                <a:spcPts val="1950"/>
+              </a:lnSpc>
+              <a:spcAft>
+                <a:spcPts val="0"/>
+              </a:spcAft>
+              <a:buNone/>
+            </a:pPr>
+            <a:r>
+              <a:rPr lang="en-US" sz="1500" b="0">
+                <a:solidFill>
+                  <a:srgbClr val="202B33"/>
+                </a:solidFill>
+                <a:latin typeface="Arial"/>
+                <a:ea typeface="Arial"/>
+                <a:cs typeface="Arial"/>
+              </a:rPr>
+              <a:t xml:space="preserve">the frugal move. I am not a shill for Big</a:t>
+            </a:r>
+            <a:endParaRPr lang="en-US" sz="1500"/>
+          </a:p>
+          <a:p>
+            <a:pPr marL="0" indent="0">
+              <a:lnSpc>
+                <a:spcPts val="1950"/>
+              </a:lnSpc>
+              <a:spcAft>
+                <a:spcPts val="0"/>
+              </a:spcAft>
+              <a:buNone/>
+            </a:pPr>
+            <a:r>
+              <a:rPr lang="en-US" sz="1500" b="0">
+                <a:solidFill>
+                  <a:srgbClr val="202B33"/>
+                </a:solidFill>
+                <a:latin typeface="Arial"/>
+                <a:ea typeface="Arial"/>
+                <a:cs typeface="Arial"/>
+              </a:rPr>
+              <a:t xml:space="preserve">Token. I am telling you that cheaper, safer</a:t>
+            </a:r>
+            <a:endParaRPr lang="en-US" sz="1500"/>
+          </a:p>
+          <a:p>
+            <a:pPr marL="0" indent="0">
+              <a:lnSpc>
+                <a:spcPts val="1950"/>
+              </a:lnSpc>
+              <a:spcAft>
+                <a:spcPts val="0"/>
+              </a:spcAft>
+              <a:buNone/>
+            </a:pPr>
+            <a:r>
+              <a:rPr lang="en-US" sz="1500" b="0">
+                <a:solidFill>
+                  <a:srgbClr val="202B33"/>
+                </a:solidFill>
+                <a:latin typeface="Arial"/>
+                <a:ea typeface="Arial"/>
+                <a:cs typeface="Arial"/>
+              </a:rPr>
+              <a:t xml:space="preserve">and faster now sometimes come from spending</a:t>
+            </a:r>
+            <a:endParaRPr lang="en-US" sz="1500"/>
+          </a:p>
+          <a:p>
+            <a:pPr marL="0" indent="0">
+              <a:lnSpc>
+                <a:spcPts val="1950"/>
+              </a:lnSpc>
+              <a:spcAft>
+                <a:spcPts val="0"/>
+              </a:spcAft>
+              <a:buNone/>
+            </a:pPr>
+            <a:r>
+              <a:rPr lang="en-US" sz="1500" b="0">
+                <a:solidFill>
+                  <a:srgbClr val="202B33"/>
+                </a:solidFill>
+                <a:latin typeface="Arial"/>
+                <a:ea typeface="Arial"/>
+                <a:cs typeface="Arial"/>
+              </a:rPr>
+              <a:t xml:space="preserve">exactly where yesterday's wisdom told you</a:t>
+            </a:r>
+            <a:endParaRPr lang="en-US" sz="1500"/>
+          </a:p>
+          <a:p>
+            <a:pPr marL="0" indent="0">
+              <a:lnSpc>
+                <a:spcPts val="1950"/>
+              </a:lnSpc>
+              <a:spcAft>
+                <a:spcPts val="0"/>
+              </a:spcAft>
+              <a:buNone/>
+            </a:pPr>
+            <a:r>
+              <a:rPr lang="en-US" sz="1500" b="0">
+                <a:solidFill>
+                  <a:srgbClr val="202B33"/>
+                </a:solidFill>
+                <a:latin typeface="Arial"/>
+                <a:ea typeface="Arial"/>
+                <a:cs typeface="Arial"/>
+              </a:rPr>
+              <a:t xml:space="preserve">not to.</a:t>
             </a:r>
             <a:endParaRPr lang="en-US" sz="1500"/>
           </a:p>
@@ -17286,7 +18711,7 @@
                 <a:ea typeface="Arial"/>
                 <a:cs typeface="Arial"/>
               </a:rPr>
-              <a:t xml:space="preserve">14 / 14    SOURCE SLIDE 14</a:t>
+              <a:t xml:space="preserve">13 / 14    SOURCE SLIDE 13</a:t>
             </a:r>
             <a:endParaRPr lang="en-US" sz="1050"/>
           </a:p>
@@ -17335,7 +18760,7 @@
                 <a:ea typeface="Arial"/>
                 <a:cs typeface="Arial"/>
               </a:rPr>
-              <a:t xml:space="preserve">Put the limit where the work begins</a:t>
+              <a:t xml:space="preserve">Measure the accepted outcome</a:t>
             </a:r>
             <a:endParaRPr lang="en-US" sz="2550"/>
           </a:p>
@@ -17384,7 +18809,7 @@
                 <a:ea typeface="Arial"/>
                 <a:cs typeface="Arial"/>
               </a:rPr>
-              <a:t xml:space="preserve">One ledger across every caller</a:t>
+              <a:t xml:space="preserve">Latency: dispatch + queue + slowest branch</a:t>
             </a:r>
             <a:endParaRPr lang="en-US" sz="1500"/>
           </a:p>
@@ -17407,6 +18832,29 @@
                 <a:ea typeface="Arial"/>
                 <a:cs typeface="Arial"/>
               </a:rPr>
+              <a:t xml:space="preserve">+ merge + verify</a:t>
+            </a:r>
+            <a:endParaRPr lang="en-US" sz="1500"/>
+          </a:p>
+          <a:p>
+            <a:pPr marL="0" indent="0">
+              <a:lnSpc>
+                <a:spcPts val="1950"/>
+              </a:lnSpc>
+              <a:spcAft>
+                <a:spcPts val="0"/>
+              </a:spcAft>
+              <a:buNone/>
+            </a:pPr>
+            <a:r>
+              <a:rPr lang="en-US" sz="1500" b="0">
+                <a:solidFill>
+                  <a:srgbClr val="202B33"/>
+                </a:solidFill>
+                <a:latin typeface="Arial"/>
+                <a:ea typeface="Arial"/>
+                <a:cs typeface="Arial"/>
+              </a:rPr>
               <a:t xml:space="preserve"/>
             </a:r>
             <a:endParaRPr lang="en-US" sz="1500"/>
@@ -17430,7 +18878,7 @@
                 <a:ea typeface="Arial"/>
                 <a:cs typeface="Arial"/>
               </a:rPr>
-              <a:t xml:space="preserve">Durable state across every restart</a:t>
+              <a:t xml:space="preserve">Cost: every candidate, every retry, every</a:t>
             </a:r>
             <a:endParaRPr lang="en-US" sz="1500"/>
           </a:p>
@@ -17453,6 +18901,29 @@
                 <a:ea typeface="Arial"/>
                 <a:cs typeface="Arial"/>
               </a:rPr>
+              <a:t xml:space="preserve">held reservation, review time</a:t>
+            </a:r>
+            <a:endParaRPr lang="en-US" sz="1500"/>
+          </a:p>
+          <a:p>
+            <a:pPr marL="0" indent="0">
+              <a:lnSpc>
+                <a:spcPts val="1950"/>
+              </a:lnSpc>
+              <a:spcAft>
+                <a:spcPts val="0"/>
+              </a:spcAft>
+              <a:buNone/>
+            </a:pPr>
+            <a:r>
+              <a:rPr lang="en-US" sz="1500" b="0">
+                <a:solidFill>
+                  <a:srgbClr val="202B33"/>
+                </a:solidFill>
+                <a:latin typeface="Arial"/>
+                <a:ea typeface="Arial"/>
+                <a:cs typeface="Arial"/>
+              </a:rPr>
               <a:t xml:space="preserve"/>
             </a:r>
             <a:endParaRPr lang="en-US" sz="1500"/>
@@ -17476,7 +18947,7 @@
                 <a:ea typeface="Arial"/>
                 <a:cs typeface="Arial"/>
               </a:rPr>
-              <a:t xml:space="preserve">A lease on every box, a gate on every</a:t>
+              <a:t xml:space="preserve">Compare against one competent attempt</a:t>
             </a:r>
             <a:endParaRPr lang="en-US" sz="1500"/>
           </a:p>
@@ -17499,7 +18970,7 @@
                 <a:ea typeface="Arial"/>
                 <a:cs typeface="Arial"/>
               </a:rPr>
-              <a:t xml:space="preserve">candidate</a:t>
+              <a:t xml:space="preserve"/>
             </a:r>
             <a:endParaRPr lang="en-US" sz="1500"/>
           </a:p>
@@ -17522,7 +18993,7 @@
                 <a:ea typeface="Arial"/>
                 <a:cs typeface="Arial"/>
               </a:rPr>
-              <a:t xml:space="preserve"/>
+              <a:t xml:space="preserve">Starting three workers does not delete the</a:t>
             </a:r>
             <a:endParaRPr lang="en-US" sz="1500"/>
           </a:p>
@@ -17545,7 +19016,7 @@
                 <a:ea typeface="Arial"/>
                 <a:cs typeface="Arial"/>
               </a:rPr>
-              <a:t xml:space="preserve">Back to the four callers. Forty jobs were</a:t>
+              <a:t xml:space="preserve">serial parts. That is Amdahl, 1967, and it</a:t>
             </a:r>
             <a:endParaRPr lang="en-US" sz="1500"/>
           </a:p>
@@ -17568,7 +19039,7 @@
                 <a:ea typeface="Arial"/>
                 <a:cs typeface="Arial"/>
               </a:rPr>
-              <a:t xml:space="preserve">legal by four local counters. The missing</a:t>
+              <a:t xml:space="preserve">is unkind: if a tenth of the job is serial,</a:t>
             </a:r>
             <a:endParaRPr lang="en-US" sz="1500"/>
           </a:p>
@@ -17591,7 +19062,7 @@
                 <a:ea typeface="Arial"/>
                 <a:cs typeface="Arial"/>
               </a:rPr>
-              <a:t xml:space="preserve">piece was one shared account of what the</a:t>
+              <a:t xml:space="preserve">ten workers get you five and a quarter</a:t>
             </a:r>
             <a:endParaRPr lang="en-US" sz="1500"/>
           </a:p>
@@ -17614,53 +19085,7 @@
                 <a:ea typeface="Arial"/>
                 <a:cs typeface="Arial"/>
               </a:rPr>
-              <a:t xml:space="preserve">application had promised and what it had</a:t>
-            </a:r>
-            <a:endParaRPr lang="en-US" sz="1500"/>
-          </a:p>
-          <a:p>
-            <a:pPr marL="0" indent="0">
-              <a:lnSpc>
-                <a:spcPts val="1950"/>
-              </a:lnSpc>
-              <a:spcAft>
-                <a:spcPts val="0"/>
-              </a:spcAft>
-              <a:buNone/>
-            </a:pPr>
-            <a:r>
-              <a:rPr lang="en-US" sz="1500" b="0">
-                <a:solidFill>
-                  <a:srgbClr val="202B33"/>
-                </a:solidFill>
-                <a:latin typeface="Arial"/>
-                <a:ea typeface="Arial"/>
-                <a:cs typeface="Arial"/>
-              </a:rPr>
-              <a:t xml:space="preserve">already started.</a:t>
-            </a:r>
-            <a:endParaRPr lang="en-US" sz="1500"/>
-          </a:p>
-          <a:p>
-            <a:pPr marL="0" indent="0">
-              <a:lnSpc>
-                <a:spcPts val="1950"/>
-              </a:lnSpc>
-              <a:spcAft>
-                <a:spcPts val="0"/>
-              </a:spcAft>
-              <a:buNone/>
-            </a:pPr>
-            <a:r>
-              <a:rPr lang="en-US" sz="1500" b="0">
-                <a:solidFill>
-                  <a:srgbClr val="202B33"/>
-                </a:solidFill>
-                <a:latin typeface="Arial"/>
-                <a:ea typeface="Arial"/>
-                <a:cs typeface="Arial"/>
-              </a:rPr>
-              <a:t xml:space="preserve"/>
+              <a:t xml:space="preserve">times, and a hundred workers get you nine.</a:t>
             </a:r>
             <a:endParaRPr lang="en-US" sz="1500"/>
           </a:p>
@@ -17709,7 +19134,7 @@
                 <a:ea typeface="Arial"/>
                 <a:cs typeface="Arial"/>
               </a:rPr>
-              <a:t xml:space="preserve">The inversion is real: the workload can now</a:t>
+              <a:t xml:space="preserve">Waiting on every branch can make a finished</a:t>
             </a:r>
             <a:endParaRPr lang="en-US" sz="1500"/>
           </a:p>
@@ -17732,7 +19157,7 @@
                 <a:ea typeface="Arial"/>
                 <a:cs typeface="Arial"/>
               </a:rPr>
-              <a:t xml:space="preserve">describe its own shape and ask for its own</a:t>
+              <a:t xml:space="preserve">task slower. Count the whole thing: all</a:t>
             </a:r>
             <a:endParaRPr lang="en-US" sz="1500"/>
           </a:p>
@@ -17755,7 +19180,7 @@
                 <a:ea typeface="Arial"/>
                 <a:cs typeface="Arial"/>
               </a:rPr>
-              <a:t xml:space="preserve">compute, and the substrate to grant it in</a:t>
+              <a:t xml:space="preserve">candidates, failed work, reserved</a:t>
             </a:r>
             <a:endParaRPr lang="en-US" sz="1500"/>
           </a:p>
@@ -17778,7 +19203,7 @@
                 <a:ea typeface="Arial"/>
                 <a:cs typeface="Arial"/>
               </a:rPr>
-              <a:t xml:space="preserve">seconds already exists. That is a better</a:t>
+              <a:t xml:space="preserve">uncertainty, judging and human review, and</a:t>
             </a:r>
             <a:endParaRPr lang="en-US" sz="1500"/>
           </a:p>
@@ -17801,7 +19226,7 @@
                 <a:ea typeface="Arial"/>
                 <a:cs typeface="Arial"/>
               </a:rPr>
-              <a:t xml:space="preserve">world than a warm fleet and a guess. It is</a:t>
+              <a:t xml:space="preserve">compare against one competent attempt on</a:t>
             </a:r>
             <a:endParaRPr lang="en-US" sz="1500"/>
           </a:p>
@@ -17824,7 +19249,7 @@
                 <a:ea typeface="Arial"/>
                 <a:cs typeface="Arial"/>
               </a:rPr>
-              <a:t xml:space="preserve">only safe because the agent chooses from a</a:t>
+              <a:t xml:space="preserve">the same task set.</a:t>
             </a:r>
             <a:endParaRPr lang="en-US" sz="1500"/>
           </a:p>
@@ -17847,7 +19272,7 @@
                 <a:ea typeface="Arial"/>
                 <a:cs typeface="Arial"/>
               </a:rPr>
-              <a:t xml:space="preserve">catalog, spends from a ledger, and runs on</a:t>
+              <a:t xml:space="preserve"/>
             </a:r>
             <a:endParaRPr lang="en-US" sz="1500"/>
           </a:p>
@@ -17870,7 +19295,7 @@
                 <a:ea typeface="Arial"/>
                 <a:cs typeface="Arial"/>
               </a:rPr>
-              <a:t xml:space="preserve">boxes that expire.</a:t>
+              <a:t xml:space="preserve">Measure accepted outcomes, not launched</a:t>
             </a:r>
             <a:endParaRPr lang="en-US" sz="1500"/>
           </a:p>
@@ -17893,7 +19318,7 @@
                 <a:ea typeface="Arial"/>
                 <a:cs typeface="Arial"/>
               </a:rPr>
-              <a:t xml:space="preserve"/>
+              <a:t xml:space="preserve">workers. Start with one extra attempt or</a:t>
             </a:r>
             <a:endParaRPr lang="en-US" sz="1500"/>
           </a:p>
@@ -17916,7 +19341,7 @@
                 <a:ea typeface="Arial"/>
                 <a:cs typeface="Arial"/>
               </a:rPr>
-              <a:t xml:space="preserve">Inspect one expensive tool in your system.</a:t>
+              <a:t xml:space="preserve">one batch boundary; if it does not buy</a:t>
             </a:r>
             <a:endParaRPr lang="en-US" sz="1500"/>
           </a:p>
@@ -17939,7 +19364,7 @@
                 <a:ea typeface="Arial"/>
                 <a:cs typeface="Arial"/>
               </a:rPr>
-              <a:t xml:space="preserve">Count the work it can launch underneath</a:t>
+              <a:t xml:space="preserve">quality, time or cost, keep the simpler</a:t>
             </a:r>
             <a:endParaRPr lang="en-US" sz="1500"/>
           </a:p>
@@ -17962,7 +19387,7 @@
                 <a:ea typeface="Arial"/>
                 <a:cs typeface="Arial"/>
               </a:rPr>
-              <a:t xml:space="preserve">itself. Put the limit where that work</a:t>
+              <a:t xml:space="preserve">path. We are trying to buy useful work, not</a:t>
             </a:r>
             <a:endParaRPr lang="en-US" sz="1500"/>
           </a:p>
@@ -17985,7 +19410,7 @@
                 <a:ea typeface="Arial"/>
                 <a:cs typeface="Arial"/>
               </a:rPr>
-              <a:t xml:space="preserve">actually begins.</a:t>
+              <a:t xml:space="preserve">maximize the number of things blinking.</a:t>
             </a:r>
             <a:endParaRPr lang="en-US" sz="1500"/>
           </a:p>
@@ -19053,7 +20478,7 @@
                 <a:ea typeface="Arial"/>
                 <a:cs typeface="Arial"/>
               </a:rPr>
-              <a:t xml:space="preserve">SOURCE REFERENCES</a:t>
+              <a:t xml:space="preserve">14 / 14    SOURCE SLIDE 14</a:t>
             </a:r>
             <a:endParaRPr lang="en-US" sz="1050"/>
           </a:p>
@@ -19102,7 +20527,7 @@
                 <a:ea typeface="Arial"/>
                 <a:cs typeface="Arial"/>
               </a:rPr>
-              <a:t xml:space="preserve">References</a:t>
+              <a:t xml:space="preserve">Put the limit where the work begins</a:t>
             </a:r>
             <a:endParaRPr lang="en-US" sz="2550"/>
           </a:p>
@@ -19151,7 +20576,7 @@
                 <a:ea typeface="Arial"/>
                 <a:cs typeface="Arial"/>
               </a:rPr>
-              <a:t xml:space="preserve">Knight and Leveson (1986), An Experimental</a:t>
+              <a:t xml:space="preserve">One ledger across every caller</a:t>
             </a:r>
             <a:endParaRPr lang="en-US" sz="1500"/>
           </a:p>
@@ -19174,7 +20599,7 @@
                 <a:ea typeface="Arial"/>
                 <a:cs typeface="Arial"/>
               </a:rPr>
-              <a:t xml:space="preserve">Evaluation of the Assumption of</a:t>
+              <a:t xml:space="preserve"/>
             </a:r>
             <a:endParaRPr lang="en-US" sz="1500"/>
           </a:p>
@@ -19197,7 +20622,7 @@
                 <a:ea typeface="Arial"/>
                 <a:cs typeface="Arial"/>
               </a:rPr>
-              <a:t xml:space="preserve">Independence in Multiversion Programming —</a:t>
+              <a:t xml:space="preserve">Durable state across every restart</a:t>
             </a:r>
             <a:endParaRPr lang="en-US" sz="1500"/>
           </a:p>
@@ -19220,7 +20645,7 @@
                 <a:ea typeface="Arial"/>
                 <a:cs typeface="Arial"/>
               </a:rPr>
-              <a:t xml:space="preserve">https://doi.org/10.1109/TSE.1986.6312924),</a:t>
+              <a:t xml:space="preserve"/>
             </a:r>
             <a:endParaRPr lang="en-US" sz="1500"/>
           </a:p>
@@ -19243,7 +20668,7 @@
                 <a:ea typeface="Arial"/>
                 <a:cs typeface="Arial"/>
               </a:rPr>
-              <a:t xml:space="preserve">IEEE Transactions on Software Engineering</a:t>
+              <a:t xml:space="preserve">A lease on every box, a gate on every</a:t>
             </a:r>
             <a:endParaRPr lang="en-US" sz="1500"/>
           </a:p>
@@ -19266,7 +20691,7 @@
                 <a:ea typeface="Arial"/>
                 <a:cs typeface="Arial"/>
               </a:rPr>
-              <a:t xml:space="preserve">SE-12(1, 96 to 109. Cited to set aside: it</a:t>
+              <a:t xml:space="preserve">candidate</a:t>
             </a:r>
             <a:endParaRPr lang="en-US" sz="1500"/>
           </a:p>
@@ -19289,7 +20714,145 @@
                 <a:ea typeface="Arial"/>
                 <a:cs typeface="Arial"/>
               </a:rPr>
-              <a:t xml:space="preserve">is a result about redundancy as a</a:t>
+              <a:t xml:space="preserve"/>
+            </a:r>
+            <a:endParaRPr lang="en-US" sz="1500"/>
+          </a:p>
+          <a:p>
+            <a:pPr marL="0" indent="0">
+              <a:lnSpc>
+                <a:spcPts val="1950"/>
+              </a:lnSpc>
+              <a:spcAft>
+                <a:spcPts val="0"/>
+              </a:spcAft>
+              <a:buNone/>
+            </a:pPr>
+            <a:r>
+              <a:rPr lang="en-US" sz="1500" b="0">
+                <a:solidFill>
+                  <a:srgbClr val="202B33"/>
+                </a:solidFill>
+                <a:latin typeface="Arial"/>
+                <a:ea typeface="Arial"/>
+                <a:cs typeface="Arial"/>
+              </a:rPr>
+              <a:t xml:space="preserve">Back to the four callers. Forty jobs were</a:t>
+            </a:r>
+            <a:endParaRPr lang="en-US" sz="1500"/>
+          </a:p>
+          <a:p>
+            <a:pPr marL="0" indent="0">
+              <a:lnSpc>
+                <a:spcPts val="1950"/>
+              </a:lnSpc>
+              <a:spcAft>
+                <a:spcPts val="0"/>
+              </a:spcAft>
+              <a:buNone/>
+            </a:pPr>
+            <a:r>
+              <a:rPr lang="en-US" sz="1500" b="0">
+                <a:solidFill>
+                  <a:srgbClr val="202B33"/>
+                </a:solidFill>
+                <a:latin typeface="Arial"/>
+                <a:ea typeface="Arial"/>
+                <a:cs typeface="Arial"/>
+              </a:rPr>
+              <a:t xml:space="preserve">legal by four local counters. The missing</a:t>
+            </a:r>
+            <a:endParaRPr lang="en-US" sz="1500"/>
+          </a:p>
+          <a:p>
+            <a:pPr marL="0" indent="0">
+              <a:lnSpc>
+                <a:spcPts val="1950"/>
+              </a:lnSpc>
+              <a:spcAft>
+                <a:spcPts val="0"/>
+              </a:spcAft>
+              <a:buNone/>
+            </a:pPr>
+            <a:r>
+              <a:rPr lang="en-US" sz="1500" b="0">
+                <a:solidFill>
+                  <a:srgbClr val="202B33"/>
+                </a:solidFill>
+                <a:latin typeface="Arial"/>
+                <a:ea typeface="Arial"/>
+                <a:cs typeface="Arial"/>
+              </a:rPr>
+              <a:t xml:space="preserve">piece was one shared account of what the</a:t>
+            </a:r>
+            <a:endParaRPr lang="en-US" sz="1500"/>
+          </a:p>
+          <a:p>
+            <a:pPr marL="0" indent="0">
+              <a:lnSpc>
+                <a:spcPts val="1950"/>
+              </a:lnSpc>
+              <a:spcAft>
+                <a:spcPts val="0"/>
+              </a:spcAft>
+              <a:buNone/>
+            </a:pPr>
+            <a:r>
+              <a:rPr lang="en-US" sz="1500" b="0">
+                <a:solidFill>
+                  <a:srgbClr val="202B33"/>
+                </a:solidFill>
+                <a:latin typeface="Arial"/>
+                <a:ea typeface="Arial"/>
+                <a:cs typeface="Arial"/>
+              </a:rPr>
+              <a:t xml:space="preserve">application had promised and what it had</a:t>
+            </a:r>
+            <a:endParaRPr lang="en-US" sz="1500"/>
+          </a:p>
+          <a:p>
+            <a:pPr marL="0" indent="0">
+              <a:lnSpc>
+                <a:spcPts val="1950"/>
+              </a:lnSpc>
+              <a:spcAft>
+                <a:spcPts val="0"/>
+              </a:spcAft>
+              <a:buNone/>
+            </a:pPr>
+            <a:r>
+              <a:rPr lang="en-US" sz="1500" b="0">
+                <a:solidFill>
+                  <a:srgbClr val="202B33"/>
+                </a:solidFill>
+                <a:latin typeface="Arial"/>
+                <a:ea typeface="Arial"/>
+                <a:cs typeface="Arial"/>
+              </a:rPr>
+              <a:t xml:space="preserve">already started.</a:t>
+            </a:r>
+            <a:endParaRPr lang="en-US" sz="1500"/>
+          </a:p>
+          <a:p>
+            <a:pPr marL="0" indent="0">
+              <a:lnSpc>
+                <a:spcPts val="1950"/>
+              </a:lnSpc>
+              <a:spcAft>
+                <a:spcPts val="0"/>
+              </a:spcAft>
+              <a:buNone/>
+            </a:pPr>
+            <a:r>
+              <a:rPr lang="en-US" sz="1500" b="0">
+                <a:solidFill>
+                  <a:srgbClr val="202B33"/>
+                </a:solidFill>
+                <a:latin typeface="Arial"/>
+                <a:ea typeface="Arial"/>
+                <a:cs typeface="Arial"/>
+              </a:rPr>
+              <a:t xml:space="preserve"/>
             </a:r>
             <a:endParaRPr lang="en-US" sz="1500"/>
           </a:p>
@@ -19338,7 +20901,7 @@
                 <a:ea typeface="Arial"/>
                 <a:cs typeface="Arial"/>
               </a:rPr>
-              <a:t xml:space="preserve">correctness strategy, which this slide does</a:t>
+              <a:t xml:space="preserve">The inversion is real: the workload can now</a:t>
             </a:r>
             <a:endParaRPr lang="en-US" sz="1500"/>
           </a:p>
@@ -19361,7 +20924,7 @@
                 <a:ea typeface="Arial"/>
                 <a:cs typeface="Arial"/>
               </a:rPr>
-              <a:t xml:space="preserve">not claim.</a:t>
+              <a:t xml:space="preserve">describe its own shape and ask for its own</a:t>
             </a:r>
             <a:endParaRPr lang="en-US" sz="1500"/>
           </a:p>
@@ -19384,6 +20947,144 @@
                 <a:ea typeface="Arial"/>
                 <a:cs typeface="Arial"/>
               </a:rPr>
+              <a:t xml:space="preserve">compute, and the substrate to grant it in</a:t>
+            </a:r>
+            <a:endParaRPr lang="en-US" sz="1500"/>
+          </a:p>
+          <a:p>
+            <a:pPr marL="0" indent="0">
+              <a:lnSpc>
+                <a:spcPts val="1950"/>
+              </a:lnSpc>
+              <a:spcAft>
+                <a:spcPts val="0"/>
+              </a:spcAft>
+              <a:buNone/>
+            </a:pPr>
+            <a:r>
+              <a:rPr lang="en-US" sz="1500" b="0">
+                <a:solidFill>
+                  <a:srgbClr val="202B33"/>
+                </a:solidFill>
+                <a:latin typeface="Arial"/>
+                <a:ea typeface="Arial"/>
+                <a:cs typeface="Arial"/>
+              </a:rPr>
+              <a:t xml:space="preserve">seconds already exists. That is a better</a:t>
+            </a:r>
+            <a:endParaRPr lang="en-US" sz="1500"/>
+          </a:p>
+          <a:p>
+            <a:pPr marL="0" indent="0">
+              <a:lnSpc>
+                <a:spcPts val="1950"/>
+              </a:lnSpc>
+              <a:spcAft>
+                <a:spcPts val="0"/>
+              </a:spcAft>
+              <a:buNone/>
+            </a:pPr>
+            <a:r>
+              <a:rPr lang="en-US" sz="1500" b="0">
+                <a:solidFill>
+                  <a:srgbClr val="202B33"/>
+                </a:solidFill>
+                <a:latin typeface="Arial"/>
+                <a:ea typeface="Arial"/>
+                <a:cs typeface="Arial"/>
+              </a:rPr>
+              <a:t xml:space="preserve">world than a warm fleet and a guess. It is</a:t>
+            </a:r>
+            <a:endParaRPr lang="en-US" sz="1500"/>
+          </a:p>
+          <a:p>
+            <a:pPr marL="0" indent="0">
+              <a:lnSpc>
+                <a:spcPts val="1950"/>
+              </a:lnSpc>
+              <a:spcAft>
+                <a:spcPts val="0"/>
+              </a:spcAft>
+              <a:buNone/>
+            </a:pPr>
+            <a:r>
+              <a:rPr lang="en-US" sz="1500" b="0">
+                <a:solidFill>
+                  <a:srgbClr val="202B33"/>
+                </a:solidFill>
+                <a:latin typeface="Arial"/>
+                <a:ea typeface="Arial"/>
+                <a:cs typeface="Arial"/>
+              </a:rPr>
+              <a:t xml:space="preserve">only safe because the agent chooses from a</a:t>
+            </a:r>
+            <a:endParaRPr lang="en-US" sz="1500"/>
+          </a:p>
+          <a:p>
+            <a:pPr marL="0" indent="0">
+              <a:lnSpc>
+                <a:spcPts val="1950"/>
+              </a:lnSpc>
+              <a:spcAft>
+                <a:spcPts val="0"/>
+              </a:spcAft>
+              <a:buNone/>
+            </a:pPr>
+            <a:r>
+              <a:rPr lang="en-US" sz="1500" b="0">
+                <a:solidFill>
+                  <a:srgbClr val="202B33"/>
+                </a:solidFill>
+                <a:latin typeface="Arial"/>
+                <a:ea typeface="Arial"/>
+                <a:cs typeface="Arial"/>
+              </a:rPr>
+              <a:t xml:space="preserve">catalog, spends from a ledger, and runs on</a:t>
+            </a:r>
+            <a:endParaRPr lang="en-US" sz="1500"/>
+          </a:p>
+          <a:p>
+            <a:pPr marL="0" indent="0">
+              <a:lnSpc>
+                <a:spcPts val="1950"/>
+              </a:lnSpc>
+              <a:spcAft>
+                <a:spcPts val="0"/>
+              </a:spcAft>
+              <a:buNone/>
+            </a:pPr>
+            <a:r>
+              <a:rPr lang="en-US" sz="1500" b="0">
+                <a:solidFill>
+                  <a:srgbClr val="202B33"/>
+                </a:solidFill>
+                <a:latin typeface="Arial"/>
+                <a:ea typeface="Arial"/>
+                <a:cs typeface="Arial"/>
+              </a:rPr>
+              <a:t xml:space="preserve">boxes that expire.</a:t>
+            </a:r>
+            <a:endParaRPr lang="en-US" sz="1500"/>
+          </a:p>
+          <a:p>
+            <a:pPr marL="0" indent="0">
+              <a:lnSpc>
+                <a:spcPts val="1950"/>
+              </a:lnSpc>
+              <a:spcAft>
+                <a:spcPts val="0"/>
+              </a:spcAft>
+              <a:buNone/>
+            </a:pPr>
+            <a:r>
+              <a:rPr lang="en-US" sz="1500" b="0">
+                <a:solidFill>
+                  <a:srgbClr val="202B33"/>
+                </a:solidFill>
+                <a:latin typeface="Arial"/>
+                <a:ea typeface="Arial"/>
+                <a:cs typeface="Arial"/>
+              </a:rPr>
               <a:t xml:space="preserve"/>
             </a:r>
             <a:endParaRPr lang="en-US" sz="1500"/>
@@ -19407,7 +21108,7 @@
                 <a:ea typeface="Arial"/>
                 <a:cs typeface="Arial"/>
               </a:rPr>
-              <a:t xml:space="preserve">Amdahl (1967), Validity of the single</a:t>
+              <a:t xml:space="preserve">Inspect one expensive tool in your system.</a:t>
             </a:r>
             <a:endParaRPr lang="en-US" sz="1500"/>
           </a:p>
@@ -19430,7 +21131,7 @@
                 <a:ea typeface="Arial"/>
                 <a:cs typeface="Arial"/>
               </a:rPr>
-              <a:t xml:space="preserve">processor approach to achieving large scale</a:t>
+              <a:t xml:space="preserve">Count the work it can launch underneath</a:t>
             </a:r>
             <a:endParaRPr lang="en-US" sz="1500"/>
           </a:p>
@@ -19453,7 +21154,7 @@
                 <a:ea typeface="Arial"/>
                 <a:cs typeface="Arial"/>
               </a:rPr>
-              <a:t xml:space="preserve">computing capabilities, AFIPS Conference</a:t>
+              <a:t xml:space="preserve">itself. Put the limit where that work</a:t>
             </a:r>
             <a:endParaRPr lang="en-US" sz="1500"/>
           </a:p>
@@ -19476,7 +21177,7 @@
                 <a:ea typeface="Arial"/>
                 <a:cs typeface="Arial"/>
               </a:rPr>
-              <a:t xml:space="preserve">Proceedings 30, 483 to 485.</a:t>
+              <a:t xml:space="preserve">actually begins.</a:t>
             </a:r>
             <a:endParaRPr lang="en-US" sz="1500"/>
           </a:p>
@@ -19575,6 +21276,609 @@
                 <a:cs typeface="Arial"/>
               </a:rPr>
               <a:t xml:space="preserve">20</a:t>
+            </a:r>
+            <a:endParaRPr lang="en-US" sz="975"/>
+          </a:p>
+        </p:txBody>
+      </p:sp>
+    </p:spTree>
+  </p:cSld>
+  <p:clrMapOvr>
+    <a:masterClrMapping/>
+  </p:clrMapOvr>
+</p:sld>
+</file>
+
+<file path=ppt/slides/slide21.xml><?xml version="1.0" encoding="utf-8"?>
+<p:sld xmlns:a="http://schemas.openxmlformats.org/drawingml/2006/main" xmlns:r="http://schemas.openxmlformats.org/officeDocument/2006/relationships" xmlns:p="http://schemas.openxmlformats.org/presentationml/2006/main">
+  <p:cSld name="Slide 21">
+    <p:bg>
+      <p:bgPr>
+        <a:solidFill>
+          <a:srgbClr val="FAFAF7"/>
+        </a:solidFill>
+        <a:effectLst/>
+      </p:bgPr>
+    </p:bg>
+    <p:spTree>
+      <p:nvGrpSpPr>
+        <p:cNvPr id="1" name=""/>
+        <p:cNvGrpSpPr/>
+        <p:nvPr/>
+      </p:nvGrpSpPr>
+      <p:grpSpPr>
+        <a:xfrm>
+          <a:off x="0" y="0"/>
+          <a:ext cx="0" cy="0"/>
+          <a:chOff x="0" y="0"/>
+          <a:chExt cx="0" cy="0"/>
+        </a:xfrm>
+      </p:grpSpPr>
+      <p:sp>
+        <p:nvSpPr>
+          <p:cNvPr id="2" name="Text 2"/>
+          <p:cNvSpPr txBox="1"/>
+          <p:nvPr/>
+        </p:nvSpPr>
+        <p:spPr>
+          <a:xfrm>
+            <a:off x="457200" y="266700"/>
+            <a:ext cx="9144000" cy="228600"/>
+          </a:xfrm>
+          <a:prstGeom prst="rect">
+            <a:avLst/>
+          </a:prstGeom>
+          <a:noFill/>
+          <a:ln>
+            <a:noFill/>
+          </a:ln>
+        </p:spPr>
+        <p:txBody>
+          <a:bodyPr wrap="none" lIns="0" tIns="0" rIns="0" bIns="0" anchor="t">
+            <a:noAutofit/>
+          </a:bodyPr>
+          <a:lstStyle/>
+          <a:p>
+            <a:pPr marL="0" indent="0">
+              <a:lnSpc>
+                <a:spcPts val="1365"/>
+              </a:lnSpc>
+              <a:spcAft>
+                <a:spcPts val="0"/>
+              </a:spcAft>
+              <a:buNone/>
+            </a:pPr>
+            <a:r>
+              <a:rPr lang="en-US" sz="1050" b="1">
+                <a:solidFill>
+                  <a:srgbClr val="246957"/>
+                </a:solidFill>
+                <a:latin typeface="Arial"/>
+                <a:ea typeface="Arial"/>
+                <a:cs typeface="Arial"/>
+              </a:rPr>
+              <a:t xml:space="preserve">SOURCE REFERENCES</a:t>
+            </a:r>
+            <a:endParaRPr lang="en-US" sz="1050"/>
+          </a:p>
+        </p:txBody>
+      </p:sp>
+      <p:sp>
+        <p:nvSpPr>
+          <p:cNvPr id="3" name="Text 3"/>
+          <p:cNvSpPr txBox="1"/>
+          <p:nvPr/>
+        </p:nvSpPr>
+        <p:spPr>
+          <a:xfrm>
+            <a:off x="457200" y="657225"/>
+            <a:ext cx="9144000" cy="1104900"/>
+          </a:xfrm>
+          <a:prstGeom prst="rect">
+            <a:avLst/>
+          </a:prstGeom>
+          <a:noFill/>
+          <a:ln>
+            <a:noFill/>
+          </a:ln>
+        </p:spPr>
+        <p:txBody>
+          <a:bodyPr wrap="none" lIns="0" tIns="0" rIns="0" bIns="0" anchor="t">
+            <a:noAutofit/>
+          </a:bodyPr>
+          <a:lstStyle/>
+          <a:p>
+            <a:pPr marL="0" indent="0">
+              <a:lnSpc>
+                <a:spcPts val="3060"/>
+              </a:lnSpc>
+              <a:spcAft>
+                <a:spcPts val="0"/>
+              </a:spcAft>
+              <a:buNone/>
+            </a:pPr>
+            <a:r>
+              <a:rPr lang="en-US" sz="2550" b="1">
+                <a:solidFill>
+                  <a:srgbClr val="202B33"/>
+                </a:solidFill>
+                <a:latin typeface="Arial"/>
+                <a:ea typeface="Arial"/>
+                <a:cs typeface="Arial"/>
+              </a:rPr>
+              <a:t xml:space="preserve">References</a:t>
+            </a:r>
+            <a:endParaRPr lang="en-US" sz="2550"/>
+          </a:p>
+        </p:txBody>
+      </p:sp>
+      <p:sp>
+        <p:nvSpPr>
+          <p:cNvPr id="4" name="Text 4"/>
+          <p:cNvSpPr txBox="1"/>
+          <p:nvPr/>
+        </p:nvSpPr>
+        <p:spPr>
+          <a:xfrm>
+            <a:off x="457200" y="1971675"/>
+            <a:ext cx="4352925" cy="5314950"/>
+          </a:xfrm>
+          <a:prstGeom prst="rect">
+            <a:avLst/>
+          </a:prstGeom>
+          <a:noFill/>
+          <a:ln>
+            <a:noFill/>
+          </a:ln>
+        </p:spPr>
+        <p:txBody>
+          <a:bodyPr wrap="none" lIns="0" tIns="0" rIns="0" bIns="0" anchor="t">
+            <a:noAutofit/>
+          </a:bodyPr>
+          <a:lstStyle/>
+          <a:p>
+            <a:pPr marL="0" indent="0">
+              <a:lnSpc>
+                <a:spcPts val="1950"/>
+              </a:lnSpc>
+              <a:spcAft>
+                <a:spcPts val="0"/>
+              </a:spcAft>
+              <a:buNone/>
+            </a:pPr>
+            <a:r>
+              <a:rPr lang="en-US" sz="1500" b="0">
+                <a:solidFill>
+                  <a:srgbClr val="202B33"/>
+                </a:solidFill>
+                <a:latin typeface="Arial"/>
+                <a:ea typeface="Arial"/>
+                <a:cs typeface="Arial"/>
+              </a:rPr>
+              <a:t xml:space="preserve">Knight and Leveson (1986), An Experimental</a:t>
+            </a:r>
+            <a:endParaRPr lang="en-US" sz="1500"/>
+          </a:p>
+          <a:p>
+            <a:pPr marL="0" indent="0">
+              <a:lnSpc>
+                <a:spcPts val="1950"/>
+              </a:lnSpc>
+              <a:spcAft>
+                <a:spcPts val="0"/>
+              </a:spcAft>
+              <a:buNone/>
+            </a:pPr>
+            <a:r>
+              <a:rPr lang="en-US" sz="1500" b="0">
+                <a:solidFill>
+                  <a:srgbClr val="202B33"/>
+                </a:solidFill>
+                <a:latin typeface="Arial"/>
+                <a:ea typeface="Arial"/>
+                <a:cs typeface="Arial"/>
+              </a:rPr>
+              <a:t xml:space="preserve">Evaluation of the Assumption of</a:t>
+            </a:r>
+            <a:endParaRPr lang="en-US" sz="1500"/>
+          </a:p>
+          <a:p>
+            <a:pPr marL="0" indent="0">
+              <a:lnSpc>
+                <a:spcPts val="1950"/>
+              </a:lnSpc>
+              <a:spcAft>
+                <a:spcPts val="0"/>
+              </a:spcAft>
+              <a:buNone/>
+            </a:pPr>
+            <a:r>
+              <a:rPr lang="en-US" sz="1500" b="0">
+                <a:solidFill>
+                  <a:srgbClr val="202B33"/>
+                </a:solidFill>
+                <a:latin typeface="Arial"/>
+                <a:ea typeface="Arial"/>
+                <a:cs typeface="Arial"/>
+              </a:rPr>
+              <a:t xml:space="preserve">Independence in Multiversion Programming —</a:t>
+            </a:r>
+            <a:endParaRPr lang="en-US" sz="1500"/>
+          </a:p>
+          <a:p>
+            <a:pPr marL="0" indent="0">
+              <a:lnSpc>
+                <a:spcPts val="1950"/>
+              </a:lnSpc>
+              <a:spcAft>
+                <a:spcPts val="0"/>
+              </a:spcAft>
+              <a:buNone/>
+            </a:pPr>
+            <a:r>
+              <a:rPr lang="en-US" sz="1500" b="0">
+                <a:solidFill>
+                  <a:srgbClr val="202B33"/>
+                </a:solidFill>
+                <a:latin typeface="Arial"/>
+                <a:ea typeface="Arial"/>
+                <a:cs typeface="Arial"/>
+              </a:rPr>
+              <a:t xml:space="preserve">https://doi.org/10.1109/TSE.1986.6312924),</a:t>
+            </a:r>
+            <a:endParaRPr lang="en-US" sz="1500"/>
+          </a:p>
+          <a:p>
+            <a:pPr marL="0" indent="0">
+              <a:lnSpc>
+                <a:spcPts val="1950"/>
+              </a:lnSpc>
+              <a:spcAft>
+                <a:spcPts val="0"/>
+              </a:spcAft>
+              <a:buNone/>
+            </a:pPr>
+            <a:r>
+              <a:rPr lang="en-US" sz="1500" b="0">
+                <a:solidFill>
+                  <a:srgbClr val="202B33"/>
+                </a:solidFill>
+                <a:latin typeface="Arial"/>
+                <a:ea typeface="Arial"/>
+                <a:cs typeface="Arial"/>
+              </a:rPr>
+              <a:t xml:space="preserve">IEEE Transactions on Software Engineering</a:t>
+            </a:r>
+            <a:endParaRPr lang="en-US" sz="1500"/>
+          </a:p>
+          <a:p>
+            <a:pPr marL="0" indent="0">
+              <a:lnSpc>
+                <a:spcPts val="1950"/>
+              </a:lnSpc>
+              <a:spcAft>
+                <a:spcPts val="0"/>
+              </a:spcAft>
+              <a:buNone/>
+            </a:pPr>
+            <a:r>
+              <a:rPr lang="en-US" sz="1500" b="0">
+                <a:solidFill>
+                  <a:srgbClr val="202B33"/>
+                </a:solidFill>
+                <a:latin typeface="Arial"/>
+                <a:ea typeface="Arial"/>
+                <a:cs typeface="Arial"/>
+              </a:rPr>
+              <a:t xml:space="preserve">SE-12(1, 96 to 109. Cited to set aside: it</a:t>
+            </a:r>
+            <a:endParaRPr lang="en-US" sz="1500"/>
+          </a:p>
+          <a:p>
+            <a:pPr marL="0" indent="0">
+              <a:lnSpc>
+                <a:spcPts val="1950"/>
+              </a:lnSpc>
+              <a:spcAft>
+                <a:spcPts val="0"/>
+              </a:spcAft>
+              <a:buNone/>
+            </a:pPr>
+            <a:r>
+              <a:rPr lang="en-US" sz="1500" b="0">
+                <a:solidFill>
+                  <a:srgbClr val="202B33"/>
+                </a:solidFill>
+                <a:latin typeface="Arial"/>
+                <a:ea typeface="Arial"/>
+                <a:cs typeface="Arial"/>
+              </a:rPr>
+              <a:t xml:space="preserve">is a result about redundancy as a</a:t>
+            </a:r>
+            <a:endParaRPr lang="en-US" sz="1500"/>
+          </a:p>
+        </p:txBody>
+      </p:sp>
+      <p:sp>
+        <p:nvSpPr>
+          <p:cNvPr id="5" name="Text 5"/>
+          <p:cNvSpPr txBox="1"/>
+          <p:nvPr/>
+        </p:nvSpPr>
+        <p:spPr>
+          <a:xfrm>
+            <a:off x="5238750" y="1971675"/>
+            <a:ext cx="4362450" cy="5314950"/>
+          </a:xfrm>
+          <a:prstGeom prst="rect">
+            <a:avLst/>
+          </a:prstGeom>
+          <a:noFill/>
+          <a:ln>
+            <a:noFill/>
+          </a:ln>
+        </p:spPr>
+        <p:txBody>
+          <a:bodyPr wrap="none" lIns="0" tIns="0" rIns="0" bIns="0" anchor="t">
+            <a:noAutofit/>
+          </a:bodyPr>
+          <a:lstStyle/>
+          <a:p>
+            <a:pPr marL="0" indent="0">
+              <a:lnSpc>
+                <a:spcPts val="1950"/>
+              </a:lnSpc>
+              <a:spcAft>
+                <a:spcPts val="0"/>
+              </a:spcAft>
+              <a:buNone/>
+            </a:pPr>
+            <a:r>
+              <a:rPr lang="en-US" sz="1500" b="0">
+                <a:solidFill>
+                  <a:srgbClr val="202B33"/>
+                </a:solidFill>
+                <a:latin typeface="Arial"/>
+                <a:ea typeface="Arial"/>
+                <a:cs typeface="Arial"/>
+              </a:rPr>
+              <a:t xml:space="preserve">correctness strategy, which this slide does</a:t>
+            </a:r>
+            <a:endParaRPr lang="en-US" sz="1500"/>
+          </a:p>
+          <a:p>
+            <a:pPr marL="0" indent="0">
+              <a:lnSpc>
+                <a:spcPts val="1950"/>
+              </a:lnSpc>
+              <a:spcAft>
+                <a:spcPts val="0"/>
+              </a:spcAft>
+              <a:buNone/>
+            </a:pPr>
+            <a:r>
+              <a:rPr lang="en-US" sz="1500" b="0">
+                <a:solidFill>
+                  <a:srgbClr val="202B33"/>
+                </a:solidFill>
+                <a:latin typeface="Arial"/>
+                <a:ea typeface="Arial"/>
+                <a:cs typeface="Arial"/>
+              </a:rPr>
+              <a:t xml:space="preserve">not claim.</a:t>
+            </a:r>
+            <a:endParaRPr lang="en-US" sz="1500"/>
+          </a:p>
+          <a:p>
+            <a:pPr marL="0" indent="0">
+              <a:lnSpc>
+                <a:spcPts val="1950"/>
+              </a:lnSpc>
+              <a:spcAft>
+                <a:spcPts val="0"/>
+              </a:spcAft>
+              <a:buNone/>
+            </a:pPr>
+            <a:r>
+              <a:rPr lang="en-US" sz="1500" b="0">
+                <a:solidFill>
+                  <a:srgbClr val="202B33"/>
+                </a:solidFill>
+                <a:latin typeface="Arial"/>
+                <a:ea typeface="Arial"/>
+                <a:cs typeface="Arial"/>
+              </a:rPr>
+              <a:t xml:space="preserve"/>
+            </a:r>
+            <a:endParaRPr lang="en-US" sz="1500"/>
+          </a:p>
+          <a:p>
+            <a:pPr marL="0" indent="0">
+              <a:lnSpc>
+                <a:spcPts val="1950"/>
+              </a:lnSpc>
+              <a:spcAft>
+                <a:spcPts val="0"/>
+              </a:spcAft>
+              <a:buNone/>
+            </a:pPr>
+            <a:r>
+              <a:rPr lang="en-US" sz="1500" b="0">
+                <a:solidFill>
+                  <a:srgbClr val="202B33"/>
+                </a:solidFill>
+                <a:latin typeface="Arial"/>
+                <a:ea typeface="Arial"/>
+                <a:cs typeface="Arial"/>
+              </a:rPr>
+              <a:t xml:space="preserve">Amdahl (1967), Validity of the single</a:t>
+            </a:r>
+            <a:endParaRPr lang="en-US" sz="1500"/>
+          </a:p>
+          <a:p>
+            <a:pPr marL="0" indent="0">
+              <a:lnSpc>
+                <a:spcPts val="1950"/>
+              </a:lnSpc>
+              <a:spcAft>
+                <a:spcPts val="0"/>
+              </a:spcAft>
+              <a:buNone/>
+            </a:pPr>
+            <a:r>
+              <a:rPr lang="en-US" sz="1500" b="0">
+                <a:solidFill>
+                  <a:srgbClr val="202B33"/>
+                </a:solidFill>
+                <a:latin typeface="Arial"/>
+                <a:ea typeface="Arial"/>
+                <a:cs typeface="Arial"/>
+              </a:rPr>
+              <a:t xml:space="preserve">processor approach to achieving large scale</a:t>
+            </a:r>
+            <a:endParaRPr lang="en-US" sz="1500"/>
+          </a:p>
+          <a:p>
+            <a:pPr marL="0" indent="0">
+              <a:lnSpc>
+                <a:spcPts val="1950"/>
+              </a:lnSpc>
+              <a:spcAft>
+                <a:spcPts val="0"/>
+              </a:spcAft>
+              <a:buNone/>
+            </a:pPr>
+            <a:r>
+              <a:rPr lang="en-US" sz="1500" b="0">
+                <a:solidFill>
+                  <a:srgbClr val="202B33"/>
+                </a:solidFill>
+                <a:latin typeface="Arial"/>
+                <a:ea typeface="Arial"/>
+                <a:cs typeface="Arial"/>
+              </a:rPr>
+              <a:t xml:space="preserve">computing capabilities, AFIPS Conference</a:t>
+            </a:r>
+            <a:endParaRPr lang="en-US" sz="1500"/>
+          </a:p>
+          <a:p>
+            <a:pPr marL="0" indent="0">
+              <a:lnSpc>
+                <a:spcPts val="1950"/>
+              </a:lnSpc>
+              <a:spcAft>
+                <a:spcPts val="0"/>
+              </a:spcAft>
+              <a:buNone/>
+            </a:pPr>
+            <a:r>
+              <a:rPr lang="en-US" sz="1500" b="0">
+                <a:solidFill>
+                  <a:srgbClr val="202B33"/>
+                </a:solidFill>
+                <a:latin typeface="Arial"/>
+                <a:ea typeface="Arial"/>
+                <a:cs typeface="Arial"/>
+              </a:rPr>
+              <a:t xml:space="preserve">Proceedings 30, 483 to 485.</a:t>
+            </a:r>
+            <a:endParaRPr lang="en-US" sz="1500"/>
+          </a:p>
+        </p:txBody>
+      </p:sp>
+      <p:sp>
+        <p:nvSpPr>
+          <p:cNvPr id="6" name="Text 6"/>
+          <p:cNvSpPr txBox="1"/>
+          <p:nvPr/>
+        </p:nvSpPr>
+        <p:spPr>
+          <a:xfrm>
+            <a:off x="457200" y="7486650"/>
+            <a:ext cx="8820150" cy="190500"/>
+          </a:xfrm>
+          <a:prstGeom prst="rect">
+            <a:avLst/>
+          </a:prstGeom>
+          <a:noFill/>
+          <a:ln>
+            <a:noFill/>
+          </a:ln>
+        </p:spPr>
+        <p:txBody>
+          <a:bodyPr wrap="none" lIns="0" tIns="0" rIns="0" bIns="0" anchor="t">
+            <a:noAutofit/>
+          </a:bodyPr>
+          <a:lstStyle/>
+          <a:p>
+            <a:pPr marL="0" indent="0">
+              <a:lnSpc>
+                <a:spcPts val="1268"/>
+              </a:lnSpc>
+              <a:spcAft>
+                <a:spcPts val="0"/>
+              </a:spcAft>
+              <a:buNone/>
+            </a:pPr>
+            <a:r>
+              <a:rPr lang="en-US" sz="975" b="0">
+                <a:solidFill>
+                  <a:srgbClr val="48555B"/>
+                </a:solidFill>
+                <a:latin typeface="Arial"/>
+                <a:ea typeface="Arial"/>
+                <a:cs typeface="Arial"/>
+              </a:rPr>
+              <a:t xml:space="preserve">Dynamic Scaling of Agentic Workloads</a:t>
+            </a:r>
+            <a:endParaRPr lang="en-US" sz="975"/>
+          </a:p>
+        </p:txBody>
+      </p:sp>
+      <p:sp>
+        <p:nvSpPr>
+          <p:cNvPr id="7" name="Text 7"/>
+          <p:cNvSpPr txBox="1"/>
+          <p:nvPr/>
+        </p:nvSpPr>
+        <p:spPr>
+          <a:xfrm>
+            <a:off x="9391650" y="7486650"/>
+            <a:ext cx="238125" cy="190500"/>
+          </a:xfrm>
+          <a:prstGeom prst="rect">
+            <a:avLst/>
+          </a:prstGeom>
+          <a:noFill/>
+          <a:ln>
+            <a:noFill/>
+          </a:ln>
+        </p:spPr>
+        <p:txBody>
+          <a:bodyPr wrap="none" lIns="0" tIns="0" rIns="0" bIns="0" anchor="t">
+            <a:noAutofit/>
+          </a:bodyPr>
+          <a:lstStyle/>
+          <a:p>
+            <a:pPr marL="0" indent="0">
+              <a:lnSpc>
+                <a:spcPts val="1268"/>
+              </a:lnSpc>
+              <a:spcAft>
+                <a:spcPts val="0"/>
+              </a:spcAft>
+              <a:buNone/>
+            </a:pPr>
+            <a:r>
+              <a:rPr lang="en-US" sz="975" b="0">
+                <a:solidFill>
+                  <a:srgbClr val="48555B"/>
+                </a:solidFill>
+                <a:latin typeface="Arial"/>
+                <a:ea typeface="Arial"/>
+                <a:cs typeface="Arial"/>
+              </a:rPr>
+              <a:t xml:space="preserve">21</a:t>
             </a:r>
             <a:endParaRPr lang="en-US" sz="975"/>
           </a:p>

--- a/artifacts/speaking-portfolio-expanded/decks/dynamic-scaling-40min-handout.pptx
+++ b/artifacts/speaking-portfolio-expanded/decks/dynamic-scaling-40min-handout.pptx
@@ -28,7 +28,6 @@
     <p:sldId id="273" r:id="rIdSlide18"/>
     <p:sldId id="274" r:id="rIdSlide19"/>
     <p:sldId id="275" r:id="rIdSlide20"/>
-    <p:sldId id="276" r:id="rIdSlide21"/>
   </p:sldIdLst>
   <p:sldSz cx="10058400" cy="7772400" type="custom"/>
   <p:notesSz cx="6858000" cy="9144000"/>
@@ -318,7 +317,7 @@
                 <a:ea typeface="Arial"/>
                 <a:cs typeface="Arial"/>
               </a:rPr>
-              <a:t xml:space="preserve">The ecosystem is already ephemeral by default</a:t>
+              <a:t xml:space="preserve">Torn Down by Default</a:t>
             </a:r>
             <a:endParaRPr lang="en-US" sz="1200"/>
           </a:p>
@@ -571,7 +570,7 @@
                 <a:ea typeface="Arial"/>
                 <a:cs typeface="Arial"/>
               </a:rPr>
-              <a:t xml:space="preserve">The pieces exist, and they are shaped for this. Fly.io Sprites are hardware-isolated VMs that create in a second or two, checkpoint and restore, and take an egress policy from outside so the agent inside cannot loosen it. Depot sandboxes bill per second for exactly this: run agent-generated code, stream output, throw it away.</a:t>
+              <a:t xml:space="preserve">The pieces exist, and they are shaped for this. Fly.io Sprites are microVMs whose stated creation target is under a second, checkpoint and restore, and take an egress policy from outside so the agent inside cannot loosen it. Depot sandboxes bill by the second for exactly this: run agent-generated code, throw it away.</a:t>
             </a:r>
             <a:endParaRPr lang="en-US" sz="1200"/>
           </a:p>
@@ -822,7 +821,7 @@
                 <a:ea typeface="Arial"/>
                 <a:cs typeface="Arial"/>
               </a:rPr>
-              <a:t xml:space="preserve">The ecosystem is already ephemeral by default</a:t>
+              <a:t xml:space="preserve">Torn Down by Default</a:t>
             </a:r>
             <a:endParaRPr lang="en-US" sz="1200"/>
           </a:p>
@@ -1075,7 +1074,7 @@
                 <a:ea typeface="Arial"/>
                 <a:cs typeface="Arial"/>
               </a:rPr>
-              <a:t xml:space="preserve">The pieces exist, and they are shaped for this. Fly.io Sprites are hardware-isolated VMs that create in a second or two, checkpoint and restore, and take an egress policy from outside so the agent inside cannot loosen it. Depot sandboxes bill per second for exactly this: run agent-generated code, stream output, throw it away.</a:t>
+              <a:t xml:space="preserve">The pieces exist, and they are shaped for this. Fly.io Sprites are microVMs whose stated creation target is under a second, checkpoint and restore, and take an egress policy from outside so the agent inside cannot loosen it. Depot sandboxes bill by the second for exactly this: run agent-generated code, throw it away.</a:t>
             </a:r>
             <a:endParaRPr lang="en-US" sz="1200"/>
           </a:p>
@@ -1326,7 +1325,7 @@
                 <a:ea typeface="Arial"/>
                 <a:cs typeface="Arial"/>
               </a:rPr>
-              <a:t xml:space="preserve">Match the execution class to the work</a:t>
+              <a:t xml:space="preserve">Fifty Containers Don't Render Faster</a:t>
             </a:r>
             <a:endParaRPr lang="en-US" sz="1200"/>
           </a:p>
@@ -1853,7 +1852,7 @@
                 <a:ea typeface="Arial"/>
                 <a:cs typeface="Arial"/>
               </a:rPr>
-              <a:t xml:space="preserve">&gt; accepted → submitted → waiting → completed / failed / unresolved</a:t>
+              <a:t xml:space="preserve">&gt; queued → submitted → waiting → completed / failed / unresolved</a:t>
             </a:r>
             <a:endParaRPr lang="en-US" sz="1200"/>
           </a:p>
@@ -2472,7 +2471,7 @@
                 <a:ea typeface="Arial"/>
                 <a:cs typeface="Arial"/>
               </a:rPr>
-              <a:t xml:space="preserve">Stage direction: Five minutes from demo.md. Ask the room for each next transition before revealing it.</a:t>
+              <a:t xml:space="preserve">Stage direction: The trace in demo.md; compress rows 1 and 2 on the short routes. Ask the room for each next transition before revealing it.</a:t>
             </a:r>
             <a:endParaRPr lang="en-US" sz="1200"/>
           </a:p>
@@ -2585,7 +2584,7 @@
                 <a:ea typeface="Arial"/>
                 <a:cs typeface="Arial"/>
               </a:rPr>
-              <a:t xml:space="preserve">Attempts are a scaling axis. So is judging.</a:t>
+              <a:t xml:space="preserve">Monkeys, Then Guards</a:t>
             </a:r>
             <a:endParaRPr lang="en-US" sz="1200"/>
           </a:p>
@@ -2746,7 +2745,7 @@
                 <a:ea typeface="Arial"/>
                 <a:cs typeface="Arial"/>
               </a:rPr>
-              <a:t xml:space="preserve">&gt; Council of guards: judges read a thousand tokens and write fifty; measure the disagreement</a:t>
+              <a:t xml:space="preserve">&gt; Council of Guards: judges read a thousand tokens and write fifty; measure the disagreement</a:t>
             </a:r>
             <a:endParaRPr lang="en-US" sz="1200"/>
           </a:p>
@@ -2815,7 +2814,7 @@
                 <a:ea typeface="Arial"/>
                 <a:cs typeface="Arial"/>
               </a:rPr>
-              <a:t xml:space="preserve">Change the unit of work from images to whole designs. Give the batch-job problem to three generated agents with the same requirements and different priorities: a minimalist, a maintainer, a security and performance reviewer. Keep first drafts separate so they do not converge on the first plausible answer. The contrast is the product.</a:t>
+              <a:t xml:space="preserve">Change the unit of work from images to whole designs. One brief, three generated agents: minimalist, maintainer, security and performance reviewer. Separate first drafts. The contrast is the product.</a:t>
             </a:r>
             <a:endParaRPr lang="en-US" sz="1200"/>
           </a:p>
@@ -2861,7 +2860,7 @@
                 <a:ea typeface="Arial"/>
                 <a:cs typeface="Arial"/>
               </a:rPr>
-              <a:t xml:space="preserve">Somebody is going to cite Knight and Leveson at me, so let me do it first. 1986, twenty-seven teams, one specification, a million tests, and the independently written versions failed together far more than independence predicts. True, important, and about N-version programming as a correctness strategy. That is not what this is. I am not voting three models toward the truth, and I am not going to tell you the ensemble is right because it agreed with itself. If that is the pitch you heard, it is not mine.</a:t>
+              <a:t xml:space="preserve">Somebody is going to cite Knight and Leveson at me, so let me do it first. 1986, twenty-seven programmers, one specification, a million tests, and the independently written versions failed together far more than independence predicts. True, important, and about N-version programming as a correctness strategy. Not this. I am not voting three models toward the truth.</a:t>
             </a:r>
             <a:endParaRPr lang="en-US" sz="1200"/>
           </a:p>
@@ -2907,7 +2906,7 @@
                 <a:ea typeface="Arial"/>
                 <a:cs typeface="Arial"/>
               </a:rPr>
-              <a:t xml:space="preserve">Here is what parallel attempts actually buy. Understanding of the models you depend on: run one brief through two of them and you learn what each reaches for and what each forgets. A migration harness: same brief, new model, diff the behavior before you switch, instead of after the incident. Better output: a synthesis of compatible ideas is often better than any single draft. And the cheap one, which is the one I care about: judging. A judge reads a thousand tokens and writes fifty. Output is what costs, so you can afford three or five judges from different models on every candidate, and the number you want back is not the average score. It is the disagreement. When the judges split or their reasons barely overlap, that candidate is sitting in territory nobody understands, and that is the one you do not ship on autopilot. I call this the Council of Guards. It picks between one and three alternatives to generate, and it costs a fraction of the generation it is guarding.</a:t>
+              <a:t xml:space="preserve">The generation side has a name I am not sorry about: the barrel-of-monkeys maneuver. Lead with cheap parallel generation on purpose — monkeys at a hundredth of the frontier's price — and hand the barrel to the next stage. Four reasons. Race: take the first draft that passes the gate. Synthesize: a frontier model reads them all, input tokens being the cheap ones, and writes one coherent output. Rank: more candidates for the judges, so the best whole answer goes downstream. Catch: in law or medicine, where the rules are extensive and specific, the mistake you fear shows up in one output out of ten, and the only way to see it is to have ten.</a:t>
             </a:r>
             <a:endParaRPr lang="en-US" sz="1200"/>
           </a:p>
@@ -2953,7 +2952,7 @@
                 <a:ea typeface="Arial"/>
                 <a:cs typeface="Arial"/>
               </a:rPr>
-              <a:t xml:space="preserve">The generation side has a name too, and I am not sorry about it: the barrel-of-monkeys maneuver. Lead with parallel generation on purpose. You are adding a controlled section of chaos that the next stage has to handle: a revision loop, a router, the council, or your users in an A/B test. Why you would want the chaos varies. Sometimes you want the fastest answer, so you race. Sometimes you want the best parts of several, so a frontier model, whose input tokens are the cheap ones, reads all of them and writes one coherent output. Sometimes you just want more candidates for the judges to rank so the best whole answer goes downstream. In law or medicine, where the rules are extensive and specific, that is how you catch the one errant mistake that shows up in one output out of ten. And the monkeys can be cheap: models at a hundredth or a thousandth the price of the frontier, generating alternatives in a loop. Some of them need a tool-calling agent with files, search and git, which means a sandbox and somebody's cloud; others single-shot it fine. That is an architecture question about how much effort you want in a system that keeps improving versus one you can retune at runtime. Fan-out is a tool you encapsulate at points in the graph: default model most of the time, n alternatives for a sample of requests. Your needs and your opportunities decide why, where and how often.</a:t>
+              <a:t xml:space="preserve">Speculative optimization in a lab coat? Possibly. Ship it with an env var that sets fan-out to one, and ideally let the system tune that knob itself. Right? Right. That is the companion talk.</a:t>
             </a:r>
             <a:endParaRPr lang="en-US" sz="1200"/>
           </a:p>
@@ -2999,7 +2998,7 @@
                 <a:ea typeface="Arial"/>
                 <a:cs typeface="Arial"/>
               </a:rPr>
-              <a:t xml:space="preserve">Does this border on speculative optimization dressed up as learning? Yes, possibly. Probably sometimes. We will find out. So do not build any of it without env vars to turn it down, and ideally build the system that adjusts its own fan-out and token burn from what it measures. Right? Right. That system is the companion talk.</a:t>
+              <a:t xml:space="preserve">The cheap half is judging. A judge reads a thousand tokens and writes fifty, and output is what costs, so five judges from different models on every candidate is affordable. Not the average score. The disagreement. Judges that split, or whose reasons barely overlap, have found territory nobody understands; that candidate does not ship on autopilot. I call this the Council of Guards: it reads everything, writes almost nothing, and costs a fraction of what it guards.</a:t>
             </a:r>
             <a:endParaRPr lang="en-US" sz="1200"/>
           </a:p>
@@ -3045,7 +3044,7 @@
                 <a:ea typeface="Arial"/>
                 <a:cs typeface="Arial"/>
               </a:rPr>
-              <a:t xml:space="preserve">Write the gates before reading the candidates: no duplicate dispatch after restart, no cross-tenant spend, no regeneration on notification retry, no dispatch after deadline. Run executable checks first. In the exercise every candidate fails a gate, including the careful one, which is the point: the council is allowed to reject the room. Then combine compatible ideas into a new candidate with one coherent set of assumptions and run the gates again. Passing parts do not make a passing whole. Stop at the review budget; an endless debate is an expensive way to not ship.</a:t>
+              <a:t xml:space="preserve">Write the gates before you read the candidates: no duplicate dispatch after restart, no cross-tenant spend, no regeneration on notification retry, no dispatch after deadline. Every candidate fails one, including the careful one; the council is allowed to reject the room. A synthesis is a new candidate. Stop at the review budget.</a:t>
             </a:r>
             <a:endParaRPr lang="en-US" sz="1200"/>
           </a:p>
@@ -3091,7 +3090,7 @@
                 <a:ea typeface="Arial"/>
                 <a:cs typeface="Arial"/>
               </a:rPr>
-              <a:t xml:space="preserve">None of this looks like the engineering we were raised on. Do not do the work twice. Do not spend compute speculatively. One right answer per ticket. Those were axioms when the expensive thing was the engineer. When the expensive thing is being wrong, and a second draft costs cents, doing it three times and reading what disagrees is the frugal move. I am not a shill for Big Token. I am telling you that cheaper, safer and faster now sometimes come from spending exactly where yesterday's wisdom told you not to.</a:t>
+              <a:t xml:space="preserve">None of this looks like the engineering we were raised on. Do not do the work twice. Do not spend compute speculatively. One right answer per ticket. Those were axioms when the expensive thing was the engineer. When the expensive thing is being wrong and a second draft costs cents, doing it three times and reading what disagrees is the frugal move. I am not a shill for Big Token. Cheaper, safer and faster now sometimes come from spending exactly where yesterday's wisdom told you not to.</a:t>
             </a:r>
             <a:endParaRPr lang="en-US" sz="1200"/>
           </a:p>
@@ -3296,7 +3295,7 @@
                 <a:ea typeface="Arial"/>
                 <a:cs typeface="Arial"/>
               </a:rPr>
-              <a:t xml:space="preserve">Attempts are a scaling axis. So is judging.</a:t>
+              <a:t xml:space="preserve">Monkeys, Then Guards</a:t>
             </a:r>
             <a:endParaRPr lang="en-US" sz="1200"/>
           </a:p>
@@ -3457,7 +3456,7 @@
                 <a:ea typeface="Arial"/>
                 <a:cs typeface="Arial"/>
               </a:rPr>
-              <a:t xml:space="preserve">&gt; Council of guards: judges read a thousand tokens and write fifty; measure the disagreement</a:t>
+              <a:t xml:space="preserve">&gt; Council of Guards: judges read a thousand tokens and write fifty; measure the disagreement</a:t>
             </a:r>
             <a:endParaRPr lang="en-US" sz="1200"/>
           </a:p>
@@ -3526,7 +3525,7 @@
                 <a:ea typeface="Arial"/>
                 <a:cs typeface="Arial"/>
               </a:rPr>
-              <a:t xml:space="preserve">Change the unit of work from images to whole designs. Give the batch-job problem to three generated agents with the same requirements and different priorities: a minimalist, a maintainer, a security and performance reviewer. Keep first drafts separate so they do not converge on the first plausible answer. The contrast is the product.</a:t>
+              <a:t xml:space="preserve">Change the unit of work from images to whole designs. One brief, three generated agents: minimalist, maintainer, security and performance reviewer. Separate first drafts. The contrast is the product.</a:t>
             </a:r>
             <a:endParaRPr lang="en-US" sz="1200"/>
           </a:p>
@@ -3572,7 +3571,7 @@
                 <a:ea typeface="Arial"/>
                 <a:cs typeface="Arial"/>
               </a:rPr>
-              <a:t xml:space="preserve">Somebody is going to cite Knight and Leveson at me, so let me do it first. 1986, twenty-seven teams, one specification, a million tests, and the independently written versions failed together far more than independence predicts. True, important, and about N-version programming as a correctness strategy. That is not what this is. I am not voting three models toward the truth, and I am not going to tell you the ensemble is right because it agreed with itself. If that is the pitch you heard, it is not mine.</a:t>
+              <a:t xml:space="preserve">Somebody is going to cite Knight and Leveson at me, so let me do it first. 1986, twenty-seven programmers, one specification, a million tests, and the independently written versions failed together far more than independence predicts. True, important, and about N-version programming as a correctness strategy. Not this. I am not voting three models toward the truth.</a:t>
             </a:r>
             <a:endParaRPr lang="en-US" sz="1200"/>
           </a:p>
@@ -3618,7 +3617,7 @@
                 <a:ea typeface="Arial"/>
                 <a:cs typeface="Arial"/>
               </a:rPr>
-              <a:t xml:space="preserve">Here is what parallel attempts actually buy. Understanding of the models you depend on: run one brief through two of them and you learn what each reaches for and what each forgets. A migration harness: same brief, new model, diff the behavior before you switch, instead of after the incident. Better output: a synthesis of compatible ideas is often better than any single draft. And the cheap one, which is the one I care about: judging. A judge reads a thousand tokens and writes fifty. Output is what costs, so you can afford three or five judges from different models on every candidate, and the number you want back is not the average score. It is the disagreement. When the judges split or their reasons barely overlap, that candidate is sitting in territory nobody understands, and that is the one you do not ship on autopilot. I call this the Council of Guards. It picks between one and three alternatives to generate, and it costs a fraction of the generation it is guarding.</a:t>
+              <a:t xml:space="preserve">The generation side has a name I am not sorry about: the barrel-of-monkeys maneuver. Lead with cheap parallel generation on purpose — monkeys at a hundredth of the frontier's price — and hand the barrel to the next stage. Four reasons. Race: take the first draft that passes the gate. Synthesize: a frontier model reads them all, input tokens being the cheap ones, and writes one coherent output. Rank: more candidates for the judges, so the best whole answer goes downstream. Catch: in law or medicine, where the rules are extensive and specific, the mistake you fear shows up in one output out of ten, and the only way to see it is to have ten.</a:t>
             </a:r>
             <a:endParaRPr lang="en-US" sz="1200"/>
           </a:p>
@@ -3664,7 +3663,7 @@
                 <a:ea typeface="Arial"/>
                 <a:cs typeface="Arial"/>
               </a:rPr>
-              <a:t xml:space="preserve">The generation side has a name too, and I am not sorry about it: the barrel-of-monkeys maneuver. Lead with parallel generation on purpose. You are adding a controlled section of chaos that the next stage has to handle: a revision loop, a router, the council, or your users in an A/B test. Why you would want the chaos varies. Sometimes you want the fastest answer, so you race. Sometimes you want the best parts of several, so a frontier model, whose input tokens are the cheap ones, reads all of them and writes one coherent output. Sometimes you just want more candidates for the judges to rank so the best whole answer goes downstream. In law or medicine, where the rules are extensive and specific, that is how you catch the one errant mistake that shows up in one output out of ten. And the monkeys can be cheap: models at a hundredth or a thousandth the price of the frontier, generating alternatives in a loop. Some of them need a tool-calling agent with files, search and git, which means a sandbox and somebody's cloud; others single-shot it fine. That is an architecture question about how much effort you want in a system that keeps improving versus one you can retune at runtime. Fan-out is a tool you encapsulate at points in the graph: default model most of the time, n alternatives for a sample of requests. Your needs and your opportunities decide why, where and how often.</a:t>
+              <a:t xml:space="preserve">Speculative optimization in a lab coat? Possibly. Ship it with an env var that sets fan-out to one, and ideally let the system tune that knob itself. Right? Right. That is the companion talk.</a:t>
             </a:r>
             <a:endParaRPr lang="en-US" sz="1200"/>
           </a:p>
@@ -3710,7 +3709,7 @@
                 <a:ea typeface="Arial"/>
                 <a:cs typeface="Arial"/>
               </a:rPr>
-              <a:t xml:space="preserve">Does this border on speculative optimization dressed up as learning? Yes, possibly. Probably sometimes. We will find out. So do not build any of it without env vars to turn it down, and ideally build the system that adjusts its own fan-out and token burn from what it measures. Right? Right. That system is the companion talk.</a:t>
+              <a:t xml:space="preserve">The cheap half is judging. A judge reads a thousand tokens and writes fifty, and output is what costs, so five judges from different models on every candidate is affordable. Not the average score. The disagreement. Judges that split, or whose reasons barely overlap, have found territory nobody understands; that candidate does not ship on autopilot. I call this the Council of Guards: it reads everything, writes almost nothing, and costs a fraction of what it guards.</a:t>
             </a:r>
             <a:endParaRPr lang="en-US" sz="1200"/>
           </a:p>
@@ -3756,7 +3755,7 @@
                 <a:ea typeface="Arial"/>
                 <a:cs typeface="Arial"/>
               </a:rPr>
-              <a:t xml:space="preserve">Write the gates before reading the candidates: no duplicate dispatch after restart, no cross-tenant spend, no regeneration on notification retry, no dispatch after deadline. Run executable checks first. In the exercise every candidate fails a gate, including the careful one, which is the point: the council is allowed to reject the room. Then combine compatible ideas into a new candidate with one coherent set of assumptions and run the gates again. Passing parts do not make a passing whole. Stop at the review budget; an endless debate is an expensive way to not ship.</a:t>
+              <a:t xml:space="preserve">Write the gates before you read the candidates: no duplicate dispatch after restart, no cross-tenant spend, no regeneration on notification retry, no dispatch after deadline. Every candidate fails one, including the careful one; the council is allowed to reject the room. A synthesis is a new candidate. Stop at the review budget.</a:t>
             </a:r>
             <a:endParaRPr lang="en-US" sz="1200"/>
           </a:p>
@@ -3802,7 +3801,7 @@
                 <a:ea typeface="Arial"/>
                 <a:cs typeface="Arial"/>
               </a:rPr>
-              <a:t xml:space="preserve">None of this looks like the engineering we were raised on. Do not do the work twice. Do not spend compute speculatively. One right answer per ticket. Those were axioms when the expensive thing was the engineer. When the expensive thing is being wrong, and a second draft costs cents, doing it three times and reading what disagrees is the frugal move. I am not a shill for Big Token. I am telling you that cheaper, safer and faster now sometimes come from spending exactly where yesterday's wisdom told you not to.</a:t>
+              <a:t xml:space="preserve">None of this looks like the engineering we were raised on. Do not do the work twice. Do not spend compute speculatively. One right answer per ticket. Those were axioms when the expensive thing was the engineer. When the expensive thing is being wrong and a second draft costs cents, doing it three times and reading what disagrees is the frugal move. I am not a shill for Big Token. Cheaper, safer and faster now sometimes come from spending exactly where yesterday's wisdom told you not to.</a:t>
             </a:r>
             <a:endParaRPr lang="en-US" sz="1200"/>
           </a:p>
@@ -4007,7 +4006,7 @@
                 <a:ea typeface="Arial"/>
                 <a:cs typeface="Arial"/>
               </a:rPr>
-              <a:t xml:space="preserve">Attempts are a scaling axis. So is judging.</a:t>
+              <a:t xml:space="preserve">Monkeys, Then Guards</a:t>
             </a:r>
             <a:endParaRPr lang="en-US" sz="1200"/>
           </a:p>
@@ -4168,7 +4167,7 @@
                 <a:ea typeface="Arial"/>
                 <a:cs typeface="Arial"/>
               </a:rPr>
-              <a:t xml:space="preserve">&gt; Council of guards: judges read a thousand tokens and write fifty; measure the disagreement</a:t>
+              <a:t xml:space="preserve">&gt; Council of Guards: judges read a thousand tokens and write fifty; measure the disagreement</a:t>
             </a:r>
             <a:endParaRPr lang="en-US" sz="1200"/>
           </a:p>
@@ -4237,7 +4236,7 @@
                 <a:ea typeface="Arial"/>
                 <a:cs typeface="Arial"/>
               </a:rPr>
-              <a:t xml:space="preserve">Change the unit of work from images to whole designs. Give the batch-job problem to three generated agents with the same requirements and different priorities: a minimalist, a maintainer, a security and performance reviewer. Keep first drafts separate so they do not converge on the first plausible answer. The contrast is the product.</a:t>
+              <a:t xml:space="preserve">Change the unit of work from images to whole designs. One brief, three generated agents: minimalist, maintainer, security and performance reviewer. Separate first drafts. The contrast is the product.</a:t>
             </a:r>
             <a:endParaRPr lang="en-US" sz="1200"/>
           </a:p>
@@ -4283,7 +4282,7 @@
                 <a:ea typeface="Arial"/>
                 <a:cs typeface="Arial"/>
               </a:rPr>
-              <a:t xml:space="preserve">Somebody is going to cite Knight and Leveson at me, so let me do it first. 1986, twenty-seven teams, one specification, a million tests, and the independently written versions failed together far more than independence predicts. True, important, and about N-version programming as a correctness strategy. That is not what this is. I am not voting three models toward the truth, and I am not going to tell you the ensemble is right because it agreed with itself. If that is the pitch you heard, it is not mine.</a:t>
+              <a:t xml:space="preserve">Somebody is going to cite Knight and Leveson at me, so let me do it first. 1986, twenty-seven programmers, one specification, a million tests, and the independently written versions failed together far more than independence predicts. True, important, and about N-version programming as a correctness strategy. Not this. I am not voting three models toward the truth.</a:t>
             </a:r>
             <a:endParaRPr lang="en-US" sz="1200"/>
           </a:p>
@@ -4329,7 +4328,7 @@
                 <a:ea typeface="Arial"/>
                 <a:cs typeface="Arial"/>
               </a:rPr>
-              <a:t xml:space="preserve">Here is what parallel attempts actually buy. Understanding of the models you depend on: run one brief through two of them and you learn what each reaches for and what each forgets. A migration harness: same brief, new model, diff the behavior before you switch, instead of after the incident. Better output: a synthesis of compatible ideas is often better than any single draft. And the cheap one, which is the one I care about: judging. A judge reads a thousand tokens and writes fifty. Output is what costs, so you can afford three or five judges from different models on every candidate, and the number you want back is not the average score. It is the disagreement. When the judges split or their reasons barely overlap, that candidate is sitting in territory nobody understands, and that is the one you do not ship on autopilot. I call this the Council of Guards. It picks between one and three alternatives to generate, and it costs a fraction of the generation it is guarding.</a:t>
+              <a:t xml:space="preserve">The generation side has a name I am not sorry about: the barrel-of-monkeys maneuver. Lead with cheap parallel generation on purpose — monkeys at a hundredth of the frontier's price — and hand the barrel to the next stage. Four reasons. Race: take the first draft that passes the gate. Synthesize: a frontier model reads them all, input tokens being the cheap ones, and writes one coherent output. Rank: more candidates for the judges, so the best whole answer goes downstream. Catch: in law or medicine, where the rules are extensive and specific, the mistake you fear shows up in one output out of ten, and the only way to see it is to have ten.</a:t>
             </a:r>
             <a:endParaRPr lang="en-US" sz="1200"/>
           </a:p>
@@ -4375,7 +4374,7 @@
                 <a:ea typeface="Arial"/>
                 <a:cs typeface="Arial"/>
               </a:rPr>
-              <a:t xml:space="preserve">The generation side has a name too, and I am not sorry about it: the barrel-of-monkeys maneuver. Lead with parallel generation on purpose. You are adding a controlled section of chaos that the next stage has to handle: a revision loop, a router, the council, or your users in an A/B test. Why you would want the chaos varies. Sometimes you want the fastest answer, so you race. Sometimes you want the best parts of several, so a frontier model, whose input tokens are the cheap ones, reads all of them and writes one coherent output. Sometimes you just want more candidates for the judges to rank so the best whole answer goes downstream. In law or medicine, where the rules are extensive and specific, that is how you catch the one errant mistake that shows up in one output out of ten. And the monkeys can be cheap: models at a hundredth or a thousandth the price of the frontier, generating alternatives in a loop. Some of them need a tool-calling agent with files, search and git, which means a sandbox and somebody's cloud; others single-shot it fine. That is an architecture question about how much effort you want in a system that keeps improving versus one you can retune at runtime. Fan-out is a tool you encapsulate at points in the graph: default model most of the time, n alternatives for a sample of requests. Your needs and your opportunities decide why, where and how often.</a:t>
+              <a:t xml:space="preserve">Speculative optimization in a lab coat? Possibly. Ship it with an env var that sets fan-out to one, and ideally let the system tune that knob itself. Right? Right. That is the companion talk.</a:t>
             </a:r>
             <a:endParaRPr lang="en-US" sz="1200"/>
           </a:p>
@@ -4421,7 +4420,7 @@
                 <a:ea typeface="Arial"/>
                 <a:cs typeface="Arial"/>
               </a:rPr>
-              <a:t xml:space="preserve">Does this border on speculative optimization dressed up as learning? Yes, possibly. Probably sometimes. We will find out. So do not build any of it without env vars to turn it down, and ideally build the system that adjusts its own fan-out and token burn from what it measures. Right? Right. That system is the companion talk.</a:t>
+              <a:t xml:space="preserve">The cheap half is judging. A judge reads a thousand tokens and writes fifty, and output is what costs, so five judges from different models on every candidate is affordable. Not the average score. The disagreement. Judges that split, or whose reasons barely overlap, have found territory nobody understands; that candidate does not ship on autopilot. I call this the Council of Guards: it reads everything, writes almost nothing, and costs a fraction of what it guards.</a:t>
             </a:r>
             <a:endParaRPr lang="en-US" sz="1200"/>
           </a:p>
@@ -4467,7 +4466,7 @@
                 <a:ea typeface="Arial"/>
                 <a:cs typeface="Arial"/>
               </a:rPr>
-              <a:t xml:space="preserve">Write the gates before reading the candidates: no duplicate dispatch after restart, no cross-tenant spend, no regeneration on notification retry, no dispatch after deadline. Run executable checks first. In the exercise every candidate fails a gate, including the careful one, which is the point: the council is allowed to reject the room. Then combine compatible ideas into a new candidate with one coherent set of assumptions and run the gates again. Passing parts do not make a passing whole. Stop at the review budget; an endless debate is an expensive way to not ship.</a:t>
+              <a:t xml:space="preserve">Write the gates before you read the candidates: no duplicate dispatch after restart, no cross-tenant spend, no regeneration on notification retry, no dispatch after deadline. Every candidate fails one, including the careful one; the council is allowed to reject the room. A synthesis is a new candidate. Stop at the review budget.</a:t>
             </a:r>
             <a:endParaRPr lang="en-US" sz="1200"/>
           </a:p>
@@ -4513,7 +4512,7 @@
                 <a:ea typeface="Arial"/>
                 <a:cs typeface="Arial"/>
               </a:rPr>
-              <a:t xml:space="preserve">None of this looks like the engineering we were raised on. Do not do the work twice. Do not spend compute speculatively. One right answer per ticket. Those were axioms when the expensive thing was the engineer. When the expensive thing is being wrong, and a second draft costs cents, doing it three times and reading what disagrees is the frugal move. I am not a shill for Big Token. I am telling you that cheaper, safer and faster now sometimes come from spending exactly where yesterday's wisdom told you not to.</a:t>
+              <a:t xml:space="preserve">None of this looks like the engineering we were raised on. Do not do the work twice. Do not spend compute speculatively. One right answer per ticket. Those were axioms when the expensive thing was the engineer. When the expensive thing is being wrong and a second draft costs cents, doing it three times and reading what disagrees is the frugal move. I am not a shill for Big Token. Cheaper, safer and faster now sometimes come from spending exactly where yesterday's wisdom told you not to.</a:t>
             </a:r>
             <a:endParaRPr lang="en-US" sz="1200"/>
           </a:p>
@@ -4718,7 +4717,7 @@
                 <a:ea typeface="Arial"/>
                 <a:cs typeface="Arial"/>
               </a:rPr>
-              <a:t xml:space="preserve">Attempts are a scaling axis. So is judging.</a:t>
+              <a:t xml:space="preserve">Measure the accepted outcome</a:t>
             </a:r>
             <a:endParaRPr lang="en-US" sz="1200"/>
           </a:p>
@@ -4764,7 +4763,7 @@
                 <a:ea typeface="Arial"/>
                 <a:cs typeface="Arial"/>
               </a:rPr>
-              <a:t xml:space="preserve">30:00 to 35:00 · build</a:t>
+              <a:t xml:space="preserve">35:00 to 37:30 · land</a:t>
             </a:r>
             <a:endParaRPr lang="en-US" sz="1200"/>
           </a:p>
@@ -4810,7 +4809,53 @@
                 <a:ea typeface="Arial"/>
                 <a:cs typeface="Arial"/>
               </a:rPr>
-              <a:t xml:space="preserve">![Different priorities expose tradeoffs. Common requirements and checks apply to every candidate.](../../reveal-talks/assets/dynamic-scaling/11-independent-attempts-share-requirements.svg)</a:t>
+              <a:t xml:space="preserve">&gt; Latency: dispatch + queue + slowest branch + merge + verify</a:t>
+            </a:r>
+            <a:endParaRPr lang="en-US" sz="1200"/>
+          </a:p>
+          <a:p>
+            <a:pPr marL="0" indent="0">
+              <a:lnSpc>
+                <a:spcPts val="1560"/>
+              </a:lnSpc>
+              <a:spcAft>
+                <a:spcPts val="0"/>
+              </a:spcAft>
+              <a:buNone/>
+            </a:pPr>
+            <a:r>
+              <a:rPr lang="en-US" sz="1200" b="0">
+                <a:solidFill>
+                  <a:srgbClr val="202b33"/>
+                </a:solidFill>
+                <a:latin typeface="Arial"/>
+                <a:ea typeface="Arial"/>
+                <a:cs typeface="Arial"/>
+              </a:rPr>
+              <a:t xml:space="preserve">&gt; Cost: every candidate, every retry, every held reservation, review time</a:t>
+            </a:r>
+            <a:endParaRPr lang="en-US" sz="1200"/>
+          </a:p>
+          <a:p>
+            <a:pPr marL="0" indent="0">
+              <a:lnSpc>
+                <a:spcPts val="1560"/>
+              </a:lnSpc>
+              <a:spcAft>
+                <a:spcPts val="0"/>
+              </a:spcAft>
+              <a:buNone/>
+            </a:pPr>
+            <a:r>
+              <a:rPr lang="en-US" sz="1200" b="0">
+                <a:solidFill>
+                  <a:srgbClr val="202b33"/>
+                </a:solidFill>
+                <a:latin typeface="Arial"/>
+                <a:ea typeface="Arial"/>
+                <a:cs typeface="Arial"/>
+              </a:rPr>
+              <a:t xml:space="preserve">&gt; Compare against one competent attempt</a:t>
             </a:r>
             <a:endParaRPr lang="en-US" sz="1200"/>
           </a:p>
@@ -4856,53 +4901,7 @@
                 <a:ea typeface="Arial"/>
                 <a:cs typeface="Arial"/>
               </a:rPr>
-              <a:t xml:space="preserve">&gt; Barrel of monkeys: lead with cheap parallel generation, on purpose</a:t>
-            </a:r>
-            <a:endParaRPr lang="en-US" sz="1200"/>
-          </a:p>
-          <a:p>
-            <a:pPr marL="0" indent="0">
-              <a:lnSpc>
-                <a:spcPts val="1560"/>
-              </a:lnSpc>
-              <a:spcAft>
-                <a:spcPts val="0"/>
-              </a:spcAft>
-              <a:buNone/>
-            </a:pPr>
-            <a:r>
-              <a:rPr lang="en-US" sz="1200" b="0">
-                <a:solidFill>
-                  <a:srgbClr val="202b33"/>
-                </a:solidFill>
-                <a:latin typeface="Arial"/>
-                <a:ea typeface="Arial"/>
-                <a:cs typeface="Arial"/>
-              </a:rPr>
-              <a:t xml:space="preserve">&gt; Council of guards: judges read a thousand tokens and write fifty; measure the disagreement</a:t>
-            </a:r>
-            <a:endParaRPr lang="en-US" sz="1200"/>
-          </a:p>
-          <a:p>
-            <a:pPr marL="0" indent="0">
-              <a:lnSpc>
-                <a:spcPts val="1560"/>
-              </a:lnSpc>
-              <a:spcAft>
-                <a:spcPts val="0"/>
-              </a:spcAft>
-              <a:buNone/>
-            </a:pPr>
-            <a:r>
-              <a:rPr lang="en-US" sz="1200" b="0">
-                <a:solidFill>
-                  <a:srgbClr val="202b33"/>
-                </a:solidFill>
-                <a:latin typeface="Arial"/>
-                <a:ea typeface="Arial"/>
-                <a:cs typeface="Arial"/>
-              </a:rPr>
-              <a:t xml:space="preserve">&gt; Gates before preferences; the judge may reject everyone</a:t>
+              <a:t xml:space="preserve">Starting three workers does not delete the serial parts. That is Amdahl, 1967, and it is unkind: if a tenth of the job is serial, ten workers get you five and a quarter times, and a hundred workers get you nine. Waiting on every branch can make a finished task slower. Count the whole thing: all candidates, failed work, reserved uncertainty, judging and human review, and compare against one competent attempt on the same task set.</a:t>
             </a:r>
             <a:endParaRPr lang="en-US" sz="1200"/>
           </a:p>
@@ -4948,7 +4947,7 @@
                 <a:ea typeface="Arial"/>
                 <a:cs typeface="Arial"/>
               </a:rPr>
-              <a:t xml:space="preserve">Change the unit of work from images to whole designs. Give the batch-job problem to three generated agents with the same requirements and different priorities: a minimalist, a maintainer, a security and performance reviewer. Keep first drafts separate so they do not converge on the first plausible answer. The contrast is the product.</a:t>
+              <a:t xml:space="preserve">Measure accepted outcomes, not launched workers. Start with one extra attempt or one batch boundary; if it does not buy quality, time or cost, keep the simpler path. We are trying to buy useful work, not maximize the number of things blinking.</a:t>
             </a:r>
             <a:endParaRPr lang="en-US" sz="1200"/>
           </a:p>
@@ -4994,7 +4993,7 @@
                 <a:ea typeface="Arial"/>
                 <a:cs typeface="Arial"/>
               </a:rPr>
-              <a:t xml:space="preserve">Somebody is going to cite Knight and Leveson at me, so let me do it first. 1986, twenty-seven teams, one specification, a million tests, and the independently written versions failed together far more than independence predicts. True, important, and about N-version programming as a correctness strategy. That is not what this is. I am not voting three models toward the truth, and I am not going to tell you the ensemble is right because it agreed with itself. If that is the pitch you heard, it is not mine.</a:t>
+              <a:t xml:space="preserve">Source: Amdahl (1967), Validity of the single processor approach to achieving large scale computing capabilities, AFIPS Conference Proceedings 30, 483 to 485.</a:t>
             </a:r>
             <a:endParaRPr lang="en-US" sz="1200"/>
           </a:p>
@@ -5040,283 +5039,7 @@
                 <a:ea typeface="Arial"/>
                 <a:cs typeface="Arial"/>
               </a:rPr>
-              <a:t xml:space="preserve">Here is what parallel attempts actually buy. Understanding of the models you depend on: run one brief through two of them and you learn what each reaches for and what each forgets. A migration harness: same brief, new model, diff the behavior before you switch, instead of after the incident. Better output: a synthesis of compatible ideas is often better than any single draft. And the cheap one, which is the one I care about: judging. A judge reads a thousand tokens and writes fifty. Output is what costs, so you can afford three or five judges from different models on every candidate, and the number you want back is not the average score. It is the disagreement. When the judges split or their reasons barely overlap, that candidate is sitting in territory nobody understands, and that is the one you do not ship on autopilot. I call this the Council of Guards. It picks between one and three alternatives to generate, and it costs a fraction of the generation it is guarding.</a:t>
-            </a:r>
-            <a:endParaRPr lang="en-US" sz="1200"/>
-          </a:p>
-          <a:p>
-            <a:pPr marL="0" indent="0">
-              <a:lnSpc>
-                <a:spcPts val="1560"/>
-              </a:lnSpc>
-              <a:spcAft>
-                <a:spcPts val="0"/>
-              </a:spcAft>
-              <a:buNone/>
-            </a:pPr>
-            <a:r>
-              <a:rPr lang="en-US" sz="1200" b="0">
-                <a:solidFill>
-                  <a:srgbClr val="202b33"/>
-                </a:solidFill>
-                <a:latin typeface="Arial"/>
-                <a:ea typeface="Arial"/>
-                <a:cs typeface="Arial"/>
-              </a:rPr>
-              <a:t xml:space="preserve"/>
-            </a:r>
-            <a:endParaRPr lang="en-US" sz="1200"/>
-          </a:p>
-          <a:p>
-            <a:pPr marL="0" indent="0">
-              <a:lnSpc>
-                <a:spcPts val="1560"/>
-              </a:lnSpc>
-              <a:spcAft>
-                <a:spcPts val="0"/>
-              </a:spcAft>
-              <a:buNone/>
-            </a:pPr>
-            <a:r>
-              <a:rPr lang="en-US" sz="1200" b="0">
-                <a:solidFill>
-                  <a:srgbClr val="202b33"/>
-                </a:solidFill>
-                <a:latin typeface="Arial"/>
-                <a:ea typeface="Arial"/>
-                <a:cs typeface="Arial"/>
-              </a:rPr>
-              <a:t xml:space="preserve">The generation side has a name too, and I am not sorry about it: the barrel-of-monkeys maneuver. Lead with parallel generation on purpose. You are adding a controlled section of chaos that the next stage has to handle: a revision loop, a router, the council, or your users in an A/B test. Why you would want the chaos varies. Sometimes you want the fastest answer, so you race. Sometimes you want the best parts of several, so a frontier model, whose input tokens are the cheap ones, reads all of them and writes one coherent output. Sometimes you just want more candidates for the judges to rank so the best whole answer goes downstream. In law or medicine, where the rules are extensive and specific, that is how you catch the one errant mistake that shows up in one output out of ten. And the monkeys can be cheap: models at a hundredth or a thousandth the price of the frontier, generating alternatives in a loop. Some of them need a tool-calling agent with files, search and git, which means a sandbox and somebody's cloud; others single-shot it fine. That is an architecture question about how much effort you want in a system that keeps improving versus one you can retune at runtime. Fan-out is a tool you encapsulate at points in the graph: default model most of the time, n alternatives for a sample of requests. Your needs and your opportunities decide why, where and how often.</a:t>
-            </a:r>
-            <a:endParaRPr lang="en-US" sz="1200"/>
-          </a:p>
-          <a:p>
-            <a:pPr marL="0" indent="0">
-              <a:lnSpc>
-                <a:spcPts val="1560"/>
-              </a:lnSpc>
-              <a:spcAft>
-                <a:spcPts val="0"/>
-              </a:spcAft>
-              <a:buNone/>
-            </a:pPr>
-            <a:r>
-              <a:rPr lang="en-US" sz="1200" b="0">
-                <a:solidFill>
-                  <a:srgbClr val="202b33"/>
-                </a:solidFill>
-                <a:latin typeface="Arial"/>
-                <a:ea typeface="Arial"/>
-                <a:cs typeface="Arial"/>
-              </a:rPr>
-              <a:t xml:space="preserve"/>
-            </a:r>
-            <a:endParaRPr lang="en-US" sz="1200"/>
-          </a:p>
-          <a:p>
-            <a:pPr marL="0" indent="0">
-              <a:lnSpc>
-                <a:spcPts val="1560"/>
-              </a:lnSpc>
-              <a:spcAft>
-                <a:spcPts val="0"/>
-              </a:spcAft>
-              <a:buNone/>
-            </a:pPr>
-            <a:r>
-              <a:rPr lang="en-US" sz="1200" b="0">
-                <a:solidFill>
-                  <a:srgbClr val="202b33"/>
-                </a:solidFill>
-                <a:latin typeface="Arial"/>
-                <a:ea typeface="Arial"/>
-                <a:cs typeface="Arial"/>
-              </a:rPr>
-              <a:t xml:space="preserve">Does this border on speculative optimization dressed up as learning? Yes, possibly. Probably sometimes. We will find out. So do not build any of it without env vars to turn it down, and ideally build the system that adjusts its own fan-out and token burn from what it measures. Right? Right. That system is the companion talk.</a:t>
-            </a:r>
-            <a:endParaRPr lang="en-US" sz="1200"/>
-          </a:p>
-          <a:p>
-            <a:pPr marL="0" indent="0">
-              <a:lnSpc>
-                <a:spcPts val="1560"/>
-              </a:lnSpc>
-              <a:spcAft>
-                <a:spcPts val="0"/>
-              </a:spcAft>
-              <a:buNone/>
-            </a:pPr>
-            <a:r>
-              <a:rPr lang="en-US" sz="1200" b="0">
-                <a:solidFill>
-                  <a:srgbClr val="202b33"/>
-                </a:solidFill>
-                <a:latin typeface="Arial"/>
-                <a:ea typeface="Arial"/>
-                <a:cs typeface="Arial"/>
-              </a:rPr>
-              <a:t xml:space="preserve"/>
-            </a:r>
-            <a:endParaRPr lang="en-US" sz="1200"/>
-          </a:p>
-          <a:p>
-            <a:pPr marL="0" indent="0">
-              <a:lnSpc>
-                <a:spcPts val="1560"/>
-              </a:lnSpc>
-              <a:spcAft>
-                <a:spcPts val="0"/>
-              </a:spcAft>
-              <a:buNone/>
-            </a:pPr>
-            <a:r>
-              <a:rPr lang="en-US" sz="1200" b="0">
-                <a:solidFill>
-                  <a:srgbClr val="202b33"/>
-                </a:solidFill>
-                <a:latin typeface="Arial"/>
-                <a:ea typeface="Arial"/>
-                <a:cs typeface="Arial"/>
-              </a:rPr>
-              <a:t xml:space="preserve">Write the gates before reading the candidates: no duplicate dispatch after restart, no cross-tenant spend, no regeneration on notification retry, no dispatch after deadline. Run executable checks first. In the exercise every candidate fails a gate, including the careful one, which is the point: the council is allowed to reject the room. Then combine compatible ideas into a new candidate with one coherent set of assumptions and run the gates again. Passing parts do not make a passing whole. Stop at the review budget; an endless debate is an expensive way to not ship.</a:t>
-            </a:r>
-            <a:endParaRPr lang="en-US" sz="1200"/>
-          </a:p>
-          <a:p>
-            <a:pPr marL="0" indent="0">
-              <a:lnSpc>
-                <a:spcPts val="1560"/>
-              </a:lnSpc>
-              <a:spcAft>
-                <a:spcPts val="0"/>
-              </a:spcAft>
-              <a:buNone/>
-            </a:pPr>
-            <a:r>
-              <a:rPr lang="en-US" sz="1200" b="0">
-                <a:solidFill>
-                  <a:srgbClr val="202b33"/>
-                </a:solidFill>
-                <a:latin typeface="Arial"/>
-                <a:ea typeface="Arial"/>
-                <a:cs typeface="Arial"/>
-              </a:rPr>
-              <a:t xml:space="preserve"/>
-            </a:r>
-            <a:endParaRPr lang="en-US" sz="1200"/>
-          </a:p>
-          <a:p>
-            <a:pPr marL="0" indent="0">
-              <a:lnSpc>
-                <a:spcPts val="1560"/>
-              </a:lnSpc>
-              <a:spcAft>
-                <a:spcPts val="0"/>
-              </a:spcAft>
-              <a:buNone/>
-            </a:pPr>
-            <a:r>
-              <a:rPr lang="en-US" sz="1200" b="0">
-                <a:solidFill>
-                  <a:srgbClr val="202b33"/>
-                </a:solidFill>
-                <a:latin typeface="Arial"/>
-                <a:ea typeface="Arial"/>
-                <a:cs typeface="Arial"/>
-              </a:rPr>
-              <a:t xml:space="preserve">None of this looks like the engineering we were raised on. Do not do the work twice. Do not spend compute speculatively. One right answer per ticket. Those were axioms when the expensive thing was the engineer. When the expensive thing is being wrong, and a second draft costs cents, doing it three times and reading what disagrees is the frugal move. I am not a shill for Big Token. I am telling you that cheaper, safer and faster now sometimes come from spending exactly where yesterday's wisdom told you not to.</a:t>
-            </a:r>
-            <a:endParaRPr lang="en-US" sz="1200"/>
-          </a:p>
-          <a:p>
-            <a:pPr marL="0" indent="0">
-              <a:lnSpc>
-                <a:spcPts val="1560"/>
-              </a:lnSpc>
-              <a:spcAft>
-                <a:spcPts val="0"/>
-              </a:spcAft>
-              <a:buNone/>
-            </a:pPr>
-            <a:r>
-              <a:rPr lang="en-US" sz="1200" b="0">
-                <a:solidFill>
-                  <a:srgbClr val="202b33"/>
-                </a:solidFill>
-                <a:latin typeface="Arial"/>
-                <a:ea typeface="Arial"/>
-                <a:cs typeface="Arial"/>
-              </a:rPr>
-              <a:t xml:space="preserve"/>
-            </a:r>
-            <a:endParaRPr lang="en-US" sz="1200"/>
-          </a:p>
-          <a:p>
-            <a:pPr marL="0" indent="0">
-              <a:lnSpc>
-                <a:spcPts val="1560"/>
-              </a:lnSpc>
-              <a:spcAft>
-                <a:spcPts val="0"/>
-              </a:spcAft>
-              <a:buNone/>
-            </a:pPr>
-            <a:r>
-              <a:rPr lang="en-US" sz="1200" b="0">
-                <a:solidFill>
-                  <a:srgbClr val="202b33"/>
-                </a:solidFill>
-                <a:latin typeface="Arial"/>
-                <a:ea typeface="Arial"/>
-                <a:cs typeface="Arial"/>
-              </a:rPr>
-              <a:t xml:space="preserve">Source: Knight and Leveson (1986), [An Experimental Evaluation of the Assumption of Independence in Multiversion Programming](https://doi.org/10.1109/TSE.1986.6312924), IEEE Transactions on Software Engineering SE-12(1), 96 to 109. Cited to set aside: it is a result about redundancy as a correctness strategy, which this slide does not claim.</a:t>
-            </a:r>
-            <a:endParaRPr lang="en-US" sz="1200"/>
-          </a:p>
-          <a:p>
-            <a:pPr marL="0" indent="0">
-              <a:lnSpc>
-                <a:spcPts val="1560"/>
-              </a:lnSpc>
-              <a:spcAft>
-                <a:spcPts val="0"/>
-              </a:spcAft>
-              <a:buNone/>
-            </a:pPr>
-            <a:r>
-              <a:rPr lang="en-US" sz="1200" b="0">
-                <a:solidFill>
-                  <a:srgbClr val="202b33"/>
-                </a:solidFill>
-                <a:latin typeface="Arial"/>
-                <a:ea typeface="Arial"/>
-                <a:cs typeface="Arial"/>
-              </a:rPr>
-              <a:t xml:space="preserve"/>
-            </a:r>
-            <a:endParaRPr lang="en-US" sz="1200"/>
-          </a:p>
-          <a:p>
-            <a:pPr marL="0" indent="0">
-              <a:lnSpc>
-                <a:spcPts val="1560"/>
-              </a:lnSpc>
-              <a:spcAft>
-                <a:spcPts val="0"/>
-              </a:spcAft>
-              <a:buNone/>
-            </a:pPr>
-            <a:r>
-              <a:rPr lang="en-US" sz="1200" b="0">
-                <a:solidFill>
-                  <a:srgbClr val="202b33"/>
-                </a:solidFill>
-                <a:latin typeface="Arial"/>
-                <a:ea typeface="Arial"/>
-                <a:cs typeface="Arial"/>
-              </a:rPr>
-              <a:t xml:space="preserve">Stage direction: Score the three candidates in demo.md. Have the room find each candidate's failed gate before revealing it. Then show the council split per candidate: high agreement on the minimalist's failure, low overlap on the maintainer's, and ask which one deserves the human's afternoon.</a:t>
+              <a:t xml:space="preserve">Stage direction: Ninety seconds: choose a baseline, a cap and an acceptance gate. Keep latency and total cost as separate numbers.</a:t>
             </a:r>
             <a:endParaRPr lang="en-US" sz="1200"/>
           </a:p>
@@ -5429,7 +5152,7 @@
                 <a:ea typeface="Arial"/>
                 <a:cs typeface="Arial"/>
               </a:rPr>
-              <a:t xml:space="preserve">Measure the accepted outcome</a:t>
+              <a:t xml:space="preserve">Put the limit where the work begins</a:t>
             </a:r>
             <a:endParaRPr lang="en-US" sz="1200"/>
           </a:p>
@@ -5475,7 +5198,7 @@
                 <a:ea typeface="Arial"/>
                 <a:cs typeface="Arial"/>
               </a:rPr>
-              <a:t xml:space="preserve">35:00 to 37:30 · land</a:t>
+              <a:t xml:space="preserve">37:30 to 40:00 · land</a:t>
             </a:r>
             <a:endParaRPr lang="en-US" sz="1200"/>
           </a:p>
@@ -5521,53 +5244,53 @@
                 <a:ea typeface="Arial"/>
                 <a:cs typeface="Arial"/>
               </a:rPr>
-              <a:t xml:space="preserve">&gt; Latency: dispatch + queue + slowest branch + merge + verify</a:t>
-            </a:r>
-            <a:endParaRPr lang="en-US" sz="1200"/>
-          </a:p>
-          <a:p>
-            <a:pPr marL="0" indent="0">
-              <a:lnSpc>
-                <a:spcPts val="1560"/>
-              </a:lnSpc>
-              <a:spcAft>
-                <a:spcPts val="0"/>
-              </a:spcAft>
-              <a:buNone/>
-            </a:pPr>
-            <a:r>
-              <a:rPr lang="en-US" sz="1200" b="0">
-                <a:solidFill>
-                  <a:srgbClr val="202b33"/>
-                </a:solidFill>
-                <a:latin typeface="Arial"/>
-                <a:ea typeface="Arial"/>
-                <a:cs typeface="Arial"/>
-              </a:rPr>
-              <a:t xml:space="preserve">&gt; Cost: every candidate, every retry, every held reservation, review time</a:t>
-            </a:r>
-            <a:endParaRPr lang="en-US" sz="1200"/>
-          </a:p>
-          <a:p>
-            <a:pPr marL="0" indent="0">
-              <a:lnSpc>
-                <a:spcPts val="1560"/>
-              </a:lnSpc>
-              <a:spcAft>
-                <a:spcPts val="0"/>
-              </a:spcAft>
-              <a:buNone/>
-            </a:pPr>
-            <a:r>
-              <a:rPr lang="en-US" sz="1200" b="0">
-                <a:solidFill>
-                  <a:srgbClr val="202b33"/>
-                </a:solidFill>
-                <a:latin typeface="Arial"/>
-                <a:ea typeface="Arial"/>
-                <a:cs typeface="Arial"/>
-              </a:rPr>
-              <a:t xml:space="preserve">&gt; Compare against one competent attempt</a:t>
+              <a:t xml:space="preserve">&gt; One ledger across every caller</a:t>
+            </a:r>
+            <a:endParaRPr lang="en-US" sz="1200"/>
+          </a:p>
+          <a:p>
+            <a:pPr marL="0" indent="0">
+              <a:lnSpc>
+                <a:spcPts val="1560"/>
+              </a:lnSpc>
+              <a:spcAft>
+                <a:spcPts val="0"/>
+              </a:spcAft>
+              <a:buNone/>
+            </a:pPr>
+            <a:r>
+              <a:rPr lang="en-US" sz="1200" b="0">
+                <a:solidFill>
+                  <a:srgbClr val="202b33"/>
+                </a:solidFill>
+                <a:latin typeface="Arial"/>
+                <a:ea typeface="Arial"/>
+                <a:cs typeface="Arial"/>
+              </a:rPr>
+              <a:t xml:space="preserve">&gt; Durable state across every restart</a:t>
+            </a:r>
+            <a:endParaRPr lang="en-US" sz="1200"/>
+          </a:p>
+          <a:p>
+            <a:pPr marL="0" indent="0">
+              <a:lnSpc>
+                <a:spcPts val="1560"/>
+              </a:lnSpc>
+              <a:spcAft>
+                <a:spcPts val="0"/>
+              </a:spcAft>
+              <a:buNone/>
+            </a:pPr>
+            <a:r>
+              <a:rPr lang="en-US" sz="1200" b="0">
+                <a:solidFill>
+                  <a:srgbClr val="202b33"/>
+                </a:solidFill>
+                <a:latin typeface="Arial"/>
+                <a:ea typeface="Arial"/>
+                <a:cs typeface="Arial"/>
+              </a:rPr>
+              <a:t xml:space="preserve">&gt; A lease on every box, a gate on every candidate</a:t>
             </a:r>
             <a:endParaRPr lang="en-US" sz="1200"/>
           </a:p>
@@ -5613,7 +5336,7 @@
                 <a:ea typeface="Arial"/>
                 <a:cs typeface="Arial"/>
               </a:rPr>
-              <a:t xml:space="preserve">Starting three workers does not delete the serial parts. That is Amdahl, 1967, and it is unkind: if a tenth of the job is serial, ten workers get you five and a quarter times, and a hundred workers get you nine. Waiting on every branch can make a finished task slower. Count the whole thing: all candidates, failed work, reserved uncertainty, judging and human review, and compare against one competent attempt on the same task set.</a:t>
+              <a:t xml:space="preserve">Back to the four callers. Forty jobs were legal by four local counters. The missing piece was one shared account of what the application had promised and what it had already started.</a:t>
             </a:r>
             <a:endParaRPr lang="en-US" sz="1200"/>
           </a:p>
@@ -5659,7 +5382,7 @@
                 <a:ea typeface="Arial"/>
                 <a:cs typeface="Arial"/>
               </a:rPr>
-              <a:t xml:space="preserve">Measure accepted outcomes, not launched workers. Start with one extra attempt or one batch boundary; if it does not buy quality, time or cost, keep the simpler path. We are trying to buy useful work, not maximize the number of things blinking.</a:t>
+              <a:t xml:space="preserve">The inversion is real: the workload can now describe its own shape and ask for its own compute, and the substrate to grant it in seconds already exists. That is a better world than a warm fleet and a guess. It is only safe because the agent chooses from a catalog, spends from a ledger, and runs on boxes that expire.</a:t>
             </a:r>
             <a:endParaRPr lang="en-US" sz="1200"/>
           </a:p>
@@ -5705,7 +5428,7 @@
                 <a:ea typeface="Arial"/>
                 <a:cs typeface="Arial"/>
               </a:rPr>
-              <a:t xml:space="preserve">Source: Amdahl (1967), Validity of the single processor approach to achieving large scale computing capabilities, AFIPS Conference Proceedings 30, 483 to 485.</a:t>
+              <a:t xml:space="preserve">Inspect one expensive tool in your system. Count the work it can launch underneath itself. Put the limit where that work actually begins.</a:t>
             </a:r>
             <a:endParaRPr lang="en-US" sz="1200"/>
           </a:p>
@@ -5751,30 +5474,7 @@
                 <a:ea typeface="Arial"/>
                 <a:cs typeface="Arial"/>
               </a:rPr>
-              <a:t xml:space="preserve">Stage direction: Ninety seconds: choose a baseline, a cap and an acceptance gate. Keep latency and total cost as separate numbers.</a:t>
-            </a:r>
-            <a:endParaRPr lang="en-US" sz="1200"/>
-          </a:p>
-          <a:p>
-            <a:pPr marL="0" indent="0">
-              <a:lnSpc>
-                <a:spcPts val="1560"/>
-              </a:lnSpc>
-              <a:spcAft>
-                <a:spcPts val="0"/>
-              </a:spcAft>
-              <a:buNone/>
-            </a:pPr>
-            <a:r>
-              <a:rPr lang="en-US" sz="1200" b="0">
-                <a:solidFill>
-                  <a:srgbClr val="202b33"/>
-                </a:solidFill>
-                <a:latin typeface="Arial"/>
-                <a:ea typeface="Arial"/>
-                <a:cs typeface="Arial"/>
-              </a:rPr>
-              <a:t xml:space="preserve"/>
+              <a:t xml:space="preserve">Stage direction: Close on the multiplication and the shared admission line. Do not add a vendor.</a:t>
             </a:r>
             <a:endParaRPr lang="en-US" sz="1200"/>
           </a:p>
@@ -6391,418 +6091,6 @@
                 <a:ea typeface="Arial"/>
                 <a:cs typeface="Arial"/>
               </a:rPr>
-              <a:t xml:space="preserve">Put the limit where the work begins</a:t>
-            </a:r>
-            <a:endParaRPr lang="en-US" sz="1200"/>
-          </a:p>
-          <a:p>
-            <a:pPr marL="0" indent="0">
-              <a:lnSpc>
-                <a:spcPts val="1560"/>
-              </a:lnSpc>
-              <a:spcAft>
-                <a:spcPts val="0"/>
-              </a:spcAft>
-              <a:buNone/>
-            </a:pPr>
-            <a:r>
-              <a:rPr lang="en-US" sz="1200" b="0">
-                <a:solidFill>
-                  <a:srgbClr val="202b33"/>
-                </a:solidFill>
-                <a:latin typeface="Arial"/>
-                <a:ea typeface="Arial"/>
-                <a:cs typeface="Arial"/>
-              </a:rPr>
-              <a:t xml:space="preserve"/>
-            </a:r>
-            <a:endParaRPr lang="en-US" sz="1200"/>
-          </a:p>
-          <a:p>
-            <a:pPr marL="0" indent="0">
-              <a:lnSpc>
-                <a:spcPts val="1560"/>
-              </a:lnSpc>
-              <a:spcAft>
-                <a:spcPts val="0"/>
-              </a:spcAft>
-              <a:buNone/>
-            </a:pPr>
-            <a:r>
-              <a:rPr lang="en-US" sz="1200" b="0">
-                <a:solidFill>
-                  <a:srgbClr val="202b33"/>
-                </a:solidFill>
-                <a:latin typeface="Arial"/>
-                <a:ea typeface="Arial"/>
-                <a:cs typeface="Arial"/>
-              </a:rPr>
-              <a:t xml:space="preserve">37:30 to 40:00 · land</a:t>
-            </a:r>
-            <a:endParaRPr lang="en-US" sz="1200"/>
-          </a:p>
-          <a:p>
-            <a:pPr marL="0" indent="0">
-              <a:lnSpc>
-                <a:spcPts val="1560"/>
-              </a:lnSpc>
-              <a:spcAft>
-                <a:spcPts val="0"/>
-              </a:spcAft>
-              <a:buNone/>
-            </a:pPr>
-            <a:r>
-              <a:rPr lang="en-US" sz="1200" b="0">
-                <a:solidFill>
-                  <a:srgbClr val="202b33"/>
-                </a:solidFill>
-                <a:latin typeface="Arial"/>
-                <a:ea typeface="Arial"/>
-                <a:cs typeface="Arial"/>
-              </a:rPr>
-              <a:t xml:space="preserve"/>
-            </a:r>
-            <a:endParaRPr lang="en-US" sz="1200"/>
-          </a:p>
-          <a:p>
-            <a:pPr marL="0" indent="0">
-              <a:lnSpc>
-                <a:spcPts val="1560"/>
-              </a:lnSpc>
-              <a:spcAft>
-                <a:spcPts val="0"/>
-              </a:spcAft>
-              <a:buNone/>
-            </a:pPr>
-            <a:r>
-              <a:rPr lang="en-US" sz="1200" b="0">
-                <a:solidFill>
-                  <a:srgbClr val="202b33"/>
-                </a:solidFill>
-                <a:latin typeface="Arial"/>
-                <a:ea typeface="Arial"/>
-                <a:cs typeface="Arial"/>
-              </a:rPr>
-              <a:t xml:space="preserve">&gt; One ledger across every caller</a:t>
-            </a:r>
-            <a:endParaRPr lang="en-US" sz="1200"/>
-          </a:p>
-          <a:p>
-            <a:pPr marL="0" indent="0">
-              <a:lnSpc>
-                <a:spcPts val="1560"/>
-              </a:lnSpc>
-              <a:spcAft>
-                <a:spcPts val="0"/>
-              </a:spcAft>
-              <a:buNone/>
-            </a:pPr>
-            <a:r>
-              <a:rPr lang="en-US" sz="1200" b="0">
-                <a:solidFill>
-                  <a:srgbClr val="202b33"/>
-                </a:solidFill>
-                <a:latin typeface="Arial"/>
-                <a:ea typeface="Arial"/>
-                <a:cs typeface="Arial"/>
-              </a:rPr>
-              <a:t xml:space="preserve">&gt; Durable state across every restart</a:t>
-            </a:r>
-            <a:endParaRPr lang="en-US" sz="1200"/>
-          </a:p>
-          <a:p>
-            <a:pPr marL="0" indent="0">
-              <a:lnSpc>
-                <a:spcPts val="1560"/>
-              </a:lnSpc>
-              <a:spcAft>
-                <a:spcPts val="0"/>
-              </a:spcAft>
-              <a:buNone/>
-            </a:pPr>
-            <a:r>
-              <a:rPr lang="en-US" sz="1200" b="0">
-                <a:solidFill>
-                  <a:srgbClr val="202b33"/>
-                </a:solidFill>
-                <a:latin typeface="Arial"/>
-                <a:ea typeface="Arial"/>
-                <a:cs typeface="Arial"/>
-              </a:rPr>
-              <a:t xml:space="preserve">&gt; A lease on every box, a gate on every candidate</a:t>
-            </a:r>
-            <a:endParaRPr lang="en-US" sz="1200"/>
-          </a:p>
-          <a:p>
-            <a:pPr marL="0" indent="0">
-              <a:lnSpc>
-                <a:spcPts val="1560"/>
-              </a:lnSpc>
-              <a:spcAft>
-                <a:spcPts val="0"/>
-              </a:spcAft>
-              <a:buNone/>
-            </a:pPr>
-            <a:r>
-              <a:rPr lang="en-US" sz="1200" b="0">
-                <a:solidFill>
-                  <a:srgbClr val="202b33"/>
-                </a:solidFill>
-                <a:latin typeface="Arial"/>
-                <a:ea typeface="Arial"/>
-                <a:cs typeface="Arial"/>
-              </a:rPr>
-              <a:t xml:space="preserve"/>
-            </a:r>
-            <a:endParaRPr lang="en-US" sz="1200"/>
-          </a:p>
-          <a:p>
-            <a:pPr marL="0" indent="0">
-              <a:lnSpc>
-                <a:spcPts val="1560"/>
-              </a:lnSpc>
-              <a:spcAft>
-                <a:spcPts val="0"/>
-              </a:spcAft>
-              <a:buNone/>
-            </a:pPr>
-            <a:r>
-              <a:rPr lang="en-US" sz="1200" b="0">
-                <a:solidFill>
-                  <a:srgbClr val="202b33"/>
-                </a:solidFill>
-                <a:latin typeface="Arial"/>
-                <a:ea typeface="Arial"/>
-                <a:cs typeface="Arial"/>
-              </a:rPr>
-              <a:t xml:space="preserve">Back to the four callers. Forty jobs were legal by four local counters. The missing piece was one shared account of what the application had promised and what it had already started.</a:t>
-            </a:r>
-            <a:endParaRPr lang="en-US" sz="1200"/>
-          </a:p>
-          <a:p>
-            <a:pPr marL="0" indent="0">
-              <a:lnSpc>
-                <a:spcPts val="1560"/>
-              </a:lnSpc>
-              <a:spcAft>
-                <a:spcPts val="0"/>
-              </a:spcAft>
-              <a:buNone/>
-            </a:pPr>
-            <a:r>
-              <a:rPr lang="en-US" sz="1200" b="0">
-                <a:solidFill>
-                  <a:srgbClr val="202b33"/>
-                </a:solidFill>
-                <a:latin typeface="Arial"/>
-                <a:ea typeface="Arial"/>
-                <a:cs typeface="Arial"/>
-              </a:rPr>
-              <a:t xml:space="preserve"/>
-            </a:r>
-            <a:endParaRPr lang="en-US" sz="1200"/>
-          </a:p>
-          <a:p>
-            <a:pPr marL="0" indent="0">
-              <a:lnSpc>
-                <a:spcPts val="1560"/>
-              </a:lnSpc>
-              <a:spcAft>
-                <a:spcPts val="0"/>
-              </a:spcAft>
-              <a:buNone/>
-            </a:pPr>
-            <a:r>
-              <a:rPr lang="en-US" sz="1200" b="0">
-                <a:solidFill>
-                  <a:srgbClr val="202b33"/>
-                </a:solidFill>
-                <a:latin typeface="Arial"/>
-                <a:ea typeface="Arial"/>
-                <a:cs typeface="Arial"/>
-              </a:rPr>
-              <a:t xml:space="preserve">The inversion is real: the workload can now describe its own shape and ask for its own compute, and the substrate to grant it in seconds already exists. That is a better world than a warm fleet and a guess. It is only safe because the agent chooses from a catalog, spends from a ledger, and runs on boxes that expire.</a:t>
-            </a:r>
-            <a:endParaRPr lang="en-US" sz="1200"/>
-          </a:p>
-          <a:p>
-            <a:pPr marL="0" indent="0">
-              <a:lnSpc>
-                <a:spcPts val="1560"/>
-              </a:lnSpc>
-              <a:spcAft>
-                <a:spcPts val="0"/>
-              </a:spcAft>
-              <a:buNone/>
-            </a:pPr>
-            <a:r>
-              <a:rPr lang="en-US" sz="1200" b="0">
-                <a:solidFill>
-                  <a:srgbClr val="202b33"/>
-                </a:solidFill>
-                <a:latin typeface="Arial"/>
-                <a:ea typeface="Arial"/>
-                <a:cs typeface="Arial"/>
-              </a:rPr>
-              <a:t xml:space="preserve"/>
-            </a:r>
-            <a:endParaRPr lang="en-US" sz="1200"/>
-          </a:p>
-          <a:p>
-            <a:pPr marL="0" indent="0">
-              <a:lnSpc>
-                <a:spcPts val="1560"/>
-              </a:lnSpc>
-              <a:spcAft>
-                <a:spcPts val="0"/>
-              </a:spcAft>
-              <a:buNone/>
-            </a:pPr>
-            <a:r>
-              <a:rPr lang="en-US" sz="1200" b="0">
-                <a:solidFill>
-                  <a:srgbClr val="202b33"/>
-                </a:solidFill>
-                <a:latin typeface="Arial"/>
-                <a:ea typeface="Arial"/>
-                <a:cs typeface="Arial"/>
-              </a:rPr>
-              <a:t xml:space="preserve">Inspect one expensive tool in your system. Count the work it can launch underneath itself. Put the limit where that work actually begins.</a:t>
-            </a:r>
-            <a:endParaRPr lang="en-US" sz="1200"/>
-          </a:p>
-          <a:p>
-            <a:pPr marL="0" indent="0">
-              <a:lnSpc>
-                <a:spcPts val="1560"/>
-              </a:lnSpc>
-              <a:spcAft>
-                <a:spcPts val="0"/>
-              </a:spcAft>
-              <a:buNone/>
-            </a:pPr>
-            <a:r>
-              <a:rPr lang="en-US" sz="1200" b="0">
-                <a:solidFill>
-                  <a:srgbClr val="202b33"/>
-                </a:solidFill>
-                <a:latin typeface="Arial"/>
-                <a:ea typeface="Arial"/>
-                <a:cs typeface="Arial"/>
-              </a:rPr>
-              <a:t xml:space="preserve"/>
-            </a:r>
-            <a:endParaRPr lang="en-US" sz="1200"/>
-          </a:p>
-          <a:p>
-            <a:pPr marL="0" indent="0">
-              <a:lnSpc>
-                <a:spcPts val="1560"/>
-              </a:lnSpc>
-              <a:spcAft>
-                <a:spcPts val="0"/>
-              </a:spcAft>
-              <a:buNone/>
-            </a:pPr>
-            <a:r>
-              <a:rPr lang="en-US" sz="1200" b="0">
-                <a:solidFill>
-                  <a:srgbClr val="202b33"/>
-                </a:solidFill>
-                <a:latin typeface="Arial"/>
-                <a:ea typeface="Arial"/>
-                <a:cs typeface="Arial"/>
-              </a:rPr>
-              <a:t xml:space="preserve">Stage direction: Close on the multiplication and the shared admission line. Do not add a vendor.</a:t>
-            </a:r>
-            <a:endParaRPr lang="en-US" sz="1200"/>
-          </a:p>
-          <a:p>
-            <a:pPr marL="0" indent="0">
-              <a:lnSpc>
-                <a:spcPts val="1560"/>
-              </a:lnSpc>
-              <a:spcAft>
-                <a:spcPts val="0"/>
-              </a:spcAft>
-              <a:buNone/>
-            </a:pPr>
-            <a:r>
-              <a:rPr lang="en-US" sz="1200" b="0">
-                <a:solidFill>
-                  <a:srgbClr val="202b33"/>
-                </a:solidFill>
-                <a:latin typeface="Arial"/>
-                <a:ea typeface="Arial"/>
-                <a:cs typeface="Arial"/>
-              </a:rPr>
-              <a:t xml:space="preserve"/>
-            </a:r>
-            <a:endParaRPr lang="en-US" sz="1200"/>
-          </a:p>
-        </p:txBody>
-      </p:sp>
-    </p:spTree>
-  </p:cSld>
-  <p:clrMapOvr>
-    <a:masterClrMapping/>
-  </p:clrMapOvr>
-</p:notes>
-</file>
-
-<file path=ppt/notesSlides/notesSlide21.xml><?xml version="1.0" encoding="utf-8"?>
-<p:notes xmlns:a="http://schemas.openxmlformats.org/drawingml/2006/main" xmlns:r="http://schemas.openxmlformats.org/officeDocument/2006/relationships" xmlns:p="http://schemas.openxmlformats.org/presentationml/2006/main">
-  <p:cSld>
-    <p:spTree>
-      <p:nvGrpSpPr>
-        <p:cNvPr id="1" name=""/>
-        <p:cNvGrpSpPr/>
-        <p:nvPr/>
-      </p:nvGrpSpPr>
-      <p:grpSpPr>
-        <a:xfrm>
-          <a:off x="0" y="0"/>
-          <a:ext cx="0" cy="0"/>
-          <a:chOff x="0" y="0"/>
-          <a:chExt cx="0" cy="0"/>
-        </a:xfrm>
-      </p:grpSpPr>
-      <p:sp>
-        <p:nvSpPr>
-          <p:cNvPr id="2" name="Presenter notes"/>
-          <p:cNvSpPr txBox="1"/>
-          <p:nvPr>
-            <p:ph type="body" idx="1"/>
-          </p:nvPr>
-        </p:nvSpPr>
-        <p:spPr>
-          <a:xfrm>
-            <a:off x="457200" y="1428750"/>
-            <a:ext cx="5715000" cy="6667500"/>
-          </a:xfrm>
-        </p:spPr>
-        <p:txBody>
-          <a:bodyPr/>
-          <a:lstStyle/>
-          <a:p>
-            <a:pPr marL="0" indent="0">
-              <a:lnSpc>
-                <a:spcPts val="1560"/>
-              </a:lnSpc>
-              <a:spcAft>
-                <a:spcPts val="0"/>
-              </a:spcAft>
-              <a:buNone/>
-            </a:pPr>
-            <a:r>
-              <a:rPr lang="en-US" sz="1200" b="0">
-                <a:solidFill>
-                  <a:srgbClr val="202b33"/>
-                </a:solidFill>
-                <a:latin typeface="Arial"/>
-                <a:ea typeface="Arial"/>
-                <a:cs typeface="Arial"/>
-              </a:rPr>
               <a:t xml:space="preserve">Knight and Leveson (1986), [An Experimental Evaluation of the Assumption of Independence in Multiversion Programming](https://doi.org/10.1109/TSE.1986.6312924), IEEE Transactions on Software Engineering SE-12(1), 96 to 109. Cited to set aside: it is a result about redundancy as a correctness strategy, which this slide does not claim.</a:t>
             </a:r>
             <a:endParaRPr lang="en-US" sz="1200"/>
@@ -7146,7 +6434,7 @@
                 <a:ea typeface="Arial"/>
                 <a:cs typeface="Arial"/>
               </a:rPr>
-              <a:t xml:space="preserve">For twenty years scaling was an infra question answered once for everyone. Add replicas or buy a bigger box, then let an autoscaler watch CPU and guess. The workload never got a vote.</a:t>
+              <a:t xml:space="preserve">For twenty years scaling was an infra question answered once for everyone. Add replicas or buy a bigger box, then let an autoscaler watch CPU and guess. The workload never got a say.</a:t>
             </a:r>
             <a:endParaRPr lang="en-US" sz="1200"/>
           </a:p>
@@ -7192,7 +6480,7 @@
                 <a:ea typeface="Arial"/>
                 <a:cs typeface="Arial"/>
               </a:rPr>
-              <a:t xml:space="preserve">Agentic workloads can vote. The orchestrator knows this batch is mostly waiting on a provider, that this one needs a GPU for ninety seconds, that this one is untrusted code and wants a sandbox. It can say so, per job, at the moment the job starts.</a:t>
+              <a:t xml:space="preserve">Agentic workloads do. The orchestrator knows this batch is mostly waiting on a provider, that this one needs a GPU for ninety seconds, that this one is untrusted code and wants a sandbox. It can say so, per job, at the moment the job starts.</a:t>
             </a:r>
             <a:endParaRPr lang="en-US" sz="1200"/>
           </a:p>
@@ -9091,7 +8379,7 @@
                 <a:ea typeface="Arial"/>
                 <a:cs typeface="Arial"/>
               </a:rPr>
-              <a:t xml:space="preserve">The inversion: infra as an agent capability</a:t>
+              <a:t xml:space="preserve">Infra Is a Tool Call</a:t>
             </a:r>
             <a:endParaRPr lang="en-US" sz="1200"/>
           </a:p>
@@ -9618,7 +8906,7 @@
                 <a:ea typeface="Arial"/>
                 <a:cs typeface="Arial"/>
               </a:rPr>
-              <a:t xml:space="preserve">The inversion: infra as an agent capability</a:t>
+              <a:t xml:space="preserve">Infra Is a Tool Call</a:t>
             </a:r>
             <a:endParaRPr lang="en-US" sz="1200"/>
           </a:p>
@@ -10615,7 +9903,7 @@
                 <a:ea typeface="Arial"/>
                 <a:cs typeface="Arial"/>
               </a:rPr>
-              <a:t xml:space="preserve">The ecosystem is already ephemeral by default</a:t>
+              <a:t xml:space="preserve">Torn Down by Default</a:t>
             </a:r>
             <a:endParaRPr lang="en-US" sz="2550"/>
           </a:p>
@@ -10645,7 +9933,7 @@
       </p:sp>
       <p:pic>
         <p:nvPicPr>
-          <p:cNvPr id="5" name="f5c9434104cce2c1d2b93f00f44fc408290defaf280712183703c30a3c4a91dd" descr="Sandboxes, serverless GPUs, durable edge state and spot capacity, all created in seconds and torn down by default."/>
+          <p:cNvPr id="5" name="1daa0143328d8028c247af2b7cfb4a0a77c5d39818a1b12c28efc7e58b692783" descr="Sandboxes, serverless GPUs, durable edge state and spot capacity, all created in seconds and torn down by default."/>
           <p:cNvPicPr>
             <a:picLocks noChangeAspect="1"/>
           </p:cNvPicPr>
@@ -10949,7 +10237,7 @@
                 <a:ea typeface="Arial"/>
                 <a:cs typeface="Arial"/>
               </a:rPr>
-              <a:t xml:space="preserve">Fly.io Sprites are hardware-isolated VMs that create</a:t>
+              <a:t xml:space="preserve">Fly.io Sprites are microVMs whose stated creation</a:t>
             </a:r>
             <a:endParaRPr lang="en-US" sz="1200"/>
           </a:p>
@@ -10972,7 +10260,7 @@
                 <a:ea typeface="Arial"/>
                 <a:cs typeface="Arial"/>
               </a:rPr>
-              <a:t xml:space="preserve">in a second or two, checkpoint and restore, and take</a:t>
+              <a:t xml:space="preserve">target is under a second, checkpoint and restore, and</a:t>
             </a:r>
             <a:endParaRPr lang="en-US" sz="1200"/>
           </a:p>
@@ -10995,7 +10283,7 @@
                 <a:ea typeface="Arial"/>
                 <a:cs typeface="Arial"/>
               </a:rPr>
-              <a:t xml:space="preserve">an egress policy from outside so the agent inside</a:t>
+              <a:t xml:space="preserve">take an egress policy from outside so the agent</a:t>
             </a:r>
             <a:endParaRPr lang="en-US" sz="1200"/>
           </a:p>
@@ -11044,7 +10332,7 @@
                 <a:ea typeface="Arial"/>
                 <a:cs typeface="Arial"/>
               </a:rPr>
-              <a:t xml:space="preserve">cannot loosen it. Depot sandboxes bill per second for</a:t>
+              <a:t xml:space="preserve">inside cannot loosen it. Depot sandboxes bill by the</a:t>
             </a:r>
             <a:endParaRPr lang="en-US" sz="1200"/>
           </a:p>
@@ -11067,7 +10355,7 @@
                 <a:ea typeface="Arial"/>
                 <a:cs typeface="Arial"/>
               </a:rPr>
-              <a:t xml:space="preserve">exactly this: run agent-generated code, stream</a:t>
+              <a:t xml:space="preserve">second for exactly this: run agent-generated code,</a:t>
             </a:r>
             <a:endParaRPr lang="en-US" sz="1200"/>
           </a:p>
@@ -11090,7 +10378,7 @@
                 <a:ea typeface="Arial"/>
                 <a:cs typeface="Arial"/>
               </a:rPr>
-              <a:t xml:space="preserve">output, throw it away.</a:t>
+              <a:t xml:space="preserve">throw it away.</a:t>
             </a:r>
             <a:endParaRPr lang="en-US" sz="1200"/>
           </a:p>
@@ -11526,30 +10814,7 @@
                 <a:ea typeface="Arial"/>
                 <a:cs typeface="Arial"/>
               </a:rPr>
-              <a:t xml:space="preserve">The ecosystem is already ephemeral by default</a:t>
-            </a:r>
-            <a:endParaRPr lang="en-US" sz="2550"/>
-          </a:p>
-          <a:p>
-            <a:pPr marL="0" indent="0">
-              <a:lnSpc>
-                <a:spcPts val="3060"/>
-              </a:lnSpc>
-              <a:spcAft>
-                <a:spcPts val="0"/>
-              </a:spcAft>
-              <a:buNone/>
-            </a:pPr>
-            <a:r>
-              <a:rPr lang="en-US" sz="2550" b="1">
-                <a:solidFill>
-                  <a:srgbClr val="202B33"/>
-                </a:solidFill>
-                <a:latin typeface="Arial"/>
-                <a:ea typeface="Arial"/>
-                <a:cs typeface="Arial"/>
-              </a:rPr>
-              <a:t xml:space="preserve">(continued)</a:t>
+              <a:t xml:space="preserve">Torn Down by Default (continued)</a:t>
             </a:r>
             <a:endParaRPr lang="en-US" sz="2550"/>
           </a:p>
@@ -11991,7 +11256,7 @@
                 <a:ea typeface="Arial"/>
                 <a:cs typeface="Arial"/>
               </a:rPr>
-              <a:t xml:space="preserve">Match the execution class to the work</a:t>
+              <a:t xml:space="preserve">Fifty Containers Don't Render Faster</a:t>
             </a:r>
             <a:endParaRPr lang="en-US" sz="2550"/>
           </a:p>
@@ -12859,7 +12124,7 @@
                 <a:ea typeface="Arial"/>
                 <a:cs typeface="Arial"/>
               </a:rPr>
-              <a:t xml:space="preserve">accepted → submitted → waiting → completed / failed /</a:t>
+              <a:t xml:space="preserve">queued → submitted → waiting → completed / failed /</a:t>
             </a:r>
             <a:endParaRPr lang="en-US" sz="1200"/>
           </a:p>
@@ -14591,7 +13856,7 @@
                 <a:ea typeface="Arial"/>
                 <a:cs typeface="Arial"/>
               </a:rPr>
-              <a:t xml:space="preserve">Attempts are a scaling axis. So is judging.</a:t>
+              <a:t xml:space="preserve">Monkeys, Then Guards</a:t>
             </a:r>
             <a:endParaRPr lang="en-US" sz="2550"/>
           </a:p>
@@ -14621,7 +13886,7 @@
       </p:sp>
       <p:pic>
         <p:nvPicPr>
-          <p:cNvPr id="5" name="b4949abe8dedb577fd5f9a3e1c7aa70046fe06211202f0b36f95e7c744c651ce" descr="Different priorities expose tradeoffs. Common requirements and checks apply to every candidate."/>
+          <p:cNvPr id="5" name="2c5fb820b277964d777498358b0962f4a0f45afc5a39c350b143fa7e45e40586" descr="Different priorities expose tradeoffs. Common requirements and checks apply to every candidate."/>
           <p:cNvPicPr>
             <a:picLocks noChangeAspect="1"/>
           </p:cNvPicPr>
@@ -14764,7 +14029,7 @@
                 <a:ea typeface="Arial"/>
                 <a:cs typeface="Arial"/>
               </a:rPr>
-              <a:t xml:space="preserve">Council of guards: judges read a thousand tokens and</a:t>
+              <a:t xml:space="preserve">Council of Guards: judges read a thousand tokens and</a:t>
             </a:r>
             <a:endParaRPr lang="en-US" sz="1200"/>
           </a:p>
@@ -14857,6 +14122,75 @@
                 <a:cs typeface="Arial"/>
               </a:rPr>
               <a:t xml:space="preserve">everyone</a:t>
+            </a:r>
+            <a:endParaRPr lang="en-US" sz="1200"/>
+          </a:p>
+          <a:p>
+            <a:pPr marL="0" indent="0">
+              <a:lnSpc>
+                <a:spcPts val="1575"/>
+              </a:lnSpc>
+              <a:spcAft>
+                <a:spcPts val="0"/>
+              </a:spcAft>
+              <a:buNone/>
+            </a:pPr>
+            <a:r>
+              <a:rPr lang="en-US" sz="1200" b="0">
+                <a:solidFill>
+                  <a:srgbClr val="202B33"/>
+                </a:solidFill>
+                <a:latin typeface="Arial"/>
+                <a:ea typeface="Arial"/>
+                <a:cs typeface="Arial"/>
+              </a:rPr>
+              <a:t xml:space="preserve"/>
+            </a:r>
+            <a:endParaRPr lang="en-US" sz="1200"/>
+          </a:p>
+          <a:p>
+            <a:pPr marL="0" indent="0">
+              <a:lnSpc>
+                <a:spcPts val="1575"/>
+              </a:lnSpc>
+              <a:spcAft>
+                <a:spcPts val="0"/>
+              </a:spcAft>
+              <a:buNone/>
+            </a:pPr>
+            <a:r>
+              <a:rPr lang="en-US" sz="1200" b="0">
+                <a:solidFill>
+                  <a:srgbClr val="202B33"/>
+                </a:solidFill>
+                <a:latin typeface="Arial"/>
+                <a:ea typeface="Arial"/>
+                <a:cs typeface="Arial"/>
+              </a:rPr>
+              <a:t xml:space="preserve">Change the unit of work from images to whole designs.</a:t>
+            </a:r>
+            <a:endParaRPr lang="en-US" sz="1200"/>
+          </a:p>
+          <a:p>
+            <a:pPr marL="0" indent="0">
+              <a:lnSpc>
+                <a:spcPts val="1575"/>
+              </a:lnSpc>
+              <a:spcAft>
+                <a:spcPts val="0"/>
+              </a:spcAft>
+              <a:buNone/>
+            </a:pPr>
+            <a:r>
+              <a:rPr lang="en-US" sz="1200" b="0">
+                <a:solidFill>
+                  <a:srgbClr val="202B33"/>
+                </a:solidFill>
+                <a:latin typeface="Arial"/>
+                <a:ea typeface="Arial"/>
+                <a:cs typeface="Arial"/>
+              </a:rPr>
+              <a:t xml:space="preserve">One brief, three generated agents: minimalist,</a:t>
             </a:r>
             <a:endParaRPr lang="en-US" sz="1200"/>
           </a:p>
@@ -14905,6 +14239,52 @@
                 <a:ea typeface="Arial"/>
                 <a:cs typeface="Arial"/>
               </a:rPr>
+              <a:t xml:space="preserve">maintainer, security and performance reviewer.</a:t>
+            </a:r>
+            <a:endParaRPr lang="en-US" sz="1200"/>
+          </a:p>
+          <a:p>
+            <a:pPr marL="0" indent="0">
+              <a:lnSpc>
+                <a:spcPts val="1575"/>
+              </a:lnSpc>
+              <a:spcAft>
+                <a:spcPts val="0"/>
+              </a:spcAft>
+              <a:buNone/>
+            </a:pPr>
+            <a:r>
+              <a:rPr lang="en-US" sz="1200" b="0">
+                <a:solidFill>
+                  <a:srgbClr val="202B33"/>
+                </a:solidFill>
+                <a:latin typeface="Arial"/>
+                <a:ea typeface="Arial"/>
+                <a:cs typeface="Arial"/>
+              </a:rPr>
+              <a:t xml:space="preserve">Separate first drafts. The contrast is the product.</a:t>
+            </a:r>
+            <a:endParaRPr lang="en-US" sz="1200"/>
+          </a:p>
+          <a:p>
+            <a:pPr marL="0" indent="0">
+              <a:lnSpc>
+                <a:spcPts val="1575"/>
+              </a:lnSpc>
+              <a:spcAft>
+                <a:spcPts val="0"/>
+              </a:spcAft>
+              <a:buNone/>
+            </a:pPr>
+            <a:r>
+              <a:rPr lang="en-US" sz="1200" b="0">
+                <a:solidFill>
+                  <a:srgbClr val="202B33"/>
+                </a:solidFill>
+                <a:latin typeface="Arial"/>
+                <a:ea typeface="Arial"/>
+                <a:cs typeface="Arial"/>
+              </a:rPr>
               <a:t xml:space="preserve"/>
             </a:r>
             <a:endParaRPr lang="en-US" sz="1200"/>
@@ -14928,7 +14308,7 @@
                 <a:ea typeface="Arial"/>
                 <a:cs typeface="Arial"/>
               </a:rPr>
-              <a:t xml:space="preserve">Change the unit of work from images to whole designs.</a:t>
+              <a:t xml:space="preserve">Somebody is going to cite Knight and Leveson at me,</a:t>
             </a:r>
             <a:endParaRPr lang="en-US" sz="1200"/>
           </a:p>
@@ -14951,7 +14331,7 @@
                 <a:ea typeface="Arial"/>
                 <a:cs typeface="Arial"/>
               </a:rPr>
-              <a:t xml:space="preserve">Give the batch-job problem to three generated agents</a:t>
+              <a:t xml:space="preserve">so let me do it first. 1986, twenty-seven</a:t>
             </a:r>
             <a:endParaRPr lang="en-US" sz="1200"/>
           </a:p>
@@ -14974,7 +14354,7 @@
                 <a:ea typeface="Arial"/>
                 <a:cs typeface="Arial"/>
               </a:rPr>
-              <a:t xml:space="preserve">with the same requirements and different priorities:</a:t>
+              <a:t xml:space="preserve">programmers, one specification, a million tests, and</a:t>
             </a:r>
             <a:endParaRPr lang="en-US" sz="1200"/>
           </a:p>
@@ -14997,7 +14377,7 @@
                 <a:ea typeface="Arial"/>
                 <a:cs typeface="Arial"/>
               </a:rPr>
-              <a:t xml:space="preserve">a minimalist, a maintainer, a security and</a:t>
+              <a:t xml:space="preserve">the independently written versions failed together</a:t>
             </a:r>
             <a:endParaRPr lang="en-US" sz="1200"/>
           </a:p>
@@ -15020,7 +14400,7 @@
                 <a:ea typeface="Arial"/>
                 <a:cs typeface="Arial"/>
               </a:rPr>
-              <a:t xml:space="preserve">performance reviewer. Keep first drafts separate so</a:t>
+              <a:t xml:space="preserve">far more than independence predicts. True, important,</a:t>
             </a:r>
             <a:endParaRPr lang="en-US" sz="1200"/>
           </a:p>
@@ -15043,7 +14423,7 @@
                 <a:ea typeface="Arial"/>
                 <a:cs typeface="Arial"/>
               </a:rPr>
-              <a:t xml:space="preserve">they do not converge on the first plausible answer.</a:t>
+              <a:t xml:space="preserve">and about N-version programming as a correctness</a:t>
             </a:r>
             <a:endParaRPr lang="en-US" sz="1200"/>
           </a:p>
@@ -15066,7 +14446,30 @@
                 <a:ea typeface="Arial"/>
                 <a:cs typeface="Arial"/>
               </a:rPr>
-              <a:t xml:space="preserve">The contrast is the product.</a:t>
+              <a:t xml:space="preserve">strategy. Not this. I am not voting three models</a:t>
+            </a:r>
+            <a:endParaRPr lang="en-US" sz="1200"/>
+          </a:p>
+          <a:p>
+            <a:pPr marL="0" indent="0">
+              <a:lnSpc>
+                <a:spcPts val="1575"/>
+              </a:lnSpc>
+              <a:spcAft>
+                <a:spcPts val="0"/>
+              </a:spcAft>
+              <a:buNone/>
+            </a:pPr>
+            <a:r>
+              <a:rPr lang="en-US" sz="1200" b="0">
+                <a:solidFill>
+                  <a:srgbClr val="202B33"/>
+                </a:solidFill>
+                <a:latin typeface="Arial"/>
+                <a:ea typeface="Arial"/>
+                <a:cs typeface="Arial"/>
+              </a:rPr>
+              <a:t xml:space="preserve">toward the truth.</a:t>
             </a:r>
             <a:endParaRPr lang="en-US" sz="1200"/>
           </a:p>
@@ -15295,30 +14698,7 @@
                 <a:ea typeface="Arial"/>
                 <a:cs typeface="Arial"/>
               </a:rPr>
-              <a:t xml:space="preserve">Attempts are a scaling axis. So is judging.</a:t>
-            </a:r>
-            <a:endParaRPr lang="en-US" sz="2550"/>
-          </a:p>
-          <a:p>
-            <a:pPr marL="0" indent="0">
-              <a:lnSpc>
-                <a:spcPts val="3060"/>
-              </a:lnSpc>
-              <a:spcAft>
-                <a:spcPts val="0"/>
-              </a:spcAft>
-              <a:buNone/>
-            </a:pPr>
-            <a:r>
-              <a:rPr lang="en-US" sz="2550" b="1">
-                <a:solidFill>
-                  <a:srgbClr val="202B33"/>
-                </a:solidFill>
-                <a:latin typeface="Arial"/>
-                <a:ea typeface="Arial"/>
-                <a:cs typeface="Arial"/>
-              </a:rPr>
-              <a:t xml:space="preserve">(continued)</a:t>
+              <a:t xml:space="preserve">Monkeys, Then Guards (continued)</a:t>
             </a:r>
             <a:endParaRPr lang="en-US" sz="2550"/>
           </a:p>
@@ -15367,7 +14747,7 @@
                 <a:ea typeface="Arial"/>
                 <a:cs typeface="Arial"/>
               </a:rPr>
-              <a:t xml:space="preserve">Somebody is going to cite Knight and</a:t>
+              <a:t xml:space="preserve">The generation side has a name I am not</a:t>
             </a:r>
             <a:endParaRPr lang="en-US" sz="1500"/>
           </a:p>
@@ -15390,7 +14770,7 @@
                 <a:ea typeface="Arial"/>
                 <a:cs typeface="Arial"/>
               </a:rPr>
-              <a:t xml:space="preserve">Leveson at me, so let me do it first. 1986,</a:t>
+              <a:t xml:space="preserve">sorry about: the barrel-of-monkeys</a:t>
             </a:r>
             <a:endParaRPr lang="en-US" sz="1500"/>
           </a:p>
@@ -15413,7 +14793,7 @@
                 <a:ea typeface="Arial"/>
                 <a:cs typeface="Arial"/>
               </a:rPr>
-              <a:t xml:space="preserve">twenty-seven teams, one specification, a</a:t>
+              <a:t xml:space="preserve">maneuver. Lead with cheap parallel</a:t>
             </a:r>
             <a:endParaRPr lang="en-US" sz="1500"/>
           </a:p>
@@ -15436,7 +14816,7 @@
                 <a:ea typeface="Arial"/>
                 <a:cs typeface="Arial"/>
               </a:rPr>
-              <a:t xml:space="preserve">million tests, and the independently</a:t>
+              <a:t xml:space="preserve">generation on purpose — monkeys at a</a:t>
             </a:r>
             <a:endParaRPr lang="en-US" sz="1500"/>
           </a:p>
@@ -15459,7 +14839,7 @@
                 <a:ea typeface="Arial"/>
                 <a:cs typeface="Arial"/>
               </a:rPr>
-              <a:t xml:space="preserve">written versions failed together far more</a:t>
+              <a:t xml:space="preserve">hundredth of the frontier's price — and</a:t>
             </a:r>
             <a:endParaRPr lang="en-US" sz="1500"/>
           </a:p>
@@ -15482,7 +14862,7 @@
                 <a:ea typeface="Arial"/>
                 <a:cs typeface="Arial"/>
               </a:rPr>
-              <a:t xml:space="preserve">than independence predicts. True,</a:t>
+              <a:t xml:space="preserve">hand the barrel to the next stage. Four</a:t>
             </a:r>
             <a:endParaRPr lang="en-US" sz="1500"/>
           </a:p>
@@ -15505,7 +14885,7 @@
                 <a:ea typeface="Arial"/>
                 <a:cs typeface="Arial"/>
               </a:rPr>
-              <a:t xml:space="preserve">important, and about N-version programming</a:t>
+              <a:t xml:space="preserve">reasons. Race: take the first draft that</a:t>
             </a:r>
             <a:endParaRPr lang="en-US" sz="1500"/>
           </a:p>
@@ -15528,7 +14908,7 @@
                 <a:ea typeface="Arial"/>
                 <a:cs typeface="Arial"/>
               </a:rPr>
-              <a:t xml:space="preserve">as a correctness strategy. That is not what</a:t>
+              <a:t xml:space="preserve">passes the gate. Synthesize: a frontier</a:t>
             </a:r>
             <a:endParaRPr lang="en-US" sz="1500"/>
           </a:p>
@@ -15551,7 +14931,7 @@
                 <a:ea typeface="Arial"/>
                 <a:cs typeface="Arial"/>
               </a:rPr>
-              <a:t xml:space="preserve">this is. I am not voting three models</a:t>
+              <a:t xml:space="preserve">model reads them all, input tokens being</a:t>
             </a:r>
             <a:endParaRPr lang="en-US" sz="1500"/>
           </a:p>
@@ -15574,7 +14954,7 @@
                 <a:ea typeface="Arial"/>
                 <a:cs typeface="Arial"/>
               </a:rPr>
-              <a:t xml:space="preserve">toward the truth, and I am not going to</a:t>
+              <a:t xml:space="preserve">the cheap ones, and writes one coherent</a:t>
             </a:r>
             <a:endParaRPr lang="en-US" sz="1500"/>
           </a:p>
@@ -15597,7 +14977,7 @@
                 <a:ea typeface="Arial"/>
                 <a:cs typeface="Arial"/>
               </a:rPr>
-              <a:t xml:space="preserve">tell you the ensemble is right because it</a:t>
+              <a:t xml:space="preserve">output. Rank: more candidates for the</a:t>
             </a:r>
             <a:endParaRPr lang="en-US" sz="1500"/>
           </a:p>
@@ -15620,7 +15000,7 @@
                 <a:ea typeface="Arial"/>
                 <a:cs typeface="Arial"/>
               </a:rPr>
-              <a:t xml:space="preserve">agreed with itself. If that is the pitch</a:t>
+              <a:t xml:space="preserve">judges, so the best whole answer goes</a:t>
             </a:r>
             <a:endParaRPr lang="en-US" sz="1500"/>
           </a:p>
@@ -15643,7 +15023,7 @@
                 <a:ea typeface="Arial"/>
                 <a:cs typeface="Arial"/>
               </a:rPr>
-              <a:t xml:space="preserve">you heard, it is not mine.</a:t>
+              <a:t xml:space="preserve">downstream. Catch: in law or medicine,</a:t>
             </a:r>
             <a:endParaRPr lang="en-US" sz="1500"/>
           </a:p>
@@ -15666,122 +15046,99 @@
                 <a:ea typeface="Arial"/>
                 <a:cs typeface="Arial"/>
               </a:rPr>
+              <a:t xml:space="preserve">where the rules are extensive and specific,</a:t>
+            </a:r>
+            <a:endParaRPr lang="en-US" sz="1500"/>
+          </a:p>
+          <a:p>
+            <a:pPr marL="0" indent="0">
+              <a:lnSpc>
+                <a:spcPts val="1950"/>
+              </a:lnSpc>
+              <a:spcAft>
+                <a:spcPts val="0"/>
+              </a:spcAft>
+              <a:buNone/>
+            </a:pPr>
+            <a:r>
+              <a:rPr lang="en-US" sz="1500" b="0">
+                <a:solidFill>
+                  <a:srgbClr val="202B33"/>
+                </a:solidFill>
+                <a:latin typeface="Arial"/>
+                <a:ea typeface="Arial"/>
+                <a:cs typeface="Arial"/>
+              </a:rPr>
+              <a:t xml:space="preserve">the mistake you fear shows up in one output</a:t>
+            </a:r>
+            <a:endParaRPr lang="en-US" sz="1500"/>
+          </a:p>
+          <a:p>
+            <a:pPr marL="0" indent="0">
+              <a:lnSpc>
+                <a:spcPts val="1950"/>
+              </a:lnSpc>
+              <a:spcAft>
+                <a:spcPts val="0"/>
+              </a:spcAft>
+              <a:buNone/>
+            </a:pPr>
+            <a:r>
+              <a:rPr lang="en-US" sz="1500" b="0">
+                <a:solidFill>
+                  <a:srgbClr val="202B33"/>
+                </a:solidFill>
+                <a:latin typeface="Arial"/>
+                <a:ea typeface="Arial"/>
+                <a:cs typeface="Arial"/>
+              </a:rPr>
+              <a:t xml:space="preserve">out of ten, and the only way to see it is</a:t>
+            </a:r>
+            <a:endParaRPr lang="en-US" sz="1500"/>
+          </a:p>
+          <a:p>
+            <a:pPr marL="0" indent="0">
+              <a:lnSpc>
+                <a:spcPts val="1950"/>
+              </a:lnSpc>
+              <a:spcAft>
+                <a:spcPts val="0"/>
+              </a:spcAft>
+              <a:buNone/>
+            </a:pPr>
+            <a:r>
+              <a:rPr lang="en-US" sz="1500" b="0">
+                <a:solidFill>
+                  <a:srgbClr val="202B33"/>
+                </a:solidFill>
+                <a:latin typeface="Arial"/>
+                <a:ea typeface="Arial"/>
+                <a:cs typeface="Arial"/>
+              </a:rPr>
+              <a:t xml:space="preserve">to have ten.</a:t>
+            </a:r>
+            <a:endParaRPr lang="en-US" sz="1500"/>
+          </a:p>
+          <a:p>
+            <a:pPr marL="0" indent="0">
+              <a:lnSpc>
+                <a:spcPts val="1950"/>
+              </a:lnSpc>
+              <a:spcAft>
+                <a:spcPts val="0"/>
+              </a:spcAft>
+              <a:buNone/>
+            </a:pPr>
+            <a:r>
+              <a:rPr lang="en-US" sz="1500" b="0">
+                <a:solidFill>
+                  <a:srgbClr val="202B33"/>
+                </a:solidFill>
+                <a:latin typeface="Arial"/>
+                <a:ea typeface="Arial"/>
+                <a:cs typeface="Arial"/>
+              </a:rPr>
               <a:t xml:space="preserve"/>
-            </a:r>
-            <a:endParaRPr lang="en-US" sz="1500"/>
-          </a:p>
-          <a:p>
-            <a:pPr marL="0" indent="0">
-              <a:lnSpc>
-                <a:spcPts val="1950"/>
-              </a:lnSpc>
-              <a:spcAft>
-                <a:spcPts val="0"/>
-              </a:spcAft>
-              <a:buNone/>
-            </a:pPr>
-            <a:r>
-              <a:rPr lang="en-US" sz="1500" b="0">
-                <a:solidFill>
-                  <a:srgbClr val="202B33"/>
-                </a:solidFill>
-                <a:latin typeface="Arial"/>
-                <a:ea typeface="Arial"/>
-                <a:cs typeface="Arial"/>
-              </a:rPr>
-              <a:t xml:space="preserve">Here is what parallel attempts actually</a:t>
-            </a:r>
-            <a:endParaRPr lang="en-US" sz="1500"/>
-          </a:p>
-          <a:p>
-            <a:pPr marL="0" indent="0">
-              <a:lnSpc>
-                <a:spcPts val="1950"/>
-              </a:lnSpc>
-              <a:spcAft>
-                <a:spcPts val="0"/>
-              </a:spcAft>
-              <a:buNone/>
-            </a:pPr>
-            <a:r>
-              <a:rPr lang="en-US" sz="1500" b="0">
-                <a:solidFill>
-                  <a:srgbClr val="202B33"/>
-                </a:solidFill>
-                <a:latin typeface="Arial"/>
-                <a:ea typeface="Arial"/>
-                <a:cs typeface="Arial"/>
-              </a:rPr>
-              <a:t xml:space="preserve">buy. Understanding of the models you depend</a:t>
-            </a:r>
-            <a:endParaRPr lang="en-US" sz="1500"/>
-          </a:p>
-          <a:p>
-            <a:pPr marL="0" indent="0">
-              <a:lnSpc>
-                <a:spcPts val="1950"/>
-              </a:lnSpc>
-              <a:spcAft>
-                <a:spcPts val="0"/>
-              </a:spcAft>
-              <a:buNone/>
-            </a:pPr>
-            <a:r>
-              <a:rPr lang="en-US" sz="1500" b="0">
-                <a:solidFill>
-                  <a:srgbClr val="202B33"/>
-                </a:solidFill>
-                <a:latin typeface="Arial"/>
-                <a:ea typeface="Arial"/>
-                <a:cs typeface="Arial"/>
-              </a:rPr>
-              <a:t xml:space="preserve">on: run one brief through two of them and</a:t>
-            </a:r>
-            <a:endParaRPr lang="en-US" sz="1500"/>
-          </a:p>
-          <a:p>
-            <a:pPr marL="0" indent="0">
-              <a:lnSpc>
-                <a:spcPts val="1950"/>
-              </a:lnSpc>
-              <a:spcAft>
-                <a:spcPts val="0"/>
-              </a:spcAft>
-              <a:buNone/>
-            </a:pPr>
-            <a:r>
-              <a:rPr lang="en-US" sz="1500" b="0">
-                <a:solidFill>
-                  <a:srgbClr val="202B33"/>
-                </a:solidFill>
-                <a:latin typeface="Arial"/>
-                <a:ea typeface="Arial"/>
-                <a:cs typeface="Arial"/>
-              </a:rPr>
-              <a:t xml:space="preserve">you learn what each reaches for and what</a:t>
-            </a:r>
-            <a:endParaRPr lang="en-US" sz="1500"/>
-          </a:p>
-          <a:p>
-            <a:pPr marL="0" indent="0">
-              <a:lnSpc>
-                <a:spcPts val="1950"/>
-              </a:lnSpc>
-              <a:spcAft>
-                <a:spcPts val="0"/>
-              </a:spcAft>
-              <a:buNone/>
-            </a:pPr>
-            <a:r>
-              <a:rPr lang="en-US" sz="1500" b="0">
-                <a:solidFill>
-                  <a:srgbClr val="202B33"/>
-                </a:solidFill>
-                <a:latin typeface="Arial"/>
-                <a:ea typeface="Arial"/>
-                <a:cs typeface="Arial"/>
-              </a:rPr>
-              <a:t xml:space="preserve">each forgets. A migration harness: same</a:t>
             </a:r>
             <a:endParaRPr lang="en-US" sz="1500"/>
           </a:p>
@@ -15830,7 +15187,7 @@
                 <a:ea typeface="Arial"/>
                 <a:cs typeface="Arial"/>
               </a:rPr>
-              <a:t xml:space="preserve">brief, new model, diff the behavior before</a:t>
+              <a:t xml:space="preserve">Speculative optimization in a lab coat?</a:t>
             </a:r>
             <a:endParaRPr lang="en-US" sz="1500"/>
           </a:p>
@@ -15853,7 +15210,7 @@
                 <a:ea typeface="Arial"/>
                 <a:cs typeface="Arial"/>
               </a:rPr>
-              <a:t xml:space="preserve">you switch, instead of after the incident.</a:t>
+              <a:t xml:space="preserve">Possibly. Ship it with an env var that sets</a:t>
             </a:r>
             <a:endParaRPr lang="en-US" sz="1500"/>
           </a:p>
@@ -15876,7 +15233,7 @@
                 <a:ea typeface="Arial"/>
                 <a:cs typeface="Arial"/>
               </a:rPr>
-              <a:t xml:space="preserve">Better output: a synthesis of compatible</a:t>
+              <a:t xml:space="preserve">fan-out to one, and ideally let the system</a:t>
             </a:r>
             <a:endParaRPr lang="en-US" sz="1500"/>
           </a:p>
@@ -15899,7 +15256,7 @@
                 <a:ea typeface="Arial"/>
                 <a:cs typeface="Arial"/>
               </a:rPr>
-              <a:t xml:space="preserve">ideas is often better than any single</a:t>
+              <a:t xml:space="preserve">tune that knob itself. Right? Right. That</a:t>
             </a:r>
             <a:endParaRPr lang="en-US" sz="1500"/>
           </a:p>
@@ -15922,7 +15279,7 @@
                 <a:ea typeface="Arial"/>
                 <a:cs typeface="Arial"/>
               </a:rPr>
-              <a:t xml:space="preserve">draft. And the cheap one, which is the one</a:t>
+              <a:t xml:space="preserve">is the companion talk.</a:t>
             </a:r>
             <a:endParaRPr lang="en-US" sz="1500"/>
           </a:p>
@@ -15945,7 +15302,7 @@
                 <a:ea typeface="Arial"/>
                 <a:cs typeface="Arial"/>
               </a:rPr>
-              <a:t xml:space="preserve">I care about: judging. A judge reads a</a:t>
+              <a:t xml:space="preserve"/>
             </a:r>
             <a:endParaRPr lang="en-US" sz="1500"/>
           </a:p>
@@ -15968,7 +15325,7 @@
                 <a:ea typeface="Arial"/>
                 <a:cs typeface="Arial"/>
               </a:rPr>
-              <a:t xml:space="preserve">thousand tokens and writes fifty. Output is</a:t>
+              <a:t xml:space="preserve">The cheap half is judging. A judge reads a</a:t>
             </a:r>
             <a:endParaRPr lang="en-US" sz="1500"/>
           </a:p>
@@ -15991,7 +15348,7 @@
                 <a:ea typeface="Arial"/>
                 <a:cs typeface="Arial"/>
               </a:rPr>
-              <a:t xml:space="preserve">what costs, so you can afford three or five</a:t>
+              <a:t xml:space="preserve">thousand tokens and writes fifty, and</a:t>
             </a:r>
             <a:endParaRPr lang="en-US" sz="1500"/>
           </a:p>
@@ -16014,7 +15371,7 @@
                 <a:ea typeface="Arial"/>
                 <a:cs typeface="Arial"/>
               </a:rPr>
-              <a:t xml:space="preserve">judges from different models on every</a:t>
+              <a:t xml:space="preserve">output is what costs, so five judges from</a:t>
             </a:r>
             <a:endParaRPr lang="en-US" sz="1500"/>
           </a:p>
@@ -16037,7 +15394,7 @@
                 <a:ea typeface="Arial"/>
                 <a:cs typeface="Arial"/>
               </a:rPr>
-              <a:t xml:space="preserve">candidate, and the number you want back is</a:t>
+              <a:t xml:space="preserve">different models on every candidate is</a:t>
             </a:r>
             <a:endParaRPr lang="en-US" sz="1500"/>
           </a:p>
@@ -16060,7 +15417,7 @@
                 <a:ea typeface="Arial"/>
                 <a:cs typeface="Arial"/>
               </a:rPr>
-              <a:t xml:space="preserve">not the average score. It is the</a:t>
+              <a:t xml:space="preserve">affordable. Not the average score. The</a:t>
             </a:r>
             <a:endParaRPr lang="en-US" sz="1500"/>
           </a:p>
@@ -16083,7 +15440,7 @@
                 <a:ea typeface="Arial"/>
                 <a:cs typeface="Arial"/>
               </a:rPr>
-              <a:t xml:space="preserve">disagreement. When the judges split or</a:t>
+              <a:t xml:space="preserve">disagreement. Judges that split, or whose</a:t>
             </a:r>
             <a:endParaRPr lang="en-US" sz="1500"/>
           </a:p>
@@ -16106,7 +15463,7 @@
                 <a:ea typeface="Arial"/>
                 <a:cs typeface="Arial"/>
               </a:rPr>
-              <a:t xml:space="preserve">their reasons barely overlap, that</a:t>
+              <a:t xml:space="preserve">reasons barely overlap, have found</a:t>
             </a:r>
             <a:endParaRPr lang="en-US" sz="1500"/>
           </a:p>
@@ -16129,7 +15486,7 @@
                 <a:ea typeface="Arial"/>
                 <a:cs typeface="Arial"/>
               </a:rPr>
-              <a:t xml:space="preserve">candidate is sitting in territory nobody</a:t>
+              <a:t xml:space="preserve">territory nobody understands; that</a:t>
             </a:r>
             <a:endParaRPr lang="en-US" sz="1500"/>
           </a:p>
@@ -16152,7 +15509,7 @@
                 <a:ea typeface="Arial"/>
                 <a:cs typeface="Arial"/>
               </a:rPr>
-              <a:t xml:space="preserve">understands, and that is the one you do not</a:t>
+              <a:t xml:space="preserve">candidate does not ship on autopilot. I</a:t>
             </a:r>
             <a:endParaRPr lang="en-US" sz="1500"/>
           </a:p>
@@ -16175,7 +15532,7 @@
                 <a:ea typeface="Arial"/>
                 <a:cs typeface="Arial"/>
               </a:rPr>
-              <a:t xml:space="preserve">ship on autopilot. I call this the Council</a:t>
+              <a:t xml:space="preserve">call this the Council of Guards: it reads</a:t>
             </a:r>
             <a:endParaRPr lang="en-US" sz="1500"/>
           </a:p>
@@ -16198,7 +15555,7 @@
                 <a:ea typeface="Arial"/>
                 <a:cs typeface="Arial"/>
               </a:rPr>
-              <a:t xml:space="preserve">of Guards. It picks between one and three</a:t>
+              <a:t xml:space="preserve">everything, writes almost nothing, and</a:t>
             </a:r>
             <a:endParaRPr lang="en-US" sz="1500"/>
           </a:p>
@@ -16221,30 +15578,7 @@
                 <a:ea typeface="Arial"/>
                 <a:cs typeface="Arial"/>
               </a:rPr>
-              <a:t xml:space="preserve">alternatives to generate, and it costs a</a:t>
-            </a:r>
-            <a:endParaRPr lang="en-US" sz="1500"/>
-          </a:p>
-          <a:p>
-            <a:pPr marL="0" indent="0">
-              <a:lnSpc>
-                <a:spcPts val="1950"/>
-              </a:lnSpc>
-              <a:spcAft>
-                <a:spcPts val="0"/>
-              </a:spcAft>
-              <a:buNone/>
-            </a:pPr>
-            <a:r>
-              <a:rPr lang="en-US" sz="1500" b="0">
-                <a:solidFill>
-                  <a:srgbClr val="202B33"/>
-                </a:solidFill>
-                <a:latin typeface="Arial"/>
-                <a:ea typeface="Arial"/>
-                <a:cs typeface="Arial"/>
-              </a:rPr>
-              <a:t xml:space="preserve">fraction of the generation it is guarding.</a:t>
+              <a:t xml:space="preserve">costs a fraction of what it guards.</a:t>
             </a:r>
             <a:endParaRPr lang="en-US" sz="1500"/>
           </a:p>
@@ -16473,30 +15807,7 @@
                 <a:ea typeface="Arial"/>
                 <a:cs typeface="Arial"/>
               </a:rPr>
-              <a:t xml:space="preserve">Attempts are a scaling axis. So is judging.</a:t>
-            </a:r>
-            <a:endParaRPr lang="en-US" sz="2550"/>
-          </a:p>
-          <a:p>
-            <a:pPr marL="0" indent="0">
-              <a:lnSpc>
-                <a:spcPts val="3060"/>
-              </a:lnSpc>
-              <a:spcAft>
-                <a:spcPts val="0"/>
-              </a:spcAft>
-              <a:buNone/>
-            </a:pPr>
-            <a:r>
-              <a:rPr lang="en-US" sz="2550" b="1">
-                <a:solidFill>
-                  <a:srgbClr val="202B33"/>
-                </a:solidFill>
-                <a:latin typeface="Arial"/>
-                <a:ea typeface="Arial"/>
-                <a:cs typeface="Arial"/>
-              </a:rPr>
-              <a:t xml:space="preserve">(continued)</a:t>
+              <a:t xml:space="preserve">Monkeys, Then Guards (continued)</a:t>
             </a:r>
             <a:endParaRPr lang="en-US" sz="2550"/>
           </a:p>
@@ -16545,7 +15856,7 @@
                 <a:ea typeface="Arial"/>
                 <a:cs typeface="Arial"/>
               </a:rPr>
-              <a:t xml:space="preserve">The generation side has a name too, and I</a:t>
+              <a:t xml:space="preserve">Write the gates before you read the</a:t>
             </a:r>
             <a:endParaRPr lang="en-US" sz="1500"/>
           </a:p>
@@ -16568,7 +15879,7 @@
                 <a:ea typeface="Arial"/>
                 <a:cs typeface="Arial"/>
               </a:rPr>
-              <a:t xml:space="preserve">am not sorry about it: the</a:t>
+              <a:t xml:space="preserve">candidates: no duplicate dispatch after</a:t>
             </a:r>
             <a:endParaRPr lang="en-US" sz="1500"/>
           </a:p>
@@ -16591,7 +15902,7 @@
                 <a:ea typeface="Arial"/>
                 <a:cs typeface="Arial"/>
               </a:rPr>
-              <a:t xml:space="preserve">barrel-of-monkeys maneuver. Lead with</a:t>
+              <a:t xml:space="preserve">restart, no cross-tenant spend, no</a:t>
             </a:r>
             <a:endParaRPr lang="en-US" sz="1500"/>
           </a:p>
@@ -16614,7 +15925,7 @@
                 <a:ea typeface="Arial"/>
                 <a:cs typeface="Arial"/>
               </a:rPr>
-              <a:t xml:space="preserve">parallel generation on purpose. You are</a:t>
+              <a:t xml:space="preserve">regeneration on notification retry, no</a:t>
             </a:r>
             <a:endParaRPr lang="en-US" sz="1500"/>
           </a:p>
@@ -16637,7 +15948,7 @@
                 <a:ea typeface="Arial"/>
                 <a:cs typeface="Arial"/>
               </a:rPr>
-              <a:t xml:space="preserve">adding a controlled section of chaos that</a:t>
+              <a:t xml:space="preserve">dispatch after deadline. Every candidate</a:t>
             </a:r>
             <a:endParaRPr lang="en-US" sz="1500"/>
           </a:p>
@@ -16660,7 +15971,7 @@
                 <a:ea typeface="Arial"/>
                 <a:cs typeface="Arial"/>
               </a:rPr>
-              <a:t xml:space="preserve">the next stage has to handle: a revision</a:t>
+              <a:t xml:space="preserve">fails one, including the careful one; the</a:t>
             </a:r>
             <a:endParaRPr lang="en-US" sz="1500"/>
           </a:p>
@@ -16683,7 +15994,7 @@
                 <a:ea typeface="Arial"/>
                 <a:cs typeface="Arial"/>
               </a:rPr>
-              <a:t xml:space="preserve">loop, a router, the council, or your users</a:t>
+              <a:t xml:space="preserve">council is allowed to reject the room. A</a:t>
             </a:r>
             <a:endParaRPr lang="en-US" sz="1500"/>
           </a:p>
@@ -16706,7 +16017,7 @@
                 <a:ea typeface="Arial"/>
                 <a:cs typeface="Arial"/>
               </a:rPr>
-              <a:t xml:space="preserve">in an A/B test. Why you would want the</a:t>
+              <a:t xml:space="preserve">synthesis is a new candidate. Stop at the</a:t>
             </a:r>
             <a:endParaRPr lang="en-US" sz="1500"/>
           </a:p>
@@ -16729,7 +16040,7 @@
                 <a:ea typeface="Arial"/>
                 <a:cs typeface="Arial"/>
               </a:rPr>
-              <a:t xml:space="preserve">chaos varies. Sometimes you want the</a:t>
+              <a:t xml:space="preserve">review budget.</a:t>
             </a:r>
             <a:endParaRPr lang="en-US" sz="1500"/>
           </a:p>
@@ -16752,7 +16063,7 @@
                 <a:ea typeface="Arial"/>
                 <a:cs typeface="Arial"/>
               </a:rPr>
-              <a:t xml:space="preserve">fastest answer, so you race. Sometimes you</a:t>
+              <a:t xml:space="preserve"/>
             </a:r>
             <a:endParaRPr lang="en-US" sz="1500"/>
           </a:p>
@@ -16775,168 +16086,7 @@
                 <a:ea typeface="Arial"/>
                 <a:cs typeface="Arial"/>
               </a:rPr>
-              <a:t xml:space="preserve">want the best parts of several, so a</a:t>
-            </a:r>
-            <a:endParaRPr lang="en-US" sz="1500"/>
-          </a:p>
-          <a:p>
-            <a:pPr marL="0" indent="0">
-              <a:lnSpc>
-                <a:spcPts val="1950"/>
-              </a:lnSpc>
-              <a:spcAft>
-                <a:spcPts val="0"/>
-              </a:spcAft>
-              <a:buNone/>
-            </a:pPr>
-            <a:r>
-              <a:rPr lang="en-US" sz="1500" b="0">
-                <a:solidFill>
-                  <a:srgbClr val="202B33"/>
-                </a:solidFill>
-                <a:latin typeface="Arial"/>
-                <a:ea typeface="Arial"/>
-                <a:cs typeface="Arial"/>
-              </a:rPr>
-              <a:t xml:space="preserve">frontier model, whose input tokens are the</a:t>
-            </a:r>
-            <a:endParaRPr lang="en-US" sz="1500"/>
-          </a:p>
-          <a:p>
-            <a:pPr marL="0" indent="0">
-              <a:lnSpc>
-                <a:spcPts val="1950"/>
-              </a:lnSpc>
-              <a:spcAft>
-                <a:spcPts val="0"/>
-              </a:spcAft>
-              <a:buNone/>
-            </a:pPr>
-            <a:r>
-              <a:rPr lang="en-US" sz="1500" b="0">
-                <a:solidFill>
-                  <a:srgbClr val="202B33"/>
-                </a:solidFill>
-                <a:latin typeface="Arial"/>
-                <a:ea typeface="Arial"/>
-                <a:cs typeface="Arial"/>
-              </a:rPr>
-              <a:t xml:space="preserve">cheap ones, reads all of them and writes</a:t>
-            </a:r>
-            <a:endParaRPr lang="en-US" sz="1500"/>
-          </a:p>
-          <a:p>
-            <a:pPr marL="0" indent="0">
-              <a:lnSpc>
-                <a:spcPts val="1950"/>
-              </a:lnSpc>
-              <a:spcAft>
-                <a:spcPts val="0"/>
-              </a:spcAft>
-              <a:buNone/>
-            </a:pPr>
-            <a:r>
-              <a:rPr lang="en-US" sz="1500" b="0">
-                <a:solidFill>
-                  <a:srgbClr val="202B33"/>
-                </a:solidFill>
-                <a:latin typeface="Arial"/>
-                <a:ea typeface="Arial"/>
-                <a:cs typeface="Arial"/>
-              </a:rPr>
-              <a:t xml:space="preserve">one coherent output. Sometimes you just</a:t>
-            </a:r>
-            <a:endParaRPr lang="en-US" sz="1500"/>
-          </a:p>
-          <a:p>
-            <a:pPr marL="0" indent="0">
-              <a:lnSpc>
-                <a:spcPts val="1950"/>
-              </a:lnSpc>
-              <a:spcAft>
-                <a:spcPts val="0"/>
-              </a:spcAft>
-              <a:buNone/>
-            </a:pPr>
-            <a:r>
-              <a:rPr lang="en-US" sz="1500" b="0">
-                <a:solidFill>
-                  <a:srgbClr val="202B33"/>
-                </a:solidFill>
-                <a:latin typeface="Arial"/>
-                <a:ea typeface="Arial"/>
-                <a:cs typeface="Arial"/>
-              </a:rPr>
-              <a:t xml:space="preserve">want more candidates for the judges to rank</a:t>
-            </a:r>
-            <a:endParaRPr lang="en-US" sz="1500"/>
-          </a:p>
-          <a:p>
-            <a:pPr marL="0" indent="0">
-              <a:lnSpc>
-                <a:spcPts val="1950"/>
-              </a:lnSpc>
-              <a:spcAft>
-                <a:spcPts val="0"/>
-              </a:spcAft>
-              <a:buNone/>
-            </a:pPr>
-            <a:r>
-              <a:rPr lang="en-US" sz="1500" b="0">
-                <a:solidFill>
-                  <a:srgbClr val="202B33"/>
-                </a:solidFill>
-                <a:latin typeface="Arial"/>
-                <a:ea typeface="Arial"/>
-                <a:cs typeface="Arial"/>
-              </a:rPr>
-              <a:t xml:space="preserve">so the best whole answer goes downstream.</a:t>
-            </a:r>
-            <a:endParaRPr lang="en-US" sz="1500"/>
-          </a:p>
-          <a:p>
-            <a:pPr marL="0" indent="0">
-              <a:lnSpc>
-                <a:spcPts val="1950"/>
-              </a:lnSpc>
-              <a:spcAft>
-                <a:spcPts val="0"/>
-              </a:spcAft>
-              <a:buNone/>
-            </a:pPr>
-            <a:r>
-              <a:rPr lang="en-US" sz="1500" b="0">
-                <a:solidFill>
-                  <a:srgbClr val="202B33"/>
-                </a:solidFill>
-                <a:latin typeface="Arial"/>
-                <a:ea typeface="Arial"/>
-                <a:cs typeface="Arial"/>
-              </a:rPr>
-              <a:t xml:space="preserve">In law or medicine, where the rules are</a:t>
-            </a:r>
-            <a:endParaRPr lang="en-US" sz="1500"/>
-          </a:p>
-          <a:p>
-            <a:pPr marL="0" indent="0">
-              <a:lnSpc>
-                <a:spcPts val="1950"/>
-              </a:lnSpc>
-              <a:spcAft>
-                <a:spcPts val="0"/>
-              </a:spcAft>
-              <a:buNone/>
-            </a:pPr>
-            <a:r>
-              <a:rPr lang="en-US" sz="1500" b="0">
-                <a:solidFill>
-                  <a:srgbClr val="202B33"/>
-                </a:solidFill>
-                <a:latin typeface="Arial"/>
-                <a:ea typeface="Arial"/>
-                <a:cs typeface="Arial"/>
-              </a:rPr>
-              <a:t xml:space="preserve">extensive and specific, that is how you</a:t>
+              <a:t xml:space="preserve">None of this looks like the engineering we</a:t>
             </a:r>
             <a:endParaRPr lang="en-US" sz="1500"/>
           </a:p>
@@ -16985,7 +16135,7 @@
                 <a:ea typeface="Arial"/>
                 <a:cs typeface="Arial"/>
               </a:rPr>
-              <a:t xml:space="preserve">catch the one errant mistake that shows up</a:t>
+              <a:t xml:space="preserve">were raised on. Do not do the work twice.</a:t>
             </a:r>
             <a:endParaRPr lang="en-US" sz="1500"/>
           </a:p>
@@ -17008,7 +16158,7 @@
                 <a:ea typeface="Arial"/>
                 <a:cs typeface="Arial"/>
               </a:rPr>
-              <a:t xml:space="preserve">in one output out of ten. And the monkeys</a:t>
+              <a:t xml:space="preserve">Do not spend compute speculatively. One</a:t>
             </a:r>
             <a:endParaRPr lang="en-US" sz="1500"/>
           </a:p>
@@ -17031,7 +16181,7 @@
                 <a:ea typeface="Arial"/>
                 <a:cs typeface="Arial"/>
               </a:rPr>
-              <a:t xml:space="preserve">can be cheap: models at a hundredth or a</a:t>
+              <a:t xml:space="preserve">right answer per ticket. Those were axioms</a:t>
             </a:r>
             <a:endParaRPr lang="en-US" sz="1500"/>
           </a:p>
@@ -17054,7 +16204,7 @@
                 <a:ea typeface="Arial"/>
                 <a:cs typeface="Arial"/>
               </a:rPr>
-              <a:t xml:space="preserve">thousandth the price of the frontier,</a:t>
+              <a:t xml:space="preserve">when the expensive thing was the engineer.</a:t>
             </a:r>
             <a:endParaRPr lang="en-US" sz="1500"/>
           </a:p>
@@ -17077,7 +16227,7 @@
                 <a:ea typeface="Arial"/>
                 <a:cs typeface="Arial"/>
               </a:rPr>
-              <a:t xml:space="preserve">generating alternatives in a loop. Some of</a:t>
+              <a:t xml:space="preserve">When the expensive thing is being wrong and</a:t>
             </a:r>
             <a:endParaRPr lang="en-US" sz="1500"/>
           </a:p>
@@ -17100,7 +16250,7 @@
                 <a:ea typeface="Arial"/>
                 <a:cs typeface="Arial"/>
               </a:rPr>
-              <a:t xml:space="preserve">them need a tool-calling agent with files,</a:t>
+              <a:t xml:space="preserve">a second draft costs cents, doing it three</a:t>
             </a:r>
             <a:endParaRPr lang="en-US" sz="1500"/>
           </a:p>
@@ -17123,7 +16273,7 @@
                 <a:ea typeface="Arial"/>
                 <a:cs typeface="Arial"/>
               </a:rPr>
-              <a:t xml:space="preserve">search and git, which means a sandbox and</a:t>
+              <a:t xml:space="preserve">times and reading what disagrees is the</a:t>
             </a:r>
             <a:endParaRPr lang="en-US" sz="1500"/>
           </a:p>
@@ -17146,7 +16296,7 @@
                 <a:ea typeface="Arial"/>
                 <a:cs typeface="Arial"/>
               </a:rPr>
-              <a:t xml:space="preserve">somebody's cloud; others single-shot it</a:t>
+              <a:t xml:space="preserve">frugal move. I am not a shill for Big</a:t>
             </a:r>
             <a:endParaRPr lang="en-US" sz="1500"/>
           </a:p>
@@ -17169,7 +16319,7 @@
                 <a:ea typeface="Arial"/>
                 <a:cs typeface="Arial"/>
               </a:rPr>
-              <a:t xml:space="preserve">fine. That is an architecture question</a:t>
+              <a:t xml:space="preserve">Token. Cheaper, safer and faster now</a:t>
             </a:r>
             <a:endParaRPr lang="en-US" sz="1500"/>
           </a:p>
@@ -17192,7 +16342,7 @@
                 <a:ea typeface="Arial"/>
                 <a:cs typeface="Arial"/>
               </a:rPr>
-              <a:t xml:space="preserve">about how much effort you want in a system</a:t>
+              <a:t xml:space="preserve">sometimes come from spending exactly where</a:t>
             </a:r>
             <a:endParaRPr lang="en-US" sz="1500"/>
           </a:p>
@@ -17215,145 +16365,7 @@
                 <a:ea typeface="Arial"/>
                 <a:cs typeface="Arial"/>
               </a:rPr>
-              <a:t xml:space="preserve">that keeps improving versus one you can</a:t>
-            </a:r>
-            <a:endParaRPr lang="en-US" sz="1500"/>
-          </a:p>
-          <a:p>
-            <a:pPr marL="0" indent="0">
-              <a:lnSpc>
-                <a:spcPts val="1950"/>
-              </a:lnSpc>
-              <a:spcAft>
-                <a:spcPts val="0"/>
-              </a:spcAft>
-              <a:buNone/>
-            </a:pPr>
-            <a:r>
-              <a:rPr lang="en-US" sz="1500" b="0">
-                <a:solidFill>
-                  <a:srgbClr val="202B33"/>
-                </a:solidFill>
-                <a:latin typeface="Arial"/>
-                <a:ea typeface="Arial"/>
-                <a:cs typeface="Arial"/>
-              </a:rPr>
-              <a:t xml:space="preserve">retune at runtime. Fan-out is a tool you</a:t>
-            </a:r>
-            <a:endParaRPr lang="en-US" sz="1500"/>
-          </a:p>
-          <a:p>
-            <a:pPr marL="0" indent="0">
-              <a:lnSpc>
-                <a:spcPts val="1950"/>
-              </a:lnSpc>
-              <a:spcAft>
-                <a:spcPts val="0"/>
-              </a:spcAft>
-              <a:buNone/>
-            </a:pPr>
-            <a:r>
-              <a:rPr lang="en-US" sz="1500" b="0">
-                <a:solidFill>
-                  <a:srgbClr val="202B33"/>
-                </a:solidFill>
-                <a:latin typeface="Arial"/>
-                <a:ea typeface="Arial"/>
-                <a:cs typeface="Arial"/>
-              </a:rPr>
-              <a:t xml:space="preserve">encapsulate at points in the graph: default</a:t>
-            </a:r>
-            <a:endParaRPr lang="en-US" sz="1500"/>
-          </a:p>
-          <a:p>
-            <a:pPr marL="0" indent="0">
-              <a:lnSpc>
-                <a:spcPts val="1950"/>
-              </a:lnSpc>
-              <a:spcAft>
-                <a:spcPts val="0"/>
-              </a:spcAft>
-              <a:buNone/>
-            </a:pPr>
-            <a:r>
-              <a:rPr lang="en-US" sz="1500" b="0">
-                <a:solidFill>
-                  <a:srgbClr val="202B33"/>
-                </a:solidFill>
-                <a:latin typeface="Arial"/>
-                <a:ea typeface="Arial"/>
-                <a:cs typeface="Arial"/>
-              </a:rPr>
-              <a:t xml:space="preserve">model most of the time, n alternatives for</a:t>
-            </a:r>
-            <a:endParaRPr lang="en-US" sz="1500"/>
-          </a:p>
-          <a:p>
-            <a:pPr marL="0" indent="0">
-              <a:lnSpc>
-                <a:spcPts val="1950"/>
-              </a:lnSpc>
-              <a:spcAft>
-                <a:spcPts val="0"/>
-              </a:spcAft>
-              <a:buNone/>
-            </a:pPr>
-            <a:r>
-              <a:rPr lang="en-US" sz="1500" b="0">
-                <a:solidFill>
-                  <a:srgbClr val="202B33"/>
-                </a:solidFill>
-                <a:latin typeface="Arial"/>
-                <a:ea typeface="Arial"/>
-                <a:cs typeface="Arial"/>
-              </a:rPr>
-              <a:t xml:space="preserve">a sample of requests. Your needs and your</a:t>
-            </a:r>
-            <a:endParaRPr lang="en-US" sz="1500"/>
-          </a:p>
-          <a:p>
-            <a:pPr marL="0" indent="0">
-              <a:lnSpc>
-                <a:spcPts val="1950"/>
-              </a:lnSpc>
-              <a:spcAft>
-                <a:spcPts val="0"/>
-              </a:spcAft>
-              <a:buNone/>
-            </a:pPr>
-            <a:r>
-              <a:rPr lang="en-US" sz="1500" b="0">
-                <a:solidFill>
-                  <a:srgbClr val="202B33"/>
-                </a:solidFill>
-                <a:latin typeface="Arial"/>
-                <a:ea typeface="Arial"/>
-                <a:cs typeface="Arial"/>
-              </a:rPr>
-              <a:t xml:space="preserve">opportunities decide why, where and how</a:t>
-            </a:r>
-            <a:endParaRPr lang="en-US" sz="1500"/>
-          </a:p>
-          <a:p>
-            <a:pPr marL="0" indent="0">
-              <a:lnSpc>
-                <a:spcPts val="1950"/>
-              </a:lnSpc>
-              <a:spcAft>
-                <a:spcPts val="0"/>
-              </a:spcAft>
-              <a:buNone/>
-            </a:pPr>
-            <a:r>
-              <a:rPr lang="en-US" sz="1500" b="0">
-                <a:solidFill>
-                  <a:srgbClr val="202B33"/>
-                </a:solidFill>
-                <a:latin typeface="Arial"/>
-                <a:ea typeface="Arial"/>
-                <a:cs typeface="Arial"/>
-              </a:rPr>
-              <a:t xml:space="preserve">often.</a:t>
+              <a:t xml:space="preserve">yesterday's wisdom told you not to.</a:t>
             </a:r>
             <a:endParaRPr lang="en-US" sz="1500"/>
           </a:p>
@@ -17533,7 +16545,7 @@
                 <a:ea typeface="Arial"/>
                 <a:cs typeface="Arial"/>
               </a:rPr>
-              <a:t xml:space="preserve">12 / 14    SOURCE SLIDE 12</a:t>
+              <a:t xml:space="preserve">13 / 14    SOURCE SLIDE 13</a:t>
             </a:r>
             <a:endParaRPr lang="en-US" sz="1050"/>
           </a:p>
@@ -17582,30 +16594,7 @@
                 <a:ea typeface="Arial"/>
                 <a:cs typeface="Arial"/>
               </a:rPr>
-              <a:t xml:space="preserve">Attempts are a scaling axis. So is judging.</a:t>
-            </a:r>
-            <a:endParaRPr lang="en-US" sz="2550"/>
-          </a:p>
-          <a:p>
-            <a:pPr marL="0" indent="0">
-              <a:lnSpc>
-                <a:spcPts val="3060"/>
-              </a:lnSpc>
-              <a:spcAft>
-                <a:spcPts val="0"/>
-              </a:spcAft>
-              <a:buNone/>
-            </a:pPr>
-            <a:r>
-              <a:rPr lang="en-US" sz="2550" b="1">
-                <a:solidFill>
-                  <a:srgbClr val="202B33"/>
-                </a:solidFill>
-                <a:latin typeface="Arial"/>
-                <a:ea typeface="Arial"/>
-                <a:cs typeface="Arial"/>
-              </a:rPr>
-              <a:t xml:space="preserve">(continued)</a:t>
+              <a:t xml:space="preserve">Measure the accepted outcome</a:t>
             </a:r>
             <a:endParaRPr lang="en-US" sz="2550"/>
           </a:p>
@@ -17654,7 +16643,7 @@
                 <a:ea typeface="Arial"/>
                 <a:cs typeface="Arial"/>
               </a:rPr>
-              <a:t xml:space="preserve">Does this border on speculative</a:t>
+              <a:t xml:space="preserve">Latency: dispatch + queue + slowest branch</a:t>
             </a:r>
             <a:endParaRPr lang="en-US" sz="1500"/>
           </a:p>
@@ -17677,7 +16666,7 @@
                 <a:ea typeface="Arial"/>
                 <a:cs typeface="Arial"/>
               </a:rPr>
-              <a:t xml:space="preserve">optimization dressed up as learning? Yes,</a:t>
+              <a:t xml:space="preserve">+ merge + verify</a:t>
             </a:r>
             <a:endParaRPr lang="en-US" sz="1500"/>
           </a:p>
@@ -17700,7 +16689,7 @@
                 <a:ea typeface="Arial"/>
                 <a:cs typeface="Arial"/>
               </a:rPr>
-              <a:t xml:space="preserve">possibly. Probably sometimes. We will find</a:t>
+              <a:t xml:space="preserve"/>
             </a:r>
             <a:endParaRPr lang="en-US" sz="1500"/>
           </a:p>
@@ -17723,7 +16712,7 @@
                 <a:ea typeface="Arial"/>
                 <a:cs typeface="Arial"/>
               </a:rPr>
-              <a:t xml:space="preserve">out. So do not build any of it without env</a:t>
+              <a:t xml:space="preserve">Cost: every candidate, every retry, every</a:t>
             </a:r>
             <a:endParaRPr lang="en-US" sz="1500"/>
           </a:p>
@@ -17746,7 +16735,7 @@
                 <a:ea typeface="Arial"/>
                 <a:cs typeface="Arial"/>
               </a:rPr>
-              <a:t xml:space="preserve">vars to turn it down, and ideally build the</a:t>
+              <a:t xml:space="preserve">held reservation, review time</a:t>
             </a:r>
             <a:endParaRPr lang="en-US" sz="1500"/>
           </a:p>
@@ -17769,7 +16758,7 @@
                 <a:ea typeface="Arial"/>
                 <a:cs typeface="Arial"/>
               </a:rPr>
-              <a:t xml:space="preserve">system that adjusts its own fan-out and</a:t>
+              <a:t xml:space="preserve"/>
             </a:r>
             <a:endParaRPr lang="en-US" sz="1500"/>
           </a:p>
@@ -17792,7 +16781,7 @@
                 <a:ea typeface="Arial"/>
                 <a:cs typeface="Arial"/>
               </a:rPr>
-              <a:t xml:space="preserve">token burn from what it measures. Right?</a:t>
+              <a:t xml:space="preserve">Compare against one competent attempt</a:t>
             </a:r>
             <a:endParaRPr lang="en-US" sz="1500"/>
           </a:p>
@@ -17815,7 +16804,7 @@
                 <a:ea typeface="Arial"/>
                 <a:cs typeface="Arial"/>
               </a:rPr>
-              <a:t xml:space="preserve">Right. That system is the companion talk.</a:t>
+              <a:t xml:space="preserve"/>
             </a:r>
             <a:endParaRPr lang="en-US" sz="1500"/>
           </a:p>
@@ -17838,7 +16827,7 @@
                 <a:ea typeface="Arial"/>
                 <a:cs typeface="Arial"/>
               </a:rPr>
-              <a:t xml:space="preserve"/>
+              <a:t xml:space="preserve">Starting three workers does not delete the</a:t>
             </a:r>
             <a:endParaRPr lang="en-US" sz="1500"/>
           </a:p>
@@ -17861,7 +16850,7 @@
                 <a:ea typeface="Arial"/>
                 <a:cs typeface="Arial"/>
               </a:rPr>
-              <a:t xml:space="preserve">Write the gates before reading the</a:t>
+              <a:t xml:space="preserve">serial parts. That is Amdahl, 1967, and it</a:t>
             </a:r>
             <a:endParaRPr lang="en-US" sz="1500"/>
           </a:p>
@@ -17884,7 +16873,7 @@
                 <a:ea typeface="Arial"/>
                 <a:cs typeface="Arial"/>
               </a:rPr>
-              <a:t xml:space="preserve">candidates: no duplicate dispatch after</a:t>
+              <a:t xml:space="preserve">is unkind: if a tenth of the job is serial,</a:t>
             </a:r>
             <a:endParaRPr lang="en-US" sz="1500"/>
           </a:p>
@@ -17907,7 +16896,7 @@
                 <a:ea typeface="Arial"/>
                 <a:cs typeface="Arial"/>
               </a:rPr>
-              <a:t xml:space="preserve">restart, no cross-tenant spend, no</a:t>
+              <a:t xml:space="preserve">ten workers get you five and a quarter</a:t>
             </a:r>
             <a:endParaRPr lang="en-US" sz="1500"/>
           </a:p>
@@ -17930,145 +16919,7 @@
                 <a:ea typeface="Arial"/>
                 <a:cs typeface="Arial"/>
               </a:rPr>
-              <a:t xml:space="preserve">regeneration on notification retry, no</a:t>
-            </a:r>
-            <a:endParaRPr lang="en-US" sz="1500"/>
-          </a:p>
-          <a:p>
-            <a:pPr marL="0" indent="0">
-              <a:lnSpc>
-                <a:spcPts val="1950"/>
-              </a:lnSpc>
-              <a:spcAft>
-                <a:spcPts val="0"/>
-              </a:spcAft>
-              <a:buNone/>
-            </a:pPr>
-            <a:r>
-              <a:rPr lang="en-US" sz="1500" b="0">
-                <a:solidFill>
-                  <a:srgbClr val="202B33"/>
-                </a:solidFill>
-                <a:latin typeface="Arial"/>
-                <a:ea typeface="Arial"/>
-                <a:cs typeface="Arial"/>
-              </a:rPr>
-              <a:t xml:space="preserve">dispatch after deadline. Run executable</a:t>
-            </a:r>
-            <a:endParaRPr lang="en-US" sz="1500"/>
-          </a:p>
-          <a:p>
-            <a:pPr marL="0" indent="0">
-              <a:lnSpc>
-                <a:spcPts val="1950"/>
-              </a:lnSpc>
-              <a:spcAft>
-                <a:spcPts val="0"/>
-              </a:spcAft>
-              <a:buNone/>
-            </a:pPr>
-            <a:r>
-              <a:rPr lang="en-US" sz="1500" b="0">
-                <a:solidFill>
-                  <a:srgbClr val="202B33"/>
-                </a:solidFill>
-                <a:latin typeface="Arial"/>
-                <a:ea typeface="Arial"/>
-                <a:cs typeface="Arial"/>
-              </a:rPr>
-              <a:t xml:space="preserve">checks first. In the exercise every</a:t>
-            </a:r>
-            <a:endParaRPr lang="en-US" sz="1500"/>
-          </a:p>
-          <a:p>
-            <a:pPr marL="0" indent="0">
-              <a:lnSpc>
-                <a:spcPts val="1950"/>
-              </a:lnSpc>
-              <a:spcAft>
-                <a:spcPts val="0"/>
-              </a:spcAft>
-              <a:buNone/>
-            </a:pPr>
-            <a:r>
-              <a:rPr lang="en-US" sz="1500" b="0">
-                <a:solidFill>
-                  <a:srgbClr val="202B33"/>
-                </a:solidFill>
-                <a:latin typeface="Arial"/>
-                <a:ea typeface="Arial"/>
-                <a:cs typeface="Arial"/>
-              </a:rPr>
-              <a:t xml:space="preserve">candidate fails a gate, including the</a:t>
-            </a:r>
-            <a:endParaRPr lang="en-US" sz="1500"/>
-          </a:p>
-          <a:p>
-            <a:pPr marL="0" indent="0">
-              <a:lnSpc>
-                <a:spcPts val="1950"/>
-              </a:lnSpc>
-              <a:spcAft>
-                <a:spcPts val="0"/>
-              </a:spcAft>
-              <a:buNone/>
-            </a:pPr>
-            <a:r>
-              <a:rPr lang="en-US" sz="1500" b="0">
-                <a:solidFill>
-                  <a:srgbClr val="202B33"/>
-                </a:solidFill>
-                <a:latin typeface="Arial"/>
-                <a:ea typeface="Arial"/>
-                <a:cs typeface="Arial"/>
-              </a:rPr>
-              <a:t xml:space="preserve">careful one, which is the point: the</a:t>
-            </a:r>
-            <a:endParaRPr lang="en-US" sz="1500"/>
-          </a:p>
-          <a:p>
-            <a:pPr marL="0" indent="0">
-              <a:lnSpc>
-                <a:spcPts val="1950"/>
-              </a:lnSpc>
-              <a:spcAft>
-                <a:spcPts val="0"/>
-              </a:spcAft>
-              <a:buNone/>
-            </a:pPr>
-            <a:r>
-              <a:rPr lang="en-US" sz="1500" b="0">
-                <a:solidFill>
-                  <a:srgbClr val="202B33"/>
-                </a:solidFill>
-                <a:latin typeface="Arial"/>
-                <a:ea typeface="Arial"/>
-                <a:cs typeface="Arial"/>
-              </a:rPr>
-              <a:t xml:space="preserve">council is allowed to reject the room. Then</a:t>
-            </a:r>
-            <a:endParaRPr lang="en-US" sz="1500"/>
-          </a:p>
-          <a:p>
-            <a:pPr marL="0" indent="0">
-              <a:lnSpc>
-                <a:spcPts val="1950"/>
-              </a:lnSpc>
-              <a:spcAft>
-                <a:spcPts val="0"/>
-              </a:spcAft>
-              <a:buNone/>
-            </a:pPr>
-            <a:r>
-              <a:rPr lang="en-US" sz="1500" b="0">
-                <a:solidFill>
-                  <a:srgbClr val="202B33"/>
-                </a:solidFill>
-                <a:latin typeface="Arial"/>
-                <a:ea typeface="Arial"/>
-                <a:cs typeface="Arial"/>
-              </a:rPr>
-              <a:t xml:space="preserve">combine compatible ideas into a new</a:t>
+              <a:t xml:space="preserve">times, and a hundred workers get you nine.</a:t>
             </a:r>
             <a:endParaRPr lang="en-US" sz="1500"/>
           </a:p>
@@ -18117,7 +16968,7 @@
                 <a:ea typeface="Arial"/>
                 <a:cs typeface="Arial"/>
               </a:rPr>
-              <a:t xml:space="preserve">candidate with one coherent set of</a:t>
+              <a:t xml:space="preserve">Waiting on every branch can make a finished</a:t>
             </a:r>
             <a:endParaRPr lang="en-US" sz="1500"/>
           </a:p>
@@ -18140,7 +16991,7 @@
                 <a:ea typeface="Arial"/>
                 <a:cs typeface="Arial"/>
               </a:rPr>
-              <a:t xml:space="preserve">assumptions and run the gates again.</a:t>
+              <a:t xml:space="preserve">task slower. Count the whole thing: all</a:t>
             </a:r>
             <a:endParaRPr lang="en-US" sz="1500"/>
           </a:p>
@@ -18163,7 +17014,7 @@
                 <a:ea typeface="Arial"/>
                 <a:cs typeface="Arial"/>
               </a:rPr>
-              <a:t xml:space="preserve">Passing parts do not make a passing whole.</a:t>
+              <a:t xml:space="preserve">candidates, failed work, reserved</a:t>
             </a:r>
             <a:endParaRPr lang="en-US" sz="1500"/>
           </a:p>
@@ -18186,7 +17037,7 @@
                 <a:ea typeface="Arial"/>
                 <a:cs typeface="Arial"/>
               </a:rPr>
-              <a:t xml:space="preserve">Stop at the review budget; an endless</a:t>
+              <a:t xml:space="preserve">uncertainty, judging and human review, and</a:t>
             </a:r>
             <a:endParaRPr lang="en-US" sz="1500"/>
           </a:p>
@@ -18209,7 +17060,7 @@
                 <a:ea typeface="Arial"/>
                 <a:cs typeface="Arial"/>
               </a:rPr>
-              <a:t xml:space="preserve">debate is an expensive way to not ship.</a:t>
+              <a:t xml:space="preserve">compare against one competent attempt on</a:t>
             </a:r>
             <a:endParaRPr lang="en-US" sz="1500"/>
           </a:p>
@@ -18232,6 +17083,29 @@
                 <a:ea typeface="Arial"/>
                 <a:cs typeface="Arial"/>
               </a:rPr>
+              <a:t xml:space="preserve">the same task set.</a:t>
+            </a:r>
+            <a:endParaRPr lang="en-US" sz="1500"/>
+          </a:p>
+          <a:p>
+            <a:pPr marL="0" indent="0">
+              <a:lnSpc>
+                <a:spcPts val="1950"/>
+              </a:lnSpc>
+              <a:spcAft>
+                <a:spcPts val="0"/>
+              </a:spcAft>
+              <a:buNone/>
+            </a:pPr>
+            <a:r>
+              <a:rPr lang="en-US" sz="1500" b="0">
+                <a:solidFill>
+                  <a:srgbClr val="202B33"/>
+                </a:solidFill>
+                <a:latin typeface="Arial"/>
+                <a:ea typeface="Arial"/>
+                <a:cs typeface="Arial"/>
+              </a:rPr>
               <a:t xml:space="preserve"/>
             </a:r>
             <a:endParaRPr lang="en-US" sz="1500"/>
@@ -18255,7 +17129,7 @@
                 <a:ea typeface="Arial"/>
                 <a:cs typeface="Arial"/>
               </a:rPr>
-              <a:t xml:space="preserve">None of this looks like the engineering we</a:t>
+              <a:t xml:space="preserve">Measure accepted outcomes, not launched</a:t>
             </a:r>
             <a:endParaRPr lang="en-US" sz="1500"/>
           </a:p>
@@ -18278,7 +17152,7 @@
                 <a:ea typeface="Arial"/>
                 <a:cs typeface="Arial"/>
               </a:rPr>
-              <a:t xml:space="preserve">were raised on. Do not do the work twice.</a:t>
+              <a:t xml:space="preserve">workers. Start with one extra attempt or</a:t>
             </a:r>
             <a:endParaRPr lang="en-US" sz="1500"/>
           </a:p>
@@ -18301,7 +17175,7 @@
                 <a:ea typeface="Arial"/>
                 <a:cs typeface="Arial"/>
               </a:rPr>
-              <a:t xml:space="preserve">Do not spend compute speculatively. One</a:t>
+              <a:t xml:space="preserve">one batch boundary; if it does not buy</a:t>
             </a:r>
             <a:endParaRPr lang="en-US" sz="1500"/>
           </a:p>
@@ -18324,7 +17198,7 @@
                 <a:ea typeface="Arial"/>
                 <a:cs typeface="Arial"/>
               </a:rPr>
-              <a:t xml:space="preserve">right answer per ticket. Those were axioms</a:t>
+              <a:t xml:space="preserve">quality, time or cost, keep the simpler</a:t>
             </a:r>
             <a:endParaRPr lang="en-US" sz="1500"/>
           </a:p>
@@ -18347,7 +17221,7 @@
                 <a:ea typeface="Arial"/>
                 <a:cs typeface="Arial"/>
               </a:rPr>
-              <a:t xml:space="preserve">when the expensive thing was the engineer.</a:t>
+              <a:t xml:space="preserve">path. We are trying to buy useful work, not</a:t>
             </a:r>
             <a:endParaRPr lang="en-US" sz="1500"/>
           </a:p>
@@ -18370,168 +17244,7 @@
                 <a:ea typeface="Arial"/>
                 <a:cs typeface="Arial"/>
               </a:rPr>
-              <a:t xml:space="preserve">When the expensive thing is being wrong,</a:t>
-            </a:r>
-            <a:endParaRPr lang="en-US" sz="1500"/>
-          </a:p>
-          <a:p>
-            <a:pPr marL="0" indent="0">
-              <a:lnSpc>
-                <a:spcPts val="1950"/>
-              </a:lnSpc>
-              <a:spcAft>
-                <a:spcPts val="0"/>
-              </a:spcAft>
-              <a:buNone/>
-            </a:pPr>
-            <a:r>
-              <a:rPr lang="en-US" sz="1500" b="0">
-                <a:solidFill>
-                  <a:srgbClr val="202B33"/>
-                </a:solidFill>
-                <a:latin typeface="Arial"/>
-                <a:ea typeface="Arial"/>
-                <a:cs typeface="Arial"/>
-              </a:rPr>
-              <a:t xml:space="preserve">and a second draft costs cents, doing it</a:t>
-            </a:r>
-            <a:endParaRPr lang="en-US" sz="1500"/>
-          </a:p>
-          <a:p>
-            <a:pPr marL="0" indent="0">
-              <a:lnSpc>
-                <a:spcPts val="1950"/>
-              </a:lnSpc>
-              <a:spcAft>
-                <a:spcPts val="0"/>
-              </a:spcAft>
-              <a:buNone/>
-            </a:pPr>
-            <a:r>
-              <a:rPr lang="en-US" sz="1500" b="0">
-                <a:solidFill>
-                  <a:srgbClr val="202B33"/>
-                </a:solidFill>
-                <a:latin typeface="Arial"/>
-                <a:ea typeface="Arial"/>
-                <a:cs typeface="Arial"/>
-              </a:rPr>
-              <a:t xml:space="preserve">three times and reading what disagrees is</a:t>
-            </a:r>
-            <a:endParaRPr lang="en-US" sz="1500"/>
-          </a:p>
-          <a:p>
-            <a:pPr marL="0" indent="0">
-              <a:lnSpc>
-                <a:spcPts val="1950"/>
-              </a:lnSpc>
-              <a:spcAft>
-                <a:spcPts val="0"/>
-              </a:spcAft>
-              <a:buNone/>
-            </a:pPr>
-            <a:r>
-              <a:rPr lang="en-US" sz="1500" b="0">
-                <a:solidFill>
-                  <a:srgbClr val="202B33"/>
-                </a:solidFill>
-                <a:latin typeface="Arial"/>
-                <a:ea typeface="Arial"/>
-                <a:cs typeface="Arial"/>
-              </a:rPr>
-              <a:t xml:space="preserve">the frugal move. I am not a shill for Big</a:t>
-            </a:r>
-            <a:endParaRPr lang="en-US" sz="1500"/>
-          </a:p>
-          <a:p>
-            <a:pPr marL="0" indent="0">
-              <a:lnSpc>
-                <a:spcPts val="1950"/>
-              </a:lnSpc>
-              <a:spcAft>
-                <a:spcPts val="0"/>
-              </a:spcAft>
-              <a:buNone/>
-            </a:pPr>
-            <a:r>
-              <a:rPr lang="en-US" sz="1500" b="0">
-                <a:solidFill>
-                  <a:srgbClr val="202B33"/>
-                </a:solidFill>
-                <a:latin typeface="Arial"/>
-                <a:ea typeface="Arial"/>
-                <a:cs typeface="Arial"/>
-              </a:rPr>
-              <a:t xml:space="preserve">Token. I am telling you that cheaper, safer</a:t>
-            </a:r>
-            <a:endParaRPr lang="en-US" sz="1500"/>
-          </a:p>
-          <a:p>
-            <a:pPr marL="0" indent="0">
-              <a:lnSpc>
-                <a:spcPts val="1950"/>
-              </a:lnSpc>
-              <a:spcAft>
-                <a:spcPts val="0"/>
-              </a:spcAft>
-              <a:buNone/>
-            </a:pPr>
-            <a:r>
-              <a:rPr lang="en-US" sz="1500" b="0">
-                <a:solidFill>
-                  <a:srgbClr val="202B33"/>
-                </a:solidFill>
-                <a:latin typeface="Arial"/>
-                <a:ea typeface="Arial"/>
-                <a:cs typeface="Arial"/>
-              </a:rPr>
-              <a:t xml:space="preserve">and faster now sometimes come from spending</a:t>
-            </a:r>
-            <a:endParaRPr lang="en-US" sz="1500"/>
-          </a:p>
-          <a:p>
-            <a:pPr marL="0" indent="0">
-              <a:lnSpc>
-                <a:spcPts val="1950"/>
-              </a:lnSpc>
-              <a:spcAft>
-                <a:spcPts val="0"/>
-              </a:spcAft>
-              <a:buNone/>
-            </a:pPr>
-            <a:r>
-              <a:rPr lang="en-US" sz="1500" b="0">
-                <a:solidFill>
-                  <a:srgbClr val="202B33"/>
-                </a:solidFill>
-                <a:latin typeface="Arial"/>
-                <a:ea typeface="Arial"/>
-                <a:cs typeface="Arial"/>
-              </a:rPr>
-              <a:t xml:space="preserve">exactly where yesterday's wisdom told you</a:t>
-            </a:r>
-            <a:endParaRPr lang="en-US" sz="1500"/>
-          </a:p>
-          <a:p>
-            <a:pPr marL="0" indent="0">
-              <a:lnSpc>
-                <a:spcPts val="1950"/>
-              </a:lnSpc>
-              <a:spcAft>
-                <a:spcPts val="0"/>
-              </a:spcAft>
-              <a:buNone/>
-            </a:pPr>
-            <a:r>
-              <a:rPr lang="en-US" sz="1500" b="0">
-                <a:solidFill>
-                  <a:srgbClr val="202B33"/>
-                </a:solidFill>
-                <a:latin typeface="Arial"/>
-                <a:ea typeface="Arial"/>
-                <a:cs typeface="Arial"/>
-              </a:rPr>
-              <a:t xml:space="preserve">not to.</a:t>
+              <a:t xml:space="preserve">maximize the number of things blinking.</a:t>
             </a:r>
             <a:endParaRPr lang="en-US" sz="1500"/>
           </a:p>
@@ -18711,7 +17424,7 @@
                 <a:ea typeface="Arial"/>
                 <a:cs typeface="Arial"/>
               </a:rPr>
-              <a:t xml:space="preserve">13 / 14    SOURCE SLIDE 13</a:t>
+              <a:t xml:space="preserve">14 / 14    SOURCE SLIDE 14</a:t>
             </a:r>
             <a:endParaRPr lang="en-US" sz="1050"/>
           </a:p>
@@ -18760,7 +17473,7 @@
                 <a:ea typeface="Arial"/>
                 <a:cs typeface="Arial"/>
               </a:rPr>
-              <a:t xml:space="preserve">Measure the accepted outcome</a:t>
+              <a:t xml:space="preserve">Put the limit where the work begins</a:t>
             </a:r>
             <a:endParaRPr lang="en-US" sz="2550"/>
           </a:p>
@@ -18809,7 +17522,7 @@
                 <a:ea typeface="Arial"/>
                 <a:cs typeface="Arial"/>
               </a:rPr>
-              <a:t xml:space="preserve">Latency: dispatch + queue + slowest branch</a:t>
+              <a:t xml:space="preserve">One ledger across every caller</a:t>
             </a:r>
             <a:endParaRPr lang="en-US" sz="1500"/>
           </a:p>
@@ -18832,7 +17545,7 @@
                 <a:ea typeface="Arial"/>
                 <a:cs typeface="Arial"/>
               </a:rPr>
-              <a:t xml:space="preserve">+ merge + verify</a:t>
+              <a:t xml:space="preserve"/>
             </a:r>
             <a:endParaRPr lang="en-US" sz="1500"/>
           </a:p>
@@ -18855,6 +17568,29 @@
                 <a:ea typeface="Arial"/>
                 <a:cs typeface="Arial"/>
               </a:rPr>
+              <a:t xml:space="preserve">Durable state across every restart</a:t>
+            </a:r>
+            <a:endParaRPr lang="en-US" sz="1500"/>
+          </a:p>
+          <a:p>
+            <a:pPr marL="0" indent="0">
+              <a:lnSpc>
+                <a:spcPts val="1950"/>
+              </a:lnSpc>
+              <a:spcAft>
+                <a:spcPts val="0"/>
+              </a:spcAft>
+              <a:buNone/>
+            </a:pPr>
+            <a:r>
+              <a:rPr lang="en-US" sz="1500" b="0">
+                <a:solidFill>
+                  <a:srgbClr val="202B33"/>
+                </a:solidFill>
+                <a:latin typeface="Arial"/>
+                <a:ea typeface="Arial"/>
+                <a:cs typeface="Arial"/>
+              </a:rPr>
               <a:t xml:space="preserve"/>
             </a:r>
             <a:endParaRPr lang="en-US" sz="1500"/>
@@ -18878,7 +17614,7 @@
                 <a:ea typeface="Arial"/>
                 <a:cs typeface="Arial"/>
               </a:rPr>
-              <a:t xml:space="preserve">Cost: every candidate, every retry, every</a:t>
+              <a:t xml:space="preserve">A lease on every box, a gate on every</a:t>
             </a:r>
             <a:endParaRPr lang="en-US" sz="1500"/>
           </a:p>
@@ -18901,7 +17637,7 @@
                 <a:ea typeface="Arial"/>
                 <a:cs typeface="Arial"/>
               </a:rPr>
-              <a:t xml:space="preserve">held reservation, review time</a:t>
+              <a:t xml:space="preserve">candidate</a:t>
             </a:r>
             <a:endParaRPr lang="en-US" sz="1500"/>
           </a:p>
@@ -18947,7 +17683,7 @@
                 <a:ea typeface="Arial"/>
                 <a:cs typeface="Arial"/>
               </a:rPr>
-              <a:t xml:space="preserve">Compare against one competent attempt</a:t>
+              <a:t xml:space="preserve">Back to the four callers. Forty jobs were</a:t>
             </a:r>
             <a:endParaRPr lang="en-US" sz="1500"/>
           </a:p>
@@ -18970,122 +17706,99 @@
                 <a:ea typeface="Arial"/>
                 <a:cs typeface="Arial"/>
               </a:rPr>
+              <a:t xml:space="preserve">legal by four local counters. The missing</a:t>
+            </a:r>
+            <a:endParaRPr lang="en-US" sz="1500"/>
+          </a:p>
+          <a:p>
+            <a:pPr marL="0" indent="0">
+              <a:lnSpc>
+                <a:spcPts val="1950"/>
+              </a:lnSpc>
+              <a:spcAft>
+                <a:spcPts val="0"/>
+              </a:spcAft>
+              <a:buNone/>
+            </a:pPr>
+            <a:r>
+              <a:rPr lang="en-US" sz="1500" b="0">
+                <a:solidFill>
+                  <a:srgbClr val="202B33"/>
+                </a:solidFill>
+                <a:latin typeface="Arial"/>
+                <a:ea typeface="Arial"/>
+                <a:cs typeface="Arial"/>
+              </a:rPr>
+              <a:t xml:space="preserve">piece was one shared account of what the</a:t>
+            </a:r>
+            <a:endParaRPr lang="en-US" sz="1500"/>
+          </a:p>
+          <a:p>
+            <a:pPr marL="0" indent="0">
+              <a:lnSpc>
+                <a:spcPts val="1950"/>
+              </a:lnSpc>
+              <a:spcAft>
+                <a:spcPts val="0"/>
+              </a:spcAft>
+              <a:buNone/>
+            </a:pPr>
+            <a:r>
+              <a:rPr lang="en-US" sz="1500" b="0">
+                <a:solidFill>
+                  <a:srgbClr val="202B33"/>
+                </a:solidFill>
+                <a:latin typeface="Arial"/>
+                <a:ea typeface="Arial"/>
+                <a:cs typeface="Arial"/>
+              </a:rPr>
+              <a:t xml:space="preserve">application had promised and what it had</a:t>
+            </a:r>
+            <a:endParaRPr lang="en-US" sz="1500"/>
+          </a:p>
+          <a:p>
+            <a:pPr marL="0" indent="0">
+              <a:lnSpc>
+                <a:spcPts val="1950"/>
+              </a:lnSpc>
+              <a:spcAft>
+                <a:spcPts val="0"/>
+              </a:spcAft>
+              <a:buNone/>
+            </a:pPr>
+            <a:r>
+              <a:rPr lang="en-US" sz="1500" b="0">
+                <a:solidFill>
+                  <a:srgbClr val="202B33"/>
+                </a:solidFill>
+                <a:latin typeface="Arial"/>
+                <a:ea typeface="Arial"/>
+                <a:cs typeface="Arial"/>
+              </a:rPr>
+              <a:t xml:space="preserve">already started.</a:t>
+            </a:r>
+            <a:endParaRPr lang="en-US" sz="1500"/>
+          </a:p>
+          <a:p>
+            <a:pPr marL="0" indent="0">
+              <a:lnSpc>
+                <a:spcPts val="1950"/>
+              </a:lnSpc>
+              <a:spcAft>
+                <a:spcPts val="0"/>
+              </a:spcAft>
+              <a:buNone/>
+            </a:pPr>
+            <a:r>
+              <a:rPr lang="en-US" sz="1500" b="0">
+                <a:solidFill>
+                  <a:srgbClr val="202B33"/>
+                </a:solidFill>
+                <a:latin typeface="Arial"/>
+                <a:ea typeface="Arial"/>
+                <a:cs typeface="Arial"/>
+              </a:rPr>
               <a:t xml:space="preserve"/>
-            </a:r>
-            <a:endParaRPr lang="en-US" sz="1500"/>
-          </a:p>
-          <a:p>
-            <a:pPr marL="0" indent="0">
-              <a:lnSpc>
-                <a:spcPts val="1950"/>
-              </a:lnSpc>
-              <a:spcAft>
-                <a:spcPts val="0"/>
-              </a:spcAft>
-              <a:buNone/>
-            </a:pPr>
-            <a:r>
-              <a:rPr lang="en-US" sz="1500" b="0">
-                <a:solidFill>
-                  <a:srgbClr val="202B33"/>
-                </a:solidFill>
-                <a:latin typeface="Arial"/>
-                <a:ea typeface="Arial"/>
-                <a:cs typeface="Arial"/>
-              </a:rPr>
-              <a:t xml:space="preserve">Starting three workers does not delete the</a:t>
-            </a:r>
-            <a:endParaRPr lang="en-US" sz="1500"/>
-          </a:p>
-          <a:p>
-            <a:pPr marL="0" indent="0">
-              <a:lnSpc>
-                <a:spcPts val="1950"/>
-              </a:lnSpc>
-              <a:spcAft>
-                <a:spcPts val="0"/>
-              </a:spcAft>
-              <a:buNone/>
-            </a:pPr>
-            <a:r>
-              <a:rPr lang="en-US" sz="1500" b="0">
-                <a:solidFill>
-                  <a:srgbClr val="202B33"/>
-                </a:solidFill>
-                <a:latin typeface="Arial"/>
-                <a:ea typeface="Arial"/>
-                <a:cs typeface="Arial"/>
-              </a:rPr>
-              <a:t xml:space="preserve">serial parts. That is Amdahl, 1967, and it</a:t>
-            </a:r>
-            <a:endParaRPr lang="en-US" sz="1500"/>
-          </a:p>
-          <a:p>
-            <a:pPr marL="0" indent="0">
-              <a:lnSpc>
-                <a:spcPts val="1950"/>
-              </a:lnSpc>
-              <a:spcAft>
-                <a:spcPts val="0"/>
-              </a:spcAft>
-              <a:buNone/>
-            </a:pPr>
-            <a:r>
-              <a:rPr lang="en-US" sz="1500" b="0">
-                <a:solidFill>
-                  <a:srgbClr val="202B33"/>
-                </a:solidFill>
-                <a:latin typeface="Arial"/>
-                <a:ea typeface="Arial"/>
-                <a:cs typeface="Arial"/>
-              </a:rPr>
-              <a:t xml:space="preserve">is unkind: if a tenth of the job is serial,</a:t>
-            </a:r>
-            <a:endParaRPr lang="en-US" sz="1500"/>
-          </a:p>
-          <a:p>
-            <a:pPr marL="0" indent="0">
-              <a:lnSpc>
-                <a:spcPts val="1950"/>
-              </a:lnSpc>
-              <a:spcAft>
-                <a:spcPts val="0"/>
-              </a:spcAft>
-              <a:buNone/>
-            </a:pPr>
-            <a:r>
-              <a:rPr lang="en-US" sz="1500" b="0">
-                <a:solidFill>
-                  <a:srgbClr val="202B33"/>
-                </a:solidFill>
-                <a:latin typeface="Arial"/>
-                <a:ea typeface="Arial"/>
-                <a:cs typeface="Arial"/>
-              </a:rPr>
-              <a:t xml:space="preserve">ten workers get you five and a quarter</a:t>
-            </a:r>
-            <a:endParaRPr lang="en-US" sz="1500"/>
-          </a:p>
-          <a:p>
-            <a:pPr marL="0" indent="0">
-              <a:lnSpc>
-                <a:spcPts val="1950"/>
-              </a:lnSpc>
-              <a:spcAft>
-                <a:spcPts val="0"/>
-              </a:spcAft>
-              <a:buNone/>
-            </a:pPr>
-            <a:r>
-              <a:rPr lang="en-US" sz="1500" b="0">
-                <a:solidFill>
-                  <a:srgbClr val="202B33"/>
-                </a:solidFill>
-                <a:latin typeface="Arial"/>
-                <a:ea typeface="Arial"/>
-                <a:cs typeface="Arial"/>
-              </a:rPr>
-              <a:t xml:space="preserve">times, and a hundred workers get you nine.</a:t>
             </a:r>
             <a:endParaRPr lang="en-US" sz="1500"/>
           </a:p>
@@ -19134,7 +17847,7 @@
                 <a:ea typeface="Arial"/>
                 <a:cs typeface="Arial"/>
               </a:rPr>
-              <a:t xml:space="preserve">Waiting on every branch can make a finished</a:t>
+              <a:t xml:space="preserve">The inversion is real: the workload can now</a:t>
             </a:r>
             <a:endParaRPr lang="en-US" sz="1500"/>
           </a:p>
@@ -19157,7 +17870,7 @@
                 <a:ea typeface="Arial"/>
                 <a:cs typeface="Arial"/>
               </a:rPr>
-              <a:t xml:space="preserve">task slower. Count the whole thing: all</a:t>
+              <a:t xml:space="preserve">describe its own shape and ask for its own</a:t>
             </a:r>
             <a:endParaRPr lang="en-US" sz="1500"/>
           </a:p>
@@ -19180,7 +17893,7 @@
                 <a:ea typeface="Arial"/>
                 <a:cs typeface="Arial"/>
               </a:rPr>
-              <a:t xml:space="preserve">candidates, failed work, reserved</a:t>
+              <a:t xml:space="preserve">compute, and the substrate to grant it in</a:t>
             </a:r>
             <a:endParaRPr lang="en-US" sz="1500"/>
           </a:p>
@@ -19203,7 +17916,7 @@
                 <a:ea typeface="Arial"/>
                 <a:cs typeface="Arial"/>
               </a:rPr>
-              <a:t xml:space="preserve">uncertainty, judging and human review, and</a:t>
+              <a:t xml:space="preserve">seconds already exists. That is a better</a:t>
             </a:r>
             <a:endParaRPr lang="en-US" sz="1500"/>
           </a:p>
@@ -19226,7 +17939,7 @@
                 <a:ea typeface="Arial"/>
                 <a:cs typeface="Arial"/>
               </a:rPr>
-              <a:t xml:space="preserve">compare against one competent attempt on</a:t>
+              <a:t xml:space="preserve">world than a warm fleet and a guess. It is</a:t>
             </a:r>
             <a:endParaRPr lang="en-US" sz="1500"/>
           </a:p>
@@ -19249,7 +17962,7 @@
                 <a:ea typeface="Arial"/>
                 <a:cs typeface="Arial"/>
               </a:rPr>
-              <a:t xml:space="preserve">the same task set.</a:t>
+              <a:t xml:space="preserve">only safe because the agent chooses from a</a:t>
             </a:r>
             <a:endParaRPr lang="en-US" sz="1500"/>
           </a:p>
@@ -19272,6 +17985,52 @@
                 <a:ea typeface="Arial"/>
                 <a:cs typeface="Arial"/>
               </a:rPr>
+              <a:t xml:space="preserve">catalog, spends from a ledger, and runs on</a:t>
+            </a:r>
+            <a:endParaRPr lang="en-US" sz="1500"/>
+          </a:p>
+          <a:p>
+            <a:pPr marL="0" indent="0">
+              <a:lnSpc>
+                <a:spcPts val="1950"/>
+              </a:lnSpc>
+              <a:spcAft>
+                <a:spcPts val="0"/>
+              </a:spcAft>
+              <a:buNone/>
+            </a:pPr>
+            <a:r>
+              <a:rPr lang="en-US" sz="1500" b="0">
+                <a:solidFill>
+                  <a:srgbClr val="202B33"/>
+                </a:solidFill>
+                <a:latin typeface="Arial"/>
+                <a:ea typeface="Arial"/>
+                <a:cs typeface="Arial"/>
+              </a:rPr>
+              <a:t xml:space="preserve">boxes that expire.</a:t>
+            </a:r>
+            <a:endParaRPr lang="en-US" sz="1500"/>
+          </a:p>
+          <a:p>
+            <a:pPr marL="0" indent="0">
+              <a:lnSpc>
+                <a:spcPts val="1950"/>
+              </a:lnSpc>
+              <a:spcAft>
+                <a:spcPts val="0"/>
+              </a:spcAft>
+              <a:buNone/>
+            </a:pPr>
+            <a:r>
+              <a:rPr lang="en-US" sz="1500" b="0">
+                <a:solidFill>
+                  <a:srgbClr val="202B33"/>
+                </a:solidFill>
+                <a:latin typeface="Arial"/>
+                <a:ea typeface="Arial"/>
+                <a:cs typeface="Arial"/>
+              </a:rPr>
               <a:t xml:space="preserve"/>
             </a:r>
             <a:endParaRPr lang="en-US" sz="1500"/>
@@ -19295,7 +18054,7 @@
                 <a:ea typeface="Arial"/>
                 <a:cs typeface="Arial"/>
               </a:rPr>
-              <a:t xml:space="preserve">Measure accepted outcomes, not launched</a:t>
+              <a:t xml:space="preserve">Inspect one expensive tool in your system.</a:t>
             </a:r>
             <a:endParaRPr lang="en-US" sz="1500"/>
           </a:p>
@@ -19318,7 +18077,7 @@
                 <a:ea typeface="Arial"/>
                 <a:cs typeface="Arial"/>
               </a:rPr>
-              <a:t xml:space="preserve">workers. Start with one extra attempt or</a:t>
+              <a:t xml:space="preserve">Count the work it can launch underneath</a:t>
             </a:r>
             <a:endParaRPr lang="en-US" sz="1500"/>
           </a:p>
@@ -19341,7 +18100,7 @@
                 <a:ea typeface="Arial"/>
                 <a:cs typeface="Arial"/>
               </a:rPr>
-              <a:t xml:space="preserve">one batch boundary; if it does not buy</a:t>
+              <a:t xml:space="preserve">itself. Put the limit where that work</a:t>
             </a:r>
             <a:endParaRPr lang="en-US" sz="1500"/>
           </a:p>
@@ -19364,53 +18123,7 @@
                 <a:ea typeface="Arial"/>
                 <a:cs typeface="Arial"/>
               </a:rPr>
-              <a:t xml:space="preserve">quality, time or cost, keep the simpler</a:t>
-            </a:r>
-            <a:endParaRPr lang="en-US" sz="1500"/>
-          </a:p>
-          <a:p>
-            <a:pPr marL="0" indent="0">
-              <a:lnSpc>
-                <a:spcPts val="1950"/>
-              </a:lnSpc>
-              <a:spcAft>
-                <a:spcPts val="0"/>
-              </a:spcAft>
-              <a:buNone/>
-            </a:pPr>
-            <a:r>
-              <a:rPr lang="en-US" sz="1500" b="0">
-                <a:solidFill>
-                  <a:srgbClr val="202B33"/>
-                </a:solidFill>
-                <a:latin typeface="Arial"/>
-                <a:ea typeface="Arial"/>
-                <a:cs typeface="Arial"/>
-              </a:rPr>
-              <a:t xml:space="preserve">path. We are trying to buy useful work, not</a:t>
-            </a:r>
-            <a:endParaRPr lang="en-US" sz="1500"/>
-          </a:p>
-          <a:p>
-            <a:pPr marL="0" indent="0">
-              <a:lnSpc>
-                <a:spcPts val="1950"/>
-              </a:lnSpc>
-              <a:spcAft>
-                <a:spcPts val="0"/>
-              </a:spcAft>
-              <a:buNone/>
-            </a:pPr>
-            <a:r>
-              <a:rPr lang="en-US" sz="1500" b="0">
-                <a:solidFill>
-                  <a:srgbClr val="202B33"/>
-                </a:solidFill>
-                <a:latin typeface="Arial"/>
-                <a:ea typeface="Arial"/>
-                <a:cs typeface="Arial"/>
-              </a:rPr>
-              <a:t xml:space="preserve">maximize the number of things blinking.</a:t>
+              <a:t xml:space="preserve">actually begins.</a:t>
             </a:r>
             <a:endParaRPr lang="en-US" sz="1500"/>
           </a:p>
@@ -20478,7 +19191,7 @@
                 <a:ea typeface="Arial"/>
                 <a:cs typeface="Arial"/>
               </a:rPr>
-              <a:t xml:space="preserve">14 / 14    SOURCE SLIDE 14</a:t>
+              <a:t xml:space="preserve">SOURCE REFERENCES</a:t>
             </a:r>
             <a:endParaRPr lang="en-US" sz="1050"/>
           </a:p>
@@ -20527,7 +19240,7 @@
                 <a:ea typeface="Arial"/>
                 <a:cs typeface="Arial"/>
               </a:rPr>
-              <a:t xml:space="preserve">Put the limit where the work begins</a:t>
+              <a:t xml:space="preserve">References</a:t>
             </a:r>
             <a:endParaRPr lang="en-US" sz="2550"/>
           </a:p>
@@ -20576,7 +19289,7 @@
                 <a:ea typeface="Arial"/>
                 <a:cs typeface="Arial"/>
               </a:rPr>
-              <a:t xml:space="preserve">One ledger across every caller</a:t>
+              <a:t xml:space="preserve">Knight and Leveson (1986), An Experimental</a:t>
             </a:r>
             <a:endParaRPr lang="en-US" sz="1500"/>
           </a:p>
@@ -20599,7 +19312,7 @@
                 <a:ea typeface="Arial"/>
                 <a:cs typeface="Arial"/>
               </a:rPr>
-              <a:t xml:space="preserve"/>
+              <a:t xml:space="preserve">Evaluation of the Assumption of</a:t>
             </a:r>
             <a:endParaRPr lang="en-US" sz="1500"/>
           </a:p>
@@ -20622,7 +19335,7 @@
                 <a:ea typeface="Arial"/>
                 <a:cs typeface="Arial"/>
               </a:rPr>
-              <a:t xml:space="preserve">Durable state across every restart</a:t>
+              <a:t xml:space="preserve">Independence in Multiversion Programming —</a:t>
             </a:r>
             <a:endParaRPr lang="en-US" sz="1500"/>
           </a:p>
@@ -20645,7 +19358,7 @@
                 <a:ea typeface="Arial"/>
                 <a:cs typeface="Arial"/>
               </a:rPr>
-              <a:t xml:space="preserve"/>
+              <a:t xml:space="preserve">https://doi.org/10.1109/TSE.1986.6312924),</a:t>
             </a:r>
             <a:endParaRPr lang="en-US" sz="1500"/>
           </a:p>
@@ -20668,7 +19381,7 @@
                 <a:ea typeface="Arial"/>
                 <a:cs typeface="Arial"/>
               </a:rPr>
-              <a:t xml:space="preserve">A lease on every box, a gate on every</a:t>
+              <a:t xml:space="preserve">IEEE Transactions on Software Engineering</a:t>
             </a:r>
             <a:endParaRPr lang="en-US" sz="1500"/>
           </a:p>
@@ -20691,7 +19404,7 @@
                 <a:ea typeface="Arial"/>
                 <a:cs typeface="Arial"/>
               </a:rPr>
-              <a:t xml:space="preserve">candidate</a:t>
+              <a:t xml:space="preserve">SE-12(1, 96 to 109. Cited to set aside: it</a:t>
             </a:r>
             <a:endParaRPr lang="en-US" sz="1500"/>
           </a:p>
@@ -20714,145 +19427,7 @@
                 <a:ea typeface="Arial"/>
                 <a:cs typeface="Arial"/>
               </a:rPr>
-              <a:t xml:space="preserve"/>
-            </a:r>
-            <a:endParaRPr lang="en-US" sz="1500"/>
-          </a:p>
-          <a:p>
-            <a:pPr marL="0" indent="0">
-              <a:lnSpc>
-                <a:spcPts val="1950"/>
-              </a:lnSpc>
-              <a:spcAft>
-                <a:spcPts val="0"/>
-              </a:spcAft>
-              <a:buNone/>
-            </a:pPr>
-            <a:r>
-              <a:rPr lang="en-US" sz="1500" b="0">
-                <a:solidFill>
-                  <a:srgbClr val="202B33"/>
-                </a:solidFill>
-                <a:latin typeface="Arial"/>
-                <a:ea typeface="Arial"/>
-                <a:cs typeface="Arial"/>
-              </a:rPr>
-              <a:t xml:space="preserve">Back to the four callers. Forty jobs were</a:t>
-            </a:r>
-            <a:endParaRPr lang="en-US" sz="1500"/>
-          </a:p>
-          <a:p>
-            <a:pPr marL="0" indent="0">
-              <a:lnSpc>
-                <a:spcPts val="1950"/>
-              </a:lnSpc>
-              <a:spcAft>
-                <a:spcPts val="0"/>
-              </a:spcAft>
-              <a:buNone/>
-            </a:pPr>
-            <a:r>
-              <a:rPr lang="en-US" sz="1500" b="0">
-                <a:solidFill>
-                  <a:srgbClr val="202B33"/>
-                </a:solidFill>
-                <a:latin typeface="Arial"/>
-                <a:ea typeface="Arial"/>
-                <a:cs typeface="Arial"/>
-              </a:rPr>
-              <a:t xml:space="preserve">legal by four local counters. The missing</a:t>
-            </a:r>
-            <a:endParaRPr lang="en-US" sz="1500"/>
-          </a:p>
-          <a:p>
-            <a:pPr marL="0" indent="0">
-              <a:lnSpc>
-                <a:spcPts val="1950"/>
-              </a:lnSpc>
-              <a:spcAft>
-                <a:spcPts val="0"/>
-              </a:spcAft>
-              <a:buNone/>
-            </a:pPr>
-            <a:r>
-              <a:rPr lang="en-US" sz="1500" b="0">
-                <a:solidFill>
-                  <a:srgbClr val="202B33"/>
-                </a:solidFill>
-                <a:latin typeface="Arial"/>
-                <a:ea typeface="Arial"/>
-                <a:cs typeface="Arial"/>
-              </a:rPr>
-              <a:t xml:space="preserve">piece was one shared account of what the</a:t>
-            </a:r>
-            <a:endParaRPr lang="en-US" sz="1500"/>
-          </a:p>
-          <a:p>
-            <a:pPr marL="0" indent="0">
-              <a:lnSpc>
-                <a:spcPts val="1950"/>
-              </a:lnSpc>
-              <a:spcAft>
-                <a:spcPts val="0"/>
-              </a:spcAft>
-              <a:buNone/>
-            </a:pPr>
-            <a:r>
-              <a:rPr lang="en-US" sz="1500" b="0">
-                <a:solidFill>
-                  <a:srgbClr val="202B33"/>
-                </a:solidFill>
-                <a:latin typeface="Arial"/>
-                <a:ea typeface="Arial"/>
-                <a:cs typeface="Arial"/>
-              </a:rPr>
-              <a:t xml:space="preserve">application had promised and what it had</a:t>
-            </a:r>
-            <a:endParaRPr lang="en-US" sz="1500"/>
-          </a:p>
-          <a:p>
-            <a:pPr marL="0" indent="0">
-              <a:lnSpc>
-                <a:spcPts val="1950"/>
-              </a:lnSpc>
-              <a:spcAft>
-                <a:spcPts val="0"/>
-              </a:spcAft>
-              <a:buNone/>
-            </a:pPr>
-            <a:r>
-              <a:rPr lang="en-US" sz="1500" b="0">
-                <a:solidFill>
-                  <a:srgbClr val="202B33"/>
-                </a:solidFill>
-                <a:latin typeface="Arial"/>
-                <a:ea typeface="Arial"/>
-                <a:cs typeface="Arial"/>
-              </a:rPr>
-              <a:t xml:space="preserve">already started.</a:t>
-            </a:r>
-            <a:endParaRPr lang="en-US" sz="1500"/>
-          </a:p>
-          <a:p>
-            <a:pPr marL="0" indent="0">
-              <a:lnSpc>
-                <a:spcPts val="1950"/>
-              </a:lnSpc>
-              <a:spcAft>
-                <a:spcPts val="0"/>
-              </a:spcAft>
-              <a:buNone/>
-            </a:pPr>
-            <a:r>
-              <a:rPr lang="en-US" sz="1500" b="0">
-                <a:solidFill>
-                  <a:srgbClr val="202B33"/>
-                </a:solidFill>
-                <a:latin typeface="Arial"/>
-                <a:ea typeface="Arial"/>
-                <a:cs typeface="Arial"/>
-              </a:rPr>
-              <a:t xml:space="preserve"/>
+              <a:t xml:space="preserve">is a result about redundancy as a</a:t>
             </a:r>
             <a:endParaRPr lang="en-US" sz="1500"/>
           </a:p>
@@ -20901,7 +19476,7 @@
                 <a:ea typeface="Arial"/>
                 <a:cs typeface="Arial"/>
               </a:rPr>
-              <a:t xml:space="preserve">The inversion is real: the workload can now</a:t>
+              <a:t xml:space="preserve">correctness strategy, which this slide does</a:t>
             </a:r>
             <a:endParaRPr lang="en-US" sz="1500"/>
           </a:p>
@@ -20924,7 +19499,7 @@
                 <a:ea typeface="Arial"/>
                 <a:cs typeface="Arial"/>
               </a:rPr>
-              <a:t xml:space="preserve">describe its own shape and ask for its own</a:t>
+              <a:t xml:space="preserve">not claim.</a:t>
             </a:r>
             <a:endParaRPr lang="en-US" sz="1500"/>
           </a:p>
@@ -20947,7 +19522,7 @@
                 <a:ea typeface="Arial"/>
                 <a:cs typeface="Arial"/>
               </a:rPr>
-              <a:t xml:space="preserve">compute, and the substrate to grant it in</a:t>
+              <a:t xml:space="preserve"/>
             </a:r>
             <a:endParaRPr lang="en-US" sz="1500"/>
           </a:p>
@@ -20970,7 +19545,7 @@
                 <a:ea typeface="Arial"/>
                 <a:cs typeface="Arial"/>
               </a:rPr>
-              <a:t xml:space="preserve">seconds already exists. That is a better</a:t>
+              <a:t xml:space="preserve">Amdahl (1967), Validity of the single</a:t>
             </a:r>
             <a:endParaRPr lang="en-US" sz="1500"/>
           </a:p>
@@ -20993,7 +19568,7 @@
                 <a:ea typeface="Arial"/>
                 <a:cs typeface="Arial"/>
               </a:rPr>
-              <a:t xml:space="preserve">world than a warm fleet and a guess. It is</a:t>
+              <a:t xml:space="preserve">processor approach to achieving large scale</a:t>
             </a:r>
             <a:endParaRPr lang="en-US" sz="1500"/>
           </a:p>
@@ -21016,7 +19591,7 @@
                 <a:ea typeface="Arial"/>
                 <a:cs typeface="Arial"/>
               </a:rPr>
-              <a:t xml:space="preserve">only safe because the agent chooses from a</a:t>
+              <a:t xml:space="preserve">computing capabilities, AFIPS Conference</a:t>
             </a:r>
             <a:endParaRPr lang="en-US" sz="1500"/>
           </a:p>
@@ -21039,145 +19614,7 @@
                 <a:ea typeface="Arial"/>
                 <a:cs typeface="Arial"/>
               </a:rPr>
-              <a:t xml:space="preserve">catalog, spends from a ledger, and runs on</a:t>
-            </a:r>
-            <a:endParaRPr lang="en-US" sz="1500"/>
-          </a:p>
-          <a:p>
-            <a:pPr marL="0" indent="0">
-              <a:lnSpc>
-                <a:spcPts val="1950"/>
-              </a:lnSpc>
-              <a:spcAft>
-                <a:spcPts val="0"/>
-              </a:spcAft>
-              <a:buNone/>
-            </a:pPr>
-            <a:r>
-              <a:rPr lang="en-US" sz="1500" b="0">
-                <a:solidFill>
-                  <a:srgbClr val="202B33"/>
-                </a:solidFill>
-                <a:latin typeface="Arial"/>
-                <a:ea typeface="Arial"/>
-                <a:cs typeface="Arial"/>
-              </a:rPr>
-              <a:t xml:space="preserve">boxes that expire.</a:t>
-            </a:r>
-            <a:endParaRPr lang="en-US" sz="1500"/>
-          </a:p>
-          <a:p>
-            <a:pPr marL="0" indent="0">
-              <a:lnSpc>
-                <a:spcPts val="1950"/>
-              </a:lnSpc>
-              <a:spcAft>
-                <a:spcPts val="0"/>
-              </a:spcAft>
-              <a:buNone/>
-            </a:pPr>
-            <a:r>
-              <a:rPr lang="en-US" sz="1500" b="0">
-                <a:solidFill>
-                  <a:srgbClr val="202B33"/>
-                </a:solidFill>
-                <a:latin typeface="Arial"/>
-                <a:ea typeface="Arial"/>
-                <a:cs typeface="Arial"/>
-              </a:rPr>
-              <a:t xml:space="preserve"/>
-            </a:r>
-            <a:endParaRPr lang="en-US" sz="1500"/>
-          </a:p>
-          <a:p>
-            <a:pPr marL="0" indent="0">
-              <a:lnSpc>
-                <a:spcPts val="1950"/>
-              </a:lnSpc>
-              <a:spcAft>
-                <a:spcPts val="0"/>
-              </a:spcAft>
-              <a:buNone/>
-            </a:pPr>
-            <a:r>
-              <a:rPr lang="en-US" sz="1500" b="0">
-                <a:solidFill>
-                  <a:srgbClr val="202B33"/>
-                </a:solidFill>
-                <a:latin typeface="Arial"/>
-                <a:ea typeface="Arial"/>
-                <a:cs typeface="Arial"/>
-              </a:rPr>
-              <a:t xml:space="preserve">Inspect one expensive tool in your system.</a:t>
-            </a:r>
-            <a:endParaRPr lang="en-US" sz="1500"/>
-          </a:p>
-          <a:p>
-            <a:pPr marL="0" indent="0">
-              <a:lnSpc>
-                <a:spcPts val="1950"/>
-              </a:lnSpc>
-              <a:spcAft>
-                <a:spcPts val="0"/>
-              </a:spcAft>
-              <a:buNone/>
-            </a:pPr>
-            <a:r>
-              <a:rPr lang="en-US" sz="1500" b="0">
-                <a:solidFill>
-                  <a:srgbClr val="202B33"/>
-                </a:solidFill>
-                <a:latin typeface="Arial"/>
-                <a:ea typeface="Arial"/>
-                <a:cs typeface="Arial"/>
-              </a:rPr>
-              <a:t xml:space="preserve">Count the work it can launch underneath</a:t>
-            </a:r>
-            <a:endParaRPr lang="en-US" sz="1500"/>
-          </a:p>
-          <a:p>
-            <a:pPr marL="0" indent="0">
-              <a:lnSpc>
-                <a:spcPts val="1950"/>
-              </a:lnSpc>
-              <a:spcAft>
-                <a:spcPts val="0"/>
-              </a:spcAft>
-              <a:buNone/>
-            </a:pPr>
-            <a:r>
-              <a:rPr lang="en-US" sz="1500" b="0">
-                <a:solidFill>
-                  <a:srgbClr val="202B33"/>
-                </a:solidFill>
-                <a:latin typeface="Arial"/>
-                <a:ea typeface="Arial"/>
-                <a:cs typeface="Arial"/>
-              </a:rPr>
-              <a:t xml:space="preserve">itself. Put the limit where that work</a:t>
-            </a:r>
-            <a:endParaRPr lang="en-US" sz="1500"/>
-          </a:p>
-          <a:p>
-            <a:pPr marL="0" indent="0">
-              <a:lnSpc>
-                <a:spcPts val="1950"/>
-              </a:lnSpc>
-              <a:spcAft>
-                <a:spcPts val="0"/>
-              </a:spcAft>
-              <a:buNone/>
-            </a:pPr>
-            <a:r>
-              <a:rPr lang="en-US" sz="1500" b="0">
-                <a:solidFill>
-                  <a:srgbClr val="202B33"/>
-                </a:solidFill>
-                <a:latin typeface="Arial"/>
-                <a:ea typeface="Arial"/>
-                <a:cs typeface="Arial"/>
-              </a:rPr>
-              <a:t xml:space="preserve">actually begins.</a:t>
+              <a:t xml:space="preserve">Proceedings 30, 483 to 485.</a:t>
             </a:r>
             <a:endParaRPr lang="en-US" sz="1500"/>
           </a:p>
@@ -21276,609 +19713,6 @@
                 <a:cs typeface="Arial"/>
               </a:rPr>
               <a:t xml:space="preserve">20</a:t>
-            </a:r>
-            <a:endParaRPr lang="en-US" sz="975"/>
-          </a:p>
-        </p:txBody>
-      </p:sp>
-    </p:spTree>
-  </p:cSld>
-  <p:clrMapOvr>
-    <a:masterClrMapping/>
-  </p:clrMapOvr>
-</p:sld>
-</file>
-
-<file path=ppt/slides/slide21.xml><?xml version="1.0" encoding="utf-8"?>
-<p:sld xmlns:a="http://schemas.openxmlformats.org/drawingml/2006/main" xmlns:r="http://schemas.openxmlformats.org/officeDocument/2006/relationships" xmlns:p="http://schemas.openxmlformats.org/presentationml/2006/main">
-  <p:cSld name="Slide 21">
-    <p:bg>
-      <p:bgPr>
-        <a:solidFill>
-          <a:srgbClr val="FAFAF7"/>
-        </a:solidFill>
-        <a:effectLst/>
-      </p:bgPr>
-    </p:bg>
-    <p:spTree>
-      <p:nvGrpSpPr>
-        <p:cNvPr id="1" name=""/>
-        <p:cNvGrpSpPr/>
-        <p:nvPr/>
-      </p:nvGrpSpPr>
-      <p:grpSpPr>
-        <a:xfrm>
-          <a:off x="0" y="0"/>
-          <a:ext cx="0" cy="0"/>
-          <a:chOff x="0" y="0"/>
-          <a:chExt cx="0" cy="0"/>
-        </a:xfrm>
-      </p:grpSpPr>
-      <p:sp>
-        <p:nvSpPr>
-          <p:cNvPr id="2" name="Text 2"/>
-          <p:cNvSpPr txBox="1"/>
-          <p:nvPr/>
-        </p:nvSpPr>
-        <p:spPr>
-          <a:xfrm>
-            <a:off x="457200" y="266700"/>
-            <a:ext cx="9144000" cy="228600"/>
-          </a:xfrm>
-          <a:prstGeom prst="rect">
-            <a:avLst/>
-          </a:prstGeom>
-          <a:noFill/>
-          <a:ln>
-            <a:noFill/>
-          </a:ln>
-        </p:spPr>
-        <p:txBody>
-          <a:bodyPr wrap="none" lIns="0" tIns="0" rIns="0" bIns="0" anchor="t">
-            <a:noAutofit/>
-          </a:bodyPr>
-          <a:lstStyle/>
-          <a:p>
-            <a:pPr marL="0" indent="0">
-              <a:lnSpc>
-                <a:spcPts val="1365"/>
-              </a:lnSpc>
-              <a:spcAft>
-                <a:spcPts val="0"/>
-              </a:spcAft>
-              <a:buNone/>
-            </a:pPr>
-            <a:r>
-              <a:rPr lang="en-US" sz="1050" b="1">
-                <a:solidFill>
-                  <a:srgbClr val="246957"/>
-                </a:solidFill>
-                <a:latin typeface="Arial"/>
-                <a:ea typeface="Arial"/>
-                <a:cs typeface="Arial"/>
-              </a:rPr>
-              <a:t xml:space="preserve">SOURCE REFERENCES</a:t>
-            </a:r>
-            <a:endParaRPr lang="en-US" sz="1050"/>
-          </a:p>
-        </p:txBody>
-      </p:sp>
-      <p:sp>
-        <p:nvSpPr>
-          <p:cNvPr id="3" name="Text 3"/>
-          <p:cNvSpPr txBox="1"/>
-          <p:nvPr/>
-        </p:nvSpPr>
-        <p:spPr>
-          <a:xfrm>
-            <a:off x="457200" y="657225"/>
-            <a:ext cx="9144000" cy="1104900"/>
-          </a:xfrm>
-          <a:prstGeom prst="rect">
-            <a:avLst/>
-          </a:prstGeom>
-          <a:noFill/>
-          <a:ln>
-            <a:noFill/>
-          </a:ln>
-        </p:spPr>
-        <p:txBody>
-          <a:bodyPr wrap="none" lIns="0" tIns="0" rIns="0" bIns="0" anchor="t">
-            <a:noAutofit/>
-          </a:bodyPr>
-          <a:lstStyle/>
-          <a:p>
-            <a:pPr marL="0" indent="0">
-              <a:lnSpc>
-                <a:spcPts val="3060"/>
-              </a:lnSpc>
-              <a:spcAft>
-                <a:spcPts val="0"/>
-              </a:spcAft>
-              <a:buNone/>
-            </a:pPr>
-            <a:r>
-              <a:rPr lang="en-US" sz="2550" b="1">
-                <a:solidFill>
-                  <a:srgbClr val="202B33"/>
-                </a:solidFill>
-                <a:latin typeface="Arial"/>
-                <a:ea typeface="Arial"/>
-                <a:cs typeface="Arial"/>
-              </a:rPr>
-              <a:t xml:space="preserve">References</a:t>
-            </a:r>
-            <a:endParaRPr lang="en-US" sz="2550"/>
-          </a:p>
-        </p:txBody>
-      </p:sp>
-      <p:sp>
-        <p:nvSpPr>
-          <p:cNvPr id="4" name="Text 4"/>
-          <p:cNvSpPr txBox="1"/>
-          <p:nvPr/>
-        </p:nvSpPr>
-        <p:spPr>
-          <a:xfrm>
-            <a:off x="457200" y="1971675"/>
-            <a:ext cx="4352925" cy="5314950"/>
-          </a:xfrm>
-          <a:prstGeom prst="rect">
-            <a:avLst/>
-          </a:prstGeom>
-          <a:noFill/>
-          <a:ln>
-            <a:noFill/>
-          </a:ln>
-        </p:spPr>
-        <p:txBody>
-          <a:bodyPr wrap="none" lIns="0" tIns="0" rIns="0" bIns="0" anchor="t">
-            <a:noAutofit/>
-          </a:bodyPr>
-          <a:lstStyle/>
-          <a:p>
-            <a:pPr marL="0" indent="0">
-              <a:lnSpc>
-                <a:spcPts val="1950"/>
-              </a:lnSpc>
-              <a:spcAft>
-                <a:spcPts val="0"/>
-              </a:spcAft>
-              <a:buNone/>
-            </a:pPr>
-            <a:r>
-              <a:rPr lang="en-US" sz="1500" b="0">
-                <a:solidFill>
-                  <a:srgbClr val="202B33"/>
-                </a:solidFill>
-                <a:latin typeface="Arial"/>
-                <a:ea typeface="Arial"/>
-                <a:cs typeface="Arial"/>
-              </a:rPr>
-              <a:t xml:space="preserve">Knight and Leveson (1986), An Experimental</a:t>
-            </a:r>
-            <a:endParaRPr lang="en-US" sz="1500"/>
-          </a:p>
-          <a:p>
-            <a:pPr marL="0" indent="0">
-              <a:lnSpc>
-                <a:spcPts val="1950"/>
-              </a:lnSpc>
-              <a:spcAft>
-                <a:spcPts val="0"/>
-              </a:spcAft>
-              <a:buNone/>
-            </a:pPr>
-            <a:r>
-              <a:rPr lang="en-US" sz="1500" b="0">
-                <a:solidFill>
-                  <a:srgbClr val="202B33"/>
-                </a:solidFill>
-                <a:latin typeface="Arial"/>
-                <a:ea typeface="Arial"/>
-                <a:cs typeface="Arial"/>
-              </a:rPr>
-              <a:t xml:space="preserve">Evaluation of the Assumption of</a:t>
-            </a:r>
-            <a:endParaRPr lang="en-US" sz="1500"/>
-          </a:p>
-          <a:p>
-            <a:pPr marL="0" indent="0">
-              <a:lnSpc>
-                <a:spcPts val="1950"/>
-              </a:lnSpc>
-              <a:spcAft>
-                <a:spcPts val="0"/>
-              </a:spcAft>
-              <a:buNone/>
-            </a:pPr>
-            <a:r>
-              <a:rPr lang="en-US" sz="1500" b="0">
-                <a:solidFill>
-                  <a:srgbClr val="202B33"/>
-                </a:solidFill>
-                <a:latin typeface="Arial"/>
-                <a:ea typeface="Arial"/>
-                <a:cs typeface="Arial"/>
-              </a:rPr>
-              <a:t xml:space="preserve">Independence in Multiversion Programming —</a:t>
-            </a:r>
-            <a:endParaRPr lang="en-US" sz="1500"/>
-          </a:p>
-          <a:p>
-            <a:pPr marL="0" indent="0">
-              <a:lnSpc>
-                <a:spcPts val="1950"/>
-              </a:lnSpc>
-              <a:spcAft>
-                <a:spcPts val="0"/>
-              </a:spcAft>
-              <a:buNone/>
-            </a:pPr>
-            <a:r>
-              <a:rPr lang="en-US" sz="1500" b="0">
-                <a:solidFill>
-                  <a:srgbClr val="202B33"/>
-                </a:solidFill>
-                <a:latin typeface="Arial"/>
-                <a:ea typeface="Arial"/>
-                <a:cs typeface="Arial"/>
-              </a:rPr>
-              <a:t xml:space="preserve">https://doi.org/10.1109/TSE.1986.6312924),</a:t>
-            </a:r>
-            <a:endParaRPr lang="en-US" sz="1500"/>
-          </a:p>
-          <a:p>
-            <a:pPr marL="0" indent="0">
-              <a:lnSpc>
-                <a:spcPts val="1950"/>
-              </a:lnSpc>
-              <a:spcAft>
-                <a:spcPts val="0"/>
-              </a:spcAft>
-              <a:buNone/>
-            </a:pPr>
-            <a:r>
-              <a:rPr lang="en-US" sz="1500" b="0">
-                <a:solidFill>
-                  <a:srgbClr val="202B33"/>
-                </a:solidFill>
-                <a:latin typeface="Arial"/>
-                <a:ea typeface="Arial"/>
-                <a:cs typeface="Arial"/>
-              </a:rPr>
-              <a:t xml:space="preserve">IEEE Transactions on Software Engineering</a:t>
-            </a:r>
-            <a:endParaRPr lang="en-US" sz="1500"/>
-          </a:p>
-          <a:p>
-            <a:pPr marL="0" indent="0">
-              <a:lnSpc>
-                <a:spcPts val="1950"/>
-              </a:lnSpc>
-              <a:spcAft>
-                <a:spcPts val="0"/>
-              </a:spcAft>
-              <a:buNone/>
-            </a:pPr>
-            <a:r>
-              <a:rPr lang="en-US" sz="1500" b="0">
-                <a:solidFill>
-                  <a:srgbClr val="202B33"/>
-                </a:solidFill>
-                <a:latin typeface="Arial"/>
-                <a:ea typeface="Arial"/>
-                <a:cs typeface="Arial"/>
-              </a:rPr>
-              <a:t xml:space="preserve">SE-12(1, 96 to 109. Cited to set aside: it</a:t>
-            </a:r>
-            <a:endParaRPr lang="en-US" sz="1500"/>
-          </a:p>
-          <a:p>
-            <a:pPr marL="0" indent="0">
-              <a:lnSpc>
-                <a:spcPts val="1950"/>
-              </a:lnSpc>
-              <a:spcAft>
-                <a:spcPts val="0"/>
-              </a:spcAft>
-              <a:buNone/>
-            </a:pPr>
-            <a:r>
-              <a:rPr lang="en-US" sz="1500" b="0">
-                <a:solidFill>
-                  <a:srgbClr val="202B33"/>
-                </a:solidFill>
-                <a:latin typeface="Arial"/>
-                <a:ea typeface="Arial"/>
-                <a:cs typeface="Arial"/>
-              </a:rPr>
-              <a:t xml:space="preserve">is a result about redundancy as a</a:t>
-            </a:r>
-            <a:endParaRPr lang="en-US" sz="1500"/>
-          </a:p>
-        </p:txBody>
-      </p:sp>
-      <p:sp>
-        <p:nvSpPr>
-          <p:cNvPr id="5" name="Text 5"/>
-          <p:cNvSpPr txBox="1"/>
-          <p:nvPr/>
-        </p:nvSpPr>
-        <p:spPr>
-          <a:xfrm>
-            <a:off x="5238750" y="1971675"/>
-            <a:ext cx="4362450" cy="5314950"/>
-          </a:xfrm>
-          <a:prstGeom prst="rect">
-            <a:avLst/>
-          </a:prstGeom>
-          <a:noFill/>
-          <a:ln>
-            <a:noFill/>
-          </a:ln>
-        </p:spPr>
-        <p:txBody>
-          <a:bodyPr wrap="none" lIns="0" tIns="0" rIns="0" bIns="0" anchor="t">
-            <a:noAutofit/>
-          </a:bodyPr>
-          <a:lstStyle/>
-          <a:p>
-            <a:pPr marL="0" indent="0">
-              <a:lnSpc>
-                <a:spcPts val="1950"/>
-              </a:lnSpc>
-              <a:spcAft>
-                <a:spcPts val="0"/>
-              </a:spcAft>
-              <a:buNone/>
-            </a:pPr>
-            <a:r>
-              <a:rPr lang="en-US" sz="1500" b="0">
-                <a:solidFill>
-                  <a:srgbClr val="202B33"/>
-                </a:solidFill>
-                <a:latin typeface="Arial"/>
-                <a:ea typeface="Arial"/>
-                <a:cs typeface="Arial"/>
-              </a:rPr>
-              <a:t xml:space="preserve">correctness strategy, which this slide does</a:t>
-            </a:r>
-            <a:endParaRPr lang="en-US" sz="1500"/>
-          </a:p>
-          <a:p>
-            <a:pPr marL="0" indent="0">
-              <a:lnSpc>
-                <a:spcPts val="1950"/>
-              </a:lnSpc>
-              <a:spcAft>
-                <a:spcPts val="0"/>
-              </a:spcAft>
-              <a:buNone/>
-            </a:pPr>
-            <a:r>
-              <a:rPr lang="en-US" sz="1500" b="0">
-                <a:solidFill>
-                  <a:srgbClr val="202B33"/>
-                </a:solidFill>
-                <a:latin typeface="Arial"/>
-                <a:ea typeface="Arial"/>
-                <a:cs typeface="Arial"/>
-              </a:rPr>
-              <a:t xml:space="preserve">not claim.</a:t>
-            </a:r>
-            <a:endParaRPr lang="en-US" sz="1500"/>
-          </a:p>
-          <a:p>
-            <a:pPr marL="0" indent="0">
-              <a:lnSpc>
-                <a:spcPts val="1950"/>
-              </a:lnSpc>
-              <a:spcAft>
-                <a:spcPts val="0"/>
-              </a:spcAft>
-              <a:buNone/>
-            </a:pPr>
-            <a:r>
-              <a:rPr lang="en-US" sz="1500" b="0">
-                <a:solidFill>
-                  <a:srgbClr val="202B33"/>
-                </a:solidFill>
-                <a:latin typeface="Arial"/>
-                <a:ea typeface="Arial"/>
-                <a:cs typeface="Arial"/>
-              </a:rPr>
-              <a:t xml:space="preserve"/>
-            </a:r>
-            <a:endParaRPr lang="en-US" sz="1500"/>
-          </a:p>
-          <a:p>
-            <a:pPr marL="0" indent="0">
-              <a:lnSpc>
-                <a:spcPts val="1950"/>
-              </a:lnSpc>
-              <a:spcAft>
-                <a:spcPts val="0"/>
-              </a:spcAft>
-              <a:buNone/>
-            </a:pPr>
-            <a:r>
-              <a:rPr lang="en-US" sz="1500" b="0">
-                <a:solidFill>
-                  <a:srgbClr val="202B33"/>
-                </a:solidFill>
-                <a:latin typeface="Arial"/>
-                <a:ea typeface="Arial"/>
-                <a:cs typeface="Arial"/>
-              </a:rPr>
-              <a:t xml:space="preserve">Amdahl (1967), Validity of the single</a:t>
-            </a:r>
-            <a:endParaRPr lang="en-US" sz="1500"/>
-          </a:p>
-          <a:p>
-            <a:pPr marL="0" indent="0">
-              <a:lnSpc>
-                <a:spcPts val="1950"/>
-              </a:lnSpc>
-              <a:spcAft>
-                <a:spcPts val="0"/>
-              </a:spcAft>
-              <a:buNone/>
-            </a:pPr>
-            <a:r>
-              <a:rPr lang="en-US" sz="1500" b="0">
-                <a:solidFill>
-                  <a:srgbClr val="202B33"/>
-                </a:solidFill>
-                <a:latin typeface="Arial"/>
-                <a:ea typeface="Arial"/>
-                <a:cs typeface="Arial"/>
-              </a:rPr>
-              <a:t xml:space="preserve">processor approach to achieving large scale</a:t>
-            </a:r>
-            <a:endParaRPr lang="en-US" sz="1500"/>
-          </a:p>
-          <a:p>
-            <a:pPr marL="0" indent="0">
-              <a:lnSpc>
-                <a:spcPts val="1950"/>
-              </a:lnSpc>
-              <a:spcAft>
-                <a:spcPts val="0"/>
-              </a:spcAft>
-              <a:buNone/>
-            </a:pPr>
-            <a:r>
-              <a:rPr lang="en-US" sz="1500" b="0">
-                <a:solidFill>
-                  <a:srgbClr val="202B33"/>
-                </a:solidFill>
-                <a:latin typeface="Arial"/>
-                <a:ea typeface="Arial"/>
-                <a:cs typeface="Arial"/>
-              </a:rPr>
-              <a:t xml:space="preserve">computing capabilities, AFIPS Conference</a:t>
-            </a:r>
-            <a:endParaRPr lang="en-US" sz="1500"/>
-          </a:p>
-          <a:p>
-            <a:pPr marL="0" indent="0">
-              <a:lnSpc>
-                <a:spcPts val="1950"/>
-              </a:lnSpc>
-              <a:spcAft>
-                <a:spcPts val="0"/>
-              </a:spcAft>
-              <a:buNone/>
-            </a:pPr>
-            <a:r>
-              <a:rPr lang="en-US" sz="1500" b="0">
-                <a:solidFill>
-                  <a:srgbClr val="202B33"/>
-                </a:solidFill>
-                <a:latin typeface="Arial"/>
-                <a:ea typeface="Arial"/>
-                <a:cs typeface="Arial"/>
-              </a:rPr>
-              <a:t xml:space="preserve">Proceedings 30, 483 to 485.</a:t>
-            </a:r>
-            <a:endParaRPr lang="en-US" sz="1500"/>
-          </a:p>
-        </p:txBody>
-      </p:sp>
-      <p:sp>
-        <p:nvSpPr>
-          <p:cNvPr id="6" name="Text 6"/>
-          <p:cNvSpPr txBox="1"/>
-          <p:nvPr/>
-        </p:nvSpPr>
-        <p:spPr>
-          <a:xfrm>
-            <a:off x="457200" y="7486650"/>
-            <a:ext cx="8820150" cy="190500"/>
-          </a:xfrm>
-          <a:prstGeom prst="rect">
-            <a:avLst/>
-          </a:prstGeom>
-          <a:noFill/>
-          <a:ln>
-            <a:noFill/>
-          </a:ln>
-        </p:spPr>
-        <p:txBody>
-          <a:bodyPr wrap="none" lIns="0" tIns="0" rIns="0" bIns="0" anchor="t">
-            <a:noAutofit/>
-          </a:bodyPr>
-          <a:lstStyle/>
-          <a:p>
-            <a:pPr marL="0" indent="0">
-              <a:lnSpc>
-                <a:spcPts val="1268"/>
-              </a:lnSpc>
-              <a:spcAft>
-                <a:spcPts val="0"/>
-              </a:spcAft>
-              <a:buNone/>
-            </a:pPr>
-            <a:r>
-              <a:rPr lang="en-US" sz="975" b="0">
-                <a:solidFill>
-                  <a:srgbClr val="48555B"/>
-                </a:solidFill>
-                <a:latin typeface="Arial"/>
-                <a:ea typeface="Arial"/>
-                <a:cs typeface="Arial"/>
-              </a:rPr>
-              <a:t xml:space="preserve">Dynamic Scaling of Agentic Workloads</a:t>
-            </a:r>
-            <a:endParaRPr lang="en-US" sz="975"/>
-          </a:p>
-        </p:txBody>
-      </p:sp>
-      <p:sp>
-        <p:nvSpPr>
-          <p:cNvPr id="7" name="Text 7"/>
-          <p:cNvSpPr txBox="1"/>
-          <p:nvPr/>
-        </p:nvSpPr>
-        <p:spPr>
-          <a:xfrm>
-            <a:off x="9391650" y="7486650"/>
-            <a:ext cx="238125" cy="190500"/>
-          </a:xfrm>
-          <a:prstGeom prst="rect">
-            <a:avLst/>
-          </a:prstGeom>
-          <a:noFill/>
-          <a:ln>
-            <a:noFill/>
-          </a:ln>
-        </p:spPr>
-        <p:txBody>
-          <a:bodyPr wrap="none" lIns="0" tIns="0" rIns="0" bIns="0" anchor="t">
-            <a:noAutofit/>
-          </a:bodyPr>
-          <a:lstStyle/>
-          <a:p>
-            <a:pPr marL="0" indent="0">
-              <a:lnSpc>
-                <a:spcPts val="1268"/>
-              </a:lnSpc>
-              <a:spcAft>
-                <a:spcPts val="0"/>
-              </a:spcAft>
-              <a:buNone/>
-            </a:pPr>
-            <a:r>
-              <a:rPr lang="en-US" sz="975" b="0">
-                <a:solidFill>
-                  <a:srgbClr val="48555B"/>
-                </a:solidFill>
-                <a:latin typeface="Arial"/>
-                <a:ea typeface="Arial"/>
-                <a:cs typeface="Arial"/>
-              </a:rPr>
-              <a:t xml:space="preserve">21</a:t>
             </a:r>
             <a:endParaRPr lang="en-US" sz="975"/>
           </a:p>
@@ -22320,7 +20154,7 @@
                 <a:ea typeface="Arial"/>
                 <a:cs typeface="Arial"/>
               </a:rPr>
-              <a:t xml:space="preserve">guess. The workload never got a vote.</a:t>
+              <a:t xml:space="preserve">guess. The workload never got a say.</a:t>
             </a:r>
             <a:endParaRPr lang="en-US" sz="1200"/>
           </a:p>
@@ -22392,7 +20226,7 @@
                 <a:ea typeface="Arial"/>
                 <a:cs typeface="Arial"/>
               </a:rPr>
-              <a:t xml:space="preserve">Agentic workloads can vote. The orchestrator knows</a:t>
+              <a:t xml:space="preserve">Agentic workloads do. The orchestrator knows this</a:t>
             </a:r>
             <a:endParaRPr lang="en-US" sz="1200"/>
           </a:p>
@@ -22415,7 +20249,7 @@
                 <a:ea typeface="Arial"/>
                 <a:cs typeface="Arial"/>
               </a:rPr>
-              <a:t xml:space="preserve">this batch is mostly waiting on a provider, that this</a:t>
+              <a:t xml:space="preserve">batch is mostly waiting on a provider, that this one</a:t>
             </a:r>
             <a:endParaRPr lang="en-US" sz="1200"/>
           </a:p>
@@ -22438,7 +20272,7 @@
                 <a:ea typeface="Arial"/>
                 <a:cs typeface="Arial"/>
               </a:rPr>
-              <a:t xml:space="preserve">one needs a GPU for ninety seconds, that this one is</a:t>
+              <a:t xml:space="preserve">needs a GPU for ninety seconds, that this one is</a:t>
             </a:r>
             <a:endParaRPr lang="en-US" sz="1200"/>
           </a:p>
@@ -24335,7 +22169,7 @@
       </p:sp>
       <p:pic>
         <p:nvPicPr>
-          <p:cNvPr id="5" name="8fde8ed4544054c6ba696fe2945ded1fdf0c0b247ec34f09fb00f8685dfce56b" descr="Illustrative $2 run cap: settled + reserved ≤ $2. Prices here are invented fixture values."/>
+          <p:cNvPr id="5" name="53c399b4989d541a9290cbf8888665cf190abef617844fd5194169975728c017" descr="Illustrative $2 run cap: settled + reserved ≤ $2. Prices here are invented fixture values."/>
           <p:cNvPicPr>
             <a:picLocks noChangeAspect="1"/>
           </p:cNvPicPr>
@@ -25851,7 +23685,7 @@
                 <a:ea typeface="Arial"/>
                 <a:cs typeface="Arial"/>
               </a:rPr>
-              <a:t xml:space="preserve">The inversion: infra as an agent capability</a:t>
+              <a:t xml:space="preserve">Infra Is a Tool Call</a:t>
             </a:r>
             <a:endParaRPr lang="en-US" sz="2550"/>
           </a:p>
@@ -26670,30 +24504,7 @@
                 <a:ea typeface="Arial"/>
                 <a:cs typeface="Arial"/>
               </a:rPr>
-              <a:t xml:space="preserve">The inversion: infra as an agent capability</a:t>
-            </a:r>
-            <a:endParaRPr lang="en-US" sz="2550"/>
-          </a:p>
-          <a:p>
-            <a:pPr marL="0" indent="0">
-              <a:lnSpc>
-                <a:spcPts val="3060"/>
-              </a:lnSpc>
-              <a:spcAft>
-                <a:spcPts val="0"/>
-              </a:spcAft>
-              <a:buNone/>
-            </a:pPr>
-            <a:r>
-              <a:rPr lang="en-US" sz="2550" b="1">
-                <a:solidFill>
-                  <a:srgbClr val="202B33"/>
-                </a:solidFill>
-                <a:latin typeface="Arial"/>
-                <a:ea typeface="Arial"/>
-                <a:cs typeface="Arial"/>
-              </a:rPr>
-              <a:t xml:space="preserve">(continued)</a:t>
+              <a:t xml:space="preserve">Infra Is a Tool Call (continued)</a:t>
             </a:r>
             <a:endParaRPr lang="en-US" sz="2550"/>
           </a:p>

--- a/artifacts/speaking-portfolio-expanded/decks/dynamic-scaling-40min-handout.pptx
+++ b/artifacts/speaking-portfolio-expanded/decks/dynamic-scaling-40min-handout.pptx
@@ -2676,7 +2676,7 @@
                 <a:ea typeface="Arial"/>
                 <a:cs typeface="Arial"/>
               </a:rPr>
-              <a:t xml:space="preserve">![Different priorities expose tradeoffs. Common requirements and checks apply to every candidate.](../../reveal-talks/assets/dynamic-scaling/11-independent-attempts-share-requirements.svg)</a:t>
+              <a:t xml:space="preserve">![Cheap parallel generation produces candidates; shared gates reject before preference; cheap multi-model judges report disagreement rather than an average score.](../../reveal-talks/assets/dynamic-scaling/12-monkeys-then-guards.svg)</a:t>
             </a:r>
             <a:endParaRPr lang="en-US" sz="1200"/>
           </a:p>
@@ -3387,7 +3387,7 @@
                 <a:ea typeface="Arial"/>
                 <a:cs typeface="Arial"/>
               </a:rPr>
-              <a:t xml:space="preserve">![Different priorities expose tradeoffs. Common requirements and checks apply to every candidate.](../../reveal-talks/assets/dynamic-scaling/11-independent-attempts-share-requirements.svg)</a:t>
+              <a:t xml:space="preserve">![Cheap parallel generation produces candidates; shared gates reject before preference; cheap multi-model judges report disagreement rather than an average score.](../../reveal-talks/assets/dynamic-scaling/12-monkeys-then-guards.svg)</a:t>
             </a:r>
             <a:endParaRPr lang="en-US" sz="1200"/>
           </a:p>
@@ -4098,7 +4098,7 @@
                 <a:ea typeface="Arial"/>
                 <a:cs typeface="Arial"/>
               </a:rPr>
-              <a:t xml:space="preserve">![Different priorities expose tradeoffs. Common requirements and checks apply to every candidate.](../../reveal-talks/assets/dynamic-scaling/11-independent-attempts-share-requirements.svg)</a:t>
+              <a:t xml:space="preserve">![Cheap parallel generation produces candidates; shared gates reject before preference; cheap multi-model judges report disagreement rather than an average score.](../../reveal-talks/assets/dynamic-scaling/12-monkeys-then-guards.svg)</a:t>
             </a:r>
             <a:endParaRPr lang="en-US" sz="1200"/>
           </a:p>
@@ -13886,7 +13886,7 @@
       </p:sp>
       <p:pic>
         <p:nvPicPr>
-          <p:cNvPr id="5" name="2c5fb820b277964d777498358b0962f4a0f45afc5a39c350b143fa7e45e40586" descr="Different priorities expose tradeoffs. Common requirements and checks apply to every candidate."/>
+          <p:cNvPr id="5" name="6df039e19b720a58c5dd5b0a6fd22802e6016f46ca549bd6fe67a83f688c07ac" descr="Cheap parallel generation produces candidates; shared gates reject before preference; cheap multi-model judges report disagreement rather than an average score."/>
           <p:cNvPicPr>
             <a:picLocks noChangeAspect="1"/>
           </p:cNvPicPr>
